--- a/Linear_Algebra/w6_Deep Learning.pptx
+++ b/Linear_Algebra/w6_Deep Learning.pptx
@@ -5,10 +5,10 @@
     <p:sldMasterId id="2147483660" r:id="rId1"/>
   </p:sldMasterIdLst>
   <p:notesMasterIdLst>
-    <p:notesMasterId r:id="rId27"/>
+    <p:notesMasterId r:id="rId32"/>
   </p:notesMasterIdLst>
   <p:handoutMasterIdLst>
-    <p:handoutMasterId r:id="rId28"/>
+    <p:handoutMasterId r:id="rId33"/>
   </p:handoutMasterIdLst>
   <p:sldIdLst>
     <p:sldId id="256" r:id="rId2"/>
@@ -34,8 +34,13 @@
     <p:sldId id="908" r:id="rId22"/>
     <p:sldId id="885" r:id="rId23"/>
     <p:sldId id="1098" r:id="rId24"/>
-    <p:sldId id="1099" r:id="rId25"/>
-    <p:sldId id="1100" r:id="rId26"/>
+    <p:sldId id="1103" r:id="rId25"/>
+    <p:sldId id="1104" r:id="rId26"/>
+    <p:sldId id="1102" r:id="rId27"/>
+    <p:sldId id="1105" r:id="rId28"/>
+    <p:sldId id="1106" r:id="rId29"/>
+    <p:sldId id="1099" r:id="rId30"/>
+    <p:sldId id="1100" r:id="rId31"/>
   </p:sldIdLst>
   <p:sldSz cx="12192000" cy="6858000"/>
   <p:notesSz cx="6858000" cy="9144000"/>
@@ -166,6 +171,11 @@
             <p14:sldId id="908"/>
             <p14:sldId id="885"/>
             <p14:sldId id="1098"/>
+            <p14:sldId id="1103"/>
+            <p14:sldId id="1104"/>
+            <p14:sldId id="1102"/>
+            <p14:sldId id="1105"/>
+            <p14:sldId id="1106"/>
             <p14:sldId id="1099"/>
             <p14:sldId id="1100"/>
           </p14:sldIdLst>
@@ -292,7 +302,7 @@
                 <a:latin typeface="맑은 고딕" panose="020B0503020000020004" pitchFamily="50" charset="-127"/>
                 <a:ea typeface="맑은 고딕" panose="020B0503020000020004" pitchFamily="50" charset="-127"/>
               </a:rPr>
-              <a:t>2026-05-02</a:t>
+              <a:t>2026-05-03</a:t>
             </a:fld>
             <a:endParaRPr lang="ko-KR" altLang="en-US">
               <a:latin typeface="맑은 고딕" panose="020B0503020000020004" pitchFamily="50" charset="-127"/>
@@ -478,7 +488,7 @@
           <a:p>
             <a:fld id="{43E1C3DD-4A19-441D-907C-380838DB51C4}" type="datetime1">
               <a:rPr lang="ko-KR" altLang="en-US" noProof="0" smtClean="0"/>
-              <a:t>2026-05-02</a:t>
+              <a:t>2026-05-03</a:t>
             </a:fld>
             <a:endParaRPr lang="ko-KR" altLang="en-US" noProof="0"/>
           </a:p>
@@ -1916,7 +1926,7 @@
           <a:p>
             <a:fld id="{990475B5-67CA-4281-BDCA-DA943C3C8EB3}" type="datetime1">
               <a:rPr lang="ko-KR" altLang="en-US" noProof="0" smtClean="0"/>
-              <a:t>2026-05-02</a:t>
+              <a:t>2026-05-03</a:t>
             </a:fld>
             <a:endParaRPr lang="ko-KR" altLang="en-US" noProof="0"/>
           </a:p>
@@ -2570,7 +2580,7 @@
           <a:p>
             <a:fld id="{48A87A34-81AB-432B-8DAE-1953F412C126}" type="datetimeFigureOut">
               <a:rPr lang="en-US" smtClean="0"/>
-              <a:t>5/2/2026</a:t>
+              <a:t>5/3/2026</a:t>
             </a:fld>
             <a:endParaRPr lang="en-US" dirty="0"/>
           </a:p>
@@ -2866,7 +2876,7 @@
           <a:p>
             <a:fld id="{C655C81E-72E7-4D05-94B5-F45B321A525D}" type="datetime1">
               <a:rPr lang="ko-KR" altLang="en-US" noProof="0" smtClean="0"/>
-              <a:t>2026-05-02</a:t>
+              <a:t>2026-05-03</a:t>
             </a:fld>
             <a:endParaRPr lang="ko-KR" altLang="en-US" noProof="0" dirty="0">
               <a:latin typeface="맑은 고딕" panose="020B0503020000020004" pitchFamily="50" charset="-127"/>
@@ -12803,6 +12813,2670 @@
         <p:cNvPr id="1" name="">
           <a:extLst>
             <a:ext uri="{FF2B5EF4-FFF2-40B4-BE49-F238E27FC236}">
+              <a16:creationId xmlns:a16="http://schemas.microsoft.com/office/drawing/2014/main" id="{516D8F64-AE03-83A8-9AC3-946E3E41FFBA}"/>
+            </a:ext>
+          </a:extLst>
+        </p:cNvPr>
+        <p:cNvGrpSpPr/>
+        <p:nvPr/>
+      </p:nvGrpSpPr>
+      <p:grpSpPr>
+        <a:xfrm>
+          <a:off x="0" y="0"/>
+          <a:ext cx="0" cy="0"/>
+          <a:chOff x="0" y="0"/>
+          <a:chExt cx="0" cy="0"/>
+        </a:xfrm>
+      </p:grpSpPr>
+      <p:sp>
+        <p:nvSpPr>
+          <p:cNvPr id="4" name="슬라이드 번호 개체 틀 3">
+            <a:extLst>
+              <a:ext uri="{FF2B5EF4-FFF2-40B4-BE49-F238E27FC236}">
+                <a16:creationId xmlns:a16="http://schemas.microsoft.com/office/drawing/2014/main" id="{CA9D7258-89E0-FD16-303B-902B6CD77562}"/>
+              </a:ext>
+            </a:extLst>
+          </p:cNvPr>
+          <p:cNvSpPr>
+            <a:spLocks noGrp="1"/>
+          </p:cNvSpPr>
+          <p:nvPr>
+            <p:ph type="sldNum" sz="quarter" idx="12"/>
+          </p:nvPr>
+        </p:nvSpPr>
+        <p:spPr>
+          <a:xfrm>
+            <a:off x="10514011" y="6036261"/>
+            <a:ext cx="753545" cy="365125"/>
+          </a:xfrm>
+        </p:spPr>
+        <p:txBody>
+          <a:bodyPr/>
+          <a:lstStyle/>
+          <a:p>
+            <a:fld id="{D57F1E4F-1CFF-5643-939E-217C01CDF565}" type="slidenum">
+              <a:rPr lang="en-US" smtClean="0"/>
+              <a:pPr/>
+              <a:t>24</a:t>
+            </a:fld>
+            <a:endParaRPr lang="en-US" dirty="0"/>
+          </a:p>
+        </p:txBody>
+      </p:sp>
+      <p:sp>
+        <p:nvSpPr>
+          <p:cNvPr id="39" name="제목 1">
+            <a:extLst>
+              <a:ext uri="{FF2B5EF4-FFF2-40B4-BE49-F238E27FC236}">
+                <a16:creationId xmlns:a16="http://schemas.microsoft.com/office/drawing/2014/main" id="{5C55FA6B-189E-28C7-6A8E-2B437D180532}"/>
+              </a:ext>
+            </a:extLst>
+          </p:cNvPr>
+          <p:cNvSpPr txBox="1">
+            <a:spLocks/>
+          </p:cNvSpPr>
+          <p:nvPr/>
+        </p:nvSpPr>
+        <p:spPr>
+          <a:xfrm>
+            <a:off x="590464" y="395619"/>
+            <a:ext cx="10353762" cy="766439"/>
+          </a:xfrm>
+          <a:prstGeom prst="rect">
+            <a:avLst/>
+          </a:prstGeom>
+        </p:spPr>
+        <p:txBody>
+          <a:bodyPr vert="horz" lIns="91440" tIns="45720" rIns="91440" bIns="45720" rtlCol="0" anchor="ctr">
+            <a:normAutofit/>
+          </a:bodyPr>
+          <a:lstStyle>
+            <a:lvl1pPr algn="ctr" defTabSz="914400" rtl="0" eaLnBrk="1" latinLnBrk="1" hangingPunct="1">
+              <a:lnSpc>
+                <a:spcPct val="90000"/>
+              </a:lnSpc>
+              <a:spcBef>
+                <a:spcPct val="0"/>
+              </a:spcBef>
+              <a:buNone/>
+              <a:defRPr sz="3200" kern="1200" cap="all" baseline="0">
+                <a:solidFill>
+                  <a:schemeClr val="tx1"/>
+                </a:solidFill>
+                <a:effectLst/>
+                <a:latin typeface="Batang" panose="02030600000101010101" pitchFamily="18" charset="-127"/>
+                <a:ea typeface="Batang" panose="02030600000101010101" pitchFamily="18" charset="-127"/>
+                <a:cs typeface="+mj-cs"/>
+              </a:defRPr>
+            </a:lvl1pPr>
+          </a:lstStyle>
+          <a:p>
+            <a:pPr algn="l"/>
+            <a:endParaRPr lang="ko-KR" altLang="en-US" sz="2800" cap="none" dirty="0">
+              <a:solidFill>
+                <a:schemeClr val="bg2">
+                  <a:lumMod val="25000"/>
+                </a:schemeClr>
+              </a:solidFill>
+              <a:latin typeface="맑은 고딕" panose="020B0503020000020004" pitchFamily="50" charset="-127"/>
+              <a:ea typeface="맑은 고딕" panose="020B0503020000020004" pitchFamily="50" charset="-127"/>
+              <a:cs typeface="Segoe UI Light" panose="020B0502040204020203" pitchFamily="34" charset="0"/>
+            </a:endParaRPr>
+          </a:p>
+        </p:txBody>
+      </p:sp>
+      <p:sp>
+        <p:nvSpPr>
+          <p:cNvPr id="9" name="내용 개체 틀 2">
+            <a:extLst>
+              <a:ext uri="{FF2B5EF4-FFF2-40B4-BE49-F238E27FC236}">
+                <a16:creationId xmlns:a16="http://schemas.microsoft.com/office/drawing/2014/main" id="{61A83C34-C151-41C1-64A0-BD7003F0C95F}"/>
+              </a:ext>
+            </a:extLst>
+          </p:cNvPr>
+          <p:cNvSpPr>
+            <a:spLocks noGrp="1"/>
+          </p:cNvSpPr>
+          <p:nvPr>
+            <p:ph idx="1"/>
+          </p:nvPr>
+        </p:nvSpPr>
+        <p:spPr>
+          <a:xfrm>
+            <a:off x="590464" y="1320833"/>
+            <a:ext cx="10706705" cy="1853860"/>
+          </a:xfrm>
+        </p:spPr>
+        <p:txBody>
+          <a:bodyPr>
+            <a:normAutofit/>
+          </a:bodyPr>
+          <a:lstStyle/>
+          <a:p>
+            <a:pPr marL="342900" indent="-342900">
+              <a:lnSpc>
+                <a:spcPct val="100000"/>
+              </a:lnSpc>
+              <a:buFont typeface="Wingdings" panose="05000000000000000000" pitchFamily="2" charset="2"/>
+              <a:buChar char="§"/>
+            </a:pPr>
+            <a:r>
+              <a:rPr lang="en-US" altLang="ko-KR" sz="2100" cap="none" dirty="0">
+                <a:latin typeface="맑은 고딕 Semilight" panose="020B0502040204020203" pitchFamily="50" charset="-127"/>
+                <a:ea typeface="맑은 고딕 Semilight" panose="020B0502040204020203" pitchFamily="50" charset="-127"/>
+                <a:cs typeface="맑은 고딕 Semilight" panose="020B0502040204020203" pitchFamily="50" charset="-127"/>
+              </a:rPr>
+              <a:t>Feature</a:t>
+            </a:r>
+            <a:r>
+              <a:rPr lang="ko-KR" altLang="en-US" sz="2100" cap="none" dirty="0">
+                <a:latin typeface="맑은 고딕 Semilight" panose="020B0502040204020203" pitchFamily="50" charset="-127"/>
+                <a:ea typeface="맑은 고딕 Semilight" panose="020B0502040204020203" pitchFamily="50" charset="-127"/>
+                <a:cs typeface="맑은 고딕 Semilight" panose="020B0502040204020203" pitchFamily="50" charset="-127"/>
+              </a:rPr>
+              <a:t> 가 아무리 많아도 대부분의</a:t>
+            </a:r>
+            <a:r>
+              <a:rPr lang="en-US" altLang="ko-KR" sz="2100" cap="none" dirty="0">
+                <a:latin typeface="맑은 고딕 Semilight" panose="020B0502040204020203" pitchFamily="50" charset="-127"/>
+                <a:ea typeface="맑은 고딕 Semilight" panose="020B0502040204020203" pitchFamily="50" charset="-127"/>
+                <a:cs typeface="맑은 고딕 Semilight" panose="020B0502040204020203" pitchFamily="50" charset="-127"/>
+              </a:rPr>
+              <a:t> feature</a:t>
+            </a:r>
+            <a:r>
+              <a:rPr lang="ko-KR" altLang="en-US" sz="2100" cap="none" dirty="0">
+                <a:latin typeface="맑은 고딕 Semilight" panose="020B0502040204020203" pitchFamily="50" charset="-127"/>
+                <a:ea typeface="맑은 고딕 Semilight" panose="020B0502040204020203" pitchFamily="50" charset="-127"/>
+                <a:cs typeface="맑은 고딕 Semilight" panose="020B0502040204020203" pitchFamily="50" charset="-127"/>
+              </a:rPr>
+              <a:t>는 무의미한 경우가 많음</a:t>
+            </a:r>
+            <a:endParaRPr lang="en-US" altLang="ko-KR" sz="2100" dirty="0">
+              <a:latin typeface="맑은 고딕 Semilight" panose="020B0502040204020203" pitchFamily="50" charset="-127"/>
+              <a:ea typeface="맑은 고딕 Semilight" panose="020B0502040204020203" pitchFamily="50" charset="-127"/>
+              <a:cs typeface="맑은 고딕 Semilight" panose="020B0502040204020203" pitchFamily="50" charset="-127"/>
+            </a:endParaRPr>
+          </a:p>
+          <a:p>
+            <a:pPr marL="342900" indent="-342900">
+              <a:lnSpc>
+                <a:spcPct val="100000"/>
+              </a:lnSpc>
+              <a:buFont typeface="Wingdings" panose="05000000000000000000" pitchFamily="2" charset="2"/>
+              <a:buChar char="§"/>
+            </a:pPr>
+            <a:r>
+              <a:rPr lang="ko-KR" altLang="en-US" sz="1900" cap="none" dirty="0">
+                <a:latin typeface="맑은 고딕 Semilight" panose="020B0502040204020203" pitchFamily="50" charset="-127"/>
+                <a:ea typeface="맑은 고딕 Semilight" panose="020B0502040204020203" pitchFamily="50" charset="-127"/>
+                <a:cs typeface="맑은 고딕 Semilight" panose="020B0502040204020203" pitchFamily="50" charset="-127"/>
+              </a:rPr>
+              <a:t>아래 </a:t>
+            </a:r>
+            <a:r>
+              <a:rPr lang="en-US" altLang="ko-KR" sz="1900" cap="none" dirty="0">
+                <a:latin typeface="맑은 고딕 Semilight" panose="020B0502040204020203" pitchFamily="50" charset="-127"/>
+                <a:ea typeface="맑은 고딕 Semilight" panose="020B0502040204020203" pitchFamily="50" charset="-127"/>
+                <a:cs typeface="맑은 고딕 Semilight" panose="020B0502040204020203" pitchFamily="50" charset="-127"/>
+              </a:rPr>
+              <a:t>3</a:t>
+            </a:r>
+            <a:r>
+              <a:rPr lang="ko-KR" altLang="en-US" sz="1900" cap="none" dirty="0">
+                <a:latin typeface="맑은 고딕 Semilight" panose="020B0502040204020203" pitchFamily="50" charset="-127"/>
+                <a:ea typeface="맑은 고딕 Semilight" panose="020B0502040204020203" pitchFamily="50" charset="-127"/>
+                <a:cs typeface="맑은 고딕 Semilight" panose="020B0502040204020203" pitchFamily="50" charset="-127"/>
+              </a:rPr>
+              <a:t>개의 아라비아 숫자의 </a:t>
+            </a:r>
+            <a:r>
+              <a:rPr lang="en-US" altLang="ko-KR" sz="1900" cap="none" dirty="0">
+                <a:latin typeface="맑은 고딕 Semilight" panose="020B0502040204020203" pitchFamily="50" charset="-127"/>
+                <a:ea typeface="맑은 고딕 Semilight" panose="020B0502040204020203" pitchFamily="50" charset="-127"/>
+                <a:cs typeface="맑은 고딕 Semilight" panose="020B0502040204020203" pitchFamily="50" charset="-127"/>
+              </a:rPr>
+              <a:t>75% </a:t>
+            </a:r>
+            <a:r>
+              <a:rPr lang="ko-KR" altLang="en-US" sz="1900" cap="none" dirty="0">
+                <a:latin typeface="맑은 고딕 Semilight" panose="020B0502040204020203" pitchFamily="50" charset="-127"/>
+                <a:ea typeface="맑은 고딕 Semilight" panose="020B0502040204020203" pitchFamily="50" charset="-127"/>
+                <a:cs typeface="맑은 고딕 Semilight" panose="020B0502040204020203" pitchFamily="50" charset="-127"/>
+              </a:rPr>
+              <a:t>이상을 지워도 수자를 읽을 수 있음</a:t>
+            </a:r>
+            <a:endParaRPr lang="en-US" altLang="ko-KR" sz="1900" cap="none" dirty="0">
+              <a:latin typeface="맑은 고딕 Semilight" panose="020B0502040204020203" pitchFamily="50" charset="-127"/>
+              <a:ea typeface="맑은 고딕 Semilight" panose="020B0502040204020203" pitchFamily="50" charset="-127"/>
+              <a:cs typeface="맑은 고딕 Semilight" panose="020B0502040204020203" pitchFamily="50" charset="-127"/>
+            </a:endParaRPr>
+          </a:p>
+        </p:txBody>
+      </p:sp>
+      <p:pic>
+        <p:nvPicPr>
+          <p:cNvPr id="10" name="그림 9">
+            <a:extLst>
+              <a:ext uri="{FF2B5EF4-FFF2-40B4-BE49-F238E27FC236}">
+                <a16:creationId xmlns:a16="http://schemas.microsoft.com/office/drawing/2014/main" id="{CF41F368-1CB4-5087-3A3D-F11BAC41BC92}"/>
+              </a:ext>
+            </a:extLst>
+          </p:cNvPr>
+          <p:cNvPicPr>
+            <a:picLocks noChangeAspect="1"/>
+          </p:cNvPicPr>
+          <p:nvPr/>
+        </p:nvPicPr>
+        <p:blipFill>
+          <a:blip r:embed="rId2"/>
+          <a:stretch>
+            <a:fillRect/>
+          </a:stretch>
+        </p:blipFill>
+        <p:spPr>
+          <a:xfrm>
+            <a:off x="2274268" y="3088968"/>
+            <a:ext cx="6957663" cy="2377646"/>
+          </a:xfrm>
+          <a:prstGeom prst="rect">
+            <a:avLst/>
+          </a:prstGeom>
+        </p:spPr>
+      </p:pic>
+      <p:sp>
+        <p:nvSpPr>
+          <p:cNvPr id="2" name="제목 1">
+            <a:extLst>
+              <a:ext uri="{FF2B5EF4-FFF2-40B4-BE49-F238E27FC236}">
+                <a16:creationId xmlns:a16="http://schemas.microsoft.com/office/drawing/2014/main" id="{64D54FBD-2A11-10A5-4EBC-9030EC7BE9A3}"/>
+              </a:ext>
+            </a:extLst>
+          </p:cNvPr>
+          <p:cNvSpPr txBox="1">
+            <a:spLocks/>
+          </p:cNvSpPr>
+          <p:nvPr/>
+        </p:nvSpPr>
+        <p:spPr>
+          <a:xfrm>
+            <a:off x="742864" y="548019"/>
+            <a:ext cx="10353762" cy="766439"/>
+          </a:xfrm>
+          <a:prstGeom prst="rect">
+            <a:avLst/>
+          </a:prstGeom>
+        </p:spPr>
+        <p:txBody>
+          <a:bodyPr vert="horz" lIns="91440" tIns="45720" rIns="91440" bIns="45720" rtlCol="0" anchor="ctr">
+            <a:normAutofit/>
+          </a:bodyPr>
+          <a:lstStyle>
+            <a:lvl1pPr algn="ctr" defTabSz="914400" rtl="0" eaLnBrk="1" latinLnBrk="1" hangingPunct="1">
+              <a:lnSpc>
+                <a:spcPct val="90000"/>
+              </a:lnSpc>
+              <a:spcBef>
+                <a:spcPct val="0"/>
+              </a:spcBef>
+              <a:buNone/>
+              <a:defRPr sz="3200" kern="1200" cap="all" baseline="0">
+                <a:solidFill>
+                  <a:schemeClr val="tx1"/>
+                </a:solidFill>
+                <a:effectLst/>
+                <a:latin typeface="Batang" panose="02030600000101010101" pitchFamily="18" charset="-127"/>
+                <a:ea typeface="Batang" panose="02030600000101010101" pitchFamily="18" charset="-127"/>
+                <a:cs typeface="+mj-cs"/>
+              </a:defRPr>
+            </a:lvl1pPr>
+          </a:lstStyle>
+          <a:p>
+            <a:pPr algn="l"/>
+            <a:r>
+              <a:rPr lang="en-US" altLang="ko-KR" sz="2800" cap="none" dirty="0">
+                <a:latin typeface="ADLaM Display" panose="02010000000000000000" pitchFamily="2" charset="0"/>
+                <a:ea typeface="ADLaM Display" panose="02010000000000000000" pitchFamily="2" charset="0"/>
+                <a:cs typeface="ADLaM Display" panose="02010000000000000000" pitchFamily="2" charset="0"/>
+              </a:rPr>
+              <a:t>Principal Component Analysis</a:t>
+            </a:r>
+            <a:endParaRPr lang="ko-KR" altLang="en-US" sz="2800" cap="none" dirty="0">
+              <a:latin typeface="ADLaM Display" panose="02010000000000000000" pitchFamily="2" charset="0"/>
+              <a:cs typeface="ADLaM Display" panose="02010000000000000000" pitchFamily="2" charset="0"/>
+            </a:endParaRPr>
+          </a:p>
+        </p:txBody>
+      </p:sp>
+    </p:spTree>
+    <p:extLst>
+      <p:ext uri="{BB962C8B-B14F-4D97-AF65-F5344CB8AC3E}">
+        <p14:creationId xmlns:p14="http://schemas.microsoft.com/office/powerpoint/2010/main" val="779825223"/>
+      </p:ext>
+    </p:extLst>
+  </p:cSld>
+  <p:clrMapOvr>
+    <a:masterClrMapping/>
+  </p:clrMapOvr>
+</p:sld>
+</file>
+
+<file path=ppt/slides/slide25.xml><?xml version="1.0" encoding="utf-8"?>
+<p:sld xmlns:a="http://schemas.openxmlformats.org/drawingml/2006/main" xmlns:r="http://schemas.openxmlformats.org/officeDocument/2006/relationships" xmlns:p="http://schemas.openxmlformats.org/presentationml/2006/main">
+  <p:cSld>
+    <p:spTree>
+      <p:nvGrpSpPr>
+        <p:cNvPr id="1" name="">
+          <a:extLst>
+            <a:ext uri="{FF2B5EF4-FFF2-40B4-BE49-F238E27FC236}">
+              <a16:creationId xmlns:a16="http://schemas.microsoft.com/office/drawing/2014/main" id="{DCBE6398-4BFE-4A9F-6038-C76E929E0ECD}"/>
+            </a:ext>
+          </a:extLst>
+        </p:cNvPr>
+        <p:cNvGrpSpPr/>
+        <p:nvPr/>
+      </p:nvGrpSpPr>
+      <p:grpSpPr>
+        <a:xfrm>
+          <a:off x="0" y="0"/>
+          <a:ext cx="0" cy="0"/>
+          <a:chOff x="0" y="0"/>
+          <a:chExt cx="0" cy="0"/>
+        </a:xfrm>
+      </p:grpSpPr>
+      <p:sp>
+        <p:nvSpPr>
+          <p:cNvPr id="4" name="슬라이드 번호 개체 틀 3">
+            <a:extLst>
+              <a:ext uri="{FF2B5EF4-FFF2-40B4-BE49-F238E27FC236}">
+                <a16:creationId xmlns:a16="http://schemas.microsoft.com/office/drawing/2014/main" id="{B6191611-FEB0-08B6-3ADF-3D53D7E715C2}"/>
+              </a:ext>
+            </a:extLst>
+          </p:cNvPr>
+          <p:cNvSpPr>
+            <a:spLocks noGrp="1"/>
+          </p:cNvSpPr>
+          <p:nvPr>
+            <p:ph type="sldNum" sz="quarter" idx="12"/>
+          </p:nvPr>
+        </p:nvSpPr>
+        <p:spPr>
+          <a:xfrm>
+            <a:off x="10514011" y="6036261"/>
+            <a:ext cx="753545" cy="365125"/>
+          </a:xfrm>
+        </p:spPr>
+        <p:txBody>
+          <a:bodyPr/>
+          <a:lstStyle/>
+          <a:p>
+            <a:fld id="{D57F1E4F-1CFF-5643-939E-217C01CDF565}" type="slidenum">
+              <a:rPr lang="en-US" smtClean="0"/>
+              <a:pPr/>
+              <a:t>25</a:t>
+            </a:fld>
+            <a:endParaRPr lang="en-US" dirty="0"/>
+          </a:p>
+        </p:txBody>
+      </p:sp>
+      <p:sp>
+        <p:nvSpPr>
+          <p:cNvPr id="39" name="제목 1">
+            <a:extLst>
+              <a:ext uri="{FF2B5EF4-FFF2-40B4-BE49-F238E27FC236}">
+                <a16:creationId xmlns:a16="http://schemas.microsoft.com/office/drawing/2014/main" id="{5EC02710-FAFA-CB41-8FD4-D3B20F515B4A}"/>
+              </a:ext>
+            </a:extLst>
+          </p:cNvPr>
+          <p:cNvSpPr txBox="1">
+            <a:spLocks/>
+          </p:cNvSpPr>
+          <p:nvPr/>
+        </p:nvSpPr>
+        <p:spPr>
+          <a:xfrm>
+            <a:off x="590464" y="395619"/>
+            <a:ext cx="10353762" cy="766439"/>
+          </a:xfrm>
+          <a:prstGeom prst="rect">
+            <a:avLst/>
+          </a:prstGeom>
+        </p:spPr>
+        <p:txBody>
+          <a:bodyPr vert="horz" lIns="91440" tIns="45720" rIns="91440" bIns="45720" rtlCol="0" anchor="ctr">
+            <a:normAutofit/>
+          </a:bodyPr>
+          <a:lstStyle>
+            <a:lvl1pPr algn="ctr" defTabSz="914400" rtl="0" eaLnBrk="1" latinLnBrk="1" hangingPunct="1">
+              <a:lnSpc>
+                <a:spcPct val="90000"/>
+              </a:lnSpc>
+              <a:spcBef>
+                <a:spcPct val="0"/>
+              </a:spcBef>
+              <a:buNone/>
+              <a:defRPr sz="3200" kern="1200" cap="all" baseline="0">
+                <a:solidFill>
+                  <a:schemeClr val="tx1"/>
+                </a:solidFill>
+                <a:effectLst/>
+                <a:latin typeface="Batang" panose="02030600000101010101" pitchFamily="18" charset="-127"/>
+                <a:ea typeface="Batang" panose="02030600000101010101" pitchFamily="18" charset="-127"/>
+                <a:cs typeface="+mj-cs"/>
+              </a:defRPr>
+            </a:lvl1pPr>
+          </a:lstStyle>
+          <a:p>
+            <a:pPr algn="l"/>
+            <a:r>
+              <a:rPr lang="en-US" altLang="ko-KR" sz="2800" cap="none" dirty="0">
+                <a:latin typeface="ADLaM Display" panose="02010000000000000000" pitchFamily="2" charset="0"/>
+                <a:ea typeface="ADLaM Display" panose="02010000000000000000" pitchFamily="2" charset="0"/>
+                <a:cs typeface="ADLaM Display" panose="02010000000000000000" pitchFamily="2" charset="0"/>
+              </a:rPr>
+              <a:t>Principal Component Analysis</a:t>
+            </a:r>
+            <a:endParaRPr lang="ko-KR" altLang="en-US" sz="2800" cap="none" dirty="0">
+              <a:latin typeface="ADLaM Display" panose="02010000000000000000" pitchFamily="2" charset="0"/>
+              <a:cs typeface="ADLaM Display" panose="02010000000000000000" pitchFamily="2" charset="0"/>
+            </a:endParaRPr>
+          </a:p>
+        </p:txBody>
+      </p:sp>
+      <p:sp>
+        <p:nvSpPr>
+          <p:cNvPr id="9" name="내용 개체 틀 2">
+            <a:extLst>
+              <a:ext uri="{FF2B5EF4-FFF2-40B4-BE49-F238E27FC236}">
+                <a16:creationId xmlns:a16="http://schemas.microsoft.com/office/drawing/2014/main" id="{ACDD2D56-AB63-1CFC-3EA8-CE4D9772483F}"/>
+              </a:ext>
+            </a:extLst>
+          </p:cNvPr>
+          <p:cNvSpPr>
+            <a:spLocks noGrp="1"/>
+          </p:cNvSpPr>
+          <p:nvPr>
+            <p:ph idx="1"/>
+          </p:nvPr>
+        </p:nvSpPr>
+        <p:spPr>
+          <a:xfrm>
+            <a:off x="590464" y="1235108"/>
+            <a:ext cx="10706705" cy="1853860"/>
+          </a:xfrm>
+        </p:spPr>
+        <p:txBody>
+          <a:bodyPr>
+            <a:normAutofit/>
+          </a:bodyPr>
+          <a:lstStyle/>
+          <a:p>
+            <a:pPr marL="342900" indent="-342900">
+              <a:lnSpc>
+                <a:spcPct val="100000"/>
+              </a:lnSpc>
+              <a:buFont typeface="Wingdings" panose="05000000000000000000" pitchFamily="2" charset="2"/>
+              <a:buChar char="§"/>
+            </a:pPr>
+            <a:r>
+              <a:rPr lang="en-US" altLang="ko-KR" sz="2100" cap="none" dirty="0">
+                <a:latin typeface="맑은 고딕 Semilight" panose="020B0502040204020203" pitchFamily="50" charset="-127"/>
+                <a:ea typeface="맑은 고딕 Semilight" panose="020B0502040204020203" pitchFamily="50" charset="-127"/>
+                <a:cs typeface="맑은 고딕 Semilight" panose="020B0502040204020203" pitchFamily="50" charset="-127"/>
+              </a:rPr>
+              <a:t>Feature</a:t>
+            </a:r>
+            <a:r>
+              <a:rPr lang="ko-KR" altLang="en-US" sz="2100" cap="none" dirty="0">
+                <a:latin typeface="맑은 고딕 Semilight" panose="020B0502040204020203" pitchFamily="50" charset="-127"/>
+                <a:ea typeface="맑은 고딕 Semilight" panose="020B0502040204020203" pitchFamily="50" charset="-127"/>
+                <a:cs typeface="맑은 고딕 Semilight" panose="020B0502040204020203" pitchFamily="50" charset="-127"/>
+              </a:rPr>
+              <a:t> 가 아무리 많아도 대부분의</a:t>
+            </a:r>
+            <a:r>
+              <a:rPr lang="en-US" altLang="ko-KR" sz="2100" cap="none" dirty="0">
+                <a:latin typeface="맑은 고딕 Semilight" panose="020B0502040204020203" pitchFamily="50" charset="-127"/>
+                <a:ea typeface="맑은 고딕 Semilight" panose="020B0502040204020203" pitchFamily="50" charset="-127"/>
+                <a:cs typeface="맑은 고딕 Semilight" panose="020B0502040204020203" pitchFamily="50" charset="-127"/>
+              </a:rPr>
+              <a:t> feature</a:t>
+            </a:r>
+            <a:r>
+              <a:rPr lang="ko-KR" altLang="en-US" sz="2100" cap="none" dirty="0">
+                <a:latin typeface="맑은 고딕 Semilight" panose="020B0502040204020203" pitchFamily="50" charset="-127"/>
+                <a:ea typeface="맑은 고딕 Semilight" panose="020B0502040204020203" pitchFamily="50" charset="-127"/>
+                <a:cs typeface="맑은 고딕 Semilight" panose="020B0502040204020203" pitchFamily="50" charset="-127"/>
+              </a:rPr>
+              <a:t>는 무의미한 경우가 많음</a:t>
+            </a:r>
+            <a:endParaRPr lang="en-US" altLang="ko-KR" sz="2100" dirty="0">
+              <a:latin typeface="맑은 고딕 Semilight" panose="020B0502040204020203" pitchFamily="50" charset="-127"/>
+              <a:ea typeface="맑은 고딕 Semilight" panose="020B0502040204020203" pitchFamily="50" charset="-127"/>
+              <a:cs typeface="맑은 고딕 Semilight" panose="020B0502040204020203" pitchFamily="50" charset="-127"/>
+            </a:endParaRPr>
+          </a:p>
+          <a:p>
+            <a:pPr marL="342900" indent="-342900">
+              <a:lnSpc>
+                <a:spcPct val="100000"/>
+              </a:lnSpc>
+              <a:buFont typeface="Wingdings" panose="05000000000000000000" pitchFamily="2" charset="2"/>
+              <a:buChar char="§"/>
+            </a:pPr>
+            <a:r>
+              <a:rPr lang="ko-KR" altLang="en-US" sz="1900" cap="none" dirty="0">
+                <a:latin typeface="맑은 고딕 Semilight" panose="020B0502040204020203" pitchFamily="50" charset="-127"/>
+                <a:ea typeface="맑은 고딕 Semilight" panose="020B0502040204020203" pitchFamily="50" charset="-127"/>
+                <a:cs typeface="맑은 고딕 Semilight" panose="020B0502040204020203" pitchFamily="50" charset="-127"/>
+              </a:rPr>
+              <a:t>아래 </a:t>
+            </a:r>
+            <a:r>
+              <a:rPr lang="en-US" altLang="ko-KR" sz="1900" cap="none" dirty="0">
+                <a:latin typeface="맑은 고딕 Semilight" panose="020B0502040204020203" pitchFamily="50" charset="-127"/>
+                <a:ea typeface="맑은 고딕 Semilight" panose="020B0502040204020203" pitchFamily="50" charset="-127"/>
+                <a:cs typeface="맑은 고딕 Semilight" panose="020B0502040204020203" pitchFamily="50" charset="-127"/>
+              </a:rPr>
+              <a:t>3</a:t>
+            </a:r>
+            <a:r>
+              <a:rPr lang="ko-KR" altLang="en-US" sz="1900" cap="none" dirty="0">
+                <a:latin typeface="맑은 고딕 Semilight" panose="020B0502040204020203" pitchFamily="50" charset="-127"/>
+                <a:ea typeface="맑은 고딕 Semilight" panose="020B0502040204020203" pitchFamily="50" charset="-127"/>
+                <a:cs typeface="맑은 고딕 Semilight" panose="020B0502040204020203" pitchFamily="50" charset="-127"/>
+              </a:rPr>
+              <a:t>개의 아라비아 숫자의 </a:t>
+            </a:r>
+            <a:r>
+              <a:rPr lang="en-US" altLang="ko-KR" sz="1900" cap="none" dirty="0">
+                <a:latin typeface="맑은 고딕 Semilight" panose="020B0502040204020203" pitchFamily="50" charset="-127"/>
+                <a:ea typeface="맑은 고딕 Semilight" panose="020B0502040204020203" pitchFamily="50" charset="-127"/>
+                <a:cs typeface="맑은 고딕 Semilight" panose="020B0502040204020203" pitchFamily="50" charset="-127"/>
+              </a:rPr>
+              <a:t>75% </a:t>
+            </a:r>
+            <a:r>
+              <a:rPr lang="ko-KR" altLang="en-US" sz="1900" cap="none" dirty="0">
+                <a:latin typeface="맑은 고딕 Semilight" panose="020B0502040204020203" pitchFamily="50" charset="-127"/>
+                <a:ea typeface="맑은 고딕 Semilight" panose="020B0502040204020203" pitchFamily="50" charset="-127"/>
+                <a:cs typeface="맑은 고딕 Semilight" panose="020B0502040204020203" pitchFamily="50" charset="-127"/>
+              </a:rPr>
+              <a:t>이상을 지워도 수자를 읽을 수 있음</a:t>
+            </a:r>
+            <a:endParaRPr lang="en-US" altLang="ko-KR" sz="1900" cap="none" dirty="0">
+              <a:latin typeface="맑은 고딕 Semilight" panose="020B0502040204020203" pitchFamily="50" charset="-127"/>
+              <a:ea typeface="맑은 고딕 Semilight" panose="020B0502040204020203" pitchFamily="50" charset="-127"/>
+              <a:cs typeface="맑은 고딕 Semilight" panose="020B0502040204020203" pitchFamily="50" charset="-127"/>
+            </a:endParaRPr>
+          </a:p>
+        </p:txBody>
+      </p:sp>
+      <p:pic>
+        <p:nvPicPr>
+          <p:cNvPr id="2" name="Picture 2" descr="The original 3-dimensional data set. The red, blue, green arrows are the direction of the first, second, and third principal components, respectively. Image by the author.">
+            <a:extLst>
+              <a:ext uri="{FF2B5EF4-FFF2-40B4-BE49-F238E27FC236}">
+                <a16:creationId xmlns:a16="http://schemas.microsoft.com/office/drawing/2014/main" id="{D668D96A-CE83-ADD0-F5DF-0380F6FCB763}"/>
+              </a:ext>
+            </a:extLst>
+          </p:cNvPr>
+          <p:cNvPicPr>
+            <a:picLocks noChangeAspect="1" noChangeArrowheads="1"/>
+          </p:cNvPicPr>
+          <p:nvPr/>
+        </p:nvPicPr>
+        <p:blipFill>
+          <a:blip r:embed="rId2">
+            <a:extLst>
+              <a:ext uri="{28A0092B-C50C-407E-A947-70E740481C1C}">
+                <a14:useLocalDpi xmlns:a14="http://schemas.microsoft.com/office/drawing/2010/main" val="0"/>
+              </a:ext>
+            </a:extLst>
+          </a:blip>
+          <a:srcRect/>
+          <a:stretch>
+            <a:fillRect/>
+          </a:stretch>
+        </p:blipFill>
+        <p:spPr bwMode="auto">
+          <a:xfrm>
+            <a:off x="866775" y="2426019"/>
+            <a:ext cx="4371975" cy="3264310"/>
+          </a:xfrm>
+          <a:prstGeom prst="rect">
+            <a:avLst/>
+          </a:prstGeom>
+          <a:noFill/>
+          <a:extLst>
+            <a:ext uri="{909E8E84-426E-40DD-AFC4-6F175D3DCCD1}">
+              <a14:hiddenFill xmlns:a14="http://schemas.microsoft.com/office/drawing/2010/main">
+                <a:solidFill>
+                  <a:srgbClr val="FFFFFF"/>
+                </a:solidFill>
+              </a14:hiddenFill>
+            </a:ext>
+          </a:extLst>
+        </p:spPr>
+      </p:pic>
+      <p:pic>
+        <p:nvPicPr>
+          <p:cNvPr id="3" name="Picture 4" descr="Scatterplot after PCA reduced from 3-dimensions to 2-dimensions. Image by the author.">
+            <a:extLst>
+              <a:ext uri="{FF2B5EF4-FFF2-40B4-BE49-F238E27FC236}">
+                <a16:creationId xmlns:a16="http://schemas.microsoft.com/office/drawing/2014/main" id="{27B050C9-3918-0FC9-3DA7-760BE91EEB1B}"/>
+              </a:ext>
+            </a:extLst>
+          </p:cNvPr>
+          <p:cNvPicPr>
+            <a:picLocks noChangeAspect="1" noChangeArrowheads="1"/>
+          </p:cNvPicPr>
+          <p:nvPr/>
+        </p:nvPicPr>
+        <p:blipFill>
+          <a:blip r:embed="rId3">
+            <a:extLst>
+              <a:ext uri="{28A0092B-C50C-407E-A947-70E740481C1C}">
+                <a14:useLocalDpi xmlns:a14="http://schemas.microsoft.com/office/drawing/2010/main" val="0"/>
+              </a:ext>
+            </a:extLst>
+          </a:blip>
+          <a:srcRect/>
+          <a:stretch>
+            <a:fillRect/>
+          </a:stretch>
+        </p:blipFill>
+        <p:spPr bwMode="auto">
+          <a:xfrm>
+            <a:off x="6267449" y="2426020"/>
+            <a:ext cx="5230069" cy="3264309"/>
+          </a:xfrm>
+          <a:prstGeom prst="rect">
+            <a:avLst/>
+          </a:prstGeom>
+          <a:noFill/>
+          <a:extLst>
+            <a:ext uri="{909E8E84-426E-40DD-AFC4-6F175D3DCCD1}">
+              <a14:hiddenFill xmlns:a14="http://schemas.microsoft.com/office/drawing/2010/main">
+                <a:solidFill>
+                  <a:srgbClr val="FFFFFF"/>
+                </a:solidFill>
+              </a14:hiddenFill>
+            </a:ext>
+          </a:extLst>
+        </p:spPr>
+      </p:pic>
+      <p:sp>
+        <p:nvSpPr>
+          <p:cNvPr id="5" name="TextBox 4">
+            <a:extLst>
+              <a:ext uri="{FF2B5EF4-FFF2-40B4-BE49-F238E27FC236}">
+                <a16:creationId xmlns:a16="http://schemas.microsoft.com/office/drawing/2014/main" id="{8674DDD5-5E98-0D28-C1F6-B7C002ADC1E5}"/>
+              </a:ext>
+            </a:extLst>
+          </p:cNvPr>
+          <p:cNvSpPr txBox="1"/>
+          <p:nvPr/>
+        </p:nvSpPr>
+        <p:spPr>
+          <a:xfrm>
+            <a:off x="807720" y="5723600"/>
+            <a:ext cx="4533900" cy="646331"/>
+          </a:xfrm>
+          <a:prstGeom prst="rect">
+            <a:avLst/>
+          </a:prstGeom>
+          <a:noFill/>
+        </p:spPr>
+        <p:txBody>
+          <a:bodyPr wrap="square">
+            <a:spAutoFit/>
+          </a:bodyPr>
+          <a:lstStyle/>
+          <a:p>
+            <a:r>
+              <a:rPr lang="en-US" altLang="ko-KR" sz="1200" b="0" i="0" dirty="0">
+                <a:solidFill>
+                  <a:srgbClr val="2A2A2A"/>
+                </a:solidFill>
+                <a:effectLst/>
+                <a:latin typeface="맑은 고딕 Semilight" panose="020B0502040204020203" pitchFamily="50" charset="-127"/>
+                <a:ea typeface="맑은 고딕 Semilight" panose="020B0502040204020203" pitchFamily="50" charset="-127"/>
+                <a:cs typeface="맑은 고딕 Semilight" panose="020B0502040204020203" pitchFamily="50" charset="-127"/>
+              </a:rPr>
+              <a:t>The original 3-dimensional data set. The red, blue, green arrows are the direction of the first, second, and third principal components, respectively.</a:t>
+            </a:r>
+            <a:endParaRPr lang="ko-KR" altLang="en-US" sz="1200" dirty="0">
+              <a:latin typeface="맑은 고딕 Semilight" panose="020B0502040204020203" pitchFamily="50" charset="-127"/>
+              <a:ea typeface="맑은 고딕 Semilight" panose="020B0502040204020203" pitchFamily="50" charset="-127"/>
+              <a:cs typeface="맑은 고딕 Semilight" panose="020B0502040204020203" pitchFamily="50" charset="-127"/>
+            </a:endParaRPr>
+          </a:p>
+        </p:txBody>
+      </p:sp>
+      <p:sp>
+        <p:nvSpPr>
+          <p:cNvPr id="6" name="TextBox 5">
+            <a:extLst>
+              <a:ext uri="{FF2B5EF4-FFF2-40B4-BE49-F238E27FC236}">
+                <a16:creationId xmlns:a16="http://schemas.microsoft.com/office/drawing/2014/main" id="{8533259D-9128-168B-95E1-4BB0CB2983A5}"/>
+              </a:ext>
+            </a:extLst>
+          </p:cNvPr>
+          <p:cNvSpPr txBox="1"/>
+          <p:nvPr/>
+        </p:nvSpPr>
+        <p:spPr>
+          <a:xfrm>
+            <a:off x="6267449" y="5723600"/>
+            <a:ext cx="4533900" cy="461665"/>
+          </a:xfrm>
+          <a:prstGeom prst="rect">
+            <a:avLst/>
+          </a:prstGeom>
+          <a:noFill/>
+        </p:spPr>
+        <p:txBody>
+          <a:bodyPr wrap="square">
+            <a:spAutoFit/>
+          </a:bodyPr>
+          <a:lstStyle/>
+          <a:p>
+            <a:r>
+              <a:rPr lang="en-US" altLang="ko-KR" sz="1200" b="0" i="0" dirty="0">
+                <a:solidFill>
+                  <a:srgbClr val="2A2A2A"/>
+                </a:solidFill>
+                <a:effectLst/>
+                <a:latin typeface="맑은 고딕 Semilight" panose="020B0502040204020203" pitchFamily="50" charset="-127"/>
+                <a:ea typeface="맑은 고딕 Semilight" panose="020B0502040204020203" pitchFamily="50" charset="-127"/>
+                <a:cs typeface="맑은 고딕 Semilight" panose="020B0502040204020203" pitchFamily="50" charset="-127"/>
+              </a:rPr>
+              <a:t>Scatterplot after PCA reduced from 3-dimensions to 2-dimensions. </a:t>
+            </a:r>
+            <a:endParaRPr lang="ko-KR" altLang="en-US" sz="1200" dirty="0">
+              <a:latin typeface="맑은 고딕 Semilight" panose="020B0502040204020203" pitchFamily="50" charset="-127"/>
+              <a:ea typeface="맑은 고딕 Semilight" panose="020B0502040204020203" pitchFamily="50" charset="-127"/>
+              <a:cs typeface="맑은 고딕 Semilight" panose="020B0502040204020203" pitchFamily="50" charset="-127"/>
+            </a:endParaRPr>
+          </a:p>
+        </p:txBody>
+      </p:sp>
+    </p:spTree>
+    <p:extLst>
+      <p:ext uri="{BB962C8B-B14F-4D97-AF65-F5344CB8AC3E}">
+        <p14:creationId xmlns:p14="http://schemas.microsoft.com/office/powerpoint/2010/main" val="2725764857"/>
+      </p:ext>
+    </p:extLst>
+  </p:cSld>
+  <p:clrMapOvr>
+    <a:masterClrMapping/>
+  </p:clrMapOvr>
+</p:sld>
+</file>
+
+<file path=ppt/slides/slide26.xml><?xml version="1.0" encoding="utf-8"?>
+<p:sld xmlns:a="http://schemas.openxmlformats.org/drawingml/2006/main" xmlns:r="http://schemas.openxmlformats.org/officeDocument/2006/relationships" xmlns:p="http://schemas.openxmlformats.org/presentationml/2006/main">
+  <p:cSld>
+    <p:spTree>
+      <p:nvGrpSpPr>
+        <p:cNvPr id="1" name="">
+          <a:extLst>
+            <a:ext uri="{FF2B5EF4-FFF2-40B4-BE49-F238E27FC236}">
+              <a16:creationId xmlns:a16="http://schemas.microsoft.com/office/drawing/2014/main" id="{C6BDA77C-2E29-FAAD-6486-73DAE99CD5FC}"/>
+            </a:ext>
+          </a:extLst>
+        </p:cNvPr>
+        <p:cNvGrpSpPr/>
+        <p:nvPr/>
+      </p:nvGrpSpPr>
+      <p:grpSpPr>
+        <a:xfrm>
+          <a:off x="0" y="0"/>
+          <a:ext cx="0" cy="0"/>
+          <a:chOff x="0" y="0"/>
+          <a:chExt cx="0" cy="0"/>
+        </a:xfrm>
+      </p:grpSpPr>
+      <p:sp>
+        <p:nvSpPr>
+          <p:cNvPr id="4" name="슬라이드 번호 개체 틀 3">
+            <a:extLst>
+              <a:ext uri="{FF2B5EF4-FFF2-40B4-BE49-F238E27FC236}">
+                <a16:creationId xmlns:a16="http://schemas.microsoft.com/office/drawing/2014/main" id="{E74139A7-D2A7-F7DF-AB8B-CE5F968B0F05}"/>
+              </a:ext>
+            </a:extLst>
+          </p:cNvPr>
+          <p:cNvSpPr>
+            <a:spLocks noGrp="1"/>
+          </p:cNvSpPr>
+          <p:nvPr>
+            <p:ph type="sldNum" sz="quarter" idx="12"/>
+          </p:nvPr>
+        </p:nvSpPr>
+        <p:spPr>
+          <a:xfrm>
+            <a:off x="10514011" y="6036261"/>
+            <a:ext cx="753545" cy="365125"/>
+          </a:xfrm>
+        </p:spPr>
+        <p:txBody>
+          <a:bodyPr/>
+          <a:lstStyle/>
+          <a:p>
+            <a:fld id="{D57F1E4F-1CFF-5643-939E-217C01CDF565}" type="slidenum">
+              <a:rPr lang="en-US" smtClean="0"/>
+              <a:pPr/>
+              <a:t>26</a:t>
+            </a:fld>
+            <a:endParaRPr lang="en-US" dirty="0"/>
+          </a:p>
+        </p:txBody>
+      </p:sp>
+      <p:sp>
+        <p:nvSpPr>
+          <p:cNvPr id="39" name="제목 1">
+            <a:extLst>
+              <a:ext uri="{FF2B5EF4-FFF2-40B4-BE49-F238E27FC236}">
+                <a16:creationId xmlns:a16="http://schemas.microsoft.com/office/drawing/2014/main" id="{88ABDE38-5B87-6B5E-FD84-F755B556407C}"/>
+              </a:ext>
+            </a:extLst>
+          </p:cNvPr>
+          <p:cNvSpPr txBox="1">
+            <a:spLocks/>
+          </p:cNvSpPr>
+          <p:nvPr/>
+        </p:nvSpPr>
+        <p:spPr>
+          <a:xfrm>
+            <a:off x="590464" y="395619"/>
+            <a:ext cx="10353762" cy="766439"/>
+          </a:xfrm>
+          <a:prstGeom prst="rect">
+            <a:avLst/>
+          </a:prstGeom>
+        </p:spPr>
+        <p:txBody>
+          <a:bodyPr vert="horz" lIns="91440" tIns="45720" rIns="91440" bIns="45720" rtlCol="0" anchor="ctr">
+            <a:normAutofit/>
+          </a:bodyPr>
+          <a:lstStyle>
+            <a:lvl1pPr algn="ctr" defTabSz="914400" rtl="0" eaLnBrk="1" latinLnBrk="1" hangingPunct="1">
+              <a:lnSpc>
+                <a:spcPct val="90000"/>
+              </a:lnSpc>
+              <a:spcBef>
+                <a:spcPct val="0"/>
+              </a:spcBef>
+              <a:buNone/>
+              <a:defRPr sz="3200" kern="1200" cap="all" baseline="0">
+                <a:solidFill>
+                  <a:schemeClr val="tx1"/>
+                </a:solidFill>
+                <a:effectLst/>
+                <a:latin typeface="Batang" panose="02030600000101010101" pitchFamily="18" charset="-127"/>
+                <a:ea typeface="Batang" panose="02030600000101010101" pitchFamily="18" charset="-127"/>
+                <a:cs typeface="+mj-cs"/>
+              </a:defRPr>
+            </a:lvl1pPr>
+          </a:lstStyle>
+          <a:p>
+            <a:pPr algn="l"/>
+            <a:r>
+              <a:rPr lang="en-US" altLang="ko-KR" sz="2800" cap="none" dirty="0">
+                <a:latin typeface="ADLaM Display" panose="02010000000000000000" pitchFamily="2" charset="0"/>
+                <a:ea typeface="ADLaM Display" panose="02010000000000000000" pitchFamily="2" charset="0"/>
+                <a:cs typeface="ADLaM Display" panose="02010000000000000000" pitchFamily="2" charset="0"/>
+              </a:rPr>
+              <a:t>Dimensionality Reduction</a:t>
+            </a:r>
+            <a:endParaRPr lang="ko-KR" altLang="en-US" sz="2800" cap="none" dirty="0">
+              <a:latin typeface="ADLaM Display" panose="02010000000000000000" pitchFamily="2" charset="0"/>
+              <a:cs typeface="ADLaM Display" panose="02010000000000000000" pitchFamily="2" charset="0"/>
+            </a:endParaRPr>
+          </a:p>
+        </p:txBody>
+      </p:sp>
+      <p:pic>
+        <p:nvPicPr>
+          <p:cNvPr id="6" name="Picture 4">
+            <a:extLst>
+              <a:ext uri="{FF2B5EF4-FFF2-40B4-BE49-F238E27FC236}">
+                <a16:creationId xmlns:a16="http://schemas.microsoft.com/office/drawing/2014/main" id="{074B5D32-C566-AE78-5EFB-3C09EEC6D4FE}"/>
+              </a:ext>
+            </a:extLst>
+          </p:cNvPr>
+          <p:cNvPicPr>
+            <a:picLocks noChangeAspect="1" noChangeArrowheads="1"/>
+          </p:cNvPicPr>
+          <p:nvPr/>
+        </p:nvPicPr>
+        <p:blipFill>
+          <a:blip r:embed="rId2">
+            <a:extLst>
+              <a:ext uri="{28A0092B-C50C-407E-A947-70E740481C1C}">
+                <a14:useLocalDpi xmlns:a14="http://schemas.microsoft.com/office/drawing/2010/main" val="0"/>
+              </a:ext>
+            </a:extLst>
+          </a:blip>
+          <a:srcRect/>
+          <a:stretch>
+            <a:fillRect/>
+          </a:stretch>
+        </p:blipFill>
+        <p:spPr bwMode="auto">
+          <a:xfrm>
+            <a:off x="6542089" y="2838154"/>
+            <a:ext cx="3170871" cy="3148004"/>
+          </a:xfrm>
+          <a:prstGeom prst="rect">
+            <a:avLst/>
+          </a:prstGeom>
+          <a:noFill/>
+          <a:extLst>
+            <a:ext uri="{909E8E84-426E-40DD-AFC4-6F175D3DCCD1}">
+              <a14:hiddenFill xmlns:a14="http://schemas.microsoft.com/office/drawing/2010/main">
+                <a:solidFill>
+                  <a:srgbClr val="FFFFFF"/>
+                </a:solidFill>
+              </a14:hiddenFill>
+            </a:ext>
+          </a:extLst>
+        </p:spPr>
+      </p:pic>
+      <p:sp>
+        <p:nvSpPr>
+          <p:cNvPr id="7" name="TextBox 6">
+            <a:extLst>
+              <a:ext uri="{FF2B5EF4-FFF2-40B4-BE49-F238E27FC236}">
+                <a16:creationId xmlns:a16="http://schemas.microsoft.com/office/drawing/2014/main" id="{08A22C6A-8BD3-339D-5312-E8D46C32AE62}"/>
+              </a:ext>
+            </a:extLst>
+          </p:cNvPr>
+          <p:cNvSpPr txBox="1"/>
+          <p:nvPr/>
+        </p:nvSpPr>
+        <p:spPr>
+          <a:xfrm>
+            <a:off x="607241" y="1280160"/>
+            <a:ext cx="10977518" cy="1285288"/>
+          </a:xfrm>
+          <a:prstGeom prst="rect">
+            <a:avLst/>
+          </a:prstGeom>
+          <a:noFill/>
+        </p:spPr>
+        <p:txBody>
+          <a:bodyPr wrap="square" rtlCol="0">
+            <a:spAutoFit/>
+          </a:bodyPr>
+          <a:lstStyle/>
+          <a:p>
+            <a:pPr>
+              <a:lnSpc>
+                <a:spcPct val="150000"/>
+              </a:lnSpc>
+            </a:pPr>
+            <a:r>
+              <a:rPr lang="en-US" altLang="ko-KR" dirty="0">
+                <a:latin typeface="맑은 고딕 Semilight" panose="020B0502040204020203" pitchFamily="50" charset="-127"/>
+                <a:ea typeface="맑은 고딕 Semilight" panose="020B0502040204020203" pitchFamily="50" charset="-127"/>
+                <a:cs typeface="맑은 고딕 Semilight" panose="020B0502040204020203" pitchFamily="50" charset="-127"/>
+              </a:rPr>
+              <a:t>60,00</a:t>
+            </a:r>
+            <a:r>
+              <a:rPr lang="ko-KR" altLang="en-US" dirty="0">
+                <a:latin typeface="맑은 고딕 Semilight" panose="020B0502040204020203" pitchFamily="50" charset="-127"/>
+                <a:ea typeface="맑은 고딕 Semilight" panose="020B0502040204020203" pitchFamily="50" charset="-127"/>
+                <a:cs typeface="맑은 고딕 Semilight" panose="020B0502040204020203" pitchFamily="50" charset="-127"/>
+              </a:rPr>
+              <a:t>개 </a:t>
+            </a:r>
+            <a:r>
+              <a:rPr lang="en-US" altLang="ko-KR" dirty="0">
+                <a:latin typeface="맑은 고딕 Semilight" panose="020B0502040204020203" pitchFamily="50" charset="-127"/>
+                <a:ea typeface="맑은 고딕 Semilight" panose="020B0502040204020203" pitchFamily="50" charset="-127"/>
+                <a:cs typeface="맑은 고딕 Semilight" panose="020B0502040204020203" pitchFamily="50" charset="-127"/>
+              </a:rPr>
+              <a:t>MNIST</a:t>
+            </a:r>
+            <a:r>
+              <a:rPr lang="ko-KR" altLang="en-US" dirty="0">
+                <a:latin typeface="맑은 고딕 Semilight" panose="020B0502040204020203" pitchFamily="50" charset="-127"/>
+                <a:ea typeface="맑은 고딕 Semilight" panose="020B0502040204020203" pitchFamily="50" charset="-127"/>
+                <a:cs typeface="맑은 고딕 Semilight" panose="020B0502040204020203" pitchFamily="50" charset="-127"/>
+              </a:rPr>
+              <a:t>의 필기체 수자</a:t>
+            </a:r>
+            <a:r>
+              <a:rPr lang="en-US" altLang="ko-KR" dirty="0">
+                <a:latin typeface="맑은 고딕 Semilight" panose="020B0502040204020203" pitchFamily="50" charset="-127"/>
+                <a:ea typeface="맑은 고딕 Semilight" panose="020B0502040204020203" pitchFamily="50" charset="-127"/>
+                <a:cs typeface="맑은 고딕 Semilight" panose="020B0502040204020203" pitchFamily="50" charset="-127"/>
+              </a:rPr>
+              <a:t>(28 by</a:t>
+            </a:r>
+            <a:r>
+              <a:rPr lang="ko-KR" altLang="en-US" dirty="0">
+                <a:latin typeface="맑은 고딕 Semilight" panose="020B0502040204020203" pitchFamily="50" charset="-127"/>
+                <a:ea typeface="맑은 고딕 Semilight" panose="020B0502040204020203" pitchFamily="50" charset="-127"/>
+                <a:cs typeface="맑은 고딕 Semilight" panose="020B0502040204020203" pitchFamily="50" charset="-127"/>
+              </a:rPr>
+              <a:t> </a:t>
+            </a:r>
+            <a:r>
+              <a:rPr lang="en-US" altLang="ko-KR" dirty="0">
+                <a:latin typeface="맑은 고딕 Semilight" panose="020B0502040204020203" pitchFamily="50" charset="-127"/>
+                <a:ea typeface="맑은 고딕 Semilight" panose="020B0502040204020203" pitchFamily="50" charset="-127"/>
+                <a:cs typeface="맑은 고딕 Semilight" panose="020B0502040204020203" pitchFamily="50" charset="-127"/>
+              </a:rPr>
+              <a:t>28 </a:t>
+            </a:r>
+            <a:r>
+              <a:rPr lang="ko-KR" altLang="en-US" dirty="0">
+                <a:latin typeface="맑은 고딕 Semilight" panose="020B0502040204020203" pitchFamily="50" charset="-127"/>
+                <a:ea typeface="맑은 고딕 Semilight" panose="020B0502040204020203" pitchFamily="50" charset="-127"/>
+                <a:cs typeface="맑은 고딕 Semilight" panose="020B0502040204020203" pitchFamily="50" charset="-127"/>
+              </a:rPr>
+              <a:t>행렬</a:t>
+            </a:r>
+            <a:r>
+              <a:rPr lang="en-US" altLang="ko-KR" dirty="0">
+                <a:latin typeface="맑은 고딕 Semilight" panose="020B0502040204020203" pitchFamily="50" charset="-127"/>
+                <a:ea typeface="맑은 고딕 Semilight" panose="020B0502040204020203" pitchFamily="50" charset="-127"/>
+                <a:cs typeface="맑은 고딕 Semilight" panose="020B0502040204020203" pitchFamily="50" charset="-127"/>
+              </a:rPr>
+              <a:t>) </a:t>
+            </a:r>
+            <a:r>
+              <a:rPr lang="ko-KR" altLang="en-US" dirty="0">
+                <a:latin typeface="맑은 고딕 Semilight" panose="020B0502040204020203" pitchFamily="50" charset="-127"/>
+                <a:ea typeface="맑은 고딕 Semilight" panose="020B0502040204020203" pitchFamily="50" charset="-127"/>
+                <a:cs typeface="맑은 고딕 Semilight" panose="020B0502040204020203" pitchFamily="50" charset="-127"/>
+              </a:rPr>
+              <a:t>데이터의 각 </a:t>
+            </a:r>
+            <a:r>
+              <a:rPr lang="en-US" altLang="ko-KR" dirty="0">
+                <a:latin typeface="맑은 고딕 Semilight" panose="020B0502040204020203" pitchFamily="50" charset="-127"/>
+                <a:ea typeface="맑은 고딕 Semilight" panose="020B0502040204020203" pitchFamily="50" charset="-127"/>
+                <a:cs typeface="맑은 고딕 Semilight" panose="020B0502040204020203" pitchFamily="50" charset="-127"/>
+              </a:rPr>
+              <a:t>pixel</a:t>
+            </a:r>
+            <a:r>
+              <a:rPr lang="ko-KR" altLang="en-US" dirty="0">
+                <a:latin typeface="맑은 고딕 Semilight" panose="020B0502040204020203" pitchFamily="50" charset="-127"/>
+                <a:ea typeface="맑은 고딕 Semilight" panose="020B0502040204020203" pitchFamily="50" charset="-127"/>
+                <a:cs typeface="맑은 고딕 Semilight" panose="020B0502040204020203" pitchFamily="50" charset="-127"/>
+              </a:rPr>
+              <a:t>간 표준편차를 구해서 시각화한 이미지를 보면 해보면 중앙 픽셀의 표준편차는 높지만 주변 픽셀의 표준편차는 거의 </a:t>
+            </a:r>
+            <a:r>
+              <a:rPr lang="en-US" altLang="ko-KR" dirty="0">
+                <a:latin typeface="맑은 고딕 Semilight" panose="020B0502040204020203" pitchFamily="50" charset="-127"/>
+                <a:ea typeface="맑은 고딕 Semilight" panose="020B0502040204020203" pitchFamily="50" charset="-127"/>
+                <a:cs typeface="맑은 고딕 Semilight" panose="020B0502040204020203" pitchFamily="50" charset="-127"/>
+              </a:rPr>
+              <a:t>0</a:t>
+            </a:r>
+            <a:r>
+              <a:rPr lang="ko-KR" altLang="en-US" dirty="0">
+                <a:latin typeface="맑은 고딕 Semilight" panose="020B0502040204020203" pitchFamily="50" charset="-127"/>
+                <a:ea typeface="맑은 고딕 Semilight" panose="020B0502040204020203" pitchFamily="50" charset="-127"/>
+                <a:cs typeface="맑은 고딕 Semilight" panose="020B0502040204020203" pitchFamily="50" charset="-127"/>
+              </a:rPr>
+              <a:t>에 근접한 것으로 나타남</a:t>
+            </a:r>
+            <a:r>
+              <a:rPr lang="en-US" altLang="ko-KR" dirty="0">
+                <a:latin typeface="맑은 고딕 Semilight" panose="020B0502040204020203" pitchFamily="50" charset="-127"/>
+                <a:ea typeface="맑은 고딕 Semilight" panose="020B0502040204020203" pitchFamily="50" charset="-127"/>
+                <a:cs typeface="맑은 고딕 Semilight" panose="020B0502040204020203" pitchFamily="50" charset="-127"/>
+              </a:rPr>
+              <a:t>(</a:t>
+            </a:r>
+            <a:r>
+              <a:rPr lang="ko-KR" altLang="en-US" dirty="0">
+                <a:latin typeface="맑은 고딕 Semilight" panose="020B0502040204020203" pitchFamily="50" charset="-127"/>
+                <a:ea typeface="맑은 고딕 Semilight" panose="020B0502040204020203" pitchFamily="50" charset="-127"/>
+                <a:cs typeface="맑은 고딕 Semilight" panose="020B0502040204020203" pitchFamily="50" charset="-127"/>
+              </a:rPr>
+              <a:t>주변의 정보는 데이터는 수자를 표현하는데 거의 역할이 없음</a:t>
+            </a:r>
+            <a:r>
+              <a:rPr lang="en-US" altLang="ko-KR" dirty="0">
+                <a:latin typeface="맑은 고딕 Semilight" panose="020B0502040204020203" pitchFamily="50" charset="-127"/>
+                <a:ea typeface="맑은 고딕 Semilight" panose="020B0502040204020203" pitchFamily="50" charset="-127"/>
+                <a:cs typeface="맑은 고딕 Semilight" panose="020B0502040204020203" pitchFamily="50" charset="-127"/>
+              </a:rPr>
+              <a:t>)</a:t>
+            </a:r>
+          </a:p>
+        </p:txBody>
+      </p:sp>
+      <p:grpSp>
+        <p:nvGrpSpPr>
+          <p:cNvPr id="8" name="그룹 7">
+            <a:extLst>
+              <a:ext uri="{FF2B5EF4-FFF2-40B4-BE49-F238E27FC236}">
+                <a16:creationId xmlns:a16="http://schemas.microsoft.com/office/drawing/2014/main" id="{F54118A0-E283-62A0-E943-7CF479C2CDA9}"/>
+              </a:ext>
+            </a:extLst>
+          </p:cNvPr>
+          <p:cNvGrpSpPr/>
+          <p:nvPr/>
+        </p:nvGrpSpPr>
+        <p:grpSpPr>
+          <a:xfrm>
+            <a:off x="9966960" y="2838153"/>
+            <a:ext cx="1936300" cy="3137007"/>
+            <a:chOff x="9628030" y="2838154"/>
+            <a:chExt cx="2246046" cy="3638827"/>
+          </a:xfrm>
+        </p:grpSpPr>
+        <p:pic>
+          <p:nvPicPr>
+            <p:cNvPr id="11" name="그림 10">
+              <a:extLst>
+                <a:ext uri="{FF2B5EF4-FFF2-40B4-BE49-F238E27FC236}">
+                  <a16:creationId xmlns:a16="http://schemas.microsoft.com/office/drawing/2014/main" id="{4C4EBE39-9381-68D1-F7D5-9ABA89C7BD8E}"/>
+                </a:ext>
+              </a:extLst>
+            </p:cNvPr>
+            <p:cNvPicPr>
+              <a:picLocks noChangeAspect="1"/>
+            </p:cNvPicPr>
+            <p:nvPr/>
+          </p:nvPicPr>
+          <p:blipFill>
+            <a:blip r:embed="rId3"/>
+            <a:stretch>
+              <a:fillRect/>
+            </a:stretch>
+          </p:blipFill>
+          <p:spPr>
+            <a:xfrm>
+              <a:off x="9628030" y="2838154"/>
+              <a:ext cx="2246046" cy="1225431"/>
+            </a:xfrm>
+            <a:prstGeom prst="rect">
+              <a:avLst/>
+            </a:prstGeom>
+          </p:spPr>
+        </p:pic>
+        <p:pic>
+          <p:nvPicPr>
+            <p:cNvPr id="12" name="그림 11">
+              <a:extLst>
+                <a:ext uri="{FF2B5EF4-FFF2-40B4-BE49-F238E27FC236}">
+                  <a16:creationId xmlns:a16="http://schemas.microsoft.com/office/drawing/2014/main" id="{68C3BF4C-3BEC-CCAD-51AA-B04850C91379}"/>
+                </a:ext>
+              </a:extLst>
+            </p:cNvPr>
+            <p:cNvPicPr>
+              <a:picLocks noChangeAspect="1"/>
+            </p:cNvPicPr>
+            <p:nvPr/>
+          </p:nvPicPr>
+          <p:blipFill>
+            <a:blip r:embed="rId4"/>
+            <a:stretch>
+              <a:fillRect/>
+            </a:stretch>
+          </p:blipFill>
+          <p:spPr>
+            <a:xfrm>
+              <a:off x="9628031" y="4060451"/>
+              <a:ext cx="2240700" cy="1204969"/>
+            </a:xfrm>
+            <a:prstGeom prst="rect">
+              <a:avLst/>
+            </a:prstGeom>
+          </p:spPr>
+        </p:pic>
+        <p:pic>
+          <p:nvPicPr>
+            <p:cNvPr id="13" name="그림 12">
+              <a:extLst>
+                <a:ext uri="{FF2B5EF4-FFF2-40B4-BE49-F238E27FC236}">
+                  <a16:creationId xmlns:a16="http://schemas.microsoft.com/office/drawing/2014/main" id="{F83AD08F-9A65-B9E5-D2AA-9188852986BB}"/>
+                </a:ext>
+              </a:extLst>
+            </p:cNvPr>
+            <p:cNvPicPr>
+              <a:picLocks noChangeAspect="1"/>
+            </p:cNvPicPr>
+            <p:nvPr/>
+          </p:nvPicPr>
+          <p:blipFill>
+            <a:blip r:embed="rId5"/>
+            <a:stretch>
+              <a:fillRect/>
+            </a:stretch>
+          </p:blipFill>
+          <p:spPr>
+            <a:xfrm>
+              <a:off x="9628782" y="5265420"/>
+              <a:ext cx="2240701" cy="1211561"/>
+            </a:xfrm>
+            <a:prstGeom prst="rect">
+              <a:avLst/>
+            </a:prstGeom>
+          </p:spPr>
+        </p:pic>
+      </p:grpSp>
+      <p:sp>
+        <p:nvSpPr>
+          <p:cNvPr id="16" name="TextBox 15">
+            <a:extLst>
+              <a:ext uri="{FF2B5EF4-FFF2-40B4-BE49-F238E27FC236}">
+                <a16:creationId xmlns:a16="http://schemas.microsoft.com/office/drawing/2014/main" id="{39360056-C6B7-C3C4-513B-DC03845926C0}"/>
+              </a:ext>
+            </a:extLst>
+          </p:cNvPr>
+          <p:cNvSpPr txBox="1"/>
+          <p:nvPr/>
+        </p:nvSpPr>
+        <p:spPr>
+          <a:xfrm>
+            <a:off x="755904" y="2838153"/>
+            <a:ext cx="5297424" cy="2862322"/>
+          </a:xfrm>
+          <a:prstGeom prst="rect">
+            <a:avLst/>
+          </a:prstGeom>
+          <a:solidFill>
+            <a:srgbClr val="76E3FF"/>
+          </a:solidFill>
+        </p:spPr>
+        <p:txBody>
+          <a:bodyPr wrap="square" rtlCol="0">
+            <a:spAutoFit/>
+          </a:bodyPr>
+          <a:lstStyle/>
+          <a:p>
+            <a:r>
+              <a:rPr lang="en-US" altLang="ko-KR" sz="1200" dirty="0">
+                <a:latin typeface="D2Coding" panose="020B0609020101020101" pitchFamily="49" charset="-127"/>
+                <a:ea typeface="D2Coding" panose="020B0609020101020101" pitchFamily="49" charset="-127"/>
+              </a:rPr>
+              <a:t>import torch</a:t>
+            </a:r>
+          </a:p>
+          <a:p>
+            <a:r>
+              <a:rPr lang="en-US" altLang="ko-KR" sz="1200" dirty="0">
+                <a:latin typeface="D2Coding" panose="020B0609020101020101" pitchFamily="49" charset="-127"/>
+                <a:ea typeface="D2Coding" panose="020B0609020101020101" pitchFamily="49" charset="-127"/>
+              </a:rPr>
+              <a:t>from </a:t>
+            </a:r>
+            <a:r>
+              <a:rPr lang="en-US" altLang="ko-KR" sz="1200" dirty="0" err="1">
+                <a:latin typeface="D2Coding" panose="020B0609020101020101" pitchFamily="49" charset="-127"/>
+                <a:ea typeface="D2Coding" panose="020B0609020101020101" pitchFamily="49" charset="-127"/>
+              </a:rPr>
+              <a:t>torchvision</a:t>
+            </a:r>
+            <a:r>
+              <a:rPr lang="en-US" altLang="ko-KR" sz="1200" dirty="0">
+                <a:latin typeface="D2Coding" panose="020B0609020101020101" pitchFamily="49" charset="-127"/>
+                <a:ea typeface="D2Coding" panose="020B0609020101020101" pitchFamily="49" charset="-127"/>
+              </a:rPr>
+              <a:t> import datasets</a:t>
+            </a:r>
+          </a:p>
+          <a:p>
+            <a:r>
+              <a:rPr lang="en-US" altLang="ko-KR" sz="1200" dirty="0">
+                <a:latin typeface="D2Coding" panose="020B0609020101020101" pitchFamily="49" charset="-127"/>
+                <a:ea typeface="D2Coding" panose="020B0609020101020101" pitchFamily="49" charset="-127"/>
+              </a:rPr>
+              <a:t>import </a:t>
+            </a:r>
+            <a:r>
+              <a:rPr lang="en-US" altLang="ko-KR" sz="1200" dirty="0" err="1">
+                <a:latin typeface="D2Coding" panose="020B0609020101020101" pitchFamily="49" charset="-127"/>
+                <a:ea typeface="D2Coding" panose="020B0609020101020101" pitchFamily="49" charset="-127"/>
+              </a:rPr>
+              <a:t>matplotlib.pyplot</a:t>
+            </a:r>
+            <a:r>
+              <a:rPr lang="en-US" altLang="ko-KR" sz="1200" dirty="0">
+                <a:latin typeface="D2Coding" panose="020B0609020101020101" pitchFamily="49" charset="-127"/>
+                <a:ea typeface="D2Coding" panose="020B0609020101020101" pitchFamily="49" charset="-127"/>
+              </a:rPr>
+              <a:t> as </a:t>
+            </a:r>
+            <a:r>
+              <a:rPr lang="en-US" altLang="ko-KR" sz="1200" dirty="0" err="1">
+                <a:latin typeface="D2Coding" panose="020B0609020101020101" pitchFamily="49" charset="-127"/>
+                <a:ea typeface="D2Coding" panose="020B0609020101020101" pitchFamily="49" charset="-127"/>
+              </a:rPr>
+              <a:t>plt</a:t>
+            </a:r>
+            <a:endParaRPr lang="en-US" altLang="ko-KR" sz="1200" dirty="0">
+              <a:latin typeface="D2Coding" panose="020B0609020101020101" pitchFamily="49" charset="-127"/>
+              <a:ea typeface="D2Coding" panose="020B0609020101020101" pitchFamily="49" charset="-127"/>
+            </a:endParaRPr>
+          </a:p>
+          <a:p>
+            <a:endParaRPr lang="en-US" altLang="ko-KR" sz="1200" dirty="0">
+              <a:latin typeface="D2Coding" panose="020B0609020101020101" pitchFamily="49" charset="-127"/>
+              <a:ea typeface="D2Coding" panose="020B0609020101020101" pitchFamily="49" charset="-127"/>
+            </a:endParaRPr>
+          </a:p>
+          <a:p>
+            <a:r>
+              <a:rPr lang="en-US" altLang="ko-KR" sz="1200" dirty="0">
+                <a:latin typeface="D2Coding" panose="020B0609020101020101" pitchFamily="49" charset="-127"/>
+                <a:ea typeface="D2Coding" panose="020B0609020101020101" pitchFamily="49" charset="-127"/>
+              </a:rPr>
+              <a:t># </a:t>
+            </a:r>
+            <a:r>
+              <a:rPr lang="ko-KR" altLang="en-US" sz="1200" dirty="0">
+                <a:latin typeface="D2Coding" panose="020B0609020101020101" pitchFamily="49" charset="-127"/>
+                <a:ea typeface="D2Coding" panose="020B0609020101020101" pitchFamily="49" charset="-127"/>
+              </a:rPr>
+              <a:t>데이터를 불러오는 즉시 </a:t>
+            </a:r>
+            <a:r>
+              <a:rPr lang="en-US" altLang="ko-KR" sz="1200" dirty="0">
+                <a:latin typeface="D2Coding" panose="020B0609020101020101" pitchFamily="49" charset="-127"/>
+                <a:ea typeface="D2Coding" panose="020B0609020101020101" pitchFamily="49" charset="-127"/>
+              </a:rPr>
+              <a:t>.data</a:t>
+            </a:r>
+            <a:r>
+              <a:rPr lang="ko-KR" altLang="en-US" sz="1200" dirty="0">
+                <a:latin typeface="D2Coding" panose="020B0609020101020101" pitchFamily="49" charset="-127"/>
+                <a:ea typeface="D2Coding" panose="020B0609020101020101" pitchFamily="49" charset="-127"/>
+              </a:rPr>
+              <a:t>로 </a:t>
+            </a:r>
+            <a:r>
+              <a:rPr lang="ko-KR" altLang="en-US" sz="1200" dirty="0" err="1">
+                <a:latin typeface="D2Coding" panose="020B0609020101020101" pitchFamily="49" charset="-127"/>
+                <a:ea typeface="D2Coding" panose="020B0609020101020101" pitchFamily="49" charset="-127"/>
+              </a:rPr>
+              <a:t>텐서를</a:t>
+            </a:r>
+            <a:r>
+              <a:rPr lang="ko-KR" altLang="en-US" sz="1200" dirty="0">
+                <a:latin typeface="D2Coding" panose="020B0609020101020101" pitchFamily="49" charset="-127"/>
+                <a:ea typeface="D2Coding" panose="020B0609020101020101" pitchFamily="49" charset="-127"/>
+              </a:rPr>
+              <a:t> 추출하고 </a:t>
+            </a:r>
+            <a:r>
+              <a:rPr lang="en-US" altLang="ko-KR" sz="1200" dirty="0">
+                <a:latin typeface="D2Coding" panose="020B0609020101020101" pitchFamily="49" charset="-127"/>
+                <a:ea typeface="D2Coding" panose="020B0609020101020101" pitchFamily="49" charset="-127"/>
+              </a:rPr>
+              <a:t>float</a:t>
+            </a:r>
+            <a:r>
+              <a:rPr lang="ko-KR" altLang="en-US" sz="1200" dirty="0">
+                <a:latin typeface="D2Coding" panose="020B0609020101020101" pitchFamily="49" charset="-127"/>
+                <a:ea typeface="D2Coding" panose="020B0609020101020101" pitchFamily="49" charset="-127"/>
+              </a:rPr>
+              <a:t>로 변환</a:t>
+            </a:r>
+          </a:p>
+          <a:p>
+            <a:r>
+              <a:rPr lang="en-US" altLang="ko-KR" sz="1200" dirty="0" err="1">
+                <a:latin typeface="D2Coding" panose="020B0609020101020101" pitchFamily="49" charset="-127"/>
+                <a:ea typeface="D2Coding" panose="020B0609020101020101" pitchFamily="49" charset="-127"/>
+              </a:rPr>
+              <a:t>x_train</a:t>
+            </a:r>
+            <a:r>
+              <a:rPr lang="en-US" altLang="ko-KR" sz="1200" dirty="0">
+                <a:latin typeface="D2Coding" panose="020B0609020101020101" pitchFamily="49" charset="-127"/>
+                <a:ea typeface="D2Coding" panose="020B0609020101020101" pitchFamily="49" charset="-127"/>
+              </a:rPr>
+              <a:t> = </a:t>
+            </a:r>
+            <a:r>
+              <a:rPr lang="en-US" altLang="ko-KR" sz="1200" dirty="0" err="1">
+                <a:latin typeface="D2Coding" panose="020B0609020101020101" pitchFamily="49" charset="-127"/>
+                <a:ea typeface="D2Coding" panose="020B0609020101020101" pitchFamily="49" charset="-127"/>
+              </a:rPr>
+              <a:t>datasets.MNIST</a:t>
+            </a:r>
+            <a:r>
+              <a:rPr lang="en-US" altLang="ko-KR" sz="1200" dirty="0">
+                <a:latin typeface="D2Coding" panose="020B0609020101020101" pitchFamily="49" charset="-127"/>
+                <a:ea typeface="D2Coding" panose="020B0609020101020101" pitchFamily="49" charset="-127"/>
+              </a:rPr>
+              <a:t>(root='./data', train=True, download=True).</a:t>
+            </a:r>
+            <a:r>
+              <a:rPr lang="en-US" altLang="ko-KR" sz="1200" dirty="0" err="1">
+                <a:latin typeface="D2Coding" panose="020B0609020101020101" pitchFamily="49" charset="-127"/>
+                <a:ea typeface="D2Coding" panose="020B0609020101020101" pitchFamily="49" charset="-127"/>
+              </a:rPr>
+              <a:t>data.float</a:t>
+            </a:r>
+            <a:r>
+              <a:rPr lang="en-US" altLang="ko-KR" sz="1200" dirty="0">
+                <a:latin typeface="D2Coding" panose="020B0609020101020101" pitchFamily="49" charset="-127"/>
+                <a:ea typeface="D2Coding" panose="020B0609020101020101" pitchFamily="49" charset="-127"/>
+              </a:rPr>
+              <a:t>()</a:t>
+            </a:r>
+          </a:p>
+          <a:p>
+            <a:endParaRPr lang="en-US" altLang="ko-KR" sz="1200" dirty="0">
+              <a:latin typeface="D2Coding" panose="020B0609020101020101" pitchFamily="49" charset="-127"/>
+              <a:ea typeface="D2Coding" panose="020B0609020101020101" pitchFamily="49" charset="-127"/>
+            </a:endParaRPr>
+          </a:p>
+          <a:p>
+            <a:r>
+              <a:rPr lang="en-US" altLang="ko-KR" sz="1200" dirty="0">
+                <a:latin typeface="D2Coding" panose="020B0609020101020101" pitchFamily="49" charset="-127"/>
+                <a:ea typeface="D2Coding" panose="020B0609020101020101" pitchFamily="49" charset="-127"/>
+              </a:rPr>
+              <a:t># </a:t>
+            </a:r>
+            <a:r>
+              <a:rPr lang="ko-KR" altLang="en-US" sz="1200" dirty="0">
+                <a:latin typeface="D2Coding" panose="020B0609020101020101" pitchFamily="49" charset="-127"/>
+                <a:ea typeface="D2Coding" panose="020B0609020101020101" pitchFamily="49" charset="-127"/>
+              </a:rPr>
+              <a:t>전체 데이터의 표준편차 </a:t>
+            </a:r>
+            <a:r>
+              <a:rPr lang="en-US" altLang="ko-KR" sz="1200" dirty="0">
+                <a:latin typeface="D2Coding" panose="020B0609020101020101" pitchFamily="49" charset="-127"/>
+                <a:ea typeface="D2Coding" panose="020B0609020101020101" pitchFamily="49" charset="-127"/>
+              </a:rPr>
+              <a:t>(</a:t>
+            </a:r>
+            <a:r>
+              <a:rPr lang="ko-KR" altLang="en-US" sz="1200" dirty="0">
+                <a:latin typeface="D2Coding" panose="020B0609020101020101" pitchFamily="49" charset="-127"/>
+                <a:ea typeface="D2Coding" panose="020B0609020101020101" pitchFamily="49" charset="-127"/>
+              </a:rPr>
+              <a:t>불필요한 열</a:t>
+            </a:r>
+            <a:r>
+              <a:rPr lang="en-US" altLang="ko-KR" sz="1200" dirty="0">
+                <a:latin typeface="D2Coding" panose="020B0609020101020101" pitchFamily="49" charset="-127"/>
+                <a:ea typeface="D2Coding" panose="020B0609020101020101" pitchFamily="49" charset="-127"/>
+              </a:rPr>
+              <a:t>/</a:t>
+            </a:r>
+            <a:r>
+              <a:rPr lang="ko-KR" altLang="en-US" sz="1200" dirty="0">
+                <a:latin typeface="D2Coding" panose="020B0609020101020101" pitchFamily="49" charset="-127"/>
+                <a:ea typeface="D2Coding" panose="020B0609020101020101" pitchFamily="49" charset="-127"/>
+              </a:rPr>
+              <a:t>픽셀 확인용</a:t>
+            </a:r>
+            <a:r>
+              <a:rPr lang="en-US" altLang="ko-KR" sz="1200" dirty="0">
+                <a:latin typeface="D2Coding" panose="020B0609020101020101" pitchFamily="49" charset="-127"/>
+                <a:ea typeface="D2Coding" panose="020B0609020101020101" pitchFamily="49" charset="-127"/>
+              </a:rPr>
+              <a:t>)</a:t>
+            </a:r>
+          </a:p>
+          <a:p>
+            <a:r>
+              <a:rPr lang="en-US" altLang="ko-KR" sz="1200" dirty="0" err="1">
+                <a:latin typeface="D2Coding" panose="020B0609020101020101" pitchFamily="49" charset="-127"/>
+                <a:ea typeface="D2Coding" panose="020B0609020101020101" pitchFamily="49" charset="-127"/>
+              </a:rPr>
+              <a:t>pixel_std</a:t>
+            </a:r>
+            <a:r>
+              <a:rPr lang="en-US" altLang="ko-KR" sz="1200" dirty="0">
+                <a:latin typeface="D2Coding" panose="020B0609020101020101" pitchFamily="49" charset="-127"/>
+                <a:ea typeface="D2Coding" panose="020B0609020101020101" pitchFamily="49" charset="-127"/>
+              </a:rPr>
+              <a:t> = </a:t>
+            </a:r>
+            <a:r>
+              <a:rPr lang="en-US" altLang="ko-KR" sz="1200" dirty="0" err="1">
+                <a:latin typeface="D2Coding" panose="020B0609020101020101" pitchFamily="49" charset="-127"/>
+                <a:ea typeface="D2Coding" panose="020B0609020101020101" pitchFamily="49" charset="-127"/>
+              </a:rPr>
+              <a:t>torch.std</a:t>
+            </a:r>
+            <a:r>
+              <a:rPr lang="en-US" altLang="ko-KR" sz="1200" dirty="0">
+                <a:latin typeface="D2Coding" panose="020B0609020101020101" pitchFamily="49" charset="-127"/>
+                <a:ea typeface="D2Coding" panose="020B0609020101020101" pitchFamily="49" charset="-127"/>
+              </a:rPr>
+              <a:t>(</a:t>
+            </a:r>
+            <a:r>
+              <a:rPr lang="en-US" altLang="ko-KR" sz="1200" dirty="0" err="1">
+                <a:latin typeface="D2Coding" panose="020B0609020101020101" pitchFamily="49" charset="-127"/>
+                <a:ea typeface="D2Coding" panose="020B0609020101020101" pitchFamily="49" charset="-127"/>
+              </a:rPr>
+              <a:t>x_train</a:t>
+            </a:r>
+            <a:r>
+              <a:rPr lang="en-US" altLang="ko-KR" sz="1200" dirty="0">
+                <a:latin typeface="D2Coding" panose="020B0609020101020101" pitchFamily="49" charset="-127"/>
+                <a:ea typeface="D2Coding" panose="020B0609020101020101" pitchFamily="49" charset="-127"/>
+              </a:rPr>
+              <a:t>, dim=0)</a:t>
+            </a:r>
+          </a:p>
+          <a:p>
+            <a:endParaRPr lang="en-US" altLang="ko-KR" sz="1200" dirty="0">
+              <a:latin typeface="D2Coding" panose="020B0609020101020101" pitchFamily="49" charset="-127"/>
+              <a:ea typeface="D2Coding" panose="020B0609020101020101" pitchFamily="49" charset="-127"/>
+            </a:endParaRPr>
+          </a:p>
+          <a:p>
+            <a:r>
+              <a:rPr lang="en-US" altLang="ko-KR" sz="1200" dirty="0" err="1">
+                <a:latin typeface="D2Coding" panose="020B0609020101020101" pitchFamily="49" charset="-127"/>
+                <a:ea typeface="D2Coding" panose="020B0609020101020101" pitchFamily="49" charset="-127"/>
+              </a:rPr>
+              <a:t>plt.imshow</a:t>
+            </a:r>
+            <a:r>
+              <a:rPr lang="en-US" altLang="ko-KR" sz="1200" dirty="0">
+                <a:latin typeface="D2Coding" panose="020B0609020101020101" pitchFamily="49" charset="-127"/>
+                <a:ea typeface="D2Coding" panose="020B0609020101020101" pitchFamily="49" charset="-127"/>
+              </a:rPr>
+              <a:t>(</a:t>
+            </a:r>
+            <a:r>
+              <a:rPr lang="en-US" altLang="ko-KR" sz="1200" dirty="0" err="1">
+                <a:latin typeface="D2Coding" panose="020B0609020101020101" pitchFamily="49" charset="-127"/>
+                <a:ea typeface="D2Coding" panose="020B0609020101020101" pitchFamily="49" charset="-127"/>
+              </a:rPr>
+              <a:t>pixel_std</a:t>
+            </a:r>
+            <a:r>
+              <a:rPr lang="en-US" altLang="ko-KR" sz="1200" dirty="0">
+                <a:latin typeface="D2Coding" panose="020B0609020101020101" pitchFamily="49" charset="-127"/>
+                <a:ea typeface="D2Coding" panose="020B0609020101020101" pitchFamily="49" charset="-127"/>
+              </a:rPr>
+              <a:t>, </a:t>
+            </a:r>
+            <a:r>
+              <a:rPr lang="en-US" altLang="ko-KR" sz="1200" dirty="0" err="1">
+                <a:latin typeface="D2Coding" panose="020B0609020101020101" pitchFamily="49" charset="-127"/>
+                <a:ea typeface="D2Coding" panose="020B0609020101020101" pitchFamily="49" charset="-127"/>
+              </a:rPr>
+              <a:t>cmap</a:t>
+            </a:r>
+            <a:r>
+              <a:rPr lang="en-US" altLang="ko-KR" sz="1200" dirty="0">
+                <a:latin typeface="D2Coding" panose="020B0609020101020101" pitchFamily="49" charset="-127"/>
+                <a:ea typeface="D2Coding" panose="020B0609020101020101" pitchFamily="49" charset="-127"/>
+              </a:rPr>
+              <a:t>='hot')</a:t>
+            </a:r>
+          </a:p>
+          <a:p>
+            <a:r>
+              <a:rPr lang="en-US" altLang="ko-KR" sz="1200" dirty="0" err="1">
+                <a:latin typeface="D2Coding" panose="020B0609020101020101" pitchFamily="49" charset="-127"/>
+                <a:ea typeface="D2Coding" panose="020B0609020101020101" pitchFamily="49" charset="-127"/>
+              </a:rPr>
+              <a:t>plt.colorbar</a:t>
+            </a:r>
+            <a:r>
+              <a:rPr lang="en-US" altLang="ko-KR" sz="1200" dirty="0">
+                <a:latin typeface="D2Coding" panose="020B0609020101020101" pitchFamily="49" charset="-127"/>
+                <a:ea typeface="D2Coding" panose="020B0609020101020101" pitchFamily="49" charset="-127"/>
+              </a:rPr>
+              <a:t>() # </a:t>
+            </a:r>
+            <a:r>
+              <a:rPr lang="ko-KR" altLang="en-US" sz="1200" dirty="0">
+                <a:latin typeface="D2Coding" panose="020B0609020101020101" pitchFamily="49" charset="-127"/>
+                <a:ea typeface="D2Coding" panose="020B0609020101020101" pitchFamily="49" charset="-127"/>
+              </a:rPr>
+              <a:t>값의 범위를 확인하기 위해 </a:t>
+            </a:r>
+            <a:r>
+              <a:rPr lang="ko-KR" altLang="en-US" sz="1200" dirty="0" err="1">
+                <a:latin typeface="D2Coding" panose="020B0609020101020101" pitchFamily="49" charset="-127"/>
+                <a:ea typeface="D2Coding" panose="020B0609020101020101" pitchFamily="49" charset="-127"/>
+              </a:rPr>
+              <a:t>컬러바</a:t>
+            </a:r>
+            <a:r>
+              <a:rPr lang="ko-KR" altLang="en-US" sz="1200" dirty="0">
+                <a:latin typeface="D2Coding" panose="020B0609020101020101" pitchFamily="49" charset="-127"/>
+                <a:ea typeface="D2Coding" panose="020B0609020101020101" pitchFamily="49" charset="-127"/>
+              </a:rPr>
+              <a:t> 추가</a:t>
+            </a:r>
+          </a:p>
+          <a:p>
+            <a:r>
+              <a:rPr lang="en-US" altLang="ko-KR" sz="1200" dirty="0" err="1">
+                <a:latin typeface="D2Coding" panose="020B0609020101020101" pitchFamily="49" charset="-127"/>
+                <a:ea typeface="D2Coding" panose="020B0609020101020101" pitchFamily="49" charset="-127"/>
+              </a:rPr>
+              <a:t>plt.title</a:t>
+            </a:r>
+            <a:r>
+              <a:rPr lang="en-US" altLang="ko-KR" sz="1200" dirty="0">
+                <a:latin typeface="D2Coding" panose="020B0609020101020101" pitchFamily="49" charset="-127"/>
+                <a:ea typeface="D2Coding" panose="020B0609020101020101" pitchFamily="49" charset="-127"/>
+              </a:rPr>
+              <a:t>("Standard Deviation of MNIST Pixels")</a:t>
+            </a:r>
+          </a:p>
+          <a:p>
+            <a:r>
+              <a:rPr lang="en-US" altLang="ko-KR" sz="1200" dirty="0" err="1">
+                <a:latin typeface="D2Coding" panose="020B0609020101020101" pitchFamily="49" charset="-127"/>
+                <a:ea typeface="D2Coding" panose="020B0609020101020101" pitchFamily="49" charset="-127"/>
+              </a:rPr>
+              <a:t>plt.show</a:t>
+            </a:r>
+            <a:r>
+              <a:rPr lang="en-US" altLang="ko-KR" sz="1200" dirty="0">
+                <a:latin typeface="D2Coding" panose="020B0609020101020101" pitchFamily="49" charset="-127"/>
+                <a:ea typeface="D2Coding" panose="020B0609020101020101" pitchFamily="49" charset="-127"/>
+              </a:rPr>
+              <a:t>()</a:t>
+            </a:r>
+            <a:endParaRPr lang="ko-KR" altLang="en-US" sz="1200" dirty="0">
+              <a:latin typeface="D2Coding" panose="020B0609020101020101" pitchFamily="49" charset="-127"/>
+              <a:ea typeface="D2Coding" panose="020B0609020101020101" pitchFamily="49" charset="-127"/>
+            </a:endParaRPr>
+          </a:p>
+        </p:txBody>
+      </p:sp>
+    </p:spTree>
+    <p:extLst>
+      <p:ext uri="{BB962C8B-B14F-4D97-AF65-F5344CB8AC3E}">
+        <p14:creationId xmlns:p14="http://schemas.microsoft.com/office/powerpoint/2010/main" val="4144337951"/>
+      </p:ext>
+    </p:extLst>
+  </p:cSld>
+  <p:clrMapOvr>
+    <a:masterClrMapping/>
+  </p:clrMapOvr>
+</p:sld>
+</file>
+
+<file path=ppt/slides/slide27.xml><?xml version="1.0" encoding="utf-8"?>
+<p:sld xmlns:a="http://schemas.openxmlformats.org/drawingml/2006/main" xmlns:r="http://schemas.openxmlformats.org/officeDocument/2006/relationships" xmlns:p="http://schemas.openxmlformats.org/presentationml/2006/main">
+  <p:cSld>
+    <p:spTree>
+      <p:nvGrpSpPr>
+        <p:cNvPr id="1" name="">
+          <a:extLst>
+            <a:ext uri="{FF2B5EF4-FFF2-40B4-BE49-F238E27FC236}">
+              <a16:creationId xmlns:a16="http://schemas.microsoft.com/office/drawing/2014/main" id="{BF21584A-354B-8854-9D84-8A4AED2B3551}"/>
+            </a:ext>
+          </a:extLst>
+        </p:cNvPr>
+        <p:cNvGrpSpPr/>
+        <p:nvPr/>
+      </p:nvGrpSpPr>
+      <p:grpSpPr>
+        <a:xfrm>
+          <a:off x="0" y="0"/>
+          <a:ext cx="0" cy="0"/>
+          <a:chOff x="0" y="0"/>
+          <a:chExt cx="0" cy="0"/>
+        </a:xfrm>
+      </p:grpSpPr>
+      <p:sp>
+        <p:nvSpPr>
+          <p:cNvPr id="4" name="슬라이드 번호 개체 틀 3">
+            <a:extLst>
+              <a:ext uri="{FF2B5EF4-FFF2-40B4-BE49-F238E27FC236}">
+                <a16:creationId xmlns:a16="http://schemas.microsoft.com/office/drawing/2014/main" id="{EA6891ED-6830-2365-D8C2-4853C3446DA9}"/>
+              </a:ext>
+            </a:extLst>
+          </p:cNvPr>
+          <p:cNvSpPr>
+            <a:spLocks noGrp="1"/>
+          </p:cNvSpPr>
+          <p:nvPr>
+            <p:ph type="sldNum" sz="quarter" idx="12"/>
+          </p:nvPr>
+        </p:nvSpPr>
+        <p:spPr>
+          <a:xfrm>
+            <a:off x="10514011" y="6036261"/>
+            <a:ext cx="753545" cy="365125"/>
+          </a:xfrm>
+        </p:spPr>
+        <p:txBody>
+          <a:bodyPr/>
+          <a:lstStyle/>
+          <a:p>
+            <a:fld id="{D57F1E4F-1CFF-5643-939E-217C01CDF565}" type="slidenum">
+              <a:rPr lang="en-US" smtClean="0"/>
+              <a:pPr/>
+              <a:t>27</a:t>
+            </a:fld>
+            <a:endParaRPr lang="en-US" dirty="0"/>
+          </a:p>
+        </p:txBody>
+      </p:sp>
+      <p:pic>
+        <p:nvPicPr>
+          <p:cNvPr id="37" name="Picture 2" descr="한 여자가 노트북 컴퓨터에 타이핑을 하고 있다">
+            <a:extLst>
+              <a:ext uri="{FF2B5EF4-FFF2-40B4-BE49-F238E27FC236}">
+                <a16:creationId xmlns:a16="http://schemas.microsoft.com/office/drawing/2014/main" id="{251C5D85-E399-D2CC-578A-E107FBDAB750}"/>
+              </a:ext>
+            </a:extLst>
+          </p:cNvPr>
+          <p:cNvPicPr>
+            <a:picLocks noChangeAspect="1" noChangeArrowheads="1"/>
+          </p:cNvPicPr>
+          <p:nvPr/>
+        </p:nvPicPr>
+        <p:blipFill>
+          <a:blip r:embed="rId2">
+            <a:extLst>
+              <a:ext uri="{28A0092B-C50C-407E-A947-70E740481C1C}">
+                <a14:useLocalDpi xmlns:a14="http://schemas.microsoft.com/office/drawing/2010/main" val="0"/>
+              </a:ext>
+            </a:extLst>
+          </a:blip>
+          <a:srcRect/>
+          <a:stretch>
+            <a:fillRect/>
+          </a:stretch>
+        </p:blipFill>
+        <p:spPr bwMode="auto">
+          <a:xfrm>
+            <a:off x="10353677" y="109568"/>
+            <a:ext cx="1590674" cy="1052490"/>
+          </a:xfrm>
+          <a:prstGeom prst="rect">
+            <a:avLst/>
+          </a:prstGeom>
+          <a:noFill/>
+          <a:extLst>
+            <a:ext uri="{909E8E84-426E-40DD-AFC4-6F175D3DCCD1}">
+              <a14:hiddenFill xmlns:a14="http://schemas.microsoft.com/office/drawing/2010/main">
+                <a:solidFill>
+                  <a:srgbClr val="FFFFFF"/>
+                </a:solidFill>
+              </a14:hiddenFill>
+            </a:ext>
+          </a:extLst>
+        </p:spPr>
+      </p:pic>
+      <p:sp>
+        <p:nvSpPr>
+          <p:cNvPr id="39" name="제목 1">
+            <a:extLst>
+              <a:ext uri="{FF2B5EF4-FFF2-40B4-BE49-F238E27FC236}">
+                <a16:creationId xmlns:a16="http://schemas.microsoft.com/office/drawing/2014/main" id="{741BEBCA-45F9-C50A-C781-59824B65491C}"/>
+              </a:ext>
+            </a:extLst>
+          </p:cNvPr>
+          <p:cNvSpPr txBox="1">
+            <a:spLocks/>
+          </p:cNvSpPr>
+          <p:nvPr/>
+        </p:nvSpPr>
+        <p:spPr>
+          <a:xfrm>
+            <a:off x="590464" y="395619"/>
+            <a:ext cx="10353762" cy="766439"/>
+          </a:xfrm>
+          <a:prstGeom prst="rect">
+            <a:avLst/>
+          </a:prstGeom>
+        </p:spPr>
+        <p:txBody>
+          <a:bodyPr vert="horz" lIns="91440" tIns="45720" rIns="91440" bIns="45720" rtlCol="0" anchor="ctr">
+            <a:normAutofit/>
+          </a:bodyPr>
+          <a:lstStyle>
+            <a:lvl1pPr algn="ctr" defTabSz="914400" rtl="0" eaLnBrk="1" latinLnBrk="1" hangingPunct="1">
+              <a:lnSpc>
+                <a:spcPct val="90000"/>
+              </a:lnSpc>
+              <a:spcBef>
+                <a:spcPct val="0"/>
+              </a:spcBef>
+              <a:buNone/>
+              <a:defRPr sz="3200" kern="1200" cap="all" baseline="0">
+                <a:solidFill>
+                  <a:schemeClr val="tx1"/>
+                </a:solidFill>
+                <a:effectLst/>
+                <a:latin typeface="Batang" panose="02030600000101010101" pitchFamily="18" charset="-127"/>
+                <a:ea typeface="Batang" panose="02030600000101010101" pitchFamily="18" charset="-127"/>
+                <a:cs typeface="+mj-cs"/>
+              </a:defRPr>
+            </a:lvl1pPr>
+          </a:lstStyle>
+          <a:p>
+            <a:pPr algn="l"/>
+            <a:r>
+              <a:rPr lang="en-US" altLang="ko-KR" sz="2800" cap="none" dirty="0">
+                <a:latin typeface="ADLaM Display" panose="02010000000000000000" pitchFamily="2" charset="0"/>
+                <a:ea typeface="ADLaM Display" panose="02010000000000000000" pitchFamily="2" charset="0"/>
+                <a:cs typeface="ADLaM Display" panose="02010000000000000000" pitchFamily="2" charset="0"/>
+              </a:rPr>
+              <a:t>Hands-on : Curse of Dimensionality</a:t>
+            </a:r>
+            <a:endParaRPr lang="ko-KR" altLang="en-US" sz="2800" cap="none" dirty="0">
+              <a:latin typeface="ADLaM Display" panose="02010000000000000000" pitchFamily="2" charset="0"/>
+              <a:cs typeface="ADLaM Display" panose="02010000000000000000" pitchFamily="2" charset="0"/>
+            </a:endParaRPr>
+          </a:p>
+        </p:txBody>
+      </p:sp>
+      <p:sp>
+        <p:nvSpPr>
+          <p:cNvPr id="10" name="직사각형 9">
+            <a:extLst>
+              <a:ext uri="{FF2B5EF4-FFF2-40B4-BE49-F238E27FC236}">
+                <a16:creationId xmlns:a16="http://schemas.microsoft.com/office/drawing/2014/main" id="{5EEA879B-8433-5CB0-3060-2ED57156B079}"/>
+              </a:ext>
+            </a:extLst>
+          </p:cNvPr>
+          <p:cNvSpPr/>
+          <p:nvPr/>
+        </p:nvSpPr>
+        <p:spPr>
+          <a:xfrm>
+            <a:off x="3538537" y="2428875"/>
+            <a:ext cx="3667125" cy="3667125"/>
+          </a:xfrm>
+          <a:prstGeom prst="rect">
+            <a:avLst/>
+          </a:prstGeom>
+          <a:solidFill>
+            <a:srgbClr val="FF0000"/>
+          </a:solidFill>
+        </p:spPr>
+        <p:style>
+          <a:lnRef idx="2">
+            <a:schemeClr val="accent1">
+              <a:shade val="15000"/>
+            </a:schemeClr>
+          </a:lnRef>
+          <a:fillRef idx="1">
+            <a:schemeClr val="accent1"/>
+          </a:fillRef>
+          <a:effectRef idx="0">
+            <a:schemeClr val="accent1"/>
+          </a:effectRef>
+          <a:fontRef idx="minor">
+            <a:schemeClr val="lt1"/>
+          </a:fontRef>
+        </p:style>
+        <p:txBody>
+          <a:bodyPr rtlCol="0" anchor="ctr"/>
+          <a:lstStyle/>
+          <a:p>
+            <a:pPr algn="ctr"/>
+            <a:endParaRPr lang="ko-KR" altLang="en-US"/>
+          </a:p>
+        </p:txBody>
+      </p:sp>
+      <p:sp>
+        <p:nvSpPr>
+          <p:cNvPr id="11" name="직사각형 10">
+            <a:extLst>
+              <a:ext uri="{FF2B5EF4-FFF2-40B4-BE49-F238E27FC236}">
+                <a16:creationId xmlns:a16="http://schemas.microsoft.com/office/drawing/2014/main" id="{48A0C315-4B8C-5501-2CDD-6A01DBFAAA85}"/>
+              </a:ext>
+            </a:extLst>
+          </p:cNvPr>
+          <p:cNvSpPr/>
+          <p:nvPr/>
+        </p:nvSpPr>
+        <p:spPr>
+          <a:xfrm>
+            <a:off x="3612832" y="2494915"/>
+            <a:ext cx="3529014" cy="3529014"/>
+          </a:xfrm>
+          <a:prstGeom prst="rect">
+            <a:avLst/>
+          </a:prstGeom>
+          <a:solidFill>
+            <a:srgbClr val="00B050"/>
+          </a:solidFill>
+        </p:spPr>
+        <p:style>
+          <a:lnRef idx="2">
+            <a:schemeClr val="accent1">
+              <a:shade val="15000"/>
+            </a:schemeClr>
+          </a:lnRef>
+          <a:fillRef idx="1">
+            <a:schemeClr val="accent1"/>
+          </a:fillRef>
+          <a:effectRef idx="0">
+            <a:schemeClr val="accent1"/>
+          </a:effectRef>
+          <a:fontRef idx="minor">
+            <a:schemeClr val="lt1"/>
+          </a:fontRef>
+        </p:style>
+        <p:txBody>
+          <a:bodyPr rtlCol="0" anchor="ctr"/>
+          <a:lstStyle/>
+          <a:p>
+            <a:pPr algn="ctr"/>
+            <a:endParaRPr lang="ko-KR" altLang="en-US"/>
+          </a:p>
+        </p:txBody>
+      </p:sp>
+      <p:sp>
+        <p:nvSpPr>
+          <p:cNvPr id="13" name="TextBox 12">
+            <a:extLst>
+              <a:ext uri="{FF2B5EF4-FFF2-40B4-BE49-F238E27FC236}">
+                <a16:creationId xmlns:a16="http://schemas.microsoft.com/office/drawing/2014/main" id="{E2BDABCC-D68A-D788-C4E3-121032F9B346}"/>
+              </a:ext>
+            </a:extLst>
+          </p:cNvPr>
+          <p:cNvSpPr txBox="1"/>
+          <p:nvPr/>
+        </p:nvSpPr>
+        <p:spPr>
+          <a:xfrm>
+            <a:off x="590464" y="1300008"/>
+            <a:ext cx="10536917" cy="871329"/>
+          </a:xfrm>
+          <a:prstGeom prst="rect">
+            <a:avLst/>
+          </a:prstGeom>
+          <a:noFill/>
+        </p:spPr>
+        <p:txBody>
+          <a:bodyPr wrap="square" rtlCol="0">
+            <a:spAutoFit/>
+          </a:bodyPr>
+          <a:lstStyle/>
+          <a:p>
+            <a:pPr>
+              <a:lnSpc>
+                <a:spcPct val="150000"/>
+              </a:lnSpc>
+            </a:pPr>
+            <a:r>
+              <a:rPr lang="ko-KR" altLang="en-US" dirty="0"/>
+              <a:t>가로 세로 길이가 각각 </a:t>
+            </a:r>
+            <a:r>
+              <a:rPr lang="en-US" altLang="ko-KR" dirty="0"/>
+              <a:t>1</a:t>
+            </a:r>
+            <a:r>
+              <a:rPr lang="ko-KR" altLang="en-US" dirty="0"/>
+              <a:t>인 정사각형의 </a:t>
+            </a:r>
+            <a:r>
+              <a:rPr lang="ko-KR" altLang="en-US" dirty="0" err="1"/>
+              <a:t>태두리</a:t>
+            </a:r>
+            <a:r>
+              <a:rPr lang="en-US" altLang="ko-KR" dirty="0"/>
+              <a:t>(</a:t>
+            </a:r>
+            <a:r>
+              <a:rPr lang="ko-KR" altLang="en-US" dirty="0"/>
+              <a:t>빨강색</a:t>
+            </a:r>
+            <a:r>
+              <a:rPr lang="en-US" altLang="ko-KR" dirty="0"/>
+              <a:t>)</a:t>
+            </a:r>
+            <a:r>
+              <a:rPr lang="ko-KR" altLang="en-US" dirty="0"/>
+              <a:t>에 임의의 데이터가 있을 확률을 </a:t>
+            </a:r>
+            <a:r>
+              <a:rPr lang="en-US" altLang="ko-KR" dirty="0"/>
+              <a:t>2</a:t>
+            </a:r>
+            <a:r>
+              <a:rPr lang="ko-KR" altLang="en-US" dirty="0"/>
+              <a:t>차원</a:t>
+            </a:r>
+            <a:r>
+              <a:rPr lang="en-US" altLang="ko-KR" dirty="0"/>
+              <a:t>, 3</a:t>
+            </a:r>
+            <a:r>
+              <a:rPr lang="ko-KR" altLang="en-US" dirty="0"/>
+              <a:t>차원</a:t>
+            </a:r>
+            <a:r>
+              <a:rPr lang="en-US" altLang="ko-KR" dirty="0"/>
+              <a:t>, 4</a:t>
+            </a:r>
+            <a:r>
+              <a:rPr lang="ko-KR" altLang="en-US" dirty="0"/>
+              <a:t>차원</a:t>
+            </a:r>
+            <a:r>
+              <a:rPr lang="en-US" altLang="ko-KR" dirty="0"/>
+              <a:t>, 100</a:t>
+            </a:r>
+            <a:r>
+              <a:rPr lang="ko-KR" altLang="en-US" dirty="0"/>
+              <a:t>차원까지 확장하여 계산하라</a:t>
+            </a:r>
+          </a:p>
+        </p:txBody>
+      </p:sp>
+      <p:sp>
+        <p:nvSpPr>
+          <p:cNvPr id="14" name="오른쪽 중괄호 13">
+            <a:extLst>
+              <a:ext uri="{FF2B5EF4-FFF2-40B4-BE49-F238E27FC236}">
+                <a16:creationId xmlns:a16="http://schemas.microsoft.com/office/drawing/2014/main" id="{1D319AD3-7C6F-5D74-D64E-BE0662F2AD89}"/>
+              </a:ext>
+            </a:extLst>
+          </p:cNvPr>
+          <p:cNvSpPr/>
+          <p:nvPr/>
+        </p:nvSpPr>
+        <p:spPr>
+          <a:xfrm>
+            <a:off x="7324724" y="2420619"/>
+            <a:ext cx="314325" cy="3667125"/>
+          </a:xfrm>
+          <a:prstGeom prst="rightBrace">
+            <a:avLst>
+              <a:gd name="adj1" fmla="val 45000"/>
+              <a:gd name="adj2" fmla="val 50000"/>
+            </a:avLst>
+          </a:prstGeom>
+        </p:spPr>
+        <p:style>
+          <a:lnRef idx="1">
+            <a:schemeClr val="dk1"/>
+          </a:lnRef>
+          <a:fillRef idx="0">
+            <a:schemeClr val="dk1"/>
+          </a:fillRef>
+          <a:effectRef idx="0">
+            <a:schemeClr val="dk1"/>
+          </a:effectRef>
+          <a:fontRef idx="minor">
+            <a:schemeClr val="tx1"/>
+          </a:fontRef>
+        </p:style>
+        <p:txBody>
+          <a:bodyPr rtlCol="0" anchor="ctr"/>
+          <a:lstStyle/>
+          <a:p>
+            <a:pPr algn="ctr"/>
+            <a:endParaRPr lang="ko-KR" altLang="en-US"/>
+          </a:p>
+        </p:txBody>
+      </p:sp>
+      <p:sp>
+        <p:nvSpPr>
+          <p:cNvPr id="16" name="오른쪽 중괄호 15">
+            <a:extLst>
+              <a:ext uri="{FF2B5EF4-FFF2-40B4-BE49-F238E27FC236}">
+                <a16:creationId xmlns:a16="http://schemas.microsoft.com/office/drawing/2014/main" id="{EC1B7EBF-A4EB-27EC-021B-B5EA3DF6E392}"/>
+              </a:ext>
+            </a:extLst>
+          </p:cNvPr>
+          <p:cNvSpPr/>
+          <p:nvPr/>
+        </p:nvSpPr>
+        <p:spPr>
+          <a:xfrm rot="10800000">
+            <a:off x="3104196" y="2502534"/>
+            <a:ext cx="314325" cy="3463925"/>
+          </a:xfrm>
+          <a:prstGeom prst="rightBrace">
+            <a:avLst>
+              <a:gd name="adj1" fmla="val 45000"/>
+              <a:gd name="adj2" fmla="val 50000"/>
+            </a:avLst>
+          </a:prstGeom>
+        </p:spPr>
+        <p:style>
+          <a:lnRef idx="1">
+            <a:schemeClr val="dk1"/>
+          </a:lnRef>
+          <a:fillRef idx="0">
+            <a:schemeClr val="dk1"/>
+          </a:fillRef>
+          <a:effectRef idx="0">
+            <a:schemeClr val="dk1"/>
+          </a:effectRef>
+          <a:fontRef idx="minor">
+            <a:schemeClr val="tx1"/>
+          </a:fontRef>
+        </p:style>
+        <p:txBody>
+          <a:bodyPr rtlCol="0" anchor="ctr"/>
+          <a:lstStyle/>
+          <a:p>
+            <a:pPr algn="ctr"/>
+            <a:endParaRPr lang="ko-KR" altLang="en-US"/>
+          </a:p>
+        </p:txBody>
+      </p:sp>
+      <mc:AlternateContent xmlns:mc="http://schemas.openxmlformats.org/markup-compatibility/2006">
+        <mc:Choice xmlns:a14="http://schemas.microsoft.com/office/drawing/2010/main" Requires="a14">
+          <p:sp>
+            <p:nvSpPr>
+              <p:cNvPr id="18" name="TextBox 17">
+                <a:extLst>
+                  <a:ext uri="{FF2B5EF4-FFF2-40B4-BE49-F238E27FC236}">
+                    <a16:creationId xmlns:a16="http://schemas.microsoft.com/office/drawing/2014/main" id="{BDA83219-A091-EE97-6D09-081AA1E4D461}"/>
+                  </a:ext>
+                </a:extLst>
+              </p:cNvPr>
+              <p:cNvSpPr txBox="1"/>
+              <p:nvPr/>
+            </p:nvSpPr>
+            <p:spPr>
+              <a:xfrm>
+                <a:off x="7758111" y="4077771"/>
+                <a:ext cx="386644" cy="369332"/>
+              </a:xfrm>
+              <a:prstGeom prst="rect">
+                <a:avLst/>
+              </a:prstGeom>
+              <a:noFill/>
+            </p:spPr>
+            <p:txBody>
+              <a:bodyPr wrap="none" rtlCol="0">
+                <a:spAutoFit/>
+              </a:bodyPr>
+              <a:lstStyle/>
+              <a:p>
+                <a14:m>
+                  <m:oMathPara xmlns:m="http://schemas.openxmlformats.org/officeDocument/2006/math">
+                    <m:oMathParaPr>
+                      <m:jc m:val="centerGroup"/>
+                    </m:oMathParaPr>
+                    <m:oMath xmlns:m="http://schemas.openxmlformats.org/officeDocument/2006/math">
+                      <m:r>
+                        <a:rPr lang="en-US" altLang="ko-KR" b="1" i="1">
+                          <a:latin typeface="Cambria Math" panose="02040503050406030204" pitchFamily="18" charset="0"/>
+                        </a:rPr>
+                        <m:t>𝟏</m:t>
+                      </m:r>
+                    </m:oMath>
+                  </m:oMathPara>
+                </a14:m>
+                <a:endParaRPr lang="ko-KR" altLang="en-US" b="1" dirty="0"/>
+              </a:p>
+            </p:txBody>
+          </p:sp>
+        </mc:Choice>
+        <mc:Fallback>
+          <p:sp>
+            <p:nvSpPr>
+              <p:cNvPr id="18" name="TextBox 17">
+                <a:extLst>
+                  <a:ext uri="{FF2B5EF4-FFF2-40B4-BE49-F238E27FC236}">
+                    <a16:creationId xmlns:a16="http://schemas.microsoft.com/office/drawing/2014/main" id="{BDA83219-A091-EE97-6D09-081AA1E4D461}"/>
+                  </a:ext>
+                </a:extLst>
+              </p:cNvPr>
+              <p:cNvSpPr txBox="1">
+                <a:spLocks noRot="1" noChangeAspect="1" noMove="1" noResize="1" noEditPoints="1" noAdjustHandles="1" noChangeArrowheads="1" noChangeShapeType="1" noTextEdit="1"/>
+              </p:cNvSpPr>
+              <p:nvPr/>
+            </p:nvSpPr>
+            <p:spPr>
+              <a:xfrm>
+                <a:off x="7758111" y="4077771"/>
+                <a:ext cx="386644" cy="369332"/>
+              </a:xfrm>
+              <a:prstGeom prst="rect">
+                <a:avLst/>
+              </a:prstGeom>
+              <a:blipFill>
+                <a:blip r:embed="rId3"/>
+                <a:stretch>
+                  <a:fillRect/>
+                </a:stretch>
+              </a:blipFill>
+            </p:spPr>
+            <p:txBody>
+              <a:bodyPr/>
+              <a:lstStyle/>
+              <a:p>
+                <a:r>
+                  <a:rPr lang="ko-KR" altLang="en-US">
+                    <a:noFill/>
+                  </a:rPr>
+                  <a:t> </a:t>
+                </a:r>
+              </a:p>
+            </p:txBody>
+          </p:sp>
+        </mc:Fallback>
+      </mc:AlternateContent>
+      <mc:AlternateContent xmlns:mc="http://schemas.openxmlformats.org/markup-compatibility/2006">
+        <mc:Choice xmlns:a14="http://schemas.microsoft.com/office/drawing/2010/main" Requires="a14">
+          <p:sp>
+            <p:nvSpPr>
+              <p:cNvPr id="19" name="TextBox 18">
+                <a:extLst>
+                  <a:ext uri="{FF2B5EF4-FFF2-40B4-BE49-F238E27FC236}">
+                    <a16:creationId xmlns:a16="http://schemas.microsoft.com/office/drawing/2014/main" id="{C7418839-1373-1F5A-A382-DF16FB75A252}"/>
+                  </a:ext>
+                </a:extLst>
+              </p:cNvPr>
+              <p:cNvSpPr txBox="1"/>
+              <p:nvPr/>
+            </p:nvSpPr>
+            <p:spPr>
+              <a:xfrm>
+                <a:off x="2512891" y="5803771"/>
+                <a:ext cx="367408" cy="369332"/>
+              </a:xfrm>
+              <a:prstGeom prst="rect">
+                <a:avLst/>
+              </a:prstGeom>
+              <a:noFill/>
+            </p:spPr>
+            <p:txBody>
+              <a:bodyPr wrap="none" rtlCol="0">
+                <a:spAutoFit/>
+              </a:bodyPr>
+              <a:lstStyle/>
+              <a:p>
+                <a14:m>
+                  <m:oMathPara xmlns:m="http://schemas.openxmlformats.org/officeDocument/2006/math">
+                    <m:oMathParaPr>
+                      <m:jc m:val="centerGroup"/>
+                    </m:oMathParaPr>
+                    <m:oMath xmlns:m="http://schemas.openxmlformats.org/officeDocument/2006/math">
+                      <m:r>
+                        <a:rPr lang="ko-KR" altLang="en-US" b="1" i="1" smtClean="0">
+                          <a:solidFill>
+                            <a:srgbClr val="FF0000"/>
+                          </a:solidFill>
+                          <a:latin typeface="Cambria Math" panose="02040503050406030204" pitchFamily="18" charset="0"/>
+                        </a:rPr>
+                        <m:t>𝜺</m:t>
+                      </m:r>
+                    </m:oMath>
+                  </m:oMathPara>
+                </a14:m>
+                <a:endParaRPr lang="ko-KR" altLang="en-US" b="1" dirty="0">
+                  <a:solidFill>
+                    <a:srgbClr val="FF0000"/>
+                  </a:solidFill>
+                </a:endParaRPr>
+              </a:p>
+            </p:txBody>
+          </p:sp>
+        </mc:Choice>
+        <mc:Fallback>
+          <p:sp>
+            <p:nvSpPr>
+              <p:cNvPr id="19" name="TextBox 18">
+                <a:extLst>
+                  <a:ext uri="{FF2B5EF4-FFF2-40B4-BE49-F238E27FC236}">
+                    <a16:creationId xmlns:a16="http://schemas.microsoft.com/office/drawing/2014/main" id="{C7418839-1373-1F5A-A382-DF16FB75A252}"/>
+                  </a:ext>
+                </a:extLst>
+              </p:cNvPr>
+              <p:cNvSpPr txBox="1">
+                <a:spLocks noRot="1" noChangeAspect="1" noMove="1" noResize="1" noEditPoints="1" noAdjustHandles="1" noChangeArrowheads="1" noChangeShapeType="1" noTextEdit="1"/>
+              </p:cNvSpPr>
+              <p:nvPr/>
+            </p:nvSpPr>
+            <p:spPr>
+              <a:xfrm>
+                <a:off x="2512891" y="5803771"/>
+                <a:ext cx="367408" cy="369332"/>
+              </a:xfrm>
+              <a:prstGeom prst="rect">
+                <a:avLst/>
+              </a:prstGeom>
+              <a:blipFill>
+                <a:blip r:embed="rId4"/>
+                <a:stretch>
+                  <a:fillRect/>
+                </a:stretch>
+              </a:blipFill>
+            </p:spPr>
+            <p:txBody>
+              <a:bodyPr/>
+              <a:lstStyle/>
+              <a:p>
+                <a:r>
+                  <a:rPr lang="ko-KR" altLang="en-US">
+                    <a:noFill/>
+                  </a:rPr>
+                  <a:t> </a:t>
+                </a:r>
+              </a:p>
+            </p:txBody>
+          </p:sp>
+        </mc:Fallback>
+      </mc:AlternateContent>
+      <mc:AlternateContent xmlns:mc="http://schemas.openxmlformats.org/markup-compatibility/2006">
+        <mc:Choice xmlns:a14="http://schemas.microsoft.com/office/drawing/2010/main" Requires="a14">
+          <p:sp>
+            <p:nvSpPr>
+              <p:cNvPr id="20" name="TextBox 19">
+                <a:extLst>
+                  <a:ext uri="{FF2B5EF4-FFF2-40B4-BE49-F238E27FC236}">
+                    <a16:creationId xmlns:a16="http://schemas.microsoft.com/office/drawing/2014/main" id="{35111F6A-ED4E-CA39-CF59-F80AE897EFA4}"/>
+                  </a:ext>
+                </a:extLst>
+              </p:cNvPr>
+              <p:cNvSpPr txBox="1"/>
+              <p:nvPr/>
+            </p:nvSpPr>
+            <p:spPr>
+              <a:xfrm>
+                <a:off x="2436981" y="4069515"/>
+                <a:ext cx="582211" cy="369332"/>
+              </a:xfrm>
+              <a:prstGeom prst="rect">
+                <a:avLst/>
+              </a:prstGeom>
+              <a:noFill/>
+            </p:spPr>
+            <p:txBody>
+              <a:bodyPr wrap="none" rtlCol="0">
+                <a:spAutoFit/>
+              </a:bodyPr>
+              <a:lstStyle/>
+              <a:p>
+                <a14:m>
+                  <m:oMathPara xmlns:m="http://schemas.openxmlformats.org/officeDocument/2006/math">
+                    <m:oMathParaPr>
+                      <m:jc m:val="centerGroup"/>
+                    </m:oMathParaPr>
+                    <m:oMath xmlns:m="http://schemas.openxmlformats.org/officeDocument/2006/math">
+                      <m:r>
+                        <a:rPr lang="en-US" altLang="ko-KR" b="1" i="1" smtClean="0">
+                          <a:latin typeface="Cambria Math" panose="02040503050406030204" pitchFamily="18" charset="0"/>
+                        </a:rPr>
+                        <m:t>𝟏</m:t>
+                      </m:r>
+                      <m:r>
+                        <a:rPr lang="en-US" altLang="ko-KR" b="1" i="1" smtClean="0">
+                          <a:latin typeface="Cambria Math" panose="02040503050406030204" pitchFamily="18" charset="0"/>
+                        </a:rPr>
+                        <m:t>-</m:t>
+                      </m:r>
+                      <m:r>
+                        <a:rPr lang="ko-KR" altLang="en-US" b="1" i="1" smtClean="0">
+                          <a:latin typeface="Cambria Math" panose="02040503050406030204" pitchFamily="18" charset="0"/>
+                        </a:rPr>
+                        <m:t>𝜺</m:t>
+                      </m:r>
+                    </m:oMath>
+                  </m:oMathPara>
+                </a14:m>
+                <a:endParaRPr lang="ko-KR" altLang="en-US" b="1" dirty="0"/>
+              </a:p>
+            </p:txBody>
+          </p:sp>
+        </mc:Choice>
+        <mc:Fallback>
+          <p:sp>
+            <p:nvSpPr>
+              <p:cNvPr id="20" name="TextBox 19">
+                <a:extLst>
+                  <a:ext uri="{FF2B5EF4-FFF2-40B4-BE49-F238E27FC236}">
+                    <a16:creationId xmlns:a16="http://schemas.microsoft.com/office/drawing/2014/main" id="{35111F6A-ED4E-CA39-CF59-F80AE897EFA4}"/>
+                  </a:ext>
+                </a:extLst>
+              </p:cNvPr>
+              <p:cNvSpPr txBox="1">
+                <a:spLocks noRot="1" noChangeAspect="1" noMove="1" noResize="1" noEditPoints="1" noAdjustHandles="1" noChangeArrowheads="1" noChangeShapeType="1" noTextEdit="1"/>
+              </p:cNvSpPr>
+              <p:nvPr/>
+            </p:nvSpPr>
+            <p:spPr>
+              <a:xfrm>
+                <a:off x="2436981" y="4069515"/>
+                <a:ext cx="582211" cy="369332"/>
+              </a:xfrm>
+              <a:prstGeom prst="rect">
+                <a:avLst/>
+              </a:prstGeom>
+              <a:blipFill>
+                <a:blip r:embed="rId5"/>
+                <a:stretch>
+                  <a:fillRect/>
+                </a:stretch>
+              </a:blipFill>
+            </p:spPr>
+            <p:txBody>
+              <a:bodyPr/>
+              <a:lstStyle/>
+              <a:p>
+                <a:r>
+                  <a:rPr lang="ko-KR" altLang="en-US">
+                    <a:noFill/>
+                  </a:rPr>
+                  <a:t> </a:t>
+                </a:r>
+              </a:p>
+            </p:txBody>
+          </p:sp>
+        </mc:Fallback>
+      </mc:AlternateContent>
+    </p:spTree>
+    <p:extLst>
+      <p:ext uri="{BB962C8B-B14F-4D97-AF65-F5344CB8AC3E}">
+        <p14:creationId xmlns:p14="http://schemas.microsoft.com/office/powerpoint/2010/main" val="3878340836"/>
+      </p:ext>
+    </p:extLst>
+  </p:cSld>
+  <p:clrMapOvr>
+    <a:masterClrMapping/>
+  </p:clrMapOvr>
+</p:sld>
+</file>
+
+<file path=ppt/slides/slide28.xml><?xml version="1.0" encoding="utf-8"?>
+<p:sld xmlns:a="http://schemas.openxmlformats.org/drawingml/2006/main" xmlns:r="http://schemas.openxmlformats.org/officeDocument/2006/relationships" xmlns:p="http://schemas.openxmlformats.org/presentationml/2006/main">
+  <p:cSld>
+    <p:spTree>
+      <p:nvGrpSpPr>
+        <p:cNvPr id="1" name="">
+          <a:extLst>
+            <a:ext uri="{FF2B5EF4-FFF2-40B4-BE49-F238E27FC236}">
+              <a16:creationId xmlns:a16="http://schemas.microsoft.com/office/drawing/2014/main" id="{17789472-2894-5A71-FE73-7C8A5AD814B2}"/>
+            </a:ext>
+          </a:extLst>
+        </p:cNvPr>
+        <p:cNvGrpSpPr/>
+        <p:nvPr/>
+      </p:nvGrpSpPr>
+      <p:grpSpPr>
+        <a:xfrm>
+          <a:off x="0" y="0"/>
+          <a:ext cx="0" cy="0"/>
+          <a:chOff x="0" y="0"/>
+          <a:chExt cx="0" cy="0"/>
+        </a:xfrm>
+      </p:grpSpPr>
+      <p:sp>
+        <p:nvSpPr>
+          <p:cNvPr id="4" name="슬라이드 번호 개체 틀 3">
+            <a:extLst>
+              <a:ext uri="{FF2B5EF4-FFF2-40B4-BE49-F238E27FC236}">
+                <a16:creationId xmlns:a16="http://schemas.microsoft.com/office/drawing/2014/main" id="{2530B956-C993-C992-80CE-F028A3B820DF}"/>
+              </a:ext>
+            </a:extLst>
+          </p:cNvPr>
+          <p:cNvSpPr>
+            <a:spLocks noGrp="1"/>
+          </p:cNvSpPr>
+          <p:nvPr>
+            <p:ph type="sldNum" sz="quarter" idx="12"/>
+          </p:nvPr>
+        </p:nvSpPr>
+        <p:spPr>
+          <a:xfrm>
+            <a:off x="10514011" y="6036261"/>
+            <a:ext cx="753545" cy="365125"/>
+          </a:xfrm>
+        </p:spPr>
+        <p:txBody>
+          <a:bodyPr/>
+          <a:lstStyle/>
+          <a:p>
+            <a:fld id="{D57F1E4F-1CFF-5643-939E-217C01CDF565}" type="slidenum">
+              <a:rPr lang="en-US" smtClean="0"/>
+              <a:pPr/>
+              <a:t>28</a:t>
+            </a:fld>
+            <a:endParaRPr lang="en-US" dirty="0"/>
+          </a:p>
+        </p:txBody>
+      </p:sp>
+      <p:sp>
+        <p:nvSpPr>
+          <p:cNvPr id="39" name="제목 1">
+            <a:extLst>
+              <a:ext uri="{FF2B5EF4-FFF2-40B4-BE49-F238E27FC236}">
+                <a16:creationId xmlns:a16="http://schemas.microsoft.com/office/drawing/2014/main" id="{9E7A49C6-7D72-B92A-C29E-AF96EFBA2897}"/>
+              </a:ext>
+            </a:extLst>
+          </p:cNvPr>
+          <p:cNvSpPr txBox="1">
+            <a:spLocks/>
+          </p:cNvSpPr>
+          <p:nvPr/>
+        </p:nvSpPr>
+        <p:spPr>
+          <a:xfrm>
+            <a:off x="590464" y="395619"/>
+            <a:ext cx="10353762" cy="766439"/>
+          </a:xfrm>
+          <a:prstGeom prst="rect">
+            <a:avLst/>
+          </a:prstGeom>
+        </p:spPr>
+        <p:txBody>
+          <a:bodyPr vert="horz" lIns="91440" tIns="45720" rIns="91440" bIns="45720" rtlCol="0" anchor="ctr">
+            <a:normAutofit/>
+          </a:bodyPr>
+          <a:lstStyle>
+            <a:lvl1pPr algn="ctr" defTabSz="914400" rtl="0" eaLnBrk="1" latinLnBrk="1" hangingPunct="1">
+              <a:lnSpc>
+                <a:spcPct val="90000"/>
+              </a:lnSpc>
+              <a:spcBef>
+                <a:spcPct val="0"/>
+              </a:spcBef>
+              <a:buNone/>
+              <a:defRPr sz="3200" kern="1200" cap="all" baseline="0">
+                <a:solidFill>
+                  <a:schemeClr val="tx1"/>
+                </a:solidFill>
+                <a:effectLst/>
+                <a:latin typeface="Batang" panose="02030600000101010101" pitchFamily="18" charset="-127"/>
+                <a:ea typeface="Batang" panose="02030600000101010101" pitchFamily="18" charset="-127"/>
+                <a:cs typeface="+mj-cs"/>
+              </a:defRPr>
+            </a:lvl1pPr>
+          </a:lstStyle>
+          <a:p>
+            <a:pPr algn="l"/>
+            <a:r>
+              <a:rPr lang="en-US" altLang="ko-KR" sz="2800" cap="none" dirty="0">
+                <a:latin typeface="ADLaM Display" panose="02010000000000000000" pitchFamily="2" charset="0"/>
+                <a:ea typeface="ADLaM Display" panose="02010000000000000000" pitchFamily="2" charset="0"/>
+                <a:cs typeface="ADLaM Display" panose="02010000000000000000" pitchFamily="2" charset="0"/>
+              </a:rPr>
+              <a:t>Hands-on : Curse of Dimensionality</a:t>
+            </a:r>
+            <a:endParaRPr lang="ko-KR" altLang="en-US" sz="2800" cap="none" dirty="0">
+              <a:latin typeface="ADLaM Display" panose="02010000000000000000" pitchFamily="2" charset="0"/>
+              <a:cs typeface="ADLaM Display" panose="02010000000000000000" pitchFamily="2" charset="0"/>
+            </a:endParaRPr>
+          </a:p>
+        </p:txBody>
+      </p:sp>
+      <p:pic>
+        <p:nvPicPr>
+          <p:cNvPr id="1026" name="Picture 2" descr="The curse(s) of dimensionality | Nature Methods">
+            <a:extLst>
+              <a:ext uri="{FF2B5EF4-FFF2-40B4-BE49-F238E27FC236}">
+                <a16:creationId xmlns:a16="http://schemas.microsoft.com/office/drawing/2014/main" id="{A85A9F98-EF66-2088-4ABF-79F701CB6CD7}"/>
+              </a:ext>
+            </a:extLst>
+          </p:cNvPr>
+          <p:cNvPicPr>
+            <a:picLocks noChangeAspect="1" noChangeArrowheads="1"/>
+          </p:cNvPicPr>
+          <p:nvPr/>
+        </p:nvPicPr>
+        <p:blipFill>
+          <a:blip r:embed="rId2">
+            <a:extLst>
+              <a:ext uri="{28A0092B-C50C-407E-A947-70E740481C1C}">
+                <a14:useLocalDpi xmlns:a14="http://schemas.microsoft.com/office/drawing/2010/main" val="0"/>
+              </a:ext>
+            </a:extLst>
+          </a:blip>
+          <a:srcRect/>
+          <a:stretch>
+            <a:fillRect/>
+          </a:stretch>
+        </p:blipFill>
+        <p:spPr bwMode="auto">
+          <a:xfrm>
+            <a:off x="3273527" y="1601006"/>
+            <a:ext cx="4666706" cy="4523638"/>
+          </a:xfrm>
+          <a:prstGeom prst="rect">
+            <a:avLst/>
+          </a:prstGeom>
+          <a:noFill/>
+          <a:extLst>
+            <a:ext uri="{909E8E84-426E-40DD-AFC4-6F175D3DCCD1}">
+              <a14:hiddenFill xmlns:a14="http://schemas.microsoft.com/office/drawing/2010/main">
+                <a:solidFill>
+                  <a:srgbClr val="FFFFFF"/>
+                </a:solidFill>
+              </a14:hiddenFill>
+            </a:ext>
+          </a:extLst>
+        </p:spPr>
+      </p:pic>
+    </p:spTree>
+    <p:extLst>
+      <p:ext uri="{BB962C8B-B14F-4D97-AF65-F5344CB8AC3E}">
+        <p14:creationId xmlns:p14="http://schemas.microsoft.com/office/powerpoint/2010/main" val="1361648862"/>
+      </p:ext>
+    </p:extLst>
+  </p:cSld>
+  <p:clrMapOvr>
+    <a:masterClrMapping/>
+  </p:clrMapOvr>
+</p:sld>
+</file>
+
+<file path=ppt/slides/slide29.xml><?xml version="1.0" encoding="utf-8"?>
+<p:sld xmlns:a="http://schemas.openxmlformats.org/drawingml/2006/main" xmlns:r="http://schemas.openxmlformats.org/officeDocument/2006/relationships" xmlns:p="http://schemas.openxmlformats.org/presentationml/2006/main">
+  <p:cSld>
+    <p:spTree>
+      <p:nvGrpSpPr>
+        <p:cNvPr id="1" name="">
+          <a:extLst>
+            <a:ext uri="{FF2B5EF4-FFF2-40B4-BE49-F238E27FC236}">
               <a16:creationId xmlns:a16="http://schemas.microsoft.com/office/drawing/2014/main" id="{08A02277-2BB8-EA3C-F407-80C30E4F620F}"/>
             </a:ext>
           </a:extLst>
@@ -12847,7 +15521,7 @@
             <a:fld id="{D57F1E4F-1CFF-5643-939E-217C01CDF565}" type="slidenum">
               <a:rPr lang="en-US" smtClean="0"/>
               <a:pPr/>
-              <a:t>24</a:t>
+              <a:t>29</a:t>
             </a:fld>
             <a:endParaRPr lang="en-US" dirty="0"/>
           </a:p>
@@ -14578,7 +17252,509 @@
 </p:sld>
 </file>
 
-<file path=ppt/slides/slide25.xml><?xml version="1.0" encoding="utf-8"?>
+<file path=ppt/slides/slide3.xml><?xml version="1.0" encoding="utf-8"?>
+<p:sld xmlns:a="http://schemas.openxmlformats.org/drawingml/2006/main" xmlns:r="http://schemas.openxmlformats.org/officeDocument/2006/relationships" xmlns:p="http://schemas.openxmlformats.org/presentationml/2006/main">
+  <p:cSld>
+    <p:spTree>
+      <p:nvGrpSpPr>
+        <p:cNvPr id="1" name="">
+          <a:extLst>
+            <a:ext uri="{FF2B5EF4-FFF2-40B4-BE49-F238E27FC236}">
+              <a16:creationId xmlns:a16="http://schemas.microsoft.com/office/drawing/2014/main" id="{88FFB53F-5797-0BB2-9323-F166DE5B6771}"/>
+            </a:ext>
+          </a:extLst>
+        </p:cNvPr>
+        <p:cNvGrpSpPr/>
+        <p:nvPr/>
+      </p:nvGrpSpPr>
+      <p:grpSpPr>
+        <a:xfrm>
+          <a:off x="0" y="0"/>
+          <a:ext cx="0" cy="0"/>
+          <a:chOff x="0" y="0"/>
+          <a:chExt cx="0" cy="0"/>
+        </a:xfrm>
+      </p:grpSpPr>
+      <p:sp>
+        <p:nvSpPr>
+          <p:cNvPr id="4" name="슬라이드 번호 개체 틀 3">
+            <a:extLst>
+              <a:ext uri="{FF2B5EF4-FFF2-40B4-BE49-F238E27FC236}">
+                <a16:creationId xmlns:a16="http://schemas.microsoft.com/office/drawing/2014/main" id="{DBFB5B3E-2733-6F10-C433-7C314850C9FE}"/>
+              </a:ext>
+            </a:extLst>
+          </p:cNvPr>
+          <p:cNvSpPr>
+            <a:spLocks noGrp="1"/>
+          </p:cNvSpPr>
+          <p:nvPr>
+            <p:ph type="sldNum" sz="quarter" idx="12"/>
+          </p:nvPr>
+        </p:nvSpPr>
+        <p:spPr>
+          <a:xfrm>
+            <a:off x="10514011" y="6036261"/>
+            <a:ext cx="753545" cy="365125"/>
+          </a:xfrm>
+        </p:spPr>
+        <p:txBody>
+          <a:bodyPr/>
+          <a:lstStyle/>
+          <a:p>
+            <a:fld id="{D57F1E4F-1CFF-5643-939E-217C01CDF565}" type="slidenum">
+              <a:rPr lang="en-US" smtClean="0"/>
+              <a:pPr/>
+              <a:t>3</a:t>
+            </a:fld>
+            <a:endParaRPr lang="en-US" dirty="0"/>
+          </a:p>
+        </p:txBody>
+      </p:sp>
+      <p:sp>
+        <p:nvSpPr>
+          <p:cNvPr id="3" name="제목 1">
+            <a:extLst>
+              <a:ext uri="{FF2B5EF4-FFF2-40B4-BE49-F238E27FC236}">
+                <a16:creationId xmlns:a16="http://schemas.microsoft.com/office/drawing/2014/main" id="{C56A9490-8D65-6528-22C1-98B7D5080918}"/>
+              </a:ext>
+            </a:extLst>
+          </p:cNvPr>
+          <p:cNvSpPr txBox="1">
+            <a:spLocks/>
+          </p:cNvSpPr>
+          <p:nvPr/>
+        </p:nvSpPr>
+        <p:spPr>
+          <a:xfrm>
+            <a:off x="475645" y="481983"/>
+            <a:ext cx="10353762" cy="766439"/>
+          </a:xfrm>
+          <a:prstGeom prst="rect">
+            <a:avLst/>
+          </a:prstGeom>
+        </p:spPr>
+        <p:txBody>
+          <a:bodyPr vert="horz" lIns="91440" tIns="45720" rIns="91440" bIns="45720" rtlCol="0" anchor="ctr">
+            <a:normAutofit/>
+          </a:bodyPr>
+          <a:lstStyle>
+            <a:lvl1pPr algn="ctr" defTabSz="914400" rtl="0" eaLnBrk="1" latinLnBrk="1" hangingPunct="1">
+              <a:lnSpc>
+                <a:spcPct val="90000"/>
+              </a:lnSpc>
+              <a:spcBef>
+                <a:spcPct val="0"/>
+              </a:spcBef>
+              <a:buNone/>
+              <a:defRPr sz="3200" kern="1200" cap="all" baseline="0">
+                <a:solidFill>
+                  <a:schemeClr val="tx1"/>
+                </a:solidFill>
+                <a:effectLst/>
+                <a:latin typeface="Batang" panose="02030600000101010101" pitchFamily="18" charset="-127"/>
+                <a:ea typeface="Batang" panose="02030600000101010101" pitchFamily="18" charset="-127"/>
+                <a:cs typeface="+mj-cs"/>
+              </a:defRPr>
+            </a:lvl1pPr>
+          </a:lstStyle>
+          <a:p>
+            <a:pPr algn="l"/>
+            <a:r>
+              <a:rPr lang="en-US" altLang="ko-KR" sz="2800" cap="none" dirty="0" err="1">
+                <a:solidFill>
+                  <a:schemeClr val="bg2">
+                    <a:lumMod val="25000"/>
+                  </a:schemeClr>
+                </a:solidFill>
+                <a:latin typeface="맑은 고딕" panose="020B0503020000020004" pitchFamily="50" charset="-127"/>
+                <a:ea typeface="맑은 고딕" panose="020B0503020000020004" pitchFamily="50" charset="-127"/>
+                <a:cs typeface="Segoe UI Light" panose="020B0502040204020203" pitchFamily="34" charset="0"/>
+              </a:rPr>
+              <a:t>PyTorch</a:t>
+            </a:r>
+            <a:endParaRPr lang="ko-KR" altLang="en-US" sz="2800" cap="none" dirty="0">
+              <a:solidFill>
+                <a:schemeClr val="bg2">
+                  <a:lumMod val="25000"/>
+                </a:schemeClr>
+              </a:solidFill>
+              <a:latin typeface="맑은 고딕" panose="020B0503020000020004" pitchFamily="50" charset="-127"/>
+              <a:ea typeface="맑은 고딕" panose="020B0503020000020004" pitchFamily="50" charset="-127"/>
+              <a:cs typeface="Segoe UI Light" panose="020B0502040204020203" pitchFamily="34" charset="0"/>
+            </a:endParaRPr>
+          </a:p>
+        </p:txBody>
+      </p:sp>
+      <p:pic>
+        <p:nvPicPr>
+          <p:cNvPr id="2" name="그림 1">
+            <a:extLst>
+              <a:ext uri="{FF2B5EF4-FFF2-40B4-BE49-F238E27FC236}">
+                <a16:creationId xmlns:a16="http://schemas.microsoft.com/office/drawing/2014/main" id="{E24E00A9-B7BD-84B1-C8C9-4379A44B71E8}"/>
+              </a:ext>
+            </a:extLst>
+          </p:cNvPr>
+          <p:cNvPicPr>
+            <a:picLocks noChangeAspect="1"/>
+          </p:cNvPicPr>
+          <p:nvPr/>
+        </p:nvPicPr>
+        <p:blipFill>
+          <a:blip r:embed="rId2"/>
+          <a:stretch>
+            <a:fillRect/>
+          </a:stretch>
+        </p:blipFill>
+        <p:spPr>
+          <a:xfrm>
+            <a:off x="794196" y="2796363"/>
+            <a:ext cx="4492179" cy="2374720"/>
+          </a:xfrm>
+          <a:prstGeom prst="rect">
+            <a:avLst/>
+          </a:prstGeom>
+        </p:spPr>
+      </p:pic>
+      <p:pic>
+        <p:nvPicPr>
+          <p:cNvPr id="5" name="그림 4">
+            <a:extLst>
+              <a:ext uri="{FF2B5EF4-FFF2-40B4-BE49-F238E27FC236}">
+                <a16:creationId xmlns:a16="http://schemas.microsoft.com/office/drawing/2014/main" id="{E2B39FB3-BDC3-5CE1-2660-D71F27A4AC06}"/>
+              </a:ext>
+            </a:extLst>
+          </p:cNvPr>
+          <p:cNvPicPr>
+            <a:picLocks noChangeAspect="1"/>
+          </p:cNvPicPr>
+          <p:nvPr/>
+        </p:nvPicPr>
+        <p:blipFill>
+          <a:blip r:embed="rId3"/>
+          <a:stretch>
+            <a:fillRect/>
+          </a:stretch>
+        </p:blipFill>
+        <p:spPr>
+          <a:xfrm>
+            <a:off x="5937695" y="2796363"/>
+            <a:ext cx="4737003" cy="3063556"/>
+          </a:xfrm>
+          <a:prstGeom prst="rect">
+            <a:avLst/>
+          </a:prstGeom>
+        </p:spPr>
+      </p:pic>
+      <p:sp>
+        <p:nvSpPr>
+          <p:cNvPr id="6" name="TextBox 5">
+            <a:extLst>
+              <a:ext uri="{FF2B5EF4-FFF2-40B4-BE49-F238E27FC236}">
+                <a16:creationId xmlns:a16="http://schemas.microsoft.com/office/drawing/2014/main" id="{C000331E-189C-7790-90B5-D620BD0EBE3F}"/>
+              </a:ext>
+            </a:extLst>
+          </p:cNvPr>
+          <p:cNvSpPr txBox="1"/>
+          <p:nvPr/>
+        </p:nvSpPr>
+        <p:spPr>
+          <a:xfrm>
+            <a:off x="2177634" y="5497523"/>
+            <a:ext cx="3166251" cy="369332"/>
+          </a:xfrm>
+          <a:prstGeom prst="rect">
+            <a:avLst/>
+          </a:prstGeom>
+          <a:noFill/>
+        </p:spPr>
+        <p:txBody>
+          <a:bodyPr wrap="none" rtlCol="0">
+            <a:spAutoFit/>
+          </a:bodyPr>
+          <a:lstStyle/>
+          <a:p>
+            <a:r>
+              <a:rPr lang="en-US" altLang="ko-KR" dirty="0">
+                <a:latin typeface="맑은 고딕 Semilight" panose="020B0502040204020203" pitchFamily="50" charset="-127"/>
+                <a:ea typeface="맑은 고딕 Semilight" panose="020B0502040204020203" pitchFamily="50" charset="-127"/>
+                <a:cs typeface="맑은 고딕 Semilight" panose="020B0502040204020203" pitchFamily="50" charset="-127"/>
+              </a:rPr>
+              <a:t>Forward, </a:t>
+            </a:r>
+            <a:r>
+              <a:rPr lang="en-US" altLang="ko-KR" dirty="0" err="1">
+                <a:latin typeface="맑은 고딕 Semilight" panose="020B0502040204020203" pitchFamily="50" charset="-127"/>
+                <a:ea typeface="맑은 고딕 Semilight" panose="020B0502040204020203" pitchFamily="50" charset="-127"/>
+                <a:cs typeface="맑은 고딕 Semilight" panose="020B0502040204020203" pitchFamily="50" charset="-127"/>
+              </a:rPr>
+              <a:t>Autograd</a:t>
+            </a:r>
+            <a:r>
+              <a:rPr lang="en-US" altLang="ko-KR" dirty="0">
+                <a:latin typeface="맑은 고딕 Semilight" panose="020B0502040204020203" pitchFamily="50" charset="-127"/>
+                <a:ea typeface="맑은 고딕 Semilight" panose="020B0502040204020203" pitchFamily="50" charset="-127"/>
+                <a:cs typeface="맑은 고딕 Semilight" panose="020B0502040204020203" pitchFamily="50" charset="-127"/>
+              </a:rPr>
+              <a:t>, Backward</a:t>
+            </a:r>
+            <a:endParaRPr lang="ko-KR" altLang="en-US" dirty="0">
+              <a:latin typeface="맑은 고딕 Semilight" panose="020B0502040204020203" pitchFamily="50" charset="-127"/>
+              <a:ea typeface="맑은 고딕 Semilight" panose="020B0502040204020203" pitchFamily="50" charset="-127"/>
+              <a:cs typeface="맑은 고딕 Semilight" panose="020B0502040204020203" pitchFamily="50" charset="-127"/>
+            </a:endParaRPr>
+          </a:p>
+        </p:txBody>
+      </p:sp>
+      <p:sp>
+        <p:nvSpPr>
+          <p:cNvPr id="8" name="TextBox 7">
+            <a:extLst>
+              <a:ext uri="{FF2B5EF4-FFF2-40B4-BE49-F238E27FC236}">
+                <a16:creationId xmlns:a16="http://schemas.microsoft.com/office/drawing/2014/main" id="{AB747EDD-F717-2F86-B83C-CA5F3D943427}"/>
+              </a:ext>
+            </a:extLst>
+          </p:cNvPr>
+          <p:cNvSpPr txBox="1"/>
+          <p:nvPr/>
+        </p:nvSpPr>
+        <p:spPr>
+          <a:xfrm>
+            <a:off x="561974" y="1265090"/>
+            <a:ext cx="10835829" cy="1152688"/>
+          </a:xfrm>
+          <a:prstGeom prst="rect">
+            <a:avLst/>
+          </a:prstGeom>
+          <a:noFill/>
+        </p:spPr>
+        <p:txBody>
+          <a:bodyPr wrap="square">
+            <a:spAutoFit/>
+          </a:bodyPr>
+          <a:lstStyle/>
+          <a:p>
+            <a:pPr>
+              <a:lnSpc>
+                <a:spcPct val="150000"/>
+              </a:lnSpc>
+            </a:pPr>
+            <a:r>
+              <a:rPr lang="en-US" altLang="ko-KR" sz="1600" b="1" dirty="0">
+                <a:latin typeface="맑은 고딕 Semilight" panose="020B0502040204020203" pitchFamily="50" charset="-127"/>
+                <a:ea typeface="맑은 고딕 Semilight" panose="020B0502040204020203" pitchFamily="50" charset="-127"/>
+                <a:cs typeface="맑은 고딕 Semilight" panose="020B0502040204020203" pitchFamily="50" charset="-127"/>
+              </a:rPr>
+              <a:t>Forward:</a:t>
+            </a:r>
+            <a:r>
+              <a:rPr lang="ko-KR" altLang="en-US" sz="1600" dirty="0">
+                <a:latin typeface="맑은 고딕 Semilight" panose="020B0502040204020203" pitchFamily="50" charset="-127"/>
+                <a:ea typeface="맑은 고딕 Semilight" panose="020B0502040204020203" pitchFamily="50" charset="-127"/>
+                <a:cs typeface="맑은 고딕 Semilight" panose="020B0502040204020203" pitchFamily="50" charset="-127"/>
+              </a:rPr>
+              <a:t> 시험 문제를 풀고</a:t>
+            </a:r>
+            <a:r>
+              <a:rPr lang="en-US" altLang="ko-KR" sz="1600" dirty="0">
+                <a:latin typeface="맑은 고딕 Semilight" panose="020B0502040204020203" pitchFamily="50" charset="-127"/>
+                <a:ea typeface="맑은 고딕 Semilight" panose="020B0502040204020203" pitchFamily="50" charset="-127"/>
+                <a:cs typeface="맑은 고딕 Semilight" panose="020B0502040204020203" pitchFamily="50" charset="-127"/>
+              </a:rPr>
+              <a:t>(</a:t>
+            </a:r>
+            <a:r>
+              <a:rPr lang="ko-KR" altLang="en-US" sz="1600" dirty="0" err="1">
+                <a:latin typeface="맑은 고딕 Semilight" panose="020B0502040204020203" pitchFamily="50" charset="-127"/>
+                <a:ea typeface="맑은 고딕 Semilight" panose="020B0502040204020203" pitchFamily="50" charset="-127"/>
+                <a:cs typeface="맑은 고딕 Semilight" panose="020B0502040204020203" pitchFamily="50" charset="-127"/>
+              </a:rPr>
+              <a:t>네크워크</a:t>
+            </a:r>
+            <a:r>
+              <a:rPr lang="ko-KR" altLang="en-US" sz="1600" dirty="0">
+                <a:latin typeface="맑은 고딕 Semilight" panose="020B0502040204020203" pitchFamily="50" charset="-127"/>
+                <a:ea typeface="맑은 고딕 Semilight" panose="020B0502040204020203" pitchFamily="50" charset="-127"/>
+                <a:cs typeface="맑은 고딕 Semilight" panose="020B0502040204020203" pitchFamily="50" charset="-127"/>
+              </a:rPr>
+              <a:t> 구조 설정</a:t>
+            </a:r>
+            <a:r>
+              <a:rPr lang="en-US" altLang="ko-KR" sz="1600" dirty="0">
+                <a:latin typeface="맑은 고딕 Semilight" panose="020B0502040204020203" pitchFamily="50" charset="-127"/>
+                <a:ea typeface="맑은 고딕 Semilight" panose="020B0502040204020203" pitchFamily="50" charset="-127"/>
+                <a:cs typeface="맑은 고딕 Semilight" panose="020B0502040204020203" pitchFamily="50" charset="-127"/>
+              </a:rPr>
+              <a:t>)</a:t>
+            </a:r>
+            <a:r>
+              <a:rPr lang="ko-KR" altLang="en-US" sz="1600" dirty="0">
+                <a:latin typeface="맑은 고딕 Semilight" panose="020B0502040204020203" pitchFamily="50" charset="-127"/>
+                <a:ea typeface="맑은 고딕 Semilight" panose="020B0502040204020203" pitchFamily="50" charset="-127"/>
+                <a:cs typeface="맑은 고딕 Semilight" panose="020B0502040204020203" pitchFamily="50" charset="-127"/>
+              </a:rPr>
+              <a:t> </a:t>
+            </a:r>
+            <a:r>
+              <a:rPr lang="en-US" altLang="ko-KR" sz="1600" b="1" dirty="0">
+                <a:latin typeface="맑은 고딕 Semilight" panose="020B0502040204020203" pitchFamily="50" charset="-127"/>
+                <a:ea typeface="맑은 고딕 Semilight" panose="020B0502040204020203" pitchFamily="50" charset="-127"/>
+                <a:cs typeface="맑은 고딕 Semilight" panose="020B0502040204020203" pitchFamily="50" charset="-127"/>
+              </a:rPr>
+              <a:t>Loss </a:t>
+            </a:r>
+            <a:r>
+              <a:rPr lang="ko-KR" altLang="en-US" sz="1600" b="1" dirty="0">
+                <a:latin typeface="맑은 고딕 Semilight" panose="020B0502040204020203" pitchFamily="50" charset="-127"/>
+                <a:ea typeface="맑은 고딕 Semilight" panose="020B0502040204020203" pitchFamily="50" charset="-127"/>
+                <a:cs typeface="맑은 고딕 Semilight" panose="020B0502040204020203" pitchFamily="50" charset="-127"/>
+              </a:rPr>
+              <a:t>계산</a:t>
+            </a:r>
+            <a:r>
+              <a:rPr lang="en-US" altLang="ko-KR" sz="1600" b="1" dirty="0">
+                <a:latin typeface="맑은 고딕 Semilight" panose="020B0502040204020203" pitchFamily="50" charset="-127"/>
+                <a:ea typeface="맑은 고딕 Semilight" panose="020B0502040204020203" pitchFamily="50" charset="-127"/>
+                <a:cs typeface="맑은 고딕 Semilight" panose="020B0502040204020203" pitchFamily="50" charset="-127"/>
+              </a:rPr>
+              <a:t>:</a:t>
+            </a:r>
+            <a:r>
+              <a:rPr lang="ko-KR" altLang="en-US" sz="1600" dirty="0">
+                <a:latin typeface="맑은 고딕 Semilight" panose="020B0502040204020203" pitchFamily="50" charset="-127"/>
+                <a:ea typeface="맑은 고딕 Semilight" panose="020B0502040204020203" pitchFamily="50" charset="-127"/>
+                <a:cs typeface="맑은 고딕 Semilight" panose="020B0502040204020203" pitchFamily="50" charset="-127"/>
+              </a:rPr>
+              <a:t> 채점을 해서 몇 점 틀렸는지 확인한 후 </a:t>
+            </a:r>
+            <a:r>
+              <a:rPr lang="en-US" altLang="ko-KR" sz="1600" b="1" dirty="0">
+                <a:latin typeface="맑은 고딕 Semilight" panose="020B0502040204020203" pitchFamily="50" charset="-127"/>
+                <a:ea typeface="맑은 고딕 Semilight" panose="020B0502040204020203" pitchFamily="50" charset="-127"/>
+                <a:cs typeface="맑은 고딕 Semilight" panose="020B0502040204020203" pitchFamily="50" charset="-127"/>
+              </a:rPr>
+              <a:t>Backward:</a:t>
+            </a:r>
+            <a:r>
+              <a:rPr lang="ko-KR" altLang="en-US" sz="1600" dirty="0">
+                <a:latin typeface="맑은 고딕 Semilight" panose="020B0502040204020203" pitchFamily="50" charset="-127"/>
+                <a:ea typeface="맑은 고딕 Semilight" panose="020B0502040204020203" pitchFamily="50" charset="-127"/>
+                <a:cs typeface="맑은 고딕 Semilight" panose="020B0502040204020203" pitchFamily="50" charset="-127"/>
+              </a:rPr>
+              <a:t> 틀린 문제의 해설지를 보며 </a:t>
+            </a:r>
+            <a:r>
+              <a:rPr lang="en-US" altLang="ko-KR" sz="1600" dirty="0">
+                <a:latin typeface="맑은 고딕 Semilight" panose="020B0502040204020203" pitchFamily="50" charset="-127"/>
+                <a:ea typeface="맑은 고딕 Semilight" panose="020B0502040204020203" pitchFamily="50" charset="-127"/>
+                <a:cs typeface="맑은 고딕 Semilight" panose="020B0502040204020203" pitchFamily="50" charset="-127"/>
+              </a:rPr>
+              <a:t>"</a:t>
+            </a:r>
+            <a:r>
+              <a:rPr lang="ko-KR" altLang="en-US" sz="1600" dirty="0">
+                <a:latin typeface="맑은 고딕 Semilight" panose="020B0502040204020203" pitchFamily="50" charset="-127"/>
+                <a:ea typeface="맑은 고딕 Semilight" panose="020B0502040204020203" pitchFamily="50" charset="-127"/>
+                <a:cs typeface="맑은 고딕 Semilight" panose="020B0502040204020203" pitchFamily="50" charset="-127"/>
+              </a:rPr>
+              <a:t>어떤 개념이 부족했는지</a:t>
+            </a:r>
+            <a:r>
+              <a:rPr lang="en-US" altLang="ko-KR" sz="1600" dirty="0">
+                <a:latin typeface="맑은 고딕 Semilight" panose="020B0502040204020203" pitchFamily="50" charset="-127"/>
+                <a:ea typeface="맑은 고딕 Semilight" panose="020B0502040204020203" pitchFamily="50" charset="-127"/>
+                <a:cs typeface="맑은 고딕 Semilight" panose="020B0502040204020203" pitchFamily="50" charset="-127"/>
+              </a:rPr>
+              <a:t>" </a:t>
+            </a:r>
+            <a:r>
+              <a:rPr lang="ko-KR" altLang="en-US" sz="1600" dirty="0">
+                <a:latin typeface="맑은 고딕 Semilight" panose="020B0502040204020203" pitchFamily="50" charset="-127"/>
+                <a:ea typeface="맑은 고딕 Semilight" panose="020B0502040204020203" pitchFamily="50" charset="-127"/>
+                <a:cs typeface="맑은 고딕 Semilight" panose="020B0502040204020203" pitchFamily="50" charset="-127"/>
+              </a:rPr>
+              <a:t>파악하여 </a:t>
+            </a:r>
+            <a:r>
+              <a:rPr lang="en-US" altLang="ko-KR" sz="1600" b="1" dirty="0">
+                <a:latin typeface="맑은 고딕 Semilight" panose="020B0502040204020203" pitchFamily="50" charset="-127"/>
+                <a:ea typeface="맑은 고딕 Semilight" panose="020B0502040204020203" pitchFamily="50" charset="-127"/>
+                <a:cs typeface="맑은 고딕 Semilight" panose="020B0502040204020203" pitchFamily="50" charset="-127"/>
+              </a:rPr>
+              <a:t>Optimization:</a:t>
+            </a:r>
+            <a:r>
+              <a:rPr lang="ko-KR" altLang="en-US" sz="1600" dirty="0">
+                <a:latin typeface="맑은 고딕 Semilight" panose="020B0502040204020203" pitchFamily="50" charset="-127"/>
+                <a:ea typeface="맑은 고딕 Semilight" panose="020B0502040204020203" pitchFamily="50" charset="-127"/>
+                <a:cs typeface="맑은 고딕 Semilight" panose="020B0502040204020203" pitchFamily="50" charset="-127"/>
+              </a:rPr>
+              <a:t> 부족했던 개념을 새로 공부해서 머릿속 지식</a:t>
+            </a:r>
+            <a:r>
+              <a:rPr lang="en-US" altLang="ko-KR" sz="1600" dirty="0">
+                <a:latin typeface="맑은 고딕 Semilight" panose="020B0502040204020203" pitchFamily="50" charset="-127"/>
+                <a:ea typeface="맑은 고딕 Semilight" panose="020B0502040204020203" pitchFamily="50" charset="-127"/>
+                <a:cs typeface="맑은 고딕 Semilight" panose="020B0502040204020203" pitchFamily="50" charset="-127"/>
+              </a:rPr>
+              <a:t>(</a:t>
+            </a:r>
+            <a:r>
+              <a:rPr lang="ko-KR" altLang="en-US" sz="1600" dirty="0">
+                <a:latin typeface="맑은 고딕 Semilight" panose="020B0502040204020203" pitchFamily="50" charset="-127"/>
+                <a:ea typeface="맑은 고딕 Semilight" panose="020B0502040204020203" pitchFamily="50" charset="-127"/>
+                <a:cs typeface="맑은 고딕 Semilight" panose="020B0502040204020203" pitchFamily="50" charset="-127"/>
+              </a:rPr>
+              <a:t>가중치</a:t>
+            </a:r>
+            <a:r>
+              <a:rPr lang="en-US" altLang="ko-KR" sz="1600" dirty="0">
+                <a:latin typeface="맑은 고딕 Semilight" panose="020B0502040204020203" pitchFamily="50" charset="-127"/>
+                <a:ea typeface="맑은 고딕 Semilight" panose="020B0502040204020203" pitchFamily="50" charset="-127"/>
+                <a:cs typeface="맑은 고딕 Semilight" panose="020B0502040204020203" pitchFamily="50" charset="-127"/>
+              </a:rPr>
+              <a:t>)</a:t>
+            </a:r>
+            <a:r>
+              <a:rPr lang="ko-KR" altLang="en-US" sz="1600" dirty="0">
+                <a:latin typeface="맑은 고딕 Semilight" panose="020B0502040204020203" pitchFamily="50" charset="-127"/>
+                <a:ea typeface="맑은 고딕 Semilight" panose="020B0502040204020203" pitchFamily="50" charset="-127"/>
+                <a:cs typeface="맑은 고딕 Semilight" panose="020B0502040204020203" pitchFamily="50" charset="-127"/>
+              </a:rPr>
+              <a:t>을 고쳐가는 과정을 수천 번 반복</a:t>
+            </a:r>
+            <a:r>
+              <a:rPr lang="en-US" altLang="ko-KR" sz="1600" dirty="0">
+                <a:latin typeface="맑은 고딕 Semilight" panose="020B0502040204020203" pitchFamily="50" charset="-127"/>
+                <a:ea typeface="맑은 고딕 Semilight" panose="020B0502040204020203" pitchFamily="50" charset="-127"/>
+                <a:cs typeface="맑은 고딕 Semilight" panose="020B0502040204020203" pitchFamily="50" charset="-127"/>
+              </a:rPr>
+              <a:t>(Epoch)</a:t>
+            </a:r>
+            <a:r>
+              <a:rPr lang="ko-KR" altLang="en-US" sz="1600" dirty="0">
+                <a:latin typeface="맑은 고딕 Semilight" panose="020B0502040204020203" pitchFamily="50" charset="-127"/>
+                <a:ea typeface="맑은 고딕 Semilight" panose="020B0502040204020203" pitchFamily="50" charset="-127"/>
+                <a:cs typeface="맑은 고딕 Semilight" panose="020B0502040204020203" pitchFamily="50" charset="-127"/>
+              </a:rPr>
+              <a:t>하면 모델은 점점 정답에 가까워지게 학습</a:t>
+            </a:r>
+          </a:p>
+        </p:txBody>
+      </p:sp>
+    </p:spTree>
+    <p:extLst>
+      <p:ext uri="{BB962C8B-B14F-4D97-AF65-F5344CB8AC3E}">
+        <p14:creationId xmlns:p14="http://schemas.microsoft.com/office/powerpoint/2010/main" val="2153360048"/>
+      </p:ext>
+    </p:extLst>
+  </p:cSld>
+  <p:clrMapOvr>
+    <a:masterClrMapping/>
+  </p:clrMapOvr>
+</p:sld>
+</file>
+
+<file path=ppt/slides/slide30.xml><?xml version="1.0" encoding="utf-8"?>
 <p:sld xmlns:a="http://schemas.openxmlformats.org/drawingml/2006/main" xmlns:r="http://schemas.openxmlformats.org/officeDocument/2006/relationships" xmlns:p="http://schemas.openxmlformats.org/presentationml/2006/main">
   <p:cSld>
     <p:spTree>
@@ -14630,7 +17806,7 @@
             <a:fld id="{D57F1E4F-1CFF-5643-939E-217C01CDF565}" type="slidenum">
               <a:rPr lang="en-US" smtClean="0"/>
               <a:pPr/>
-              <a:t>25</a:t>
+              <a:t>30</a:t>
             </a:fld>
             <a:endParaRPr lang="en-US" dirty="0"/>
           </a:p>
@@ -14847,508 +18023,6 @@
     <p:extLst>
       <p:ext uri="{BB962C8B-B14F-4D97-AF65-F5344CB8AC3E}">
         <p14:creationId xmlns:p14="http://schemas.microsoft.com/office/powerpoint/2010/main" val="433640551"/>
-      </p:ext>
-    </p:extLst>
-  </p:cSld>
-  <p:clrMapOvr>
-    <a:masterClrMapping/>
-  </p:clrMapOvr>
-</p:sld>
-</file>
-
-<file path=ppt/slides/slide3.xml><?xml version="1.0" encoding="utf-8"?>
-<p:sld xmlns:a="http://schemas.openxmlformats.org/drawingml/2006/main" xmlns:r="http://schemas.openxmlformats.org/officeDocument/2006/relationships" xmlns:p="http://schemas.openxmlformats.org/presentationml/2006/main">
-  <p:cSld>
-    <p:spTree>
-      <p:nvGrpSpPr>
-        <p:cNvPr id="1" name="">
-          <a:extLst>
-            <a:ext uri="{FF2B5EF4-FFF2-40B4-BE49-F238E27FC236}">
-              <a16:creationId xmlns:a16="http://schemas.microsoft.com/office/drawing/2014/main" id="{88FFB53F-5797-0BB2-9323-F166DE5B6771}"/>
-            </a:ext>
-          </a:extLst>
-        </p:cNvPr>
-        <p:cNvGrpSpPr/>
-        <p:nvPr/>
-      </p:nvGrpSpPr>
-      <p:grpSpPr>
-        <a:xfrm>
-          <a:off x="0" y="0"/>
-          <a:ext cx="0" cy="0"/>
-          <a:chOff x="0" y="0"/>
-          <a:chExt cx="0" cy="0"/>
-        </a:xfrm>
-      </p:grpSpPr>
-      <p:sp>
-        <p:nvSpPr>
-          <p:cNvPr id="4" name="슬라이드 번호 개체 틀 3">
-            <a:extLst>
-              <a:ext uri="{FF2B5EF4-FFF2-40B4-BE49-F238E27FC236}">
-                <a16:creationId xmlns:a16="http://schemas.microsoft.com/office/drawing/2014/main" id="{DBFB5B3E-2733-6F10-C433-7C314850C9FE}"/>
-              </a:ext>
-            </a:extLst>
-          </p:cNvPr>
-          <p:cNvSpPr>
-            <a:spLocks noGrp="1"/>
-          </p:cNvSpPr>
-          <p:nvPr>
-            <p:ph type="sldNum" sz="quarter" idx="12"/>
-          </p:nvPr>
-        </p:nvSpPr>
-        <p:spPr>
-          <a:xfrm>
-            <a:off x="10514011" y="6036261"/>
-            <a:ext cx="753545" cy="365125"/>
-          </a:xfrm>
-        </p:spPr>
-        <p:txBody>
-          <a:bodyPr/>
-          <a:lstStyle/>
-          <a:p>
-            <a:fld id="{D57F1E4F-1CFF-5643-939E-217C01CDF565}" type="slidenum">
-              <a:rPr lang="en-US" smtClean="0"/>
-              <a:pPr/>
-              <a:t>3</a:t>
-            </a:fld>
-            <a:endParaRPr lang="en-US" dirty="0"/>
-          </a:p>
-        </p:txBody>
-      </p:sp>
-      <p:sp>
-        <p:nvSpPr>
-          <p:cNvPr id="3" name="제목 1">
-            <a:extLst>
-              <a:ext uri="{FF2B5EF4-FFF2-40B4-BE49-F238E27FC236}">
-                <a16:creationId xmlns:a16="http://schemas.microsoft.com/office/drawing/2014/main" id="{C56A9490-8D65-6528-22C1-98B7D5080918}"/>
-              </a:ext>
-            </a:extLst>
-          </p:cNvPr>
-          <p:cNvSpPr txBox="1">
-            <a:spLocks/>
-          </p:cNvSpPr>
-          <p:nvPr/>
-        </p:nvSpPr>
-        <p:spPr>
-          <a:xfrm>
-            <a:off x="475645" y="481983"/>
-            <a:ext cx="10353762" cy="766439"/>
-          </a:xfrm>
-          <a:prstGeom prst="rect">
-            <a:avLst/>
-          </a:prstGeom>
-        </p:spPr>
-        <p:txBody>
-          <a:bodyPr vert="horz" lIns="91440" tIns="45720" rIns="91440" bIns="45720" rtlCol="0" anchor="ctr">
-            <a:normAutofit/>
-          </a:bodyPr>
-          <a:lstStyle>
-            <a:lvl1pPr algn="ctr" defTabSz="914400" rtl="0" eaLnBrk="1" latinLnBrk="1" hangingPunct="1">
-              <a:lnSpc>
-                <a:spcPct val="90000"/>
-              </a:lnSpc>
-              <a:spcBef>
-                <a:spcPct val="0"/>
-              </a:spcBef>
-              <a:buNone/>
-              <a:defRPr sz="3200" kern="1200" cap="all" baseline="0">
-                <a:solidFill>
-                  <a:schemeClr val="tx1"/>
-                </a:solidFill>
-                <a:effectLst/>
-                <a:latin typeface="Batang" panose="02030600000101010101" pitchFamily="18" charset="-127"/>
-                <a:ea typeface="Batang" panose="02030600000101010101" pitchFamily="18" charset="-127"/>
-                <a:cs typeface="+mj-cs"/>
-              </a:defRPr>
-            </a:lvl1pPr>
-          </a:lstStyle>
-          <a:p>
-            <a:pPr algn="l"/>
-            <a:r>
-              <a:rPr lang="en-US" altLang="ko-KR" sz="2800" cap="none" dirty="0" err="1">
-                <a:solidFill>
-                  <a:schemeClr val="bg2">
-                    <a:lumMod val="25000"/>
-                  </a:schemeClr>
-                </a:solidFill>
-                <a:latin typeface="맑은 고딕" panose="020B0503020000020004" pitchFamily="50" charset="-127"/>
-                <a:ea typeface="맑은 고딕" panose="020B0503020000020004" pitchFamily="50" charset="-127"/>
-                <a:cs typeface="Segoe UI Light" panose="020B0502040204020203" pitchFamily="34" charset="0"/>
-              </a:rPr>
-              <a:t>PyTorch</a:t>
-            </a:r>
-            <a:endParaRPr lang="ko-KR" altLang="en-US" sz="2800" cap="none" dirty="0">
-              <a:solidFill>
-                <a:schemeClr val="bg2">
-                  <a:lumMod val="25000"/>
-                </a:schemeClr>
-              </a:solidFill>
-              <a:latin typeface="맑은 고딕" panose="020B0503020000020004" pitchFamily="50" charset="-127"/>
-              <a:ea typeface="맑은 고딕" panose="020B0503020000020004" pitchFamily="50" charset="-127"/>
-              <a:cs typeface="Segoe UI Light" panose="020B0502040204020203" pitchFamily="34" charset="0"/>
-            </a:endParaRPr>
-          </a:p>
-        </p:txBody>
-      </p:sp>
-      <p:pic>
-        <p:nvPicPr>
-          <p:cNvPr id="2" name="그림 1">
-            <a:extLst>
-              <a:ext uri="{FF2B5EF4-FFF2-40B4-BE49-F238E27FC236}">
-                <a16:creationId xmlns:a16="http://schemas.microsoft.com/office/drawing/2014/main" id="{E24E00A9-B7BD-84B1-C8C9-4379A44B71E8}"/>
-              </a:ext>
-            </a:extLst>
-          </p:cNvPr>
-          <p:cNvPicPr>
-            <a:picLocks noChangeAspect="1"/>
-          </p:cNvPicPr>
-          <p:nvPr/>
-        </p:nvPicPr>
-        <p:blipFill>
-          <a:blip r:embed="rId2"/>
-          <a:stretch>
-            <a:fillRect/>
-          </a:stretch>
-        </p:blipFill>
-        <p:spPr>
-          <a:xfrm>
-            <a:off x="794196" y="2796363"/>
-            <a:ext cx="4492179" cy="2374720"/>
-          </a:xfrm>
-          <a:prstGeom prst="rect">
-            <a:avLst/>
-          </a:prstGeom>
-        </p:spPr>
-      </p:pic>
-      <p:pic>
-        <p:nvPicPr>
-          <p:cNvPr id="5" name="그림 4">
-            <a:extLst>
-              <a:ext uri="{FF2B5EF4-FFF2-40B4-BE49-F238E27FC236}">
-                <a16:creationId xmlns:a16="http://schemas.microsoft.com/office/drawing/2014/main" id="{E2B39FB3-BDC3-5CE1-2660-D71F27A4AC06}"/>
-              </a:ext>
-            </a:extLst>
-          </p:cNvPr>
-          <p:cNvPicPr>
-            <a:picLocks noChangeAspect="1"/>
-          </p:cNvPicPr>
-          <p:nvPr/>
-        </p:nvPicPr>
-        <p:blipFill>
-          <a:blip r:embed="rId3"/>
-          <a:stretch>
-            <a:fillRect/>
-          </a:stretch>
-        </p:blipFill>
-        <p:spPr>
-          <a:xfrm>
-            <a:off x="5937695" y="2796363"/>
-            <a:ext cx="4737003" cy="3063556"/>
-          </a:xfrm>
-          <a:prstGeom prst="rect">
-            <a:avLst/>
-          </a:prstGeom>
-        </p:spPr>
-      </p:pic>
-      <p:sp>
-        <p:nvSpPr>
-          <p:cNvPr id="6" name="TextBox 5">
-            <a:extLst>
-              <a:ext uri="{FF2B5EF4-FFF2-40B4-BE49-F238E27FC236}">
-                <a16:creationId xmlns:a16="http://schemas.microsoft.com/office/drawing/2014/main" id="{C000331E-189C-7790-90B5-D620BD0EBE3F}"/>
-              </a:ext>
-            </a:extLst>
-          </p:cNvPr>
-          <p:cNvSpPr txBox="1"/>
-          <p:nvPr/>
-        </p:nvSpPr>
-        <p:spPr>
-          <a:xfrm>
-            <a:off x="2177634" y="5497523"/>
-            <a:ext cx="3166251" cy="369332"/>
-          </a:xfrm>
-          <a:prstGeom prst="rect">
-            <a:avLst/>
-          </a:prstGeom>
-          <a:noFill/>
-        </p:spPr>
-        <p:txBody>
-          <a:bodyPr wrap="none" rtlCol="0">
-            <a:spAutoFit/>
-          </a:bodyPr>
-          <a:lstStyle/>
-          <a:p>
-            <a:r>
-              <a:rPr lang="en-US" altLang="ko-KR" dirty="0">
-                <a:latin typeface="맑은 고딕 Semilight" panose="020B0502040204020203" pitchFamily="50" charset="-127"/>
-                <a:ea typeface="맑은 고딕 Semilight" panose="020B0502040204020203" pitchFamily="50" charset="-127"/>
-                <a:cs typeface="맑은 고딕 Semilight" panose="020B0502040204020203" pitchFamily="50" charset="-127"/>
-              </a:rPr>
-              <a:t>Forward, </a:t>
-            </a:r>
-            <a:r>
-              <a:rPr lang="en-US" altLang="ko-KR" dirty="0" err="1">
-                <a:latin typeface="맑은 고딕 Semilight" panose="020B0502040204020203" pitchFamily="50" charset="-127"/>
-                <a:ea typeface="맑은 고딕 Semilight" panose="020B0502040204020203" pitchFamily="50" charset="-127"/>
-                <a:cs typeface="맑은 고딕 Semilight" panose="020B0502040204020203" pitchFamily="50" charset="-127"/>
-              </a:rPr>
-              <a:t>Autograd</a:t>
-            </a:r>
-            <a:r>
-              <a:rPr lang="en-US" altLang="ko-KR" dirty="0">
-                <a:latin typeface="맑은 고딕 Semilight" panose="020B0502040204020203" pitchFamily="50" charset="-127"/>
-                <a:ea typeface="맑은 고딕 Semilight" panose="020B0502040204020203" pitchFamily="50" charset="-127"/>
-                <a:cs typeface="맑은 고딕 Semilight" panose="020B0502040204020203" pitchFamily="50" charset="-127"/>
-              </a:rPr>
-              <a:t>, Backward</a:t>
-            </a:r>
-            <a:endParaRPr lang="ko-KR" altLang="en-US" dirty="0">
-              <a:latin typeface="맑은 고딕 Semilight" panose="020B0502040204020203" pitchFamily="50" charset="-127"/>
-              <a:ea typeface="맑은 고딕 Semilight" panose="020B0502040204020203" pitchFamily="50" charset="-127"/>
-              <a:cs typeface="맑은 고딕 Semilight" panose="020B0502040204020203" pitchFamily="50" charset="-127"/>
-            </a:endParaRPr>
-          </a:p>
-        </p:txBody>
-      </p:sp>
-      <p:sp>
-        <p:nvSpPr>
-          <p:cNvPr id="8" name="TextBox 7">
-            <a:extLst>
-              <a:ext uri="{FF2B5EF4-FFF2-40B4-BE49-F238E27FC236}">
-                <a16:creationId xmlns:a16="http://schemas.microsoft.com/office/drawing/2014/main" id="{AB747EDD-F717-2F86-B83C-CA5F3D943427}"/>
-              </a:ext>
-            </a:extLst>
-          </p:cNvPr>
-          <p:cNvSpPr txBox="1"/>
-          <p:nvPr/>
-        </p:nvSpPr>
-        <p:spPr>
-          <a:xfrm>
-            <a:off x="561974" y="1265090"/>
-            <a:ext cx="10835829" cy="1152688"/>
-          </a:xfrm>
-          <a:prstGeom prst="rect">
-            <a:avLst/>
-          </a:prstGeom>
-          <a:noFill/>
-        </p:spPr>
-        <p:txBody>
-          <a:bodyPr wrap="square">
-            <a:spAutoFit/>
-          </a:bodyPr>
-          <a:lstStyle/>
-          <a:p>
-            <a:pPr>
-              <a:lnSpc>
-                <a:spcPct val="150000"/>
-              </a:lnSpc>
-            </a:pPr>
-            <a:r>
-              <a:rPr lang="en-US" altLang="ko-KR" sz="1600" b="1" dirty="0">
-                <a:latin typeface="맑은 고딕 Semilight" panose="020B0502040204020203" pitchFamily="50" charset="-127"/>
-                <a:ea typeface="맑은 고딕 Semilight" panose="020B0502040204020203" pitchFamily="50" charset="-127"/>
-                <a:cs typeface="맑은 고딕 Semilight" panose="020B0502040204020203" pitchFamily="50" charset="-127"/>
-              </a:rPr>
-              <a:t>Forward:</a:t>
-            </a:r>
-            <a:r>
-              <a:rPr lang="ko-KR" altLang="en-US" sz="1600" dirty="0">
-                <a:latin typeface="맑은 고딕 Semilight" panose="020B0502040204020203" pitchFamily="50" charset="-127"/>
-                <a:ea typeface="맑은 고딕 Semilight" panose="020B0502040204020203" pitchFamily="50" charset="-127"/>
-                <a:cs typeface="맑은 고딕 Semilight" panose="020B0502040204020203" pitchFamily="50" charset="-127"/>
-              </a:rPr>
-              <a:t> 시험 문제를 풀고</a:t>
-            </a:r>
-            <a:r>
-              <a:rPr lang="en-US" altLang="ko-KR" sz="1600" dirty="0">
-                <a:latin typeface="맑은 고딕 Semilight" panose="020B0502040204020203" pitchFamily="50" charset="-127"/>
-                <a:ea typeface="맑은 고딕 Semilight" panose="020B0502040204020203" pitchFamily="50" charset="-127"/>
-                <a:cs typeface="맑은 고딕 Semilight" panose="020B0502040204020203" pitchFamily="50" charset="-127"/>
-              </a:rPr>
-              <a:t>(</a:t>
-            </a:r>
-            <a:r>
-              <a:rPr lang="ko-KR" altLang="en-US" sz="1600" dirty="0" err="1">
-                <a:latin typeface="맑은 고딕 Semilight" panose="020B0502040204020203" pitchFamily="50" charset="-127"/>
-                <a:ea typeface="맑은 고딕 Semilight" panose="020B0502040204020203" pitchFamily="50" charset="-127"/>
-                <a:cs typeface="맑은 고딕 Semilight" panose="020B0502040204020203" pitchFamily="50" charset="-127"/>
-              </a:rPr>
-              <a:t>네크워크</a:t>
-            </a:r>
-            <a:r>
-              <a:rPr lang="ko-KR" altLang="en-US" sz="1600" dirty="0">
-                <a:latin typeface="맑은 고딕 Semilight" panose="020B0502040204020203" pitchFamily="50" charset="-127"/>
-                <a:ea typeface="맑은 고딕 Semilight" panose="020B0502040204020203" pitchFamily="50" charset="-127"/>
-                <a:cs typeface="맑은 고딕 Semilight" panose="020B0502040204020203" pitchFamily="50" charset="-127"/>
-              </a:rPr>
-              <a:t> 구조 설정</a:t>
-            </a:r>
-            <a:r>
-              <a:rPr lang="en-US" altLang="ko-KR" sz="1600" dirty="0">
-                <a:latin typeface="맑은 고딕 Semilight" panose="020B0502040204020203" pitchFamily="50" charset="-127"/>
-                <a:ea typeface="맑은 고딕 Semilight" panose="020B0502040204020203" pitchFamily="50" charset="-127"/>
-                <a:cs typeface="맑은 고딕 Semilight" panose="020B0502040204020203" pitchFamily="50" charset="-127"/>
-              </a:rPr>
-              <a:t>)</a:t>
-            </a:r>
-            <a:r>
-              <a:rPr lang="ko-KR" altLang="en-US" sz="1600" dirty="0">
-                <a:latin typeface="맑은 고딕 Semilight" panose="020B0502040204020203" pitchFamily="50" charset="-127"/>
-                <a:ea typeface="맑은 고딕 Semilight" panose="020B0502040204020203" pitchFamily="50" charset="-127"/>
-                <a:cs typeface="맑은 고딕 Semilight" panose="020B0502040204020203" pitchFamily="50" charset="-127"/>
-              </a:rPr>
-              <a:t> </a:t>
-            </a:r>
-            <a:r>
-              <a:rPr lang="en-US" altLang="ko-KR" sz="1600" b="1" dirty="0">
-                <a:latin typeface="맑은 고딕 Semilight" panose="020B0502040204020203" pitchFamily="50" charset="-127"/>
-                <a:ea typeface="맑은 고딕 Semilight" panose="020B0502040204020203" pitchFamily="50" charset="-127"/>
-                <a:cs typeface="맑은 고딕 Semilight" panose="020B0502040204020203" pitchFamily="50" charset="-127"/>
-              </a:rPr>
-              <a:t>Loss </a:t>
-            </a:r>
-            <a:r>
-              <a:rPr lang="ko-KR" altLang="en-US" sz="1600" b="1" dirty="0">
-                <a:latin typeface="맑은 고딕 Semilight" panose="020B0502040204020203" pitchFamily="50" charset="-127"/>
-                <a:ea typeface="맑은 고딕 Semilight" panose="020B0502040204020203" pitchFamily="50" charset="-127"/>
-                <a:cs typeface="맑은 고딕 Semilight" panose="020B0502040204020203" pitchFamily="50" charset="-127"/>
-              </a:rPr>
-              <a:t>계산</a:t>
-            </a:r>
-            <a:r>
-              <a:rPr lang="en-US" altLang="ko-KR" sz="1600" b="1" dirty="0">
-                <a:latin typeface="맑은 고딕 Semilight" panose="020B0502040204020203" pitchFamily="50" charset="-127"/>
-                <a:ea typeface="맑은 고딕 Semilight" panose="020B0502040204020203" pitchFamily="50" charset="-127"/>
-                <a:cs typeface="맑은 고딕 Semilight" panose="020B0502040204020203" pitchFamily="50" charset="-127"/>
-              </a:rPr>
-              <a:t>:</a:t>
-            </a:r>
-            <a:r>
-              <a:rPr lang="ko-KR" altLang="en-US" sz="1600" dirty="0">
-                <a:latin typeface="맑은 고딕 Semilight" panose="020B0502040204020203" pitchFamily="50" charset="-127"/>
-                <a:ea typeface="맑은 고딕 Semilight" panose="020B0502040204020203" pitchFamily="50" charset="-127"/>
-                <a:cs typeface="맑은 고딕 Semilight" panose="020B0502040204020203" pitchFamily="50" charset="-127"/>
-              </a:rPr>
-              <a:t> 채점을 해서 몇 점 틀렸는지 확인한 후 </a:t>
-            </a:r>
-            <a:r>
-              <a:rPr lang="en-US" altLang="ko-KR" sz="1600" b="1" dirty="0">
-                <a:latin typeface="맑은 고딕 Semilight" panose="020B0502040204020203" pitchFamily="50" charset="-127"/>
-                <a:ea typeface="맑은 고딕 Semilight" panose="020B0502040204020203" pitchFamily="50" charset="-127"/>
-                <a:cs typeface="맑은 고딕 Semilight" panose="020B0502040204020203" pitchFamily="50" charset="-127"/>
-              </a:rPr>
-              <a:t>Backward:</a:t>
-            </a:r>
-            <a:r>
-              <a:rPr lang="ko-KR" altLang="en-US" sz="1600" dirty="0">
-                <a:latin typeface="맑은 고딕 Semilight" panose="020B0502040204020203" pitchFamily="50" charset="-127"/>
-                <a:ea typeface="맑은 고딕 Semilight" panose="020B0502040204020203" pitchFamily="50" charset="-127"/>
-                <a:cs typeface="맑은 고딕 Semilight" panose="020B0502040204020203" pitchFamily="50" charset="-127"/>
-              </a:rPr>
-              <a:t> 틀린 문제의 해설지를 보며 </a:t>
-            </a:r>
-            <a:r>
-              <a:rPr lang="en-US" altLang="ko-KR" sz="1600" dirty="0">
-                <a:latin typeface="맑은 고딕 Semilight" panose="020B0502040204020203" pitchFamily="50" charset="-127"/>
-                <a:ea typeface="맑은 고딕 Semilight" panose="020B0502040204020203" pitchFamily="50" charset="-127"/>
-                <a:cs typeface="맑은 고딕 Semilight" panose="020B0502040204020203" pitchFamily="50" charset="-127"/>
-              </a:rPr>
-              <a:t>"</a:t>
-            </a:r>
-            <a:r>
-              <a:rPr lang="ko-KR" altLang="en-US" sz="1600" dirty="0">
-                <a:latin typeface="맑은 고딕 Semilight" panose="020B0502040204020203" pitchFamily="50" charset="-127"/>
-                <a:ea typeface="맑은 고딕 Semilight" panose="020B0502040204020203" pitchFamily="50" charset="-127"/>
-                <a:cs typeface="맑은 고딕 Semilight" panose="020B0502040204020203" pitchFamily="50" charset="-127"/>
-              </a:rPr>
-              <a:t>어떤 개념이 부족했는지</a:t>
-            </a:r>
-            <a:r>
-              <a:rPr lang="en-US" altLang="ko-KR" sz="1600" dirty="0">
-                <a:latin typeface="맑은 고딕 Semilight" panose="020B0502040204020203" pitchFamily="50" charset="-127"/>
-                <a:ea typeface="맑은 고딕 Semilight" panose="020B0502040204020203" pitchFamily="50" charset="-127"/>
-                <a:cs typeface="맑은 고딕 Semilight" panose="020B0502040204020203" pitchFamily="50" charset="-127"/>
-              </a:rPr>
-              <a:t>" </a:t>
-            </a:r>
-            <a:r>
-              <a:rPr lang="ko-KR" altLang="en-US" sz="1600" dirty="0">
-                <a:latin typeface="맑은 고딕 Semilight" panose="020B0502040204020203" pitchFamily="50" charset="-127"/>
-                <a:ea typeface="맑은 고딕 Semilight" panose="020B0502040204020203" pitchFamily="50" charset="-127"/>
-                <a:cs typeface="맑은 고딕 Semilight" panose="020B0502040204020203" pitchFamily="50" charset="-127"/>
-              </a:rPr>
-              <a:t>파악하여 </a:t>
-            </a:r>
-            <a:r>
-              <a:rPr lang="en-US" altLang="ko-KR" sz="1600" b="1" dirty="0">
-                <a:latin typeface="맑은 고딕 Semilight" panose="020B0502040204020203" pitchFamily="50" charset="-127"/>
-                <a:ea typeface="맑은 고딕 Semilight" panose="020B0502040204020203" pitchFamily="50" charset="-127"/>
-                <a:cs typeface="맑은 고딕 Semilight" panose="020B0502040204020203" pitchFamily="50" charset="-127"/>
-              </a:rPr>
-              <a:t>Optimization:</a:t>
-            </a:r>
-            <a:r>
-              <a:rPr lang="ko-KR" altLang="en-US" sz="1600" dirty="0">
-                <a:latin typeface="맑은 고딕 Semilight" panose="020B0502040204020203" pitchFamily="50" charset="-127"/>
-                <a:ea typeface="맑은 고딕 Semilight" panose="020B0502040204020203" pitchFamily="50" charset="-127"/>
-                <a:cs typeface="맑은 고딕 Semilight" panose="020B0502040204020203" pitchFamily="50" charset="-127"/>
-              </a:rPr>
-              <a:t> 부족했던 개념을 새로 공부해서 머릿속 지식</a:t>
-            </a:r>
-            <a:r>
-              <a:rPr lang="en-US" altLang="ko-KR" sz="1600" dirty="0">
-                <a:latin typeface="맑은 고딕 Semilight" panose="020B0502040204020203" pitchFamily="50" charset="-127"/>
-                <a:ea typeface="맑은 고딕 Semilight" panose="020B0502040204020203" pitchFamily="50" charset="-127"/>
-                <a:cs typeface="맑은 고딕 Semilight" panose="020B0502040204020203" pitchFamily="50" charset="-127"/>
-              </a:rPr>
-              <a:t>(</a:t>
-            </a:r>
-            <a:r>
-              <a:rPr lang="ko-KR" altLang="en-US" sz="1600" dirty="0">
-                <a:latin typeface="맑은 고딕 Semilight" panose="020B0502040204020203" pitchFamily="50" charset="-127"/>
-                <a:ea typeface="맑은 고딕 Semilight" panose="020B0502040204020203" pitchFamily="50" charset="-127"/>
-                <a:cs typeface="맑은 고딕 Semilight" panose="020B0502040204020203" pitchFamily="50" charset="-127"/>
-              </a:rPr>
-              <a:t>가중치</a:t>
-            </a:r>
-            <a:r>
-              <a:rPr lang="en-US" altLang="ko-KR" sz="1600" dirty="0">
-                <a:latin typeface="맑은 고딕 Semilight" panose="020B0502040204020203" pitchFamily="50" charset="-127"/>
-                <a:ea typeface="맑은 고딕 Semilight" panose="020B0502040204020203" pitchFamily="50" charset="-127"/>
-                <a:cs typeface="맑은 고딕 Semilight" panose="020B0502040204020203" pitchFamily="50" charset="-127"/>
-              </a:rPr>
-              <a:t>)</a:t>
-            </a:r>
-            <a:r>
-              <a:rPr lang="ko-KR" altLang="en-US" sz="1600" dirty="0">
-                <a:latin typeface="맑은 고딕 Semilight" panose="020B0502040204020203" pitchFamily="50" charset="-127"/>
-                <a:ea typeface="맑은 고딕 Semilight" panose="020B0502040204020203" pitchFamily="50" charset="-127"/>
-                <a:cs typeface="맑은 고딕 Semilight" panose="020B0502040204020203" pitchFamily="50" charset="-127"/>
-              </a:rPr>
-              <a:t>을 고쳐가는 과정을 수천 번 반복</a:t>
-            </a:r>
-            <a:r>
-              <a:rPr lang="en-US" altLang="ko-KR" sz="1600" dirty="0">
-                <a:latin typeface="맑은 고딕 Semilight" panose="020B0502040204020203" pitchFamily="50" charset="-127"/>
-                <a:ea typeface="맑은 고딕 Semilight" panose="020B0502040204020203" pitchFamily="50" charset="-127"/>
-                <a:cs typeface="맑은 고딕 Semilight" panose="020B0502040204020203" pitchFamily="50" charset="-127"/>
-              </a:rPr>
-              <a:t>(Epoch)</a:t>
-            </a:r>
-            <a:r>
-              <a:rPr lang="ko-KR" altLang="en-US" sz="1600" dirty="0">
-                <a:latin typeface="맑은 고딕 Semilight" panose="020B0502040204020203" pitchFamily="50" charset="-127"/>
-                <a:ea typeface="맑은 고딕 Semilight" panose="020B0502040204020203" pitchFamily="50" charset="-127"/>
-                <a:cs typeface="맑은 고딕 Semilight" panose="020B0502040204020203" pitchFamily="50" charset="-127"/>
-              </a:rPr>
-              <a:t>하면 모델은 점점 정답에 가까워지게 학습</a:t>
-            </a:r>
-          </a:p>
-        </p:txBody>
-      </p:sp>
-    </p:spTree>
-    <p:extLst>
-      <p:ext uri="{BB962C8B-B14F-4D97-AF65-F5344CB8AC3E}">
-        <p14:creationId xmlns:p14="http://schemas.microsoft.com/office/powerpoint/2010/main" val="2153360048"/>
       </p:ext>
     </p:extLst>
   </p:cSld>

--- a/Linear_Algebra/w6_Deep Learning.pptx
+++ b/Linear_Algebra/w6_Deep Learning.pptx
@@ -5,10 +5,10 @@
     <p:sldMasterId id="2147483660" r:id="rId1"/>
   </p:sldMasterIdLst>
   <p:notesMasterIdLst>
-    <p:notesMasterId r:id="rId32"/>
+    <p:notesMasterId r:id="rId33"/>
   </p:notesMasterIdLst>
   <p:handoutMasterIdLst>
-    <p:handoutMasterId r:id="rId33"/>
+    <p:handoutMasterId r:id="rId34"/>
   </p:handoutMasterIdLst>
   <p:sldIdLst>
     <p:sldId id="256" r:id="rId2"/>
@@ -41,6 +41,7 @@
     <p:sldId id="1106" r:id="rId29"/>
     <p:sldId id="1099" r:id="rId30"/>
     <p:sldId id="1100" r:id="rId31"/>
+    <p:sldId id="1107" r:id="rId32"/>
   </p:sldIdLst>
   <p:sldSz cx="12192000" cy="6858000"/>
   <p:notesSz cx="6858000" cy="9144000"/>
@@ -178,6 +179,7 @@
             <p14:sldId id="1106"/>
             <p14:sldId id="1099"/>
             <p14:sldId id="1100"/>
+            <p14:sldId id="1107"/>
           </p14:sldIdLst>
         </p14:section>
         <p14:section name="자세한 정보" id="{2CC34DB2-6590-42C0-AD4B-A04C6060184E}">
@@ -15527,53 +15529,6 @@
           </a:p>
         </p:txBody>
       </p:sp>
-      <p:pic>
-        <p:nvPicPr>
-          <p:cNvPr id="37" name="Picture 2" descr="한 여자가 노트북 컴퓨터에 타이핑을 하고 있다">
-            <a:extLst>
-              <a:ext uri="{FF2B5EF4-FFF2-40B4-BE49-F238E27FC236}">
-                <a16:creationId xmlns:a16="http://schemas.microsoft.com/office/drawing/2014/main" id="{27D47B66-E746-DFBF-EC11-4B3609F2FF0D}"/>
-              </a:ext>
-            </a:extLst>
-          </p:cNvPr>
-          <p:cNvPicPr>
-            <a:picLocks noChangeAspect="1" noChangeArrowheads="1"/>
-          </p:cNvPicPr>
-          <p:nvPr/>
-        </p:nvPicPr>
-        <p:blipFill>
-          <a:blip r:embed="rId2">
-            <a:extLst>
-              <a:ext uri="{28A0092B-C50C-407E-A947-70E740481C1C}">
-                <a14:useLocalDpi xmlns:a14="http://schemas.microsoft.com/office/drawing/2010/main" val="0"/>
-              </a:ext>
-            </a:extLst>
-          </a:blip>
-          <a:srcRect/>
-          <a:stretch>
-            <a:fillRect/>
-          </a:stretch>
-        </p:blipFill>
-        <p:spPr bwMode="auto">
-          <a:xfrm>
-            <a:off x="10433816" y="68913"/>
-            <a:ext cx="1667479" cy="1103309"/>
-          </a:xfrm>
-          <a:prstGeom prst="rect">
-            <a:avLst/>
-          </a:prstGeom>
-          <a:noFill/>
-          <a:extLst>
-            <a:ext uri="{909E8E84-426E-40DD-AFC4-6F175D3DCCD1}">
-              <a14:hiddenFill xmlns:a14="http://schemas.microsoft.com/office/drawing/2010/main">
-                <a:solidFill>
-                  <a:srgbClr val="FFFFFF"/>
-                </a:solidFill>
-              </a14:hiddenFill>
-            </a:ext>
-          </a:extLst>
-        </p:spPr>
-      </p:pic>
       <p:sp>
         <p:nvSpPr>
           <p:cNvPr id="39" name="제목 1">
@@ -15675,7 +15630,7 @@
                 <a:latin typeface="맑은 고딕 Semilight" panose="020B0502040204020203" pitchFamily="50" charset="-127"/>
                 <a:ea typeface="맑은 고딕 Semilight" panose="020B0502040204020203" pitchFamily="50" charset="-127"/>
                 <a:cs typeface="맑은 고딕 Semilight" panose="020B0502040204020203" pitchFamily="50" charset="-127"/>
-                <a:hlinkClick r:id="rId3">
+                <a:hlinkClick r:id="rId2">
                   <a:extLst>
                     <a:ext uri="{A12FA001-AC4F-418D-AE19-62706E023703}">
                       <ahyp:hlinkClr xmlns:ahyp="http://schemas.microsoft.com/office/drawing/2018/hyperlinkcolor" val="tx"/>
@@ -17812,53 +17767,6 @@
           </a:p>
         </p:txBody>
       </p:sp>
-      <p:pic>
-        <p:nvPicPr>
-          <p:cNvPr id="37" name="Picture 2" descr="한 여자가 노트북 컴퓨터에 타이핑을 하고 있다">
-            <a:extLst>
-              <a:ext uri="{FF2B5EF4-FFF2-40B4-BE49-F238E27FC236}">
-                <a16:creationId xmlns:a16="http://schemas.microsoft.com/office/drawing/2014/main" id="{BEA78ECC-DC6F-ACF2-5C55-620B31A3F547}"/>
-              </a:ext>
-            </a:extLst>
-          </p:cNvPr>
-          <p:cNvPicPr>
-            <a:picLocks noChangeAspect="1" noChangeArrowheads="1"/>
-          </p:cNvPicPr>
-          <p:nvPr/>
-        </p:nvPicPr>
-        <p:blipFill>
-          <a:blip r:embed="rId2">
-            <a:extLst>
-              <a:ext uri="{28A0092B-C50C-407E-A947-70E740481C1C}">
-                <a14:useLocalDpi xmlns:a14="http://schemas.microsoft.com/office/drawing/2010/main" val="0"/>
-              </a:ext>
-            </a:extLst>
-          </a:blip>
-          <a:srcRect/>
-          <a:stretch>
-            <a:fillRect/>
-          </a:stretch>
-        </p:blipFill>
-        <p:spPr bwMode="auto">
-          <a:xfrm>
-            <a:off x="10433816" y="68913"/>
-            <a:ext cx="1667479" cy="1103309"/>
-          </a:xfrm>
-          <a:prstGeom prst="rect">
-            <a:avLst/>
-          </a:prstGeom>
-          <a:noFill/>
-          <a:extLst>
-            <a:ext uri="{909E8E84-426E-40DD-AFC4-6F175D3DCCD1}">
-              <a14:hiddenFill xmlns:a14="http://schemas.microsoft.com/office/drawing/2010/main">
-                <a:solidFill>
-                  <a:srgbClr val="FFFFFF"/>
-                </a:solidFill>
-              </a14:hiddenFill>
-            </a:ext>
-          </a:extLst>
-        </p:spPr>
-      </p:pic>
       <p:sp>
         <p:nvSpPr>
           <p:cNvPr id="39" name="제목 1">
@@ -17960,7 +17868,7 @@
                 <a:latin typeface="맑은 고딕 Semilight" panose="020B0502040204020203" pitchFamily="50" charset="-127"/>
                 <a:ea typeface="맑은 고딕 Semilight" panose="020B0502040204020203" pitchFamily="50" charset="-127"/>
                 <a:cs typeface="맑은 고딕 Semilight" panose="020B0502040204020203" pitchFamily="50" charset="-127"/>
-                <a:hlinkClick r:id="rId3"/>
+                <a:hlinkClick r:id="rId2"/>
               </a:rPr>
               <a:t>machine_learning_map</a:t>
             </a:r>
@@ -17987,7 +17895,7 @@
           <p:nvPr/>
         </p:nvPicPr>
         <p:blipFill>
-          <a:blip r:embed="rId4">
+          <a:blip r:embed="rId3">
             <a:extLst>
               <a:ext uri="{28A0092B-C50C-407E-A947-70E740481C1C}">
                 <a14:useLocalDpi xmlns:a14="http://schemas.microsoft.com/office/drawing/2010/main" val="0"/>
@@ -18023,6 +17931,236 @@
     <p:extLst>
       <p:ext uri="{BB962C8B-B14F-4D97-AF65-F5344CB8AC3E}">
         <p14:creationId xmlns:p14="http://schemas.microsoft.com/office/powerpoint/2010/main" val="433640551"/>
+      </p:ext>
+    </p:extLst>
+  </p:cSld>
+  <p:clrMapOvr>
+    <a:masterClrMapping/>
+  </p:clrMapOvr>
+</p:sld>
+</file>
+
+<file path=ppt/slides/slide31.xml><?xml version="1.0" encoding="utf-8"?>
+<p:sld xmlns:a="http://schemas.openxmlformats.org/drawingml/2006/main" xmlns:r="http://schemas.openxmlformats.org/officeDocument/2006/relationships" xmlns:p="http://schemas.openxmlformats.org/presentationml/2006/main">
+  <p:cSld>
+    <p:spTree>
+      <p:nvGrpSpPr>
+        <p:cNvPr id="1" name="">
+          <a:extLst>
+            <a:ext uri="{FF2B5EF4-FFF2-40B4-BE49-F238E27FC236}">
+              <a16:creationId xmlns:a16="http://schemas.microsoft.com/office/drawing/2014/main" id="{1567AABF-8E34-14ED-2A54-48F149A9E17A}"/>
+            </a:ext>
+          </a:extLst>
+        </p:cNvPr>
+        <p:cNvGrpSpPr/>
+        <p:nvPr/>
+      </p:nvGrpSpPr>
+      <p:grpSpPr>
+        <a:xfrm>
+          <a:off x="0" y="0"/>
+          <a:ext cx="0" cy="0"/>
+          <a:chOff x="0" y="0"/>
+          <a:chExt cx="0" cy="0"/>
+        </a:xfrm>
+      </p:grpSpPr>
+      <p:sp>
+        <p:nvSpPr>
+          <p:cNvPr id="4" name="슬라이드 번호 개체 틀 3">
+            <a:extLst>
+              <a:ext uri="{FF2B5EF4-FFF2-40B4-BE49-F238E27FC236}">
+                <a16:creationId xmlns:a16="http://schemas.microsoft.com/office/drawing/2014/main" id="{80C25BA0-6347-AD14-4642-034E7A75E715}"/>
+              </a:ext>
+            </a:extLst>
+          </p:cNvPr>
+          <p:cNvSpPr>
+            <a:spLocks noGrp="1"/>
+          </p:cNvSpPr>
+          <p:nvPr>
+            <p:ph type="sldNum" sz="quarter" idx="12"/>
+          </p:nvPr>
+        </p:nvSpPr>
+        <p:spPr>
+          <a:xfrm>
+            <a:off x="10514011" y="6036261"/>
+            <a:ext cx="753545" cy="365125"/>
+          </a:xfrm>
+        </p:spPr>
+        <p:txBody>
+          <a:bodyPr/>
+          <a:lstStyle/>
+          <a:p>
+            <a:fld id="{D57F1E4F-1CFF-5643-939E-217C01CDF565}" type="slidenum">
+              <a:rPr lang="en-US" smtClean="0"/>
+              <a:pPr/>
+              <a:t>31</a:t>
+            </a:fld>
+            <a:endParaRPr lang="en-US" dirty="0"/>
+          </a:p>
+        </p:txBody>
+      </p:sp>
+      <p:sp>
+        <p:nvSpPr>
+          <p:cNvPr id="39" name="제목 1">
+            <a:extLst>
+              <a:ext uri="{FF2B5EF4-FFF2-40B4-BE49-F238E27FC236}">
+                <a16:creationId xmlns:a16="http://schemas.microsoft.com/office/drawing/2014/main" id="{6AFEE2A5-6076-E25F-D547-0D8FBF0FCD22}"/>
+              </a:ext>
+            </a:extLst>
+          </p:cNvPr>
+          <p:cNvSpPr txBox="1">
+            <a:spLocks/>
+          </p:cNvSpPr>
+          <p:nvPr/>
+        </p:nvSpPr>
+        <p:spPr>
+          <a:xfrm>
+            <a:off x="590464" y="395619"/>
+            <a:ext cx="10353762" cy="766439"/>
+          </a:xfrm>
+          <a:prstGeom prst="rect">
+            <a:avLst/>
+          </a:prstGeom>
+        </p:spPr>
+        <p:txBody>
+          <a:bodyPr vert="horz" lIns="91440" tIns="45720" rIns="91440" bIns="45720" rtlCol="0" anchor="ctr">
+            <a:normAutofit/>
+          </a:bodyPr>
+          <a:lstStyle>
+            <a:lvl1pPr algn="ctr" defTabSz="914400" rtl="0" eaLnBrk="1" latinLnBrk="1" hangingPunct="1">
+              <a:lnSpc>
+                <a:spcPct val="90000"/>
+              </a:lnSpc>
+              <a:spcBef>
+                <a:spcPct val="0"/>
+              </a:spcBef>
+              <a:buNone/>
+              <a:defRPr sz="3200" kern="1200" cap="all" baseline="0">
+                <a:solidFill>
+                  <a:schemeClr val="tx1"/>
+                </a:solidFill>
+                <a:effectLst/>
+                <a:latin typeface="Batang" panose="02030600000101010101" pitchFamily="18" charset="-127"/>
+                <a:ea typeface="Batang" panose="02030600000101010101" pitchFamily="18" charset="-127"/>
+                <a:cs typeface="+mj-cs"/>
+              </a:defRPr>
+            </a:lvl1pPr>
+          </a:lstStyle>
+          <a:p>
+            <a:pPr algn="l"/>
+            <a:r>
+              <a:rPr lang="en-US" altLang="ko-KR" sz="2800" cap="none" dirty="0">
+                <a:latin typeface="ADLaM Display" panose="02010000000000000000" pitchFamily="2" charset="0"/>
+                <a:ea typeface="ADLaM Display" panose="02010000000000000000" pitchFamily="2" charset="0"/>
+                <a:cs typeface="ADLaM Display" panose="02010000000000000000" pitchFamily="2" charset="0"/>
+              </a:rPr>
+              <a:t>Self</a:t>
+            </a:r>
+            <a:r>
+              <a:rPr lang="ko-KR" altLang="en-US" sz="2800" cap="none" dirty="0">
+                <a:latin typeface="ADLaM Display" panose="02010000000000000000" pitchFamily="2" charset="0"/>
+                <a:ea typeface="ADLaM Display" panose="02010000000000000000" pitchFamily="2" charset="0"/>
+                <a:cs typeface="ADLaM Display" panose="02010000000000000000" pitchFamily="2" charset="0"/>
+              </a:rPr>
+              <a:t> </a:t>
+            </a:r>
+            <a:r>
+              <a:rPr lang="en-US" altLang="ko-KR" sz="2800" cap="none" dirty="0">
+                <a:latin typeface="ADLaM Display" panose="02010000000000000000" pitchFamily="2" charset="0"/>
+                <a:ea typeface="ADLaM Display" panose="02010000000000000000" pitchFamily="2" charset="0"/>
+                <a:cs typeface="ADLaM Display" panose="02010000000000000000" pitchFamily="2" charset="0"/>
+              </a:rPr>
+              <a:t>study : 40 min</a:t>
+            </a:r>
+            <a:endParaRPr lang="ko-KR" altLang="en-US" sz="2800" cap="none" dirty="0">
+              <a:latin typeface="ADLaM Display" panose="02010000000000000000" pitchFamily="2" charset="0"/>
+              <a:cs typeface="ADLaM Display" panose="02010000000000000000" pitchFamily="2" charset="0"/>
+            </a:endParaRPr>
+          </a:p>
+        </p:txBody>
+      </p:sp>
+      <p:sp>
+        <p:nvSpPr>
+          <p:cNvPr id="2" name="TextBox 1">
+            <a:extLst>
+              <a:ext uri="{FF2B5EF4-FFF2-40B4-BE49-F238E27FC236}">
+                <a16:creationId xmlns:a16="http://schemas.microsoft.com/office/drawing/2014/main" id="{40223098-E37F-061C-74F5-64BC667BB779}"/>
+              </a:ext>
+            </a:extLst>
+          </p:cNvPr>
+          <p:cNvSpPr txBox="1"/>
+          <p:nvPr/>
+        </p:nvSpPr>
+        <p:spPr>
+          <a:xfrm>
+            <a:off x="590464" y="1524000"/>
+            <a:ext cx="2185214" cy="461665"/>
+          </a:xfrm>
+          <a:prstGeom prst="rect">
+            <a:avLst/>
+          </a:prstGeom>
+          <a:noFill/>
+        </p:spPr>
+        <p:txBody>
+          <a:bodyPr wrap="none" rtlCol="0">
+            <a:spAutoFit/>
+          </a:bodyPr>
+          <a:lstStyle/>
+          <a:p>
+            <a:r>
+              <a:rPr lang="en-US" altLang="ko-KR" sz="2400" dirty="0" err="1">
+                <a:latin typeface="D2Coding" panose="020B0609020101020101" pitchFamily="49" charset="-127"/>
+                <a:ea typeface="D2Coding" panose="020B0609020101020101" pitchFamily="49" charset="-127"/>
+                <a:hlinkClick r:id="rId2">
+                  <a:extLst>
+                    <a:ext uri="{A12FA001-AC4F-418D-AE19-62706E023703}">
+                      <ahyp:hlinkClr xmlns:ahyp="http://schemas.microsoft.com/office/drawing/2018/hyperlinkcolor" val="tx"/>
+                    </a:ext>
+                  </a:extLst>
+                </a:hlinkClick>
+              </a:rPr>
+              <a:t>pytorch_recap</a:t>
+            </a:r>
+            <a:endParaRPr lang="ko-KR" altLang="en-US" sz="2400" dirty="0">
+              <a:latin typeface="D2Coding" panose="020B0609020101020101" pitchFamily="49" charset="-127"/>
+              <a:ea typeface="D2Coding" panose="020B0609020101020101" pitchFamily="49" charset="-127"/>
+            </a:endParaRPr>
+          </a:p>
+        </p:txBody>
+      </p:sp>
+      <p:pic>
+        <p:nvPicPr>
+          <p:cNvPr id="5" name="그림 4">
+            <a:extLst>
+              <a:ext uri="{FF2B5EF4-FFF2-40B4-BE49-F238E27FC236}">
+                <a16:creationId xmlns:a16="http://schemas.microsoft.com/office/drawing/2014/main" id="{8ED8D6F7-8DC7-2BB5-3AF7-8AA8A4BE25D8}"/>
+              </a:ext>
+            </a:extLst>
+          </p:cNvPr>
+          <p:cNvPicPr>
+            <a:picLocks noChangeAspect="1"/>
+          </p:cNvPicPr>
+          <p:nvPr/>
+        </p:nvPicPr>
+        <p:blipFill>
+          <a:blip r:embed="rId3"/>
+          <a:stretch>
+            <a:fillRect/>
+          </a:stretch>
+        </p:blipFill>
+        <p:spPr>
+          <a:xfrm>
+            <a:off x="2905666" y="1412011"/>
+            <a:ext cx="4923869" cy="4826229"/>
+          </a:xfrm>
+          <a:prstGeom prst="rect">
+            <a:avLst/>
+          </a:prstGeom>
+        </p:spPr>
+      </p:pic>
+    </p:spTree>
+    <p:extLst>
+      <p:ext uri="{BB962C8B-B14F-4D97-AF65-F5344CB8AC3E}">
+        <p14:creationId xmlns:p14="http://schemas.microsoft.com/office/powerpoint/2010/main" val="2293609852"/>
       </p:ext>
     </p:extLst>
   </p:cSld>

--- a/Linear_Algebra/w6_Deep Learning.pptx
+++ b/Linear_Algebra/w6_Deep Learning.pptx
@@ -304,7 +304,7 @@
                 <a:latin typeface="맑은 고딕" panose="020B0503020000020004" pitchFamily="50" charset="-127"/>
                 <a:ea typeface="맑은 고딕" panose="020B0503020000020004" pitchFamily="50" charset="-127"/>
               </a:rPr>
-              <a:t>2026-05-03</a:t>
+              <a:t>2026-05-07</a:t>
             </a:fld>
             <a:endParaRPr lang="ko-KR" altLang="en-US">
               <a:latin typeface="맑은 고딕" panose="020B0503020000020004" pitchFamily="50" charset="-127"/>
@@ -490,7 +490,7 @@
           <a:p>
             <a:fld id="{43E1C3DD-4A19-441D-907C-380838DB51C4}" type="datetime1">
               <a:rPr lang="ko-KR" altLang="en-US" noProof="0" smtClean="0"/>
-              <a:t>2026-05-03</a:t>
+              <a:t>2026-05-07</a:t>
             </a:fld>
             <a:endParaRPr lang="ko-KR" altLang="en-US" noProof="0"/>
           </a:p>
@@ -1928,7 +1928,7 @@
           <a:p>
             <a:fld id="{990475B5-67CA-4281-BDCA-DA943C3C8EB3}" type="datetime1">
               <a:rPr lang="ko-KR" altLang="en-US" noProof="0" smtClean="0"/>
-              <a:t>2026-05-03</a:t>
+              <a:t>2026-05-07</a:t>
             </a:fld>
             <a:endParaRPr lang="ko-KR" altLang="en-US" noProof="0"/>
           </a:p>
@@ -2582,7 +2582,7 @@
           <a:p>
             <a:fld id="{48A87A34-81AB-432B-8DAE-1953F412C126}" type="datetimeFigureOut">
               <a:rPr lang="en-US" smtClean="0"/>
-              <a:t>5/3/2026</a:t>
+              <a:t>5/7/2026</a:t>
             </a:fld>
             <a:endParaRPr lang="en-US" dirty="0"/>
           </a:p>
@@ -2878,7 +2878,7 @@
           <a:p>
             <a:fld id="{C655C81E-72E7-4D05-94B5-F45B321A525D}" type="datetime1">
               <a:rPr lang="ko-KR" altLang="en-US" noProof="0" smtClean="0"/>
-              <a:t>2026-05-03</a:t>
+              <a:t>2026-05-07</a:t>
             </a:fld>
             <a:endParaRPr lang="ko-KR" altLang="en-US" noProof="0" dirty="0">
               <a:latin typeface="맑은 고딕" panose="020B0503020000020004" pitchFamily="50" charset="-127"/>
@@ -14972,8 +14972,8 @@
           </a:p>
         </p:txBody>
       </p:sp>
-      <mc:AlternateContent xmlns:mc="http://schemas.openxmlformats.org/markup-compatibility/2006">
-        <mc:Choice xmlns:a14="http://schemas.microsoft.com/office/drawing/2010/main" Requires="a14">
+      <mc:AlternateContent xmlns:mc="http://schemas.openxmlformats.org/markup-compatibility/2006" xmlns:a14="http://schemas.microsoft.com/office/drawing/2010/main">
+        <mc:Choice Requires="a14">
           <p:sp>
             <p:nvSpPr>
               <p:cNvPr id="18" name="TextBox 17">
@@ -15002,6 +15002,7 @@
               </a:bodyPr>
               <a:lstStyle/>
               <a:p>
+                <a:pPr/>
                 <a14:m>
                   <m:oMathPara xmlns:m="http://schemas.openxmlformats.org/officeDocument/2006/math">
                     <m:oMathParaPr>
@@ -15022,7 +15023,7 @@
             </p:txBody>
           </p:sp>
         </mc:Choice>
-        <mc:Fallback>
+        <mc:Fallback xmlns="">
           <p:sp>
             <p:nvSpPr>
               <p:cNvPr id="18" name="TextBox 17">
@@ -15067,8 +15068,8 @@
           </p:sp>
         </mc:Fallback>
       </mc:AlternateContent>
-      <mc:AlternateContent xmlns:mc="http://schemas.openxmlformats.org/markup-compatibility/2006">
-        <mc:Choice xmlns:a14="http://schemas.microsoft.com/office/drawing/2010/main" Requires="a14">
+      <mc:AlternateContent xmlns:mc="http://schemas.openxmlformats.org/markup-compatibility/2006" xmlns:a14="http://schemas.microsoft.com/office/drawing/2010/main">
+        <mc:Choice Requires="a14">
           <p:sp>
             <p:nvSpPr>
               <p:cNvPr id="19" name="TextBox 18">
@@ -15097,6 +15098,7 @@
               </a:bodyPr>
               <a:lstStyle/>
               <a:p>
+                <a:pPr/>
                 <a14:m>
                   <m:oMathPara xmlns:m="http://schemas.openxmlformats.org/officeDocument/2006/math">
                     <m:oMathParaPr>
@@ -15124,7 +15126,7 @@
             </p:txBody>
           </p:sp>
         </mc:Choice>
-        <mc:Fallback>
+        <mc:Fallback xmlns="">
           <p:sp>
             <p:nvSpPr>
               <p:cNvPr id="19" name="TextBox 18">
@@ -15169,8 +15171,8 @@
           </p:sp>
         </mc:Fallback>
       </mc:AlternateContent>
-      <mc:AlternateContent xmlns:mc="http://schemas.openxmlformats.org/markup-compatibility/2006">
-        <mc:Choice xmlns:a14="http://schemas.microsoft.com/office/drawing/2010/main" Requires="a14">
+      <mc:AlternateContent xmlns:mc="http://schemas.openxmlformats.org/markup-compatibility/2006" xmlns:a14="http://schemas.microsoft.com/office/drawing/2010/main">
+        <mc:Choice Requires="a14">
           <p:sp>
             <p:nvSpPr>
               <p:cNvPr id="20" name="TextBox 19">
@@ -15199,6 +15201,7 @@
               </a:bodyPr>
               <a:lstStyle/>
               <a:p>
+                <a:pPr/>
                 <a14:m>
                   <m:oMathPara xmlns:m="http://schemas.openxmlformats.org/officeDocument/2006/math">
                     <m:oMathParaPr>
@@ -15215,7 +15218,7 @@
                         <a:rPr lang="en-US" altLang="ko-KR" b="1" i="1" smtClean="0">
                           <a:latin typeface="Cambria Math" panose="02040503050406030204" pitchFamily="18" charset="0"/>
                         </a:rPr>
-                        <m:t>-</m:t>
+                        <m:t>−</m:t>
                       </m:r>
                       <m:r>
                         <a:rPr lang="ko-KR" altLang="en-US" b="1" i="1" smtClean="0">
@@ -15231,7 +15234,7 @@
             </p:txBody>
           </p:sp>
         </mc:Choice>
-        <mc:Fallback>
+        <mc:Fallback xmlns="">
           <p:sp>
             <p:nvSpPr>
               <p:cNvPr id="20" name="TextBox 19">
@@ -20442,7 +20445,7 @@
         </p:nvSpPr>
         <p:spPr>
           <a:xfrm>
-            <a:off x="613223" y="1956990"/>
+            <a:off x="743196" y="1749284"/>
             <a:ext cx="4644578" cy="4390817"/>
           </a:xfrm>
           <a:prstGeom prst="rect">
@@ -21202,8 +21205,8 @@
         </p:nvSpPr>
         <p:spPr>
           <a:xfrm>
-            <a:off x="5460214" y="1332705"/>
-            <a:ext cx="6023314" cy="4801186"/>
+            <a:off x="5425490" y="1749285"/>
+            <a:ext cx="6023314" cy="4390817"/>
           </a:xfrm>
           <a:prstGeom prst="rect">
             <a:avLst/>
@@ -21861,134 +21864,6 @@
                 <a:ea typeface="D2Coding" panose="020B0609020101020101" pitchFamily="49" charset="-127"/>
               </a:rPr>
               <a:t>():</a:t>
-            </a:r>
-          </a:p>
-          <a:p>
-            <a:pPr>
-              <a:lnSpc>
-                <a:spcPts val="1575"/>
-              </a:lnSpc>
-              <a:buNone/>
-            </a:pPr>
-            <a:r>
-              <a:rPr lang="en-US" altLang="ko-KR" sz="1200" b="0" dirty="0">
-                <a:effectLst/>
-                <a:latin typeface="D2Coding" panose="020B0609020101020101" pitchFamily="49" charset="-127"/>
-                <a:ea typeface="D2Coding" panose="020B0609020101020101" pitchFamily="49" charset="-127"/>
-              </a:rPr>
-              <a:t>            # alpha_j+1 = </a:t>
-            </a:r>
-            <a:r>
-              <a:rPr lang="en-US" altLang="ko-KR" sz="1200" b="0" dirty="0" err="1">
-                <a:effectLst/>
-                <a:latin typeface="D2Coding" panose="020B0609020101020101" pitchFamily="49" charset="-127"/>
-                <a:ea typeface="D2Coding" panose="020B0609020101020101" pitchFamily="49" charset="-127"/>
-              </a:rPr>
-              <a:t>alpha_j</a:t>
-            </a:r>
-            <a:r>
-              <a:rPr lang="en-US" altLang="ko-KR" sz="1200" b="0" dirty="0">
-                <a:effectLst/>
-                <a:latin typeface="D2Coding" panose="020B0609020101020101" pitchFamily="49" charset="-127"/>
-                <a:ea typeface="D2Coding" panose="020B0609020101020101" pitchFamily="49" charset="-127"/>
-              </a:rPr>
-              <a:t> - </a:t>
-            </a:r>
-            <a:r>
-              <a:rPr lang="en-US" altLang="ko-KR" sz="1200" b="0" dirty="0" err="1">
-                <a:effectLst/>
-                <a:latin typeface="D2Coding" panose="020B0609020101020101" pitchFamily="49" charset="-127"/>
-                <a:ea typeface="D2Coding" panose="020B0609020101020101" pitchFamily="49" charset="-127"/>
-              </a:rPr>
-              <a:t>lr</a:t>
-            </a:r>
-            <a:r>
-              <a:rPr lang="en-US" altLang="ko-KR" sz="1200" b="0" dirty="0">
-                <a:effectLst/>
-                <a:latin typeface="D2Coding" panose="020B0609020101020101" pitchFamily="49" charset="-127"/>
-                <a:ea typeface="D2Coding" panose="020B0609020101020101" pitchFamily="49" charset="-127"/>
-              </a:rPr>
-              <a:t> * (</a:t>
-            </a:r>
-            <a:r>
-              <a:rPr lang="en-US" altLang="ko-KR" sz="1200" b="0" dirty="0" err="1">
-                <a:effectLst/>
-                <a:latin typeface="D2Coding" panose="020B0609020101020101" pitchFamily="49" charset="-127"/>
-                <a:ea typeface="D2Coding" panose="020B0609020101020101" pitchFamily="49" charset="-127"/>
-              </a:rPr>
-              <a:t>y_hat</a:t>
-            </a:r>
-            <a:r>
-              <a:rPr lang="en-US" altLang="ko-KR" sz="1200" b="0" dirty="0">
-                <a:effectLst/>
-                <a:latin typeface="D2Coding" panose="020B0609020101020101" pitchFamily="49" charset="-127"/>
-                <a:ea typeface="D2Coding" panose="020B0609020101020101" pitchFamily="49" charset="-127"/>
-              </a:rPr>
-              <a:t> - y)</a:t>
-            </a:r>
-          </a:p>
-          <a:p>
-            <a:pPr>
-              <a:lnSpc>
-                <a:spcPts val="1575"/>
-              </a:lnSpc>
-              <a:buNone/>
-            </a:pPr>
-            <a:r>
-              <a:rPr lang="en-US" altLang="ko-KR" sz="1200" b="0" dirty="0">
-                <a:effectLst/>
-                <a:latin typeface="D2Coding" panose="020B0609020101020101" pitchFamily="49" charset="-127"/>
-                <a:ea typeface="D2Coding" panose="020B0609020101020101" pitchFamily="49" charset="-127"/>
-              </a:rPr>
-              <a:t>            # beta_j+1 = </a:t>
-            </a:r>
-            <a:r>
-              <a:rPr lang="en-US" altLang="ko-KR" sz="1200" b="0" dirty="0" err="1">
-                <a:effectLst/>
-                <a:latin typeface="D2Coding" panose="020B0609020101020101" pitchFamily="49" charset="-127"/>
-                <a:ea typeface="D2Coding" panose="020B0609020101020101" pitchFamily="49" charset="-127"/>
-              </a:rPr>
-              <a:t>beta_j</a:t>
-            </a:r>
-            <a:r>
-              <a:rPr lang="en-US" altLang="ko-KR" sz="1200" b="0" dirty="0">
-                <a:effectLst/>
-                <a:latin typeface="D2Coding" panose="020B0609020101020101" pitchFamily="49" charset="-127"/>
-                <a:ea typeface="D2Coding" panose="020B0609020101020101" pitchFamily="49" charset="-127"/>
-              </a:rPr>
-              <a:t> - </a:t>
-            </a:r>
-            <a:r>
-              <a:rPr lang="en-US" altLang="ko-KR" sz="1200" b="0" dirty="0" err="1">
-                <a:effectLst/>
-                <a:latin typeface="D2Coding" panose="020B0609020101020101" pitchFamily="49" charset="-127"/>
-                <a:ea typeface="D2Coding" panose="020B0609020101020101" pitchFamily="49" charset="-127"/>
-              </a:rPr>
-              <a:t>lr</a:t>
-            </a:r>
-            <a:r>
-              <a:rPr lang="en-US" altLang="ko-KR" sz="1200" b="0" dirty="0">
-                <a:effectLst/>
-                <a:latin typeface="D2Coding" panose="020B0609020101020101" pitchFamily="49" charset="-127"/>
-                <a:ea typeface="D2Coding" panose="020B0609020101020101" pitchFamily="49" charset="-127"/>
-              </a:rPr>
-              <a:t> * x * (</a:t>
-            </a:r>
-            <a:r>
-              <a:rPr lang="en-US" altLang="ko-KR" sz="1200" b="0" dirty="0" err="1">
-                <a:effectLst/>
-                <a:latin typeface="D2Coding" panose="020B0609020101020101" pitchFamily="49" charset="-127"/>
-                <a:ea typeface="D2Coding" panose="020B0609020101020101" pitchFamily="49" charset="-127"/>
-              </a:rPr>
-              <a:t>y_hat</a:t>
-            </a:r>
-            <a:r>
-              <a:rPr lang="en-US" altLang="ko-KR" sz="1200" b="0" dirty="0">
-                <a:effectLst/>
-                <a:latin typeface="D2Coding" panose="020B0609020101020101" pitchFamily="49" charset="-127"/>
-                <a:ea typeface="D2Coding" panose="020B0609020101020101" pitchFamily="49" charset="-127"/>
-              </a:rPr>
-              <a:t> - y)</a:t>
             </a:r>
           </a:p>
           <a:p>
@@ -22444,7 +22319,7 @@
         </p:blipFill>
         <p:spPr>
           <a:xfrm>
-            <a:off x="8630138" y="3015581"/>
+            <a:off x="9341338" y="4356701"/>
             <a:ext cx="1702369" cy="622969"/>
           </a:xfrm>
           <a:prstGeom prst="rect">
@@ -22807,7 +22682,7 @@
         <p:spPr>
           <a:xfrm>
             <a:off x="715326" y="1926290"/>
-            <a:ext cx="4656774" cy="4370427"/>
+            <a:ext cx="4656774" cy="4570482"/>
           </a:xfrm>
           <a:prstGeom prst="rect">
             <a:avLst/>
@@ -22845,20 +22720,6 @@
             </a:r>
           </a:p>
           <a:p>
-            <a:r>
-              <a:rPr lang="en-US" altLang="ko-KR" sz="1300" dirty="0">
-                <a:latin typeface="D2Coding" panose="020B0609020101020101" pitchFamily="49" charset="-127"/>
-                <a:ea typeface="D2Coding" panose="020B0609020101020101" pitchFamily="49" charset="-127"/>
-              </a:rPr>
-              <a:t># 1. </a:t>
-            </a:r>
-            <a:r>
-              <a:rPr lang="ko-KR" altLang="en-US" sz="1300" dirty="0">
-                <a:latin typeface="D2Coding" panose="020B0609020101020101" pitchFamily="49" charset="-127"/>
-                <a:ea typeface="D2Coding" panose="020B0609020101020101" pitchFamily="49" charset="-127"/>
-              </a:rPr>
-              <a:t>데이터 생성</a:t>
-            </a:r>
             <a:endParaRPr lang="en-US" altLang="ko-KR" sz="1300" dirty="0">
               <a:latin typeface="D2Coding" panose="020B0609020101020101" pitchFamily="49" charset="-127"/>
               <a:ea typeface="D2Coding" panose="020B0609020101020101" pitchFamily="49" charset="-127"/>
@@ -22866,6 +22727,26 @@
           </a:p>
           <a:p>
             <a:r>
+              <a:rPr lang="en-US" altLang="ko-KR" sz="1300" dirty="0">
+                <a:latin typeface="D2Coding" panose="020B0609020101020101" pitchFamily="49" charset="-127"/>
+                <a:ea typeface="D2Coding" panose="020B0609020101020101" pitchFamily="49" charset="-127"/>
+              </a:rPr>
+              <a:t># 1. </a:t>
+            </a:r>
+            <a:r>
+              <a:rPr lang="ko-KR" altLang="en-US" sz="1300" dirty="0">
+                <a:latin typeface="D2Coding" panose="020B0609020101020101" pitchFamily="49" charset="-127"/>
+                <a:ea typeface="D2Coding" panose="020B0609020101020101" pitchFamily="49" charset="-127"/>
+              </a:rPr>
+              <a:t>데이터 생성</a:t>
+            </a:r>
+            <a:endParaRPr lang="en-US" altLang="ko-KR" sz="1300" dirty="0">
+              <a:latin typeface="D2Coding" panose="020B0609020101020101" pitchFamily="49" charset="-127"/>
+              <a:ea typeface="D2Coding" panose="020B0609020101020101" pitchFamily="49" charset="-127"/>
+            </a:endParaRPr>
+          </a:p>
+          <a:p>
+            <a:r>
               <a:rPr lang="en-US" altLang="ko-KR" sz="1400" dirty="0">
                 <a:latin typeface="D2Coding" panose="020B0609020101020101" pitchFamily="49" charset="-127"/>
                 <a:ea typeface="D2Coding" panose="020B0609020101020101" pitchFamily="49" charset="-127"/>
@@ -22993,6 +22874,12 @@
               </a:rPr>
               <a:t>=11)</a:t>
             </a:r>
+            <a:endParaRPr lang="en-US" altLang="ko-KR" sz="1300" dirty="0">
+              <a:latin typeface="D2Coding" panose="020B0609020101020101" pitchFamily="49" charset="-127"/>
+              <a:ea typeface="D2Coding" panose="020B0609020101020101" pitchFamily="49" charset="-127"/>
+            </a:endParaRPr>
+          </a:p>
+          <a:p>
             <a:endParaRPr lang="en-US" altLang="ko-KR" sz="1300" dirty="0">
               <a:latin typeface="D2Coding" panose="020B0609020101020101" pitchFamily="49" charset="-127"/>
               <a:ea typeface="D2Coding" panose="020B0609020101020101" pitchFamily="49" charset="-127"/>
@@ -23227,7 +23114,7 @@
                 <a:latin typeface="D2Coding" panose="020B0609020101020101" pitchFamily="49" charset="-127"/>
                 <a:ea typeface="D2Coding" panose="020B0609020101020101" pitchFamily="49" charset="-127"/>
               </a:rPr>
-              <a:t>미분 가능하도록 설정</a:t>
+              <a:t>미분 가능 설정</a:t>
             </a:r>
             <a:r>
               <a:rPr lang="en-US" altLang="ko-KR" sz="1300" dirty="0">

--- a/Linear_Algebra/w6_Deep Learning.pptx
+++ b/Linear_Algebra/w6_Deep Learning.pptx
@@ -5,10 +5,10 @@
     <p:sldMasterId id="2147483660" r:id="rId1"/>
   </p:sldMasterIdLst>
   <p:notesMasterIdLst>
-    <p:notesMasterId r:id="rId33"/>
+    <p:notesMasterId r:id="rId36"/>
   </p:notesMasterIdLst>
   <p:handoutMasterIdLst>
-    <p:handoutMasterId r:id="rId34"/>
+    <p:handoutMasterId r:id="rId37"/>
   </p:handoutMasterIdLst>
   <p:sldIdLst>
     <p:sldId id="256" r:id="rId2"/>
@@ -39,9 +39,12 @@
     <p:sldId id="1102" r:id="rId27"/>
     <p:sldId id="1105" r:id="rId28"/>
     <p:sldId id="1106" r:id="rId29"/>
-    <p:sldId id="1099" r:id="rId30"/>
-    <p:sldId id="1100" r:id="rId31"/>
-    <p:sldId id="1107" r:id="rId32"/>
+    <p:sldId id="1109" r:id="rId30"/>
+    <p:sldId id="1110" r:id="rId31"/>
+    <p:sldId id="1111" r:id="rId32"/>
+    <p:sldId id="1099" r:id="rId33"/>
+    <p:sldId id="1100" r:id="rId34"/>
+    <p:sldId id="1107" r:id="rId35"/>
   </p:sldIdLst>
   <p:sldSz cx="12192000" cy="6858000"/>
   <p:notesSz cx="6858000" cy="9144000"/>
@@ -177,6 +180,9 @@
             <p14:sldId id="1102"/>
             <p14:sldId id="1105"/>
             <p14:sldId id="1106"/>
+            <p14:sldId id="1109"/>
+            <p14:sldId id="1110"/>
+            <p14:sldId id="1111"/>
             <p14:sldId id="1099"/>
             <p14:sldId id="1100"/>
             <p14:sldId id="1107"/>
@@ -15443,8 +15449,2066 @@
         </p:blipFill>
         <p:spPr bwMode="auto">
           <a:xfrm>
-            <a:off x="3273527" y="1601006"/>
+            <a:off x="957047" y="1601006"/>
             <a:ext cx="4666706" cy="4523638"/>
+          </a:xfrm>
+          <a:prstGeom prst="rect">
+            <a:avLst/>
+          </a:prstGeom>
+          <a:noFill/>
+          <a:extLst>
+            <a:ext uri="{909E8E84-426E-40DD-AFC4-6F175D3DCCD1}">
+              <a14:hiddenFill xmlns:a14="http://schemas.microsoft.com/office/drawing/2010/main">
+                <a:solidFill>
+                  <a:srgbClr val="FFFFFF"/>
+                </a:solidFill>
+              </a14:hiddenFill>
+            </a:ext>
+          </a:extLst>
+        </p:spPr>
+      </p:pic>
+      <p:sp>
+        <p:nvSpPr>
+          <p:cNvPr id="2" name="TextBox 1">
+            <a:extLst>
+              <a:ext uri="{FF2B5EF4-FFF2-40B4-BE49-F238E27FC236}">
+                <a16:creationId xmlns:a16="http://schemas.microsoft.com/office/drawing/2014/main" id="{6B0E4EFE-8F57-C87C-CFC9-D9C7BB5DD793}"/>
+              </a:ext>
+            </a:extLst>
+          </p:cNvPr>
+          <p:cNvSpPr txBox="1"/>
+          <p:nvPr/>
+        </p:nvSpPr>
+        <p:spPr>
+          <a:xfrm>
+            <a:off x="5767345" y="2631380"/>
+            <a:ext cx="6089375" cy="3493264"/>
+          </a:xfrm>
+          <a:prstGeom prst="rect">
+            <a:avLst/>
+          </a:prstGeom>
+          <a:solidFill>
+            <a:srgbClr val="76E3FF"/>
+          </a:solidFill>
+        </p:spPr>
+        <p:txBody>
+          <a:bodyPr wrap="square" rtlCol="0">
+            <a:spAutoFit/>
+          </a:bodyPr>
+          <a:lstStyle/>
+          <a:p>
+            <a:r>
+              <a:rPr lang="en-US" altLang="ko-KR" sz="1300" dirty="0">
+                <a:latin typeface="D2Coding" panose="020B0609020101020101" pitchFamily="49" charset="-127"/>
+                <a:ea typeface="D2Coding" panose="020B0609020101020101" pitchFamily="49" charset="-127"/>
+              </a:rPr>
+              <a:t>import </a:t>
+            </a:r>
+            <a:r>
+              <a:rPr lang="en-US" altLang="ko-KR" sz="1300" dirty="0" err="1">
+                <a:latin typeface="D2Coding" panose="020B0609020101020101" pitchFamily="49" charset="-127"/>
+                <a:ea typeface="D2Coding" panose="020B0609020101020101" pitchFamily="49" charset="-127"/>
+              </a:rPr>
+              <a:t>numpy</a:t>
+            </a:r>
+            <a:r>
+              <a:rPr lang="en-US" altLang="ko-KR" sz="1300" dirty="0">
+                <a:latin typeface="D2Coding" panose="020B0609020101020101" pitchFamily="49" charset="-127"/>
+                <a:ea typeface="D2Coding" panose="020B0609020101020101" pitchFamily="49" charset="-127"/>
+              </a:rPr>
+              <a:t> as np</a:t>
+            </a:r>
+          </a:p>
+          <a:p>
+            <a:r>
+              <a:rPr lang="en-US" altLang="ko-KR" sz="1300" dirty="0">
+                <a:latin typeface="D2Coding" panose="020B0609020101020101" pitchFamily="49" charset="-127"/>
+                <a:ea typeface="D2Coding" panose="020B0609020101020101" pitchFamily="49" charset="-127"/>
+              </a:rPr>
+              <a:t>import </a:t>
+            </a:r>
+            <a:r>
+              <a:rPr lang="en-US" altLang="ko-KR" sz="1300" dirty="0" err="1">
+                <a:latin typeface="D2Coding" panose="020B0609020101020101" pitchFamily="49" charset="-127"/>
+                <a:ea typeface="D2Coding" panose="020B0609020101020101" pitchFamily="49" charset="-127"/>
+              </a:rPr>
+              <a:t>matplotlib.pyplot</a:t>
+            </a:r>
+            <a:r>
+              <a:rPr lang="en-US" altLang="ko-KR" sz="1300" dirty="0">
+                <a:latin typeface="D2Coding" panose="020B0609020101020101" pitchFamily="49" charset="-127"/>
+                <a:ea typeface="D2Coding" panose="020B0609020101020101" pitchFamily="49" charset="-127"/>
+              </a:rPr>
+              <a:t> as </a:t>
+            </a:r>
+            <a:r>
+              <a:rPr lang="en-US" altLang="ko-KR" sz="1300" dirty="0" err="1">
+                <a:latin typeface="D2Coding" panose="020B0609020101020101" pitchFamily="49" charset="-127"/>
+                <a:ea typeface="D2Coding" panose="020B0609020101020101" pitchFamily="49" charset="-127"/>
+              </a:rPr>
+              <a:t>plt</a:t>
+            </a:r>
+            <a:endParaRPr lang="en-US" altLang="ko-KR" sz="1300" dirty="0">
+              <a:latin typeface="D2Coding" panose="020B0609020101020101" pitchFamily="49" charset="-127"/>
+              <a:ea typeface="D2Coding" panose="020B0609020101020101" pitchFamily="49" charset="-127"/>
+            </a:endParaRPr>
+          </a:p>
+          <a:p>
+            <a:r>
+              <a:rPr lang="en-US" altLang="ko-KR" sz="1300" dirty="0">
+                <a:latin typeface="D2Coding" panose="020B0609020101020101" pitchFamily="49" charset="-127"/>
+                <a:ea typeface="D2Coding" panose="020B0609020101020101" pitchFamily="49" charset="-127"/>
+              </a:rPr>
+              <a:t>import seaborn as </a:t>
+            </a:r>
+            <a:r>
+              <a:rPr lang="en-US" altLang="ko-KR" sz="1300" dirty="0" err="1">
+                <a:latin typeface="D2Coding" panose="020B0609020101020101" pitchFamily="49" charset="-127"/>
+                <a:ea typeface="D2Coding" panose="020B0609020101020101" pitchFamily="49" charset="-127"/>
+              </a:rPr>
+              <a:t>sns</a:t>
+            </a:r>
+            <a:endParaRPr lang="en-US" altLang="ko-KR" sz="1300" dirty="0">
+              <a:latin typeface="D2Coding" panose="020B0609020101020101" pitchFamily="49" charset="-127"/>
+              <a:ea typeface="D2Coding" panose="020B0609020101020101" pitchFamily="49" charset="-127"/>
+            </a:endParaRPr>
+          </a:p>
+          <a:p>
+            <a:r>
+              <a:rPr lang="en-US" altLang="ko-KR" sz="1300" dirty="0">
+                <a:latin typeface="D2Coding" panose="020B0609020101020101" pitchFamily="49" charset="-127"/>
+                <a:ea typeface="D2Coding" panose="020B0609020101020101" pitchFamily="49" charset="-127"/>
+              </a:rPr>
+              <a:t>from </a:t>
+            </a:r>
+            <a:r>
+              <a:rPr lang="en-US" altLang="ko-KR" sz="1300" dirty="0" err="1">
+                <a:latin typeface="D2Coding" panose="020B0609020101020101" pitchFamily="49" charset="-127"/>
+                <a:ea typeface="D2Coding" panose="020B0609020101020101" pitchFamily="49" charset="-127"/>
+              </a:rPr>
+              <a:t>scipy.stats</a:t>
+            </a:r>
+            <a:r>
+              <a:rPr lang="en-US" altLang="ko-KR" sz="1300" dirty="0">
+                <a:latin typeface="D2Coding" panose="020B0609020101020101" pitchFamily="49" charset="-127"/>
+                <a:ea typeface="D2Coding" panose="020B0609020101020101" pitchFamily="49" charset="-127"/>
+              </a:rPr>
+              <a:t> import </a:t>
+            </a:r>
+            <a:r>
+              <a:rPr lang="en-US" altLang="ko-KR" sz="1300" dirty="0" err="1">
+                <a:latin typeface="D2Coding" panose="020B0609020101020101" pitchFamily="49" charset="-127"/>
+                <a:ea typeface="D2Coding" panose="020B0609020101020101" pitchFamily="49" charset="-127"/>
+              </a:rPr>
+              <a:t>multivariate_normal</a:t>
+            </a:r>
+            <a:endParaRPr lang="en-US" altLang="ko-KR" sz="1300" dirty="0">
+              <a:latin typeface="D2Coding" panose="020B0609020101020101" pitchFamily="49" charset="-127"/>
+              <a:ea typeface="D2Coding" panose="020B0609020101020101" pitchFamily="49" charset="-127"/>
+            </a:endParaRPr>
+          </a:p>
+          <a:p>
+            <a:endParaRPr lang="en-US" altLang="ko-KR" sz="1300" dirty="0">
+              <a:latin typeface="D2Coding" panose="020B0609020101020101" pitchFamily="49" charset="-127"/>
+              <a:ea typeface="D2Coding" panose="020B0609020101020101" pitchFamily="49" charset="-127"/>
+            </a:endParaRPr>
+          </a:p>
+          <a:p>
+            <a:r>
+              <a:rPr lang="en-US" altLang="ko-KR" sz="1300" dirty="0">
+                <a:latin typeface="D2Coding" panose="020B0609020101020101" pitchFamily="49" charset="-127"/>
+                <a:ea typeface="D2Coding" panose="020B0609020101020101" pitchFamily="49" charset="-127"/>
+              </a:rPr>
+              <a:t># 1. </a:t>
+            </a:r>
+            <a:r>
+              <a:rPr lang="ko-KR" altLang="en-US" sz="1300" dirty="0">
+                <a:latin typeface="D2Coding" panose="020B0609020101020101" pitchFamily="49" charset="-127"/>
+                <a:ea typeface="D2Coding" panose="020B0609020101020101" pitchFamily="49" charset="-127"/>
+              </a:rPr>
+              <a:t>데이터 생성 </a:t>
+            </a:r>
+            <a:r>
+              <a:rPr lang="en-US" altLang="ko-KR" sz="1300" dirty="0">
+                <a:latin typeface="D2Coding" panose="020B0609020101020101" pitchFamily="49" charset="-127"/>
+                <a:ea typeface="D2Coding" panose="020B0609020101020101" pitchFamily="49" charset="-127"/>
+              </a:rPr>
+              <a:t>(</a:t>
+            </a:r>
+            <a:r>
+              <a:rPr lang="ko-KR" altLang="en-US" sz="1300" dirty="0">
+                <a:latin typeface="D2Coding" panose="020B0609020101020101" pitchFamily="49" charset="-127"/>
+                <a:ea typeface="D2Coding" panose="020B0609020101020101" pitchFamily="49" charset="-127"/>
+              </a:rPr>
+              <a:t>평균 </a:t>
+            </a:r>
+            <a:r>
+              <a:rPr lang="en-US" altLang="ko-KR" sz="1300" dirty="0">
+                <a:latin typeface="D2Coding" panose="020B0609020101020101" pitchFamily="49" charset="-127"/>
+                <a:ea typeface="D2Coding" panose="020B0609020101020101" pitchFamily="49" charset="-127"/>
+              </a:rPr>
+              <a:t>0, </a:t>
+            </a:r>
+            <a:r>
+              <a:rPr lang="ko-KR" altLang="en-US" sz="1300" dirty="0">
+                <a:latin typeface="D2Coding" panose="020B0609020101020101" pitchFamily="49" charset="-127"/>
+                <a:ea typeface="D2Coding" panose="020B0609020101020101" pitchFamily="49" charset="-127"/>
+              </a:rPr>
+              <a:t>표준편차 </a:t>
+            </a:r>
+            <a:r>
+              <a:rPr lang="en-US" altLang="ko-KR" sz="1300" dirty="0">
+                <a:latin typeface="D2Coding" panose="020B0609020101020101" pitchFamily="49" charset="-127"/>
+                <a:ea typeface="D2Coding" panose="020B0609020101020101" pitchFamily="49" charset="-127"/>
+              </a:rPr>
+              <a:t>1 </a:t>
+            </a:r>
+            <a:r>
+              <a:rPr lang="ko-KR" altLang="en-US" sz="1300" dirty="0">
+                <a:latin typeface="D2Coding" panose="020B0609020101020101" pitchFamily="49" charset="-127"/>
+                <a:ea typeface="D2Coding" panose="020B0609020101020101" pitchFamily="49" charset="-127"/>
+              </a:rPr>
+              <a:t>분포 </a:t>
+            </a:r>
+            <a:r>
+              <a:rPr lang="en-US" altLang="ko-KR" sz="1300" dirty="0">
+                <a:latin typeface="D2Coding" panose="020B0609020101020101" pitchFamily="49" charset="-127"/>
+                <a:ea typeface="D2Coding" panose="020B0609020101020101" pitchFamily="49" charset="-127"/>
+              </a:rPr>
+              <a:t>2</a:t>
+            </a:r>
+            <a:r>
+              <a:rPr lang="ko-KR" altLang="en-US" sz="1300" dirty="0">
+                <a:latin typeface="D2Coding" panose="020B0609020101020101" pitchFamily="49" charset="-127"/>
+                <a:ea typeface="D2Coding" panose="020B0609020101020101" pitchFamily="49" charset="-127"/>
+              </a:rPr>
+              <a:t>개</a:t>
+            </a:r>
+            <a:r>
+              <a:rPr lang="en-US" altLang="ko-KR" sz="1300" dirty="0">
+                <a:latin typeface="D2Coding" panose="020B0609020101020101" pitchFamily="49" charset="-127"/>
+                <a:ea typeface="D2Coding" panose="020B0609020101020101" pitchFamily="49" charset="-127"/>
+              </a:rPr>
+              <a:t>)</a:t>
+            </a:r>
+            <a:endParaRPr lang="ko-KR" altLang="en-US" sz="1300" dirty="0">
+              <a:latin typeface="D2Coding" panose="020B0609020101020101" pitchFamily="49" charset="-127"/>
+              <a:ea typeface="D2Coding" panose="020B0609020101020101" pitchFamily="49" charset="-127"/>
+            </a:endParaRPr>
+          </a:p>
+          <a:p>
+            <a:r>
+              <a:rPr lang="en-US" altLang="ko-KR" sz="1300" dirty="0">
+                <a:latin typeface="D2Coding" panose="020B0609020101020101" pitchFamily="49" charset="-127"/>
+                <a:ea typeface="D2Coding" panose="020B0609020101020101" pitchFamily="49" charset="-127"/>
+              </a:rPr>
+              <a:t>mean = [0, 0]</a:t>
+            </a:r>
+          </a:p>
+          <a:p>
+            <a:r>
+              <a:rPr lang="en-US" altLang="ko-KR" sz="1300" dirty="0" err="1">
+                <a:latin typeface="D2Coding" panose="020B0609020101020101" pitchFamily="49" charset="-127"/>
+                <a:ea typeface="D2Coding" panose="020B0609020101020101" pitchFamily="49" charset="-127"/>
+              </a:rPr>
+              <a:t>cov</a:t>
+            </a:r>
+            <a:r>
+              <a:rPr lang="en-US" altLang="ko-KR" sz="1300" dirty="0">
+                <a:latin typeface="D2Coding" panose="020B0609020101020101" pitchFamily="49" charset="-127"/>
+                <a:ea typeface="D2Coding" panose="020B0609020101020101" pitchFamily="49" charset="-127"/>
+              </a:rPr>
+              <a:t> = [[1, 0], [0, 1]]  # </a:t>
+            </a:r>
+            <a:r>
+              <a:rPr lang="ko-KR" altLang="en-US" sz="1300" dirty="0">
+                <a:latin typeface="D2Coding" panose="020B0609020101020101" pitchFamily="49" charset="-127"/>
+                <a:ea typeface="D2Coding" panose="020B0609020101020101" pitchFamily="49" charset="-127"/>
+              </a:rPr>
+              <a:t>독립 변수 가정 </a:t>
+            </a:r>
+            <a:r>
+              <a:rPr lang="en-US" altLang="ko-KR" sz="1300" dirty="0">
+                <a:latin typeface="D2Coding" panose="020B0609020101020101" pitchFamily="49" charset="-127"/>
+                <a:ea typeface="D2Coding" panose="020B0609020101020101" pitchFamily="49" charset="-127"/>
+              </a:rPr>
+              <a:t>(</a:t>
+            </a:r>
+            <a:r>
+              <a:rPr lang="ko-KR" altLang="en-US" sz="1300" dirty="0">
+                <a:latin typeface="D2Coding" panose="020B0609020101020101" pitchFamily="49" charset="-127"/>
+                <a:ea typeface="D2Coding" panose="020B0609020101020101" pitchFamily="49" charset="-127"/>
+              </a:rPr>
+              <a:t>원형 분포</a:t>
+            </a:r>
+            <a:r>
+              <a:rPr lang="en-US" altLang="ko-KR" sz="1300" dirty="0">
+                <a:latin typeface="D2Coding" panose="020B0609020101020101" pitchFamily="49" charset="-127"/>
+                <a:ea typeface="D2Coding" panose="020B0609020101020101" pitchFamily="49" charset="-127"/>
+              </a:rPr>
+              <a:t>)</a:t>
+            </a:r>
+            <a:endParaRPr lang="ko-KR" altLang="en-US" sz="1300" dirty="0">
+              <a:latin typeface="D2Coding" panose="020B0609020101020101" pitchFamily="49" charset="-127"/>
+              <a:ea typeface="D2Coding" panose="020B0609020101020101" pitchFamily="49" charset="-127"/>
+            </a:endParaRPr>
+          </a:p>
+          <a:p>
+            <a:r>
+              <a:rPr lang="en-US" altLang="ko-KR" sz="1300" dirty="0">
+                <a:latin typeface="D2Coding" panose="020B0609020101020101" pitchFamily="49" charset="-127"/>
+                <a:ea typeface="D2Coding" panose="020B0609020101020101" pitchFamily="49" charset="-127"/>
+              </a:rPr>
+              <a:t>N = 10_000</a:t>
+            </a:r>
+          </a:p>
+          <a:p>
+            <a:endParaRPr lang="en-US" altLang="ko-KR" sz="1300" dirty="0">
+              <a:latin typeface="D2Coding" panose="020B0609020101020101" pitchFamily="49" charset="-127"/>
+              <a:ea typeface="D2Coding" panose="020B0609020101020101" pitchFamily="49" charset="-127"/>
+            </a:endParaRPr>
+          </a:p>
+          <a:p>
+            <a:r>
+              <a:rPr lang="en-US" altLang="ko-KR" sz="1300" dirty="0">
+                <a:latin typeface="D2Coding" panose="020B0609020101020101" pitchFamily="49" charset="-127"/>
+                <a:ea typeface="D2Coding" panose="020B0609020101020101" pitchFamily="49" charset="-127"/>
+              </a:rPr>
+              <a:t>x, y = </a:t>
+            </a:r>
+            <a:r>
+              <a:rPr lang="en-US" altLang="ko-KR" sz="1300" dirty="0" err="1">
+                <a:latin typeface="D2Coding" panose="020B0609020101020101" pitchFamily="49" charset="-127"/>
+                <a:ea typeface="D2Coding" panose="020B0609020101020101" pitchFamily="49" charset="-127"/>
+              </a:rPr>
+              <a:t>multivariate_normal.rvs</a:t>
+            </a:r>
+            <a:r>
+              <a:rPr lang="en-US" altLang="ko-KR" sz="1300" dirty="0">
+                <a:latin typeface="D2Coding" panose="020B0609020101020101" pitchFamily="49" charset="-127"/>
+                <a:ea typeface="D2Coding" panose="020B0609020101020101" pitchFamily="49" charset="-127"/>
+              </a:rPr>
+              <a:t>(mean=mean, </a:t>
+            </a:r>
+            <a:r>
+              <a:rPr lang="en-US" altLang="ko-KR" sz="1300" dirty="0" err="1">
+                <a:latin typeface="D2Coding" panose="020B0609020101020101" pitchFamily="49" charset="-127"/>
+                <a:ea typeface="D2Coding" panose="020B0609020101020101" pitchFamily="49" charset="-127"/>
+              </a:rPr>
+              <a:t>cov</a:t>
+            </a:r>
+            <a:r>
+              <a:rPr lang="en-US" altLang="ko-KR" sz="1300" dirty="0">
+                <a:latin typeface="D2Coding" panose="020B0609020101020101" pitchFamily="49" charset="-127"/>
+                <a:ea typeface="D2Coding" panose="020B0609020101020101" pitchFamily="49" charset="-127"/>
+              </a:rPr>
+              <a:t>=</a:t>
+            </a:r>
+            <a:r>
+              <a:rPr lang="en-US" altLang="ko-KR" sz="1300" dirty="0" err="1">
+                <a:latin typeface="D2Coding" panose="020B0609020101020101" pitchFamily="49" charset="-127"/>
+                <a:ea typeface="D2Coding" panose="020B0609020101020101" pitchFamily="49" charset="-127"/>
+              </a:rPr>
+              <a:t>cov</a:t>
+            </a:r>
+            <a:r>
+              <a:rPr lang="en-US" altLang="ko-KR" sz="1300" dirty="0">
+                <a:latin typeface="D2Coding" panose="020B0609020101020101" pitchFamily="49" charset="-127"/>
+                <a:ea typeface="D2Coding" panose="020B0609020101020101" pitchFamily="49" charset="-127"/>
+              </a:rPr>
+              <a:t>, size=N).T</a:t>
+            </a:r>
+          </a:p>
+          <a:p>
+            <a:endParaRPr lang="en-US" altLang="ko-KR" sz="1300" dirty="0">
+              <a:latin typeface="D2Coding" panose="020B0609020101020101" pitchFamily="49" charset="-127"/>
+              <a:ea typeface="D2Coding" panose="020B0609020101020101" pitchFamily="49" charset="-127"/>
+            </a:endParaRPr>
+          </a:p>
+          <a:p>
+            <a:r>
+              <a:rPr lang="en-US" altLang="ko-KR" sz="1300" dirty="0">
+                <a:latin typeface="D2Coding" panose="020B0609020101020101" pitchFamily="49" charset="-127"/>
+                <a:ea typeface="D2Coding" panose="020B0609020101020101" pitchFamily="49" charset="-127"/>
+              </a:rPr>
+              <a:t># Draw a combo histogram and scatterplot with density contours</a:t>
+            </a:r>
+          </a:p>
+          <a:p>
+            <a:r>
+              <a:rPr lang="en-US" altLang="ko-KR" sz="1300" dirty="0">
+                <a:latin typeface="D2Coding" panose="020B0609020101020101" pitchFamily="49" charset="-127"/>
+                <a:ea typeface="D2Coding" panose="020B0609020101020101" pitchFamily="49" charset="-127"/>
+              </a:rPr>
+              <a:t>f, ax = </a:t>
+            </a:r>
+            <a:r>
+              <a:rPr lang="en-US" altLang="ko-KR" sz="1300" dirty="0" err="1">
+                <a:latin typeface="D2Coding" panose="020B0609020101020101" pitchFamily="49" charset="-127"/>
+                <a:ea typeface="D2Coding" panose="020B0609020101020101" pitchFamily="49" charset="-127"/>
+              </a:rPr>
+              <a:t>plt.subplots</a:t>
+            </a:r>
+            <a:r>
+              <a:rPr lang="en-US" altLang="ko-KR" sz="1300" dirty="0">
+                <a:latin typeface="D2Coding" panose="020B0609020101020101" pitchFamily="49" charset="-127"/>
+                <a:ea typeface="D2Coding" panose="020B0609020101020101" pitchFamily="49" charset="-127"/>
+              </a:rPr>
+              <a:t>(</a:t>
+            </a:r>
+            <a:r>
+              <a:rPr lang="en-US" altLang="ko-KR" sz="1300" dirty="0" err="1">
+                <a:latin typeface="D2Coding" panose="020B0609020101020101" pitchFamily="49" charset="-127"/>
+                <a:ea typeface="D2Coding" panose="020B0609020101020101" pitchFamily="49" charset="-127"/>
+              </a:rPr>
+              <a:t>figsize</a:t>
+            </a:r>
+            <a:r>
+              <a:rPr lang="en-US" altLang="ko-KR" sz="1300" dirty="0">
+                <a:latin typeface="D2Coding" panose="020B0609020101020101" pitchFamily="49" charset="-127"/>
+                <a:ea typeface="D2Coding" panose="020B0609020101020101" pitchFamily="49" charset="-127"/>
+              </a:rPr>
+              <a:t>=(6, 6))</a:t>
+            </a:r>
+          </a:p>
+          <a:p>
+            <a:r>
+              <a:rPr lang="en-US" altLang="ko-KR" sz="1300" dirty="0" err="1">
+                <a:latin typeface="D2Coding" panose="020B0609020101020101" pitchFamily="49" charset="-127"/>
+                <a:ea typeface="D2Coding" panose="020B0609020101020101" pitchFamily="49" charset="-127"/>
+              </a:rPr>
+              <a:t>sns.scatterplot</a:t>
+            </a:r>
+            <a:r>
+              <a:rPr lang="en-US" altLang="ko-KR" sz="1300" dirty="0">
+                <a:latin typeface="D2Coding" panose="020B0609020101020101" pitchFamily="49" charset="-127"/>
+                <a:ea typeface="D2Coding" panose="020B0609020101020101" pitchFamily="49" charset="-127"/>
+              </a:rPr>
+              <a:t>(x=x, y=y, s=5, color=".15")</a:t>
+            </a:r>
+          </a:p>
+          <a:p>
+            <a:r>
+              <a:rPr lang="en-US" altLang="ko-KR" sz="1300" dirty="0" err="1">
+                <a:latin typeface="D2Coding" panose="020B0609020101020101" pitchFamily="49" charset="-127"/>
+                <a:ea typeface="D2Coding" panose="020B0609020101020101" pitchFamily="49" charset="-127"/>
+              </a:rPr>
+              <a:t>sns.histplot</a:t>
+            </a:r>
+            <a:r>
+              <a:rPr lang="en-US" altLang="ko-KR" sz="1300" dirty="0">
+                <a:latin typeface="D2Coding" panose="020B0609020101020101" pitchFamily="49" charset="-127"/>
+                <a:ea typeface="D2Coding" panose="020B0609020101020101" pitchFamily="49" charset="-127"/>
+              </a:rPr>
+              <a:t>(x=x, y=y, bins=50, </a:t>
+            </a:r>
+            <a:r>
+              <a:rPr lang="en-US" altLang="ko-KR" sz="1300" dirty="0" err="1">
+                <a:latin typeface="D2Coding" panose="020B0609020101020101" pitchFamily="49" charset="-127"/>
+                <a:ea typeface="D2Coding" panose="020B0609020101020101" pitchFamily="49" charset="-127"/>
+              </a:rPr>
+              <a:t>pthresh</a:t>
+            </a:r>
+            <a:r>
+              <a:rPr lang="en-US" altLang="ko-KR" sz="1300" dirty="0">
+                <a:latin typeface="D2Coding" panose="020B0609020101020101" pitchFamily="49" charset="-127"/>
+                <a:ea typeface="D2Coding" panose="020B0609020101020101" pitchFamily="49" charset="-127"/>
+              </a:rPr>
+              <a:t>=.1, </a:t>
+            </a:r>
+            <a:r>
+              <a:rPr lang="en-US" altLang="ko-KR" sz="1300" dirty="0" err="1">
+                <a:latin typeface="D2Coding" panose="020B0609020101020101" pitchFamily="49" charset="-127"/>
+                <a:ea typeface="D2Coding" panose="020B0609020101020101" pitchFamily="49" charset="-127"/>
+              </a:rPr>
+              <a:t>cmap</a:t>
+            </a:r>
+            <a:r>
+              <a:rPr lang="en-US" altLang="ko-KR" sz="1300" dirty="0">
+                <a:latin typeface="D2Coding" panose="020B0609020101020101" pitchFamily="49" charset="-127"/>
+                <a:ea typeface="D2Coding" panose="020B0609020101020101" pitchFamily="49" charset="-127"/>
+              </a:rPr>
+              <a:t>="mako")</a:t>
+            </a:r>
+          </a:p>
+          <a:p>
+            <a:r>
+              <a:rPr lang="en-US" altLang="ko-KR" sz="1300" dirty="0" err="1">
+                <a:latin typeface="D2Coding" panose="020B0609020101020101" pitchFamily="49" charset="-127"/>
+                <a:ea typeface="D2Coding" panose="020B0609020101020101" pitchFamily="49" charset="-127"/>
+              </a:rPr>
+              <a:t>sns.kdeplot</a:t>
+            </a:r>
+            <a:r>
+              <a:rPr lang="en-US" altLang="ko-KR" sz="1300" dirty="0">
+                <a:latin typeface="D2Coding" panose="020B0609020101020101" pitchFamily="49" charset="-127"/>
+                <a:ea typeface="D2Coding" panose="020B0609020101020101" pitchFamily="49" charset="-127"/>
+              </a:rPr>
+              <a:t>(x=x, y=y, levels=5, color="w", linewidths=1)</a:t>
+            </a:r>
+          </a:p>
+        </p:txBody>
+      </p:sp>
+      <p:sp>
+        <p:nvSpPr>
+          <p:cNvPr id="3" name="TextBox 2">
+            <a:extLst>
+              <a:ext uri="{FF2B5EF4-FFF2-40B4-BE49-F238E27FC236}">
+                <a16:creationId xmlns:a16="http://schemas.microsoft.com/office/drawing/2014/main" id="{C2F3BD2A-0BC9-6490-4E92-669DF121DD6C}"/>
+              </a:ext>
+            </a:extLst>
+          </p:cNvPr>
+          <p:cNvSpPr txBox="1"/>
+          <p:nvPr/>
+        </p:nvSpPr>
+        <p:spPr>
+          <a:xfrm>
+            <a:off x="5623753" y="2242629"/>
+            <a:ext cx="2723823" cy="369332"/>
+          </a:xfrm>
+          <a:prstGeom prst="rect">
+            <a:avLst/>
+          </a:prstGeom>
+          <a:noFill/>
+        </p:spPr>
+        <p:txBody>
+          <a:bodyPr wrap="none" rtlCol="0">
+            <a:spAutoFit/>
+          </a:bodyPr>
+          <a:lstStyle/>
+          <a:p>
+            <a:r>
+              <a:rPr lang="en-US" altLang="ko-KR" dirty="0" err="1">
+                <a:latin typeface="D2Coding" panose="020B0609020101020101" pitchFamily="49" charset="-127"/>
+                <a:ea typeface="D2Coding" panose="020B0609020101020101" pitchFamily="49" charset="-127"/>
+                <a:cs typeface="맑은 고딕 Semilight" panose="020B0502040204020203" pitchFamily="50" charset="-127"/>
+                <a:hlinkClick r:id="rId3">
+                  <a:extLst>
+                    <a:ext uri="{A12FA001-AC4F-418D-AE19-62706E023703}">
+                      <ahyp:hlinkClr xmlns:ahyp="http://schemas.microsoft.com/office/drawing/2018/hyperlinkcolor" val="tx"/>
+                    </a:ext>
+                  </a:extLst>
+                </a:hlinkClick>
+              </a:rPr>
+              <a:t>layered_bivariate_plot</a:t>
+            </a:r>
+            <a:endParaRPr lang="ko-KR" altLang="en-US" dirty="0">
+              <a:latin typeface="D2Coding" panose="020B0609020101020101" pitchFamily="49" charset="-127"/>
+              <a:ea typeface="D2Coding" panose="020B0609020101020101" pitchFamily="49" charset="-127"/>
+              <a:cs typeface="맑은 고딕 Semilight" panose="020B0502040204020203" pitchFamily="50" charset="-127"/>
+            </a:endParaRPr>
+          </a:p>
+        </p:txBody>
+      </p:sp>
+    </p:spTree>
+    <p:extLst>
+      <p:ext uri="{BB962C8B-B14F-4D97-AF65-F5344CB8AC3E}">
+        <p14:creationId xmlns:p14="http://schemas.microsoft.com/office/powerpoint/2010/main" val="1361648862"/>
+      </p:ext>
+    </p:extLst>
+  </p:cSld>
+  <p:clrMapOvr>
+    <a:masterClrMapping/>
+  </p:clrMapOvr>
+</p:sld>
+</file>
+
+<file path=ppt/slides/slide29.xml><?xml version="1.0" encoding="utf-8"?>
+<p:sld xmlns:a="http://schemas.openxmlformats.org/drawingml/2006/main" xmlns:r="http://schemas.openxmlformats.org/officeDocument/2006/relationships" xmlns:p="http://schemas.openxmlformats.org/presentationml/2006/main">
+  <p:cSld>
+    <p:spTree>
+      <p:nvGrpSpPr>
+        <p:cNvPr id="1" name="">
+          <a:extLst>
+            <a:ext uri="{FF2B5EF4-FFF2-40B4-BE49-F238E27FC236}">
+              <a16:creationId xmlns:a16="http://schemas.microsoft.com/office/drawing/2014/main" id="{DA4760F6-B3C5-0C46-4C7A-2D2B293E49B3}"/>
+            </a:ext>
+          </a:extLst>
+        </p:cNvPr>
+        <p:cNvGrpSpPr/>
+        <p:nvPr/>
+      </p:nvGrpSpPr>
+      <p:grpSpPr>
+        <a:xfrm>
+          <a:off x="0" y="0"/>
+          <a:ext cx="0" cy="0"/>
+          <a:chOff x="0" y="0"/>
+          <a:chExt cx="0" cy="0"/>
+        </a:xfrm>
+      </p:grpSpPr>
+      <p:sp>
+        <p:nvSpPr>
+          <p:cNvPr id="4" name="슬라이드 번호 개체 틀 3">
+            <a:extLst>
+              <a:ext uri="{FF2B5EF4-FFF2-40B4-BE49-F238E27FC236}">
+                <a16:creationId xmlns:a16="http://schemas.microsoft.com/office/drawing/2014/main" id="{E3D09807-D0F2-214E-7585-7DDA567FD8B6}"/>
+              </a:ext>
+            </a:extLst>
+          </p:cNvPr>
+          <p:cNvSpPr>
+            <a:spLocks noGrp="1"/>
+          </p:cNvSpPr>
+          <p:nvPr>
+            <p:ph type="sldNum" sz="quarter" idx="12"/>
+          </p:nvPr>
+        </p:nvSpPr>
+        <p:spPr>
+          <a:xfrm>
+            <a:off x="10514011" y="6036261"/>
+            <a:ext cx="753545" cy="365125"/>
+          </a:xfrm>
+        </p:spPr>
+        <p:txBody>
+          <a:bodyPr/>
+          <a:lstStyle/>
+          <a:p>
+            <a:fld id="{D57F1E4F-1CFF-5643-939E-217C01CDF565}" type="slidenum">
+              <a:rPr lang="en-US" smtClean="0"/>
+              <a:pPr/>
+              <a:t>29</a:t>
+            </a:fld>
+            <a:endParaRPr lang="en-US" dirty="0"/>
+          </a:p>
+        </p:txBody>
+      </p:sp>
+      <p:sp>
+        <p:nvSpPr>
+          <p:cNvPr id="39" name="제목 1">
+            <a:extLst>
+              <a:ext uri="{FF2B5EF4-FFF2-40B4-BE49-F238E27FC236}">
+                <a16:creationId xmlns:a16="http://schemas.microsoft.com/office/drawing/2014/main" id="{AB899600-7233-CA9D-5EAD-8C04116B3B17}"/>
+              </a:ext>
+            </a:extLst>
+          </p:cNvPr>
+          <p:cNvSpPr txBox="1">
+            <a:spLocks/>
+          </p:cNvSpPr>
+          <p:nvPr/>
+        </p:nvSpPr>
+        <p:spPr>
+          <a:xfrm>
+            <a:off x="590464" y="395619"/>
+            <a:ext cx="10353762" cy="766439"/>
+          </a:xfrm>
+          <a:prstGeom prst="rect">
+            <a:avLst/>
+          </a:prstGeom>
+        </p:spPr>
+        <p:txBody>
+          <a:bodyPr vert="horz" lIns="91440" tIns="45720" rIns="91440" bIns="45720" rtlCol="0" anchor="ctr">
+            <a:normAutofit/>
+          </a:bodyPr>
+          <a:lstStyle>
+            <a:lvl1pPr algn="ctr" defTabSz="914400" rtl="0" eaLnBrk="1" latinLnBrk="1" hangingPunct="1">
+              <a:lnSpc>
+                <a:spcPct val="90000"/>
+              </a:lnSpc>
+              <a:spcBef>
+                <a:spcPct val="0"/>
+              </a:spcBef>
+              <a:buNone/>
+              <a:defRPr sz="3200" kern="1200" cap="all" baseline="0">
+                <a:solidFill>
+                  <a:schemeClr val="tx1"/>
+                </a:solidFill>
+                <a:effectLst/>
+                <a:latin typeface="Batang" panose="02030600000101010101" pitchFamily="18" charset="-127"/>
+                <a:ea typeface="Batang" panose="02030600000101010101" pitchFamily="18" charset="-127"/>
+                <a:cs typeface="+mj-cs"/>
+              </a:defRPr>
+            </a:lvl1pPr>
+          </a:lstStyle>
+          <a:p>
+            <a:pPr algn="l"/>
+            <a:r>
+              <a:rPr lang="en-US" altLang="ko-KR" sz="2800" cap="none" dirty="0">
+                <a:latin typeface="ADLaM Display" panose="02010000000000000000" pitchFamily="2" charset="0"/>
+                <a:cs typeface="ADLaM Display" panose="02010000000000000000" pitchFamily="2" charset="0"/>
+              </a:rPr>
+              <a:t>gaussian mixture model distributions</a:t>
+            </a:r>
+            <a:endParaRPr lang="ko-KR" altLang="en-US" sz="2800" cap="none" dirty="0">
+              <a:latin typeface="ADLaM Display" panose="02010000000000000000" pitchFamily="2" charset="0"/>
+              <a:cs typeface="ADLaM Display" panose="02010000000000000000" pitchFamily="2" charset="0"/>
+            </a:endParaRPr>
+          </a:p>
+        </p:txBody>
+      </p:sp>
+      <p:pic>
+        <p:nvPicPr>
+          <p:cNvPr id="5" name="Picture 2" descr="한 여자가 노트북 컴퓨터에 타이핑을 하고 있다">
+            <a:extLst>
+              <a:ext uri="{FF2B5EF4-FFF2-40B4-BE49-F238E27FC236}">
+                <a16:creationId xmlns:a16="http://schemas.microsoft.com/office/drawing/2014/main" id="{6E5CA069-05A3-B6DC-F65D-8E9DC566CFBF}"/>
+              </a:ext>
+            </a:extLst>
+          </p:cNvPr>
+          <p:cNvPicPr>
+            <a:picLocks noChangeAspect="1" noChangeArrowheads="1"/>
+          </p:cNvPicPr>
+          <p:nvPr/>
+        </p:nvPicPr>
+        <p:blipFill>
+          <a:blip r:embed="rId2">
+            <a:extLst>
+              <a:ext uri="{28A0092B-C50C-407E-A947-70E740481C1C}">
+                <a14:useLocalDpi xmlns:a14="http://schemas.microsoft.com/office/drawing/2010/main" val="0"/>
+              </a:ext>
+            </a:extLst>
+          </a:blip>
+          <a:srcRect/>
+          <a:stretch>
+            <a:fillRect/>
+          </a:stretch>
+        </p:blipFill>
+        <p:spPr bwMode="auto">
+          <a:xfrm>
+            <a:off x="10428779" y="52082"/>
+            <a:ext cx="1677554" cy="1109976"/>
+          </a:xfrm>
+          <a:prstGeom prst="rect">
+            <a:avLst/>
+          </a:prstGeom>
+          <a:noFill/>
+          <a:extLst>
+            <a:ext uri="{909E8E84-426E-40DD-AFC4-6F175D3DCCD1}">
+              <a14:hiddenFill xmlns:a14="http://schemas.microsoft.com/office/drawing/2010/main">
+                <a:solidFill>
+                  <a:srgbClr val="FFFFFF"/>
+                </a:solidFill>
+              </a14:hiddenFill>
+            </a:ext>
+          </a:extLst>
+        </p:spPr>
+      </p:pic>
+      <p:pic>
+        <p:nvPicPr>
+          <p:cNvPr id="6" name="Picture 2">
+            <a:extLst>
+              <a:ext uri="{FF2B5EF4-FFF2-40B4-BE49-F238E27FC236}">
+                <a16:creationId xmlns:a16="http://schemas.microsoft.com/office/drawing/2014/main" id="{8384DCA8-F9C0-24B4-91FD-BB3E5308823F}"/>
+              </a:ext>
+            </a:extLst>
+          </p:cNvPr>
+          <p:cNvPicPr>
+            <a:picLocks noChangeAspect="1" noChangeArrowheads="1"/>
+          </p:cNvPicPr>
+          <p:nvPr/>
+        </p:nvPicPr>
+        <p:blipFill>
+          <a:blip r:embed="rId3">
+            <a:extLst>
+              <a:ext uri="{28A0092B-C50C-407E-A947-70E740481C1C}">
+                <a14:useLocalDpi xmlns:a14="http://schemas.microsoft.com/office/drawing/2010/main" val="0"/>
+              </a:ext>
+            </a:extLst>
+          </a:blip>
+          <a:srcRect/>
+          <a:stretch>
+            <a:fillRect/>
+          </a:stretch>
+        </p:blipFill>
+        <p:spPr bwMode="auto">
+          <a:xfrm>
+            <a:off x="690564" y="2654753"/>
+            <a:ext cx="2580698" cy="2752744"/>
+          </a:xfrm>
+          <a:prstGeom prst="rect">
+            <a:avLst/>
+          </a:prstGeom>
+          <a:noFill/>
+          <a:extLst>
+            <a:ext uri="{909E8E84-426E-40DD-AFC4-6F175D3DCCD1}">
+              <a14:hiddenFill xmlns:a14="http://schemas.microsoft.com/office/drawing/2010/main">
+                <a:solidFill>
+                  <a:srgbClr val="FFFFFF"/>
+                </a:solidFill>
+              </a14:hiddenFill>
+            </a:ext>
+          </a:extLst>
+        </p:spPr>
+      </p:pic>
+      <p:pic>
+        <p:nvPicPr>
+          <p:cNvPr id="1028" name="Picture 4">
+            <a:extLst>
+              <a:ext uri="{FF2B5EF4-FFF2-40B4-BE49-F238E27FC236}">
+                <a16:creationId xmlns:a16="http://schemas.microsoft.com/office/drawing/2014/main" id="{FF274F54-3845-5E49-5105-70830BD292D6}"/>
+              </a:ext>
+            </a:extLst>
+          </p:cNvPr>
+          <p:cNvPicPr>
+            <a:picLocks noChangeAspect="1" noChangeArrowheads="1"/>
+          </p:cNvPicPr>
+          <p:nvPr/>
+        </p:nvPicPr>
+        <p:blipFill>
+          <a:blip r:embed="rId4">
+            <a:extLst>
+              <a:ext uri="{28A0092B-C50C-407E-A947-70E740481C1C}">
+                <a14:useLocalDpi xmlns:a14="http://schemas.microsoft.com/office/drawing/2010/main" val="0"/>
+              </a:ext>
+            </a:extLst>
+          </a:blip>
+          <a:srcRect/>
+          <a:stretch>
+            <a:fillRect/>
+          </a:stretch>
+        </p:blipFill>
+        <p:spPr bwMode="auto">
+          <a:xfrm>
+            <a:off x="3452968" y="2654751"/>
+            <a:ext cx="2674837" cy="2752745"/>
+          </a:xfrm>
+          <a:prstGeom prst="rect">
+            <a:avLst/>
+          </a:prstGeom>
+          <a:noFill/>
+          <a:extLst>
+            <a:ext uri="{909E8E84-426E-40DD-AFC4-6F175D3DCCD1}">
+              <a14:hiddenFill xmlns:a14="http://schemas.microsoft.com/office/drawing/2010/main">
+                <a:solidFill>
+                  <a:srgbClr val="FFFFFF"/>
+                </a:solidFill>
+              </a14:hiddenFill>
+            </a:ext>
+          </a:extLst>
+        </p:spPr>
+      </p:pic>
+      <p:pic>
+        <p:nvPicPr>
+          <p:cNvPr id="1030" name="Picture 6">
+            <a:extLst>
+              <a:ext uri="{FF2B5EF4-FFF2-40B4-BE49-F238E27FC236}">
+                <a16:creationId xmlns:a16="http://schemas.microsoft.com/office/drawing/2014/main" id="{C48DC78F-7FF1-78D4-7A0B-4F2D84999D05}"/>
+              </a:ext>
+            </a:extLst>
+          </p:cNvPr>
+          <p:cNvPicPr>
+            <a:picLocks noChangeAspect="1" noChangeArrowheads="1"/>
+          </p:cNvPicPr>
+          <p:nvPr/>
+        </p:nvPicPr>
+        <p:blipFill>
+          <a:blip r:embed="rId5">
+            <a:extLst>
+              <a:ext uri="{28A0092B-C50C-407E-A947-70E740481C1C}">
+                <a14:useLocalDpi xmlns:a14="http://schemas.microsoft.com/office/drawing/2010/main" val="0"/>
+              </a:ext>
+            </a:extLst>
+          </a:blip>
+          <a:srcRect/>
+          <a:stretch>
+            <a:fillRect/>
+          </a:stretch>
+        </p:blipFill>
+        <p:spPr bwMode="auto">
+          <a:xfrm>
+            <a:off x="6309511" y="2654752"/>
+            <a:ext cx="2627226" cy="2752744"/>
+          </a:xfrm>
+          <a:prstGeom prst="rect">
+            <a:avLst/>
+          </a:prstGeom>
+          <a:noFill/>
+          <a:extLst>
+            <a:ext uri="{909E8E84-426E-40DD-AFC4-6F175D3DCCD1}">
+              <a14:hiddenFill xmlns:a14="http://schemas.microsoft.com/office/drawing/2010/main">
+                <a:solidFill>
+                  <a:srgbClr val="FFFFFF"/>
+                </a:solidFill>
+              </a14:hiddenFill>
+            </a:ext>
+          </a:extLst>
+        </p:spPr>
+      </p:pic>
+      <p:sp>
+        <p:nvSpPr>
+          <p:cNvPr id="7" name="TextBox 6">
+            <a:extLst>
+              <a:ext uri="{FF2B5EF4-FFF2-40B4-BE49-F238E27FC236}">
+                <a16:creationId xmlns:a16="http://schemas.microsoft.com/office/drawing/2014/main" id="{C9EFBC82-4C26-34AD-7EC1-939B1DDB48AF}"/>
+              </a:ext>
+            </a:extLst>
+          </p:cNvPr>
+          <p:cNvSpPr txBox="1"/>
+          <p:nvPr/>
+        </p:nvSpPr>
+        <p:spPr>
+          <a:xfrm>
+            <a:off x="590464" y="1505595"/>
+            <a:ext cx="9382697" cy="369332"/>
+          </a:xfrm>
+          <a:prstGeom prst="rect">
+            <a:avLst/>
+          </a:prstGeom>
+          <a:noFill/>
+        </p:spPr>
+        <p:txBody>
+          <a:bodyPr wrap="none" rtlCol="0">
+            <a:spAutoFit/>
+          </a:bodyPr>
+          <a:lstStyle/>
+          <a:p>
+            <a:r>
+              <a:rPr lang="ko-KR" altLang="en-US" dirty="0">
+                <a:latin typeface="맑은 고딕 Semilight" panose="020B0502040204020203" pitchFamily="50" charset="-127"/>
+                <a:ea typeface="맑은 고딕 Semilight" panose="020B0502040204020203" pitchFamily="50" charset="-127"/>
+                <a:cs typeface="맑은 고딕 Semilight" panose="020B0502040204020203" pitchFamily="50" charset="-127"/>
+              </a:rPr>
+              <a:t>여러 개의 </a:t>
+            </a:r>
+            <a:r>
+              <a:rPr lang="ko-KR" altLang="en-US" dirty="0" err="1">
+                <a:latin typeface="맑은 고딕 Semilight" panose="020B0502040204020203" pitchFamily="50" charset="-127"/>
+                <a:ea typeface="맑은 고딕 Semilight" panose="020B0502040204020203" pitchFamily="50" charset="-127"/>
+                <a:cs typeface="맑은 고딕 Semilight" panose="020B0502040204020203" pitchFamily="50" charset="-127"/>
+              </a:rPr>
+              <a:t>가우시안</a:t>
+            </a:r>
+            <a:r>
+              <a:rPr lang="ko-KR" altLang="en-US" dirty="0">
+                <a:latin typeface="맑은 고딕 Semilight" panose="020B0502040204020203" pitchFamily="50" charset="-127"/>
+                <a:ea typeface="맑은 고딕 Semilight" panose="020B0502040204020203" pitchFamily="50" charset="-127"/>
+                <a:cs typeface="맑은 고딕 Semilight" panose="020B0502040204020203" pitchFamily="50" charset="-127"/>
+              </a:rPr>
+              <a:t> 정규분포가 데이터 분포에 혼재되어 숨어있는 그래프를 시각화 해보자</a:t>
+            </a:r>
+          </a:p>
+        </p:txBody>
+      </p:sp>
+      <p:pic>
+        <p:nvPicPr>
+          <p:cNvPr id="2050" name="Picture 2">
+            <a:extLst>
+              <a:ext uri="{FF2B5EF4-FFF2-40B4-BE49-F238E27FC236}">
+                <a16:creationId xmlns:a16="http://schemas.microsoft.com/office/drawing/2014/main" id="{727E3A01-DE2D-B33A-9D6E-C090DACA01A9}"/>
+              </a:ext>
+            </a:extLst>
+          </p:cNvPr>
+          <p:cNvPicPr>
+            <a:picLocks noChangeAspect="1" noChangeArrowheads="1"/>
+          </p:cNvPicPr>
+          <p:nvPr/>
+        </p:nvPicPr>
+        <p:blipFill>
+          <a:blip r:embed="rId6">
+            <a:extLst>
+              <a:ext uri="{28A0092B-C50C-407E-A947-70E740481C1C}">
+                <a14:useLocalDpi xmlns:a14="http://schemas.microsoft.com/office/drawing/2010/main" val="0"/>
+              </a:ext>
+            </a:extLst>
+          </a:blip>
+          <a:srcRect/>
+          <a:stretch>
+            <a:fillRect/>
+          </a:stretch>
+        </p:blipFill>
+        <p:spPr bwMode="auto">
+          <a:xfrm>
+            <a:off x="9118444" y="2654752"/>
+            <a:ext cx="2733889" cy="2752744"/>
+          </a:xfrm>
+          <a:prstGeom prst="rect">
+            <a:avLst/>
+          </a:prstGeom>
+          <a:noFill/>
+          <a:extLst>
+            <a:ext uri="{909E8E84-426E-40DD-AFC4-6F175D3DCCD1}">
+              <a14:hiddenFill xmlns:a14="http://schemas.microsoft.com/office/drawing/2010/main">
+                <a:solidFill>
+                  <a:srgbClr val="FFFFFF"/>
+                </a:solidFill>
+              </a14:hiddenFill>
+            </a:ext>
+          </a:extLst>
+        </p:spPr>
+      </p:pic>
+      <p:sp>
+        <p:nvSpPr>
+          <p:cNvPr id="2" name="TextBox 1">
+            <a:extLst>
+              <a:ext uri="{FF2B5EF4-FFF2-40B4-BE49-F238E27FC236}">
+                <a16:creationId xmlns:a16="http://schemas.microsoft.com/office/drawing/2014/main" id="{729BF775-3F2E-E3D0-972F-C2B8496A918A}"/>
+              </a:ext>
+            </a:extLst>
+          </p:cNvPr>
+          <p:cNvSpPr txBox="1"/>
+          <p:nvPr/>
+        </p:nvSpPr>
+        <p:spPr>
+          <a:xfrm>
+            <a:off x="9118443" y="2319026"/>
+            <a:ext cx="2236510" cy="338554"/>
+          </a:xfrm>
+          <a:prstGeom prst="rect">
+            <a:avLst/>
+          </a:prstGeom>
+          <a:noFill/>
+        </p:spPr>
+        <p:txBody>
+          <a:bodyPr wrap="none" rtlCol="0">
+            <a:spAutoFit/>
+          </a:bodyPr>
+          <a:lstStyle/>
+          <a:p>
+            <a:r>
+              <a:rPr lang="en-US" altLang="ko-KR" sz="1600" dirty="0" err="1">
+                <a:latin typeface="D2Coding" panose="020B0609020101020101" pitchFamily="49" charset="-127"/>
+                <a:ea typeface="D2Coding" panose="020B0609020101020101" pitchFamily="49" charset="-127"/>
+                <a:hlinkClick r:id="rId7">
+                  <a:extLst>
+                    <a:ext uri="{A12FA001-AC4F-418D-AE19-62706E023703}">
+                      <ahyp:hlinkClr xmlns:ahyp="http://schemas.microsoft.com/office/drawing/2018/hyperlinkcolor" val="tx"/>
+                    </a:ext>
+                  </a:extLst>
+                </a:hlinkClick>
+              </a:rPr>
+              <a:t>smooth_bivariate_kde</a:t>
+            </a:r>
+            <a:endParaRPr lang="ko-KR" altLang="en-US" sz="1600" dirty="0">
+              <a:latin typeface="D2Coding" panose="020B0609020101020101" pitchFamily="49" charset="-127"/>
+              <a:ea typeface="D2Coding" panose="020B0609020101020101" pitchFamily="49" charset="-127"/>
+            </a:endParaRPr>
+          </a:p>
+        </p:txBody>
+      </p:sp>
+    </p:spTree>
+    <p:extLst>
+      <p:ext uri="{BB962C8B-B14F-4D97-AF65-F5344CB8AC3E}">
+        <p14:creationId xmlns:p14="http://schemas.microsoft.com/office/powerpoint/2010/main" val="1069994721"/>
+      </p:ext>
+    </p:extLst>
+  </p:cSld>
+  <p:clrMapOvr>
+    <a:masterClrMapping/>
+  </p:clrMapOvr>
+</p:sld>
+</file>
+
+<file path=ppt/slides/slide3.xml><?xml version="1.0" encoding="utf-8"?>
+<p:sld xmlns:a="http://schemas.openxmlformats.org/drawingml/2006/main" xmlns:r="http://schemas.openxmlformats.org/officeDocument/2006/relationships" xmlns:p="http://schemas.openxmlformats.org/presentationml/2006/main">
+  <p:cSld>
+    <p:spTree>
+      <p:nvGrpSpPr>
+        <p:cNvPr id="1" name="">
+          <a:extLst>
+            <a:ext uri="{FF2B5EF4-FFF2-40B4-BE49-F238E27FC236}">
+              <a16:creationId xmlns:a16="http://schemas.microsoft.com/office/drawing/2014/main" id="{88FFB53F-5797-0BB2-9323-F166DE5B6771}"/>
+            </a:ext>
+          </a:extLst>
+        </p:cNvPr>
+        <p:cNvGrpSpPr/>
+        <p:nvPr/>
+      </p:nvGrpSpPr>
+      <p:grpSpPr>
+        <a:xfrm>
+          <a:off x="0" y="0"/>
+          <a:ext cx="0" cy="0"/>
+          <a:chOff x="0" y="0"/>
+          <a:chExt cx="0" cy="0"/>
+        </a:xfrm>
+      </p:grpSpPr>
+      <p:sp>
+        <p:nvSpPr>
+          <p:cNvPr id="4" name="슬라이드 번호 개체 틀 3">
+            <a:extLst>
+              <a:ext uri="{FF2B5EF4-FFF2-40B4-BE49-F238E27FC236}">
+                <a16:creationId xmlns:a16="http://schemas.microsoft.com/office/drawing/2014/main" id="{DBFB5B3E-2733-6F10-C433-7C314850C9FE}"/>
+              </a:ext>
+            </a:extLst>
+          </p:cNvPr>
+          <p:cNvSpPr>
+            <a:spLocks noGrp="1"/>
+          </p:cNvSpPr>
+          <p:nvPr>
+            <p:ph type="sldNum" sz="quarter" idx="12"/>
+          </p:nvPr>
+        </p:nvSpPr>
+        <p:spPr>
+          <a:xfrm>
+            <a:off x="10514011" y="6036261"/>
+            <a:ext cx="753545" cy="365125"/>
+          </a:xfrm>
+        </p:spPr>
+        <p:txBody>
+          <a:bodyPr/>
+          <a:lstStyle/>
+          <a:p>
+            <a:fld id="{D57F1E4F-1CFF-5643-939E-217C01CDF565}" type="slidenum">
+              <a:rPr lang="en-US" smtClean="0"/>
+              <a:pPr/>
+              <a:t>3</a:t>
+            </a:fld>
+            <a:endParaRPr lang="en-US" dirty="0"/>
+          </a:p>
+        </p:txBody>
+      </p:sp>
+      <p:sp>
+        <p:nvSpPr>
+          <p:cNvPr id="3" name="제목 1">
+            <a:extLst>
+              <a:ext uri="{FF2B5EF4-FFF2-40B4-BE49-F238E27FC236}">
+                <a16:creationId xmlns:a16="http://schemas.microsoft.com/office/drawing/2014/main" id="{C56A9490-8D65-6528-22C1-98B7D5080918}"/>
+              </a:ext>
+            </a:extLst>
+          </p:cNvPr>
+          <p:cNvSpPr txBox="1">
+            <a:spLocks/>
+          </p:cNvSpPr>
+          <p:nvPr/>
+        </p:nvSpPr>
+        <p:spPr>
+          <a:xfrm>
+            <a:off x="475645" y="481983"/>
+            <a:ext cx="10353762" cy="766439"/>
+          </a:xfrm>
+          <a:prstGeom prst="rect">
+            <a:avLst/>
+          </a:prstGeom>
+        </p:spPr>
+        <p:txBody>
+          <a:bodyPr vert="horz" lIns="91440" tIns="45720" rIns="91440" bIns="45720" rtlCol="0" anchor="ctr">
+            <a:normAutofit/>
+          </a:bodyPr>
+          <a:lstStyle>
+            <a:lvl1pPr algn="ctr" defTabSz="914400" rtl="0" eaLnBrk="1" latinLnBrk="1" hangingPunct="1">
+              <a:lnSpc>
+                <a:spcPct val="90000"/>
+              </a:lnSpc>
+              <a:spcBef>
+                <a:spcPct val="0"/>
+              </a:spcBef>
+              <a:buNone/>
+              <a:defRPr sz="3200" kern="1200" cap="all" baseline="0">
+                <a:solidFill>
+                  <a:schemeClr val="tx1"/>
+                </a:solidFill>
+                <a:effectLst/>
+                <a:latin typeface="Batang" panose="02030600000101010101" pitchFamily="18" charset="-127"/>
+                <a:ea typeface="Batang" panose="02030600000101010101" pitchFamily="18" charset="-127"/>
+                <a:cs typeface="+mj-cs"/>
+              </a:defRPr>
+            </a:lvl1pPr>
+          </a:lstStyle>
+          <a:p>
+            <a:pPr algn="l"/>
+            <a:r>
+              <a:rPr lang="en-US" altLang="ko-KR" sz="2800" cap="none" dirty="0" err="1">
+                <a:solidFill>
+                  <a:schemeClr val="bg2">
+                    <a:lumMod val="25000"/>
+                  </a:schemeClr>
+                </a:solidFill>
+                <a:latin typeface="맑은 고딕" panose="020B0503020000020004" pitchFamily="50" charset="-127"/>
+                <a:ea typeface="맑은 고딕" panose="020B0503020000020004" pitchFamily="50" charset="-127"/>
+                <a:cs typeface="Segoe UI Light" panose="020B0502040204020203" pitchFamily="34" charset="0"/>
+              </a:rPr>
+              <a:t>PyTorch</a:t>
+            </a:r>
+            <a:endParaRPr lang="ko-KR" altLang="en-US" sz="2800" cap="none" dirty="0">
+              <a:solidFill>
+                <a:schemeClr val="bg2">
+                  <a:lumMod val="25000"/>
+                </a:schemeClr>
+              </a:solidFill>
+              <a:latin typeface="맑은 고딕" panose="020B0503020000020004" pitchFamily="50" charset="-127"/>
+              <a:ea typeface="맑은 고딕" panose="020B0503020000020004" pitchFamily="50" charset="-127"/>
+              <a:cs typeface="Segoe UI Light" panose="020B0502040204020203" pitchFamily="34" charset="0"/>
+            </a:endParaRPr>
+          </a:p>
+        </p:txBody>
+      </p:sp>
+      <p:pic>
+        <p:nvPicPr>
+          <p:cNvPr id="2" name="그림 1">
+            <a:extLst>
+              <a:ext uri="{FF2B5EF4-FFF2-40B4-BE49-F238E27FC236}">
+                <a16:creationId xmlns:a16="http://schemas.microsoft.com/office/drawing/2014/main" id="{E24E00A9-B7BD-84B1-C8C9-4379A44B71E8}"/>
+              </a:ext>
+            </a:extLst>
+          </p:cNvPr>
+          <p:cNvPicPr>
+            <a:picLocks noChangeAspect="1"/>
+          </p:cNvPicPr>
+          <p:nvPr/>
+        </p:nvPicPr>
+        <p:blipFill>
+          <a:blip r:embed="rId2"/>
+          <a:stretch>
+            <a:fillRect/>
+          </a:stretch>
+        </p:blipFill>
+        <p:spPr>
+          <a:xfrm>
+            <a:off x="794196" y="2796363"/>
+            <a:ext cx="4492179" cy="2374720"/>
+          </a:xfrm>
+          <a:prstGeom prst="rect">
+            <a:avLst/>
+          </a:prstGeom>
+        </p:spPr>
+      </p:pic>
+      <p:pic>
+        <p:nvPicPr>
+          <p:cNvPr id="5" name="그림 4">
+            <a:extLst>
+              <a:ext uri="{FF2B5EF4-FFF2-40B4-BE49-F238E27FC236}">
+                <a16:creationId xmlns:a16="http://schemas.microsoft.com/office/drawing/2014/main" id="{E2B39FB3-BDC3-5CE1-2660-D71F27A4AC06}"/>
+              </a:ext>
+            </a:extLst>
+          </p:cNvPr>
+          <p:cNvPicPr>
+            <a:picLocks noChangeAspect="1"/>
+          </p:cNvPicPr>
+          <p:nvPr/>
+        </p:nvPicPr>
+        <p:blipFill>
+          <a:blip r:embed="rId3"/>
+          <a:stretch>
+            <a:fillRect/>
+          </a:stretch>
+        </p:blipFill>
+        <p:spPr>
+          <a:xfrm>
+            <a:off x="5937695" y="2796363"/>
+            <a:ext cx="4737003" cy="3063556"/>
+          </a:xfrm>
+          <a:prstGeom prst="rect">
+            <a:avLst/>
+          </a:prstGeom>
+        </p:spPr>
+      </p:pic>
+      <p:sp>
+        <p:nvSpPr>
+          <p:cNvPr id="6" name="TextBox 5">
+            <a:extLst>
+              <a:ext uri="{FF2B5EF4-FFF2-40B4-BE49-F238E27FC236}">
+                <a16:creationId xmlns:a16="http://schemas.microsoft.com/office/drawing/2014/main" id="{C000331E-189C-7790-90B5-D620BD0EBE3F}"/>
+              </a:ext>
+            </a:extLst>
+          </p:cNvPr>
+          <p:cNvSpPr txBox="1"/>
+          <p:nvPr/>
+        </p:nvSpPr>
+        <p:spPr>
+          <a:xfrm>
+            <a:off x="2177634" y="5497523"/>
+            <a:ext cx="3166251" cy="369332"/>
+          </a:xfrm>
+          <a:prstGeom prst="rect">
+            <a:avLst/>
+          </a:prstGeom>
+          <a:noFill/>
+        </p:spPr>
+        <p:txBody>
+          <a:bodyPr wrap="none" rtlCol="0">
+            <a:spAutoFit/>
+          </a:bodyPr>
+          <a:lstStyle/>
+          <a:p>
+            <a:r>
+              <a:rPr lang="en-US" altLang="ko-KR" dirty="0">
+                <a:latin typeface="맑은 고딕 Semilight" panose="020B0502040204020203" pitchFamily="50" charset="-127"/>
+                <a:ea typeface="맑은 고딕 Semilight" panose="020B0502040204020203" pitchFamily="50" charset="-127"/>
+                <a:cs typeface="맑은 고딕 Semilight" panose="020B0502040204020203" pitchFamily="50" charset="-127"/>
+              </a:rPr>
+              <a:t>Forward, </a:t>
+            </a:r>
+            <a:r>
+              <a:rPr lang="en-US" altLang="ko-KR" dirty="0" err="1">
+                <a:latin typeface="맑은 고딕 Semilight" panose="020B0502040204020203" pitchFamily="50" charset="-127"/>
+                <a:ea typeface="맑은 고딕 Semilight" panose="020B0502040204020203" pitchFamily="50" charset="-127"/>
+                <a:cs typeface="맑은 고딕 Semilight" panose="020B0502040204020203" pitchFamily="50" charset="-127"/>
+              </a:rPr>
+              <a:t>Autograd</a:t>
+            </a:r>
+            <a:r>
+              <a:rPr lang="en-US" altLang="ko-KR" dirty="0">
+                <a:latin typeface="맑은 고딕 Semilight" panose="020B0502040204020203" pitchFamily="50" charset="-127"/>
+                <a:ea typeface="맑은 고딕 Semilight" panose="020B0502040204020203" pitchFamily="50" charset="-127"/>
+                <a:cs typeface="맑은 고딕 Semilight" panose="020B0502040204020203" pitchFamily="50" charset="-127"/>
+              </a:rPr>
+              <a:t>, Backward</a:t>
+            </a:r>
+            <a:endParaRPr lang="ko-KR" altLang="en-US" dirty="0">
+              <a:latin typeface="맑은 고딕 Semilight" panose="020B0502040204020203" pitchFamily="50" charset="-127"/>
+              <a:ea typeface="맑은 고딕 Semilight" panose="020B0502040204020203" pitchFamily="50" charset="-127"/>
+              <a:cs typeface="맑은 고딕 Semilight" panose="020B0502040204020203" pitchFamily="50" charset="-127"/>
+            </a:endParaRPr>
+          </a:p>
+        </p:txBody>
+      </p:sp>
+      <p:sp>
+        <p:nvSpPr>
+          <p:cNvPr id="8" name="TextBox 7">
+            <a:extLst>
+              <a:ext uri="{FF2B5EF4-FFF2-40B4-BE49-F238E27FC236}">
+                <a16:creationId xmlns:a16="http://schemas.microsoft.com/office/drawing/2014/main" id="{AB747EDD-F717-2F86-B83C-CA5F3D943427}"/>
+              </a:ext>
+            </a:extLst>
+          </p:cNvPr>
+          <p:cNvSpPr txBox="1"/>
+          <p:nvPr/>
+        </p:nvSpPr>
+        <p:spPr>
+          <a:xfrm>
+            <a:off x="561974" y="1265090"/>
+            <a:ext cx="10835829" cy="1152688"/>
+          </a:xfrm>
+          <a:prstGeom prst="rect">
+            <a:avLst/>
+          </a:prstGeom>
+          <a:noFill/>
+        </p:spPr>
+        <p:txBody>
+          <a:bodyPr wrap="square">
+            <a:spAutoFit/>
+          </a:bodyPr>
+          <a:lstStyle/>
+          <a:p>
+            <a:pPr>
+              <a:lnSpc>
+                <a:spcPct val="150000"/>
+              </a:lnSpc>
+            </a:pPr>
+            <a:r>
+              <a:rPr lang="en-US" altLang="ko-KR" sz="1600" b="1" dirty="0">
+                <a:latin typeface="맑은 고딕 Semilight" panose="020B0502040204020203" pitchFamily="50" charset="-127"/>
+                <a:ea typeface="맑은 고딕 Semilight" panose="020B0502040204020203" pitchFamily="50" charset="-127"/>
+                <a:cs typeface="맑은 고딕 Semilight" panose="020B0502040204020203" pitchFamily="50" charset="-127"/>
+              </a:rPr>
+              <a:t>Forward:</a:t>
+            </a:r>
+            <a:r>
+              <a:rPr lang="ko-KR" altLang="en-US" sz="1600" dirty="0">
+                <a:latin typeface="맑은 고딕 Semilight" panose="020B0502040204020203" pitchFamily="50" charset="-127"/>
+                <a:ea typeface="맑은 고딕 Semilight" panose="020B0502040204020203" pitchFamily="50" charset="-127"/>
+                <a:cs typeface="맑은 고딕 Semilight" panose="020B0502040204020203" pitchFamily="50" charset="-127"/>
+              </a:rPr>
+              <a:t> 시험 문제를 풀고</a:t>
+            </a:r>
+            <a:r>
+              <a:rPr lang="en-US" altLang="ko-KR" sz="1600" dirty="0">
+                <a:latin typeface="맑은 고딕 Semilight" panose="020B0502040204020203" pitchFamily="50" charset="-127"/>
+                <a:ea typeface="맑은 고딕 Semilight" panose="020B0502040204020203" pitchFamily="50" charset="-127"/>
+                <a:cs typeface="맑은 고딕 Semilight" panose="020B0502040204020203" pitchFamily="50" charset="-127"/>
+              </a:rPr>
+              <a:t>(</a:t>
+            </a:r>
+            <a:r>
+              <a:rPr lang="ko-KR" altLang="en-US" sz="1600" dirty="0" err="1">
+                <a:latin typeface="맑은 고딕 Semilight" panose="020B0502040204020203" pitchFamily="50" charset="-127"/>
+                <a:ea typeface="맑은 고딕 Semilight" panose="020B0502040204020203" pitchFamily="50" charset="-127"/>
+                <a:cs typeface="맑은 고딕 Semilight" panose="020B0502040204020203" pitchFamily="50" charset="-127"/>
+              </a:rPr>
+              <a:t>네크워크</a:t>
+            </a:r>
+            <a:r>
+              <a:rPr lang="ko-KR" altLang="en-US" sz="1600" dirty="0">
+                <a:latin typeface="맑은 고딕 Semilight" panose="020B0502040204020203" pitchFamily="50" charset="-127"/>
+                <a:ea typeface="맑은 고딕 Semilight" panose="020B0502040204020203" pitchFamily="50" charset="-127"/>
+                <a:cs typeface="맑은 고딕 Semilight" panose="020B0502040204020203" pitchFamily="50" charset="-127"/>
+              </a:rPr>
+              <a:t> 구조 설정</a:t>
+            </a:r>
+            <a:r>
+              <a:rPr lang="en-US" altLang="ko-KR" sz="1600" dirty="0">
+                <a:latin typeface="맑은 고딕 Semilight" panose="020B0502040204020203" pitchFamily="50" charset="-127"/>
+                <a:ea typeface="맑은 고딕 Semilight" panose="020B0502040204020203" pitchFamily="50" charset="-127"/>
+                <a:cs typeface="맑은 고딕 Semilight" panose="020B0502040204020203" pitchFamily="50" charset="-127"/>
+              </a:rPr>
+              <a:t>)</a:t>
+            </a:r>
+            <a:r>
+              <a:rPr lang="ko-KR" altLang="en-US" sz="1600" dirty="0">
+                <a:latin typeface="맑은 고딕 Semilight" panose="020B0502040204020203" pitchFamily="50" charset="-127"/>
+                <a:ea typeface="맑은 고딕 Semilight" panose="020B0502040204020203" pitchFamily="50" charset="-127"/>
+                <a:cs typeface="맑은 고딕 Semilight" panose="020B0502040204020203" pitchFamily="50" charset="-127"/>
+              </a:rPr>
+              <a:t> </a:t>
+            </a:r>
+            <a:r>
+              <a:rPr lang="en-US" altLang="ko-KR" sz="1600" b="1" dirty="0">
+                <a:latin typeface="맑은 고딕 Semilight" panose="020B0502040204020203" pitchFamily="50" charset="-127"/>
+                <a:ea typeface="맑은 고딕 Semilight" panose="020B0502040204020203" pitchFamily="50" charset="-127"/>
+                <a:cs typeface="맑은 고딕 Semilight" panose="020B0502040204020203" pitchFamily="50" charset="-127"/>
+              </a:rPr>
+              <a:t>Loss </a:t>
+            </a:r>
+            <a:r>
+              <a:rPr lang="ko-KR" altLang="en-US" sz="1600" b="1" dirty="0">
+                <a:latin typeface="맑은 고딕 Semilight" panose="020B0502040204020203" pitchFamily="50" charset="-127"/>
+                <a:ea typeface="맑은 고딕 Semilight" panose="020B0502040204020203" pitchFamily="50" charset="-127"/>
+                <a:cs typeface="맑은 고딕 Semilight" panose="020B0502040204020203" pitchFamily="50" charset="-127"/>
+              </a:rPr>
+              <a:t>계산</a:t>
+            </a:r>
+            <a:r>
+              <a:rPr lang="en-US" altLang="ko-KR" sz="1600" b="1" dirty="0">
+                <a:latin typeface="맑은 고딕 Semilight" panose="020B0502040204020203" pitchFamily="50" charset="-127"/>
+                <a:ea typeface="맑은 고딕 Semilight" panose="020B0502040204020203" pitchFamily="50" charset="-127"/>
+                <a:cs typeface="맑은 고딕 Semilight" panose="020B0502040204020203" pitchFamily="50" charset="-127"/>
+              </a:rPr>
+              <a:t>:</a:t>
+            </a:r>
+            <a:r>
+              <a:rPr lang="ko-KR" altLang="en-US" sz="1600" dirty="0">
+                <a:latin typeface="맑은 고딕 Semilight" panose="020B0502040204020203" pitchFamily="50" charset="-127"/>
+                <a:ea typeface="맑은 고딕 Semilight" panose="020B0502040204020203" pitchFamily="50" charset="-127"/>
+                <a:cs typeface="맑은 고딕 Semilight" panose="020B0502040204020203" pitchFamily="50" charset="-127"/>
+              </a:rPr>
+              <a:t> 채점을 해서 몇 점 틀렸는지 확인한 후 </a:t>
+            </a:r>
+            <a:r>
+              <a:rPr lang="en-US" altLang="ko-KR" sz="1600" b="1" dirty="0">
+                <a:latin typeface="맑은 고딕 Semilight" panose="020B0502040204020203" pitchFamily="50" charset="-127"/>
+                <a:ea typeface="맑은 고딕 Semilight" panose="020B0502040204020203" pitchFamily="50" charset="-127"/>
+                <a:cs typeface="맑은 고딕 Semilight" panose="020B0502040204020203" pitchFamily="50" charset="-127"/>
+              </a:rPr>
+              <a:t>Backward:</a:t>
+            </a:r>
+            <a:r>
+              <a:rPr lang="ko-KR" altLang="en-US" sz="1600" dirty="0">
+                <a:latin typeface="맑은 고딕 Semilight" panose="020B0502040204020203" pitchFamily="50" charset="-127"/>
+                <a:ea typeface="맑은 고딕 Semilight" panose="020B0502040204020203" pitchFamily="50" charset="-127"/>
+                <a:cs typeface="맑은 고딕 Semilight" panose="020B0502040204020203" pitchFamily="50" charset="-127"/>
+              </a:rPr>
+              <a:t> 틀린 문제의 해설지를 보며 </a:t>
+            </a:r>
+            <a:r>
+              <a:rPr lang="en-US" altLang="ko-KR" sz="1600" dirty="0">
+                <a:latin typeface="맑은 고딕 Semilight" panose="020B0502040204020203" pitchFamily="50" charset="-127"/>
+                <a:ea typeface="맑은 고딕 Semilight" panose="020B0502040204020203" pitchFamily="50" charset="-127"/>
+                <a:cs typeface="맑은 고딕 Semilight" panose="020B0502040204020203" pitchFamily="50" charset="-127"/>
+              </a:rPr>
+              <a:t>"</a:t>
+            </a:r>
+            <a:r>
+              <a:rPr lang="ko-KR" altLang="en-US" sz="1600" dirty="0">
+                <a:latin typeface="맑은 고딕 Semilight" panose="020B0502040204020203" pitchFamily="50" charset="-127"/>
+                <a:ea typeface="맑은 고딕 Semilight" panose="020B0502040204020203" pitchFamily="50" charset="-127"/>
+                <a:cs typeface="맑은 고딕 Semilight" panose="020B0502040204020203" pitchFamily="50" charset="-127"/>
+              </a:rPr>
+              <a:t>어떤 개념이 부족했는지</a:t>
+            </a:r>
+            <a:r>
+              <a:rPr lang="en-US" altLang="ko-KR" sz="1600" dirty="0">
+                <a:latin typeface="맑은 고딕 Semilight" panose="020B0502040204020203" pitchFamily="50" charset="-127"/>
+                <a:ea typeface="맑은 고딕 Semilight" panose="020B0502040204020203" pitchFamily="50" charset="-127"/>
+                <a:cs typeface="맑은 고딕 Semilight" panose="020B0502040204020203" pitchFamily="50" charset="-127"/>
+              </a:rPr>
+              <a:t>" </a:t>
+            </a:r>
+            <a:r>
+              <a:rPr lang="ko-KR" altLang="en-US" sz="1600" dirty="0">
+                <a:latin typeface="맑은 고딕 Semilight" panose="020B0502040204020203" pitchFamily="50" charset="-127"/>
+                <a:ea typeface="맑은 고딕 Semilight" panose="020B0502040204020203" pitchFamily="50" charset="-127"/>
+                <a:cs typeface="맑은 고딕 Semilight" panose="020B0502040204020203" pitchFamily="50" charset="-127"/>
+              </a:rPr>
+              <a:t>파악하여 </a:t>
+            </a:r>
+            <a:r>
+              <a:rPr lang="en-US" altLang="ko-KR" sz="1600" b="1" dirty="0">
+                <a:latin typeface="맑은 고딕 Semilight" panose="020B0502040204020203" pitchFamily="50" charset="-127"/>
+                <a:ea typeface="맑은 고딕 Semilight" panose="020B0502040204020203" pitchFamily="50" charset="-127"/>
+                <a:cs typeface="맑은 고딕 Semilight" panose="020B0502040204020203" pitchFamily="50" charset="-127"/>
+              </a:rPr>
+              <a:t>Optimization:</a:t>
+            </a:r>
+            <a:r>
+              <a:rPr lang="ko-KR" altLang="en-US" sz="1600" dirty="0">
+                <a:latin typeface="맑은 고딕 Semilight" panose="020B0502040204020203" pitchFamily="50" charset="-127"/>
+                <a:ea typeface="맑은 고딕 Semilight" panose="020B0502040204020203" pitchFamily="50" charset="-127"/>
+                <a:cs typeface="맑은 고딕 Semilight" panose="020B0502040204020203" pitchFamily="50" charset="-127"/>
+              </a:rPr>
+              <a:t> 부족했던 개념을 새로 공부해서 머릿속 지식</a:t>
+            </a:r>
+            <a:r>
+              <a:rPr lang="en-US" altLang="ko-KR" sz="1600" dirty="0">
+                <a:latin typeface="맑은 고딕 Semilight" panose="020B0502040204020203" pitchFamily="50" charset="-127"/>
+                <a:ea typeface="맑은 고딕 Semilight" panose="020B0502040204020203" pitchFamily="50" charset="-127"/>
+                <a:cs typeface="맑은 고딕 Semilight" panose="020B0502040204020203" pitchFamily="50" charset="-127"/>
+              </a:rPr>
+              <a:t>(</a:t>
+            </a:r>
+            <a:r>
+              <a:rPr lang="ko-KR" altLang="en-US" sz="1600" dirty="0">
+                <a:latin typeface="맑은 고딕 Semilight" panose="020B0502040204020203" pitchFamily="50" charset="-127"/>
+                <a:ea typeface="맑은 고딕 Semilight" panose="020B0502040204020203" pitchFamily="50" charset="-127"/>
+                <a:cs typeface="맑은 고딕 Semilight" panose="020B0502040204020203" pitchFamily="50" charset="-127"/>
+              </a:rPr>
+              <a:t>가중치</a:t>
+            </a:r>
+            <a:r>
+              <a:rPr lang="en-US" altLang="ko-KR" sz="1600" dirty="0">
+                <a:latin typeface="맑은 고딕 Semilight" panose="020B0502040204020203" pitchFamily="50" charset="-127"/>
+                <a:ea typeface="맑은 고딕 Semilight" panose="020B0502040204020203" pitchFamily="50" charset="-127"/>
+                <a:cs typeface="맑은 고딕 Semilight" panose="020B0502040204020203" pitchFamily="50" charset="-127"/>
+              </a:rPr>
+              <a:t>)</a:t>
+            </a:r>
+            <a:r>
+              <a:rPr lang="ko-KR" altLang="en-US" sz="1600" dirty="0">
+                <a:latin typeface="맑은 고딕 Semilight" panose="020B0502040204020203" pitchFamily="50" charset="-127"/>
+                <a:ea typeface="맑은 고딕 Semilight" panose="020B0502040204020203" pitchFamily="50" charset="-127"/>
+                <a:cs typeface="맑은 고딕 Semilight" panose="020B0502040204020203" pitchFamily="50" charset="-127"/>
+              </a:rPr>
+              <a:t>을 고쳐가는 과정을 수천 번 반복</a:t>
+            </a:r>
+            <a:r>
+              <a:rPr lang="en-US" altLang="ko-KR" sz="1600" dirty="0">
+                <a:latin typeface="맑은 고딕 Semilight" panose="020B0502040204020203" pitchFamily="50" charset="-127"/>
+                <a:ea typeface="맑은 고딕 Semilight" panose="020B0502040204020203" pitchFamily="50" charset="-127"/>
+                <a:cs typeface="맑은 고딕 Semilight" panose="020B0502040204020203" pitchFamily="50" charset="-127"/>
+              </a:rPr>
+              <a:t>(Epoch)</a:t>
+            </a:r>
+            <a:r>
+              <a:rPr lang="ko-KR" altLang="en-US" sz="1600" dirty="0">
+                <a:latin typeface="맑은 고딕 Semilight" panose="020B0502040204020203" pitchFamily="50" charset="-127"/>
+                <a:ea typeface="맑은 고딕 Semilight" panose="020B0502040204020203" pitchFamily="50" charset="-127"/>
+                <a:cs typeface="맑은 고딕 Semilight" panose="020B0502040204020203" pitchFamily="50" charset="-127"/>
+              </a:rPr>
+              <a:t>하면 모델은 점점 정답에 가까워지게 학습</a:t>
+            </a:r>
+          </a:p>
+        </p:txBody>
+      </p:sp>
+    </p:spTree>
+    <p:extLst>
+      <p:ext uri="{BB962C8B-B14F-4D97-AF65-F5344CB8AC3E}">
+        <p14:creationId xmlns:p14="http://schemas.microsoft.com/office/powerpoint/2010/main" val="2153360048"/>
+      </p:ext>
+    </p:extLst>
+  </p:cSld>
+  <p:clrMapOvr>
+    <a:masterClrMapping/>
+  </p:clrMapOvr>
+</p:sld>
+</file>
+
+<file path=ppt/slides/slide30.xml><?xml version="1.0" encoding="utf-8"?>
+<p:sld xmlns:a="http://schemas.openxmlformats.org/drawingml/2006/main" xmlns:r="http://schemas.openxmlformats.org/officeDocument/2006/relationships" xmlns:p="http://schemas.openxmlformats.org/presentationml/2006/main">
+  <p:cSld>
+    <p:spTree>
+      <p:nvGrpSpPr>
+        <p:cNvPr id="1" name="">
+          <a:extLst>
+            <a:ext uri="{FF2B5EF4-FFF2-40B4-BE49-F238E27FC236}">
+              <a16:creationId xmlns:a16="http://schemas.microsoft.com/office/drawing/2014/main" id="{9F528F73-8351-9819-936D-C508CD88BE96}"/>
+            </a:ext>
+          </a:extLst>
+        </p:cNvPr>
+        <p:cNvGrpSpPr/>
+        <p:nvPr/>
+      </p:nvGrpSpPr>
+      <p:grpSpPr>
+        <a:xfrm>
+          <a:off x="0" y="0"/>
+          <a:ext cx="0" cy="0"/>
+          <a:chOff x="0" y="0"/>
+          <a:chExt cx="0" cy="0"/>
+        </a:xfrm>
+      </p:grpSpPr>
+      <p:sp>
+        <p:nvSpPr>
+          <p:cNvPr id="4" name="슬라이드 번호 개체 틀 3">
+            <a:extLst>
+              <a:ext uri="{FF2B5EF4-FFF2-40B4-BE49-F238E27FC236}">
+                <a16:creationId xmlns:a16="http://schemas.microsoft.com/office/drawing/2014/main" id="{B3C5DE67-5850-1A78-5257-6E19CBED3F4D}"/>
+              </a:ext>
+            </a:extLst>
+          </p:cNvPr>
+          <p:cNvSpPr>
+            <a:spLocks noGrp="1"/>
+          </p:cNvSpPr>
+          <p:nvPr>
+            <p:ph type="sldNum" sz="quarter" idx="12"/>
+          </p:nvPr>
+        </p:nvSpPr>
+        <p:spPr>
+          <a:xfrm>
+            <a:off x="10514011" y="6036261"/>
+            <a:ext cx="753545" cy="365125"/>
+          </a:xfrm>
+        </p:spPr>
+        <p:txBody>
+          <a:bodyPr/>
+          <a:lstStyle/>
+          <a:p>
+            <a:fld id="{D57F1E4F-1CFF-5643-939E-217C01CDF565}" type="slidenum">
+              <a:rPr lang="en-US" smtClean="0"/>
+              <a:pPr/>
+              <a:t>30</a:t>
+            </a:fld>
+            <a:endParaRPr lang="en-US" dirty="0"/>
+          </a:p>
+        </p:txBody>
+      </p:sp>
+      <p:sp>
+        <p:nvSpPr>
+          <p:cNvPr id="39" name="제목 1">
+            <a:extLst>
+              <a:ext uri="{FF2B5EF4-FFF2-40B4-BE49-F238E27FC236}">
+                <a16:creationId xmlns:a16="http://schemas.microsoft.com/office/drawing/2014/main" id="{AF8D1AAC-C3F3-2B3F-A445-27EB0C66B96D}"/>
+              </a:ext>
+            </a:extLst>
+          </p:cNvPr>
+          <p:cNvSpPr txBox="1">
+            <a:spLocks/>
+          </p:cNvSpPr>
+          <p:nvPr/>
+        </p:nvSpPr>
+        <p:spPr>
+          <a:xfrm>
+            <a:off x="590464" y="395619"/>
+            <a:ext cx="10353762" cy="766439"/>
+          </a:xfrm>
+          <a:prstGeom prst="rect">
+            <a:avLst/>
+          </a:prstGeom>
+        </p:spPr>
+        <p:txBody>
+          <a:bodyPr vert="horz" lIns="91440" tIns="45720" rIns="91440" bIns="45720" rtlCol="0" anchor="ctr">
+            <a:normAutofit/>
+          </a:bodyPr>
+          <a:lstStyle>
+            <a:lvl1pPr algn="ctr" defTabSz="914400" rtl="0" eaLnBrk="1" latinLnBrk="1" hangingPunct="1">
+              <a:lnSpc>
+                <a:spcPct val="90000"/>
+              </a:lnSpc>
+              <a:spcBef>
+                <a:spcPct val="0"/>
+              </a:spcBef>
+              <a:buNone/>
+              <a:defRPr sz="3200" kern="1200" cap="all" baseline="0">
+                <a:solidFill>
+                  <a:schemeClr val="tx1"/>
+                </a:solidFill>
+                <a:effectLst/>
+                <a:latin typeface="Batang" panose="02030600000101010101" pitchFamily="18" charset="-127"/>
+                <a:ea typeface="Batang" panose="02030600000101010101" pitchFamily="18" charset="-127"/>
+                <a:cs typeface="+mj-cs"/>
+              </a:defRPr>
+            </a:lvl1pPr>
+          </a:lstStyle>
+          <a:p>
+            <a:pPr algn="l"/>
+            <a:r>
+              <a:rPr lang="en-US" altLang="ko-KR" sz="2800" cap="none" dirty="0">
+                <a:latin typeface="ADLaM Display" panose="02010000000000000000" pitchFamily="2" charset="0"/>
+                <a:cs typeface="ADLaM Display" panose="02010000000000000000" pitchFamily="2" charset="0"/>
+              </a:rPr>
+              <a:t>regression</a:t>
+            </a:r>
+            <a:r>
+              <a:rPr lang="ko-KR" altLang="en-US" sz="2800" cap="none" dirty="0">
+                <a:latin typeface="ADLaM Display" panose="02010000000000000000" pitchFamily="2" charset="0"/>
+                <a:cs typeface="ADLaM Display" panose="02010000000000000000" pitchFamily="2" charset="0"/>
+              </a:rPr>
+              <a:t> </a:t>
+            </a:r>
+            <a:r>
+              <a:rPr lang="en-US" altLang="ko-KR" sz="2800" cap="none" dirty="0">
+                <a:latin typeface="ADLaM Display" panose="02010000000000000000" pitchFamily="2" charset="0"/>
+                <a:cs typeface="ADLaM Display" panose="02010000000000000000" pitchFamily="2" charset="0"/>
+              </a:rPr>
+              <a:t>model</a:t>
+            </a:r>
+            <a:r>
+              <a:rPr lang="ko-KR" altLang="en-US" sz="2800" cap="none" dirty="0">
+                <a:latin typeface="ADLaM Display" panose="02010000000000000000" pitchFamily="2" charset="0"/>
+                <a:cs typeface="ADLaM Display" panose="02010000000000000000" pitchFamily="2" charset="0"/>
+              </a:rPr>
+              <a:t> </a:t>
+            </a:r>
+            <a:r>
+              <a:rPr lang="en-US" altLang="ko-KR" sz="2800" cap="none" dirty="0">
+                <a:latin typeface="ADLaM Display" panose="02010000000000000000" pitchFamily="2" charset="0"/>
+                <a:cs typeface="ADLaM Display" panose="02010000000000000000" pitchFamily="2" charset="0"/>
+              </a:rPr>
+              <a:t>with</a:t>
+            </a:r>
+            <a:r>
+              <a:rPr lang="ko-KR" altLang="en-US" sz="2800" cap="none" dirty="0">
+                <a:latin typeface="ADLaM Display" panose="02010000000000000000" pitchFamily="2" charset="0"/>
+                <a:cs typeface="ADLaM Display" panose="02010000000000000000" pitchFamily="2" charset="0"/>
+              </a:rPr>
+              <a:t> </a:t>
+            </a:r>
+            <a:r>
+              <a:rPr lang="en-US" altLang="ko-KR" sz="2800" cap="none" dirty="0" err="1">
+                <a:latin typeface="ADLaM Display" panose="02010000000000000000" pitchFamily="2" charset="0"/>
+                <a:cs typeface="ADLaM Display" panose="02010000000000000000" pitchFamily="2" charset="0"/>
+              </a:rPr>
+              <a:t>gmm</a:t>
+            </a:r>
+            <a:r>
+              <a:rPr lang="en-US" altLang="ko-KR" sz="2800" cap="none" dirty="0">
+                <a:latin typeface="ADLaM Display" panose="02010000000000000000" pitchFamily="2" charset="0"/>
+                <a:cs typeface="ADLaM Display" panose="02010000000000000000" pitchFamily="2" charset="0"/>
+              </a:rPr>
+              <a:t> distributions</a:t>
+            </a:r>
+            <a:endParaRPr lang="ko-KR" altLang="en-US" sz="2800" cap="none" dirty="0">
+              <a:latin typeface="ADLaM Display" panose="02010000000000000000" pitchFamily="2" charset="0"/>
+              <a:cs typeface="ADLaM Display" panose="02010000000000000000" pitchFamily="2" charset="0"/>
+            </a:endParaRPr>
+          </a:p>
+        </p:txBody>
+      </p:sp>
+      <p:pic>
+        <p:nvPicPr>
+          <p:cNvPr id="5" name="Picture 2" descr="한 여자가 노트북 컴퓨터에 타이핑을 하고 있다">
+            <a:extLst>
+              <a:ext uri="{FF2B5EF4-FFF2-40B4-BE49-F238E27FC236}">
+                <a16:creationId xmlns:a16="http://schemas.microsoft.com/office/drawing/2014/main" id="{341717E0-CA4F-B99F-EE83-6C4AC3935E50}"/>
+              </a:ext>
+            </a:extLst>
+          </p:cNvPr>
+          <p:cNvPicPr>
+            <a:picLocks noChangeAspect="1" noChangeArrowheads="1"/>
+          </p:cNvPicPr>
+          <p:nvPr/>
+        </p:nvPicPr>
+        <p:blipFill>
+          <a:blip r:embed="rId2">
+            <a:extLst>
+              <a:ext uri="{28A0092B-C50C-407E-A947-70E740481C1C}">
+                <a14:useLocalDpi xmlns:a14="http://schemas.microsoft.com/office/drawing/2010/main" val="0"/>
+              </a:ext>
+            </a:extLst>
+          </a:blip>
+          <a:srcRect/>
+          <a:stretch>
+            <a:fillRect/>
+          </a:stretch>
+        </p:blipFill>
+        <p:spPr bwMode="auto">
+          <a:xfrm>
+            <a:off x="10428779" y="52082"/>
+            <a:ext cx="1677554" cy="1109976"/>
+          </a:xfrm>
+          <a:prstGeom prst="rect">
+            <a:avLst/>
+          </a:prstGeom>
+          <a:noFill/>
+          <a:extLst>
+            <a:ext uri="{909E8E84-426E-40DD-AFC4-6F175D3DCCD1}">
+              <a14:hiddenFill xmlns:a14="http://schemas.microsoft.com/office/drawing/2010/main">
+                <a:solidFill>
+                  <a:srgbClr val="FFFFFF"/>
+                </a:solidFill>
+              </a14:hiddenFill>
+            </a:ext>
+          </a:extLst>
+        </p:spPr>
+      </p:pic>
+      <p:sp>
+        <p:nvSpPr>
+          <p:cNvPr id="7" name="TextBox 6">
+            <a:extLst>
+              <a:ext uri="{FF2B5EF4-FFF2-40B4-BE49-F238E27FC236}">
+                <a16:creationId xmlns:a16="http://schemas.microsoft.com/office/drawing/2014/main" id="{6A26FAE2-39FF-4AD5-A5B9-DAC81820C559}"/>
+              </a:ext>
+            </a:extLst>
+          </p:cNvPr>
+          <p:cNvSpPr txBox="1"/>
+          <p:nvPr/>
+        </p:nvSpPr>
+        <p:spPr>
+          <a:xfrm>
+            <a:off x="590464" y="1363355"/>
+            <a:ext cx="10102124" cy="369332"/>
+          </a:xfrm>
+          <a:prstGeom prst="rect">
+            <a:avLst/>
+          </a:prstGeom>
+          <a:noFill/>
+        </p:spPr>
+        <p:txBody>
+          <a:bodyPr wrap="none" rtlCol="0">
+            <a:spAutoFit/>
+          </a:bodyPr>
+          <a:lstStyle/>
+          <a:p>
+            <a:r>
+              <a:rPr lang="ko-KR" altLang="en-US" dirty="0">
+                <a:latin typeface="맑은 고딕 Semilight" panose="020B0502040204020203" pitchFamily="50" charset="-127"/>
+                <a:ea typeface="맑은 고딕 Semilight" panose="020B0502040204020203" pitchFamily="50" charset="-127"/>
+                <a:cs typeface="맑은 고딕 Semilight" panose="020B0502040204020203" pitchFamily="50" charset="-127"/>
+              </a:rPr>
+              <a:t>여러 개의 데이터 분포에 혼재되어 숨어있는 그래프를 시각화 해보자 </a:t>
+            </a:r>
+            <a:r>
+              <a:rPr lang="en-US" altLang="ko-KR" dirty="0">
+                <a:latin typeface="맑은 고딕 Semilight" panose="020B0502040204020203" pitchFamily="50" charset="-127"/>
+                <a:ea typeface="맑은 고딕 Semilight" panose="020B0502040204020203" pitchFamily="50" charset="-127"/>
+                <a:cs typeface="맑은 고딕 Semilight" panose="020B0502040204020203" pitchFamily="50" charset="-127"/>
+                <a:sym typeface="Wingdings" panose="05000000000000000000" pitchFamily="2" charset="2"/>
+              </a:rPr>
+              <a:t> </a:t>
+            </a:r>
+            <a:r>
+              <a:rPr lang="en-US" altLang="ko-KR" dirty="0" err="1">
+                <a:latin typeface="맑은 고딕 Semilight" panose="020B0502040204020203" pitchFamily="50" charset="-127"/>
+                <a:ea typeface="맑은 고딕 Semilight" panose="020B0502040204020203" pitchFamily="50" charset="-127"/>
+                <a:cs typeface="맑은 고딕 Semilight" panose="020B0502040204020203" pitchFamily="50" charset="-127"/>
+                <a:sym typeface="Wingdings" panose="05000000000000000000" pitchFamily="2" charset="2"/>
+                <a:hlinkClick r:id="rId3">
+                  <a:extLst>
+                    <a:ext uri="{A12FA001-AC4F-418D-AE19-62706E023703}">
+                      <ahyp:hlinkClr xmlns:ahyp="http://schemas.microsoft.com/office/drawing/2018/hyperlinkcolor" val="tx"/>
+                    </a:ext>
+                  </a:extLst>
+                </a:hlinkClick>
+              </a:rPr>
+              <a:t>seaborn_Example</a:t>
+            </a:r>
+            <a:r>
+              <a:rPr lang="en-US" altLang="ko-KR" dirty="0">
+                <a:latin typeface="맑은 고딕 Semilight" panose="020B0502040204020203" pitchFamily="50" charset="-127"/>
+                <a:ea typeface="맑은 고딕 Semilight" panose="020B0502040204020203" pitchFamily="50" charset="-127"/>
+                <a:cs typeface="맑은 고딕 Semilight" panose="020B0502040204020203" pitchFamily="50" charset="-127"/>
+                <a:sym typeface="Wingdings" panose="05000000000000000000" pitchFamily="2" charset="2"/>
+                <a:hlinkClick r:id="rId3">
+                  <a:extLst>
+                    <a:ext uri="{A12FA001-AC4F-418D-AE19-62706E023703}">
+                      <ahyp:hlinkClr xmlns:ahyp="http://schemas.microsoft.com/office/drawing/2018/hyperlinkcolor" val="tx"/>
+                    </a:ext>
+                  </a:extLst>
+                </a:hlinkClick>
+              </a:rPr>
+              <a:t> gallery</a:t>
+            </a:r>
+            <a:endParaRPr lang="ko-KR" altLang="en-US" dirty="0">
+              <a:latin typeface="맑은 고딕 Semilight" panose="020B0502040204020203" pitchFamily="50" charset="-127"/>
+              <a:ea typeface="맑은 고딕 Semilight" panose="020B0502040204020203" pitchFamily="50" charset="-127"/>
+              <a:cs typeface="맑은 고딕 Semilight" panose="020B0502040204020203" pitchFamily="50" charset="-127"/>
+            </a:endParaRPr>
+          </a:p>
+        </p:txBody>
+      </p:sp>
+      <p:pic>
+        <p:nvPicPr>
+          <p:cNvPr id="3074" name="Picture 2">
+            <a:extLst>
+              <a:ext uri="{FF2B5EF4-FFF2-40B4-BE49-F238E27FC236}">
+                <a16:creationId xmlns:a16="http://schemas.microsoft.com/office/drawing/2014/main" id="{96CF5C09-8792-B894-742C-3BE7CF50C64F}"/>
+              </a:ext>
+            </a:extLst>
+          </p:cNvPr>
+          <p:cNvPicPr>
+            <a:picLocks noChangeAspect="1" noChangeArrowheads="1"/>
+          </p:cNvPicPr>
+          <p:nvPr/>
+        </p:nvPicPr>
+        <p:blipFill>
+          <a:blip r:embed="rId4">
+            <a:extLst>
+              <a:ext uri="{28A0092B-C50C-407E-A947-70E740481C1C}">
+                <a14:useLocalDpi xmlns:a14="http://schemas.microsoft.com/office/drawing/2010/main" val="0"/>
+              </a:ext>
+            </a:extLst>
+          </a:blip>
+          <a:srcRect/>
+          <a:stretch>
+            <a:fillRect/>
+          </a:stretch>
+        </p:blipFill>
+        <p:spPr bwMode="auto">
+          <a:xfrm>
+            <a:off x="590464" y="1905408"/>
+            <a:ext cx="2321418" cy="2337427"/>
+          </a:xfrm>
+          <a:prstGeom prst="rect">
+            <a:avLst/>
+          </a:prstGeom>
+          <a:noFill/>
+          <a:extLst>
+            <a:ext uri="{909E8E84-426E-40DD-AFC4-6F175D3DCCD1}">
+              <a14:hiddenFill xmlns:a14="http://schemas.microsoft.com/office/drawing/2010/main">
+                <a:solidFill>
+                  <a:srgbClr val="FFFFFF"/>
+                </a:solidFill>
+              </a14:hiddenFill>
+            </a:ext>
+          </a:extLst>
+        </p:spPr>
+      </p:pic>
+      <p:pic>
+        <p:nvPicPr>
+          <p:cNvPr id="3076" name="Picture 4">
+            <a:extLst>
+              <a:ext uri="{FF2B5EF4-FFF2-40B4-BE49-F238E27FC236}">
+                <a16:creationId xmlns:a16="http://schemas.microsoft.com/office/drawing/2014/main" id="{8F5053F3-BC5D-5EA8-017A-C8E25AF983EB}"/>
+              </a:ext>
+            </a:extLst>
+          </p:cNvPr>
+          <p:cNvPicPr>
+            <a:picLocks noChangeAspect="1" noChangeArrowheads="1"/>
+          </p:cNvPicPr>
+          <p:nvPr/>
+        </p:nvPicPr>
+        <p:blipFill>
+          <a:blip r:embed="rId5">
+            <a:extLst>
+              <a:ext uri="{28A0092B-C50C-407E-A947-70E740481C1C}">
+                <a14:useLocalDpi xmlns:a14="http://schemas.microsoft.com/office/drawing/2010/main" val="0"/>
+              </a:ext>
+            </a:extLst>
+          </a:blip>
+          <a:srcRect/>
+          <a:stretch>
+            <a:fillRect/>
+          </a:stretch>
+        </p:blipFill>
+        <p:spPr bwMode="auto">
+          <a:xfrm>
+            <a:off x="4311463" y="1905407"/>
+            <a:ext cx="2341985" cy="2337429"/>
+          </a:xfrm>
+          <a:prstGeom prst="rect">
+            <a:avLst/>
+          </a:prstGeom>
+          <a:noFill/>
+          <a:extLst>
+            <a:ext uri="{909E8E84-426E-40DD-AFC4-6F175D3DCCD1}">
+              <a14:hiddenFill xmlns:a14="http://schemas.microsoft.com/office/drawing/2010/main">
+                <a:solidFill>
+                  <a:srgbClr val="FFFFFF"/>
+                </a:solidFill>
+              </a14:hiddenFill>
+            </a:ext>
+          </a:extLst>
+        </p:spPr>
+      </p:pic>
+      <p:pic>
+        <p:nvPicPr>
+          <p:cNvPr id="3078" name="Picture 6">
+            <a:extLst>
+              <a:ext uri="{FF2B5EF4-FFF2-40B4-BE49-F238E27FC236}">
+                <a16:creationId xmlns:a16="http://schemas.microsoft.com/office/drawing/2014/main" id="{CA71CFBE-6DD0-9414-962E-7A7E7F99B7E1}"/>
+              </a:ext>
+            </a:extLst>
+          </p:cNvPr>
+          <p:cNvPicPr>
+            <a:picLocks noChangeAspect="1" noChangeArrowheads="1"/>
+          </p:cNvPicPr>
+          <p:nvPr/>
+        </p:nvPicPr>
+        <p:blipFill>
+          <a:blip r:embed="rId6">
+            <a:extLst>
+              <a:ext uri="{28A0092B-C50C-407E-A947-70E740481C1C}">
+                <a14:useLocalDpi xmlns:a14="http://schemas.microsoft.com/office/drawing/2010/main" val="0"/>
+              </a:ext>
+            </a:extLst>
+          </a:blip>
+          <a:srcRect/>
+          <a:stretch>
+            <a:fillRect/>
+          </a:stretch>
+        </p:blipFill>
+        <p:spPr bwMode="auto">
+          <a:xfrm>
+            <a:off x="8053029" y="1905408"/>
+            <a:ext cx="2891197" cy="2337427"/>
+          </a:xfrm>
+          <a:prstGeom prst="rect">
+            <a:avLst/>
+          </a:prstGeom>
+          <a:noFill/>
+          <a:extLst>
+            <a:ext uri="{909E8E84-426E-40DD-AFC4-6F175D3DCCD1}">
+              <a14:hiddenFill xmlns:a14="http://schemas.microsoft.com/office/drawing/2010/main">
+                <a:solidFill>
+                  <a:srgbClr val="FFFFFF"/>
+                </a:solidFill>
+              </a14:hiddenFill>
+            </a:ext>
+          </a:extLst>
+        </p:spPr>
+      </p:pic>
+      <p:pic>
+        <p:nvPicPr>
+          <p:cNvPr id="3080" name="Picture 8">
+            <a:extLst>
+              <a:ext uri="{FF2B5EF4-FFF2-40B4-BE49-F238E27FC236}">
+                <a16:creationId xmlns:a16="http://schemas.microsoft.com/office/drawing/2014/main" id="{A525403E-80ED-E3FF-91CA-88EA43BED5DC}"/>
+              </a:ext>
+            </a:extLst>
+          </p:cNvPr>
+          <p:cNvPicPr>
+            <a:picLocks noChangeAspect="1" noChangeArrowheads="1"/>
+          </p:cNvPicPr>
+          <p:nvPr/>
+        </p:nvPicPr>
+        <p:blipFill>
+          <a:blip r:embed="rId7">
+            <a:extLst>
+              <a:ext uri="{28A0092B-C50C-407E-A947-70E740481C1C}">
+                <a14:useLocalDpi xmlns:a14="http://schemas.microsoft.com/office/drawing/2010/main" val="0"/>
+              </a:ext>
+            </a:extLst>
+          </a:blip>
+          <a:srcRect/>
+          <a:stretch>
+            <a:fillRect/>
+          </a:stretch>
+        </p:blipFill>
+        <p:spPr bwMode="auto">
+          <a:xfrm>
+            <a:off x="576782" y="4316476"/>
+            <a:ext cx="4797198" cy="2337427"/>
+          </a:xfrm>
+          <a:prstGeom prst="rect">
+            <a:avLst/>
+          </a:prstGeom>
+          <a:noFill/>
+          <a:extLst>
+            <a:ext uri="{909E8E84-426E-40DD-AFC4-6F175D3DCCD1}">
+              <a14:hiddenFill xmlns:a14="http://schemas.microsoft.com/office/drawing/2010/main">
+                <a:solidFill>
+                  <a:srgbClr val="FFFFFF"/>
+                </a:solidFill>
+              </a14:hiddenFill>
+            </a:ext>
+          </a:extLst>
+        </p:spPr>
+      </p:pic>
+      <p:pic>
+        <p:nvPicPr>
+          <p:cNvPr id="3082" name="Picture 10">
+            <a:extLst>
+              <a:ext uri="{FF2B5EF4-FFF2-40B4-BE49-F238E27FC236}">
+                <a16:creationId xmlns:a16="http://schemas.microsoft.com/office/drawing/2014/main" id="{74E2F4CC-39DF-A0E8-AC5B-43D9122C9359}"/>
+              </a:ext>
+            </a:extLst>
+          </p:cNvPr>
+          <p:cNvPicPr>
+            <a:picLocks noChangeAspect="1" noChangeArrowheads="1"/>
+          </p:cNvPicPr>
+          <p:nvPr/>
+        </p:nvPicPr>
+        <p:blipFill>
+          <a:blip r:embed="rId8">
+            <a:extLst>
+              <a:ext uri="{28A0092B-C50C-407E-A947-70E740481C1C}">
+                <a14:useLocalDpi xmlns:a14="http://schemas.microsoft.com/office/drawing/2010/main" val="0"/>
+              </a:ext>
+            </a:extLst>
+          </a:blip>
+          <a:srcRect/>
+          <a:stretch>
+            <a:fillRect/>
+          </a:stretch>
+        </p:blipFill>
+        <p:spPr bwMode="auto">
+          <a:xfrm>
+            <a:off x="6064227" y="4316476"/>
+            <a:ext cx="2891197" cy="2457856"/>
           </a:xfrm>
           <a:prstGeom prst="rect">
             <a:avLst/>
@@ -15464,7 +17528,7 @@
     </p:spTree>
     <p:extLst>
       <p:ext uri="{BB962C8B-B14F-4D97-AF65-F5344CB8AC3E}">
-        <p14:creationId xmlns:p14="http://schemas.microsoft.com/office/powerpoint/2010/main" val="1361648862"/>
+        <p14:creationId xmlns:p14="http://schemas.microsoft.com/office/powerpoint/2010/main" val="1111464345"/>
       </p:ext>
     </p:extLst>
   </p:cSld>
@@ -15474,7 +17538,411 @@
 </p:sld>
 </file>
 
-<file path=ppt/slides/slide29.xml><?xml version="1.0" encoding="utf-8"?>
+<file path=ppt/slides/slide31.xml><?xml version="1.0" encoding="utf-8"?>
+<p:sld xmlns:a="http://schemas.openxmlformats.org/drawingml/2006/main" xmlns:r="http://schemas.openxmlformats.org/officeDocument/2006/relationships" xmlns:p="http://schemas.openxmlformats.org/presentationml/2006/main">
+  <p:cSld>
+    <p:spTree>
+      <p:nvGrpSpPr>
+        <p:cNvPr id="1" name="">
+          <a:extLst>
+            <a:ext uri="{FF2B5EF4-FFF2-40B4-BE49-F238E27FC236}">
+              <a16:creationId xmlns:a16="http://schemas.microsoft.com/office/drawing/2014/main" id="{3D8C9E0B-E4A4-D935-84DD-515F72623E18}"/>
+            </a:ext>
+          </a:extLst>
+        </p:cNvPr>
+        <p:cNvGrpSpPr/>
+        <p:nvPr/>
+      </p:nvGrpSpPr>
+      <p:grpSpPr>
+        <a:xfrm>
+          <a:off x="0" y="0"/>
+          <a:ext cx="0" cy="0"/>
+          <a:chOff x="0" y="0"/>
+          <a:chExt cx="0" cy="0"/>
+        </a:xfrm>
+      </p:grpSpPr>
+      <p:sp>
+        <p:nvSpPr>
+          <p:cNvPr id="4" name="슬라이드 번호 개체 틀 3">
+            <a:extLst>
+              <a:ext uri="{FF2B5EF4-FFF2-40B4-BE49-F238E27FC236}">
+                <a16:creationId xmlns:a16="http://schemas.microsoft.com/office/drawing/2014/main" id="{1E231800-C976-3F1B-F586-A674DE551EAE}"/>
+              </a:ext>
+            </a:extLst>
+          </p:cNvPr>
+          <p:cNvSpPr>
+            <a:spLocks noGrp="1"/>
+          </p:cNvSpPr>
+          <p:nvPr>
+            <p:ph type="sldNum" sz="quarter" idx="12"/>
+          </p:nvPr>
+        </p:nvSpPr>
+        <p:spPr>
+          <a:xfrm>
+            <a:off x="10514011" y="6036261"/>
+            <a:ext cx="753545" cy="365125"/>
+          </a:xfrm>
+        </p:spPr>
+        <p:txBody>
+          <a:bodyPr/>
+          <a:lstStyle/>
+          <a:p>
+            <a:fld id="{D57F1E4F-1CFF-5643-939E-217C01CDF565}" type="slidenum">
+              <a:rPr lang="en-US" smtClean="0"/>
+              <a:pPr/>
+              <a:t>31</a:t>
+            </a:fld>
+            <a:endParaRPr lang="en-US" dirty="0"/>
+          </a:p>
+        </p:txBody>
+      </p:sp>
+      <p:sp>
+        <p:nvSpPr>
+          <p:cNvPr id="39" name="제목 1">
+            <a:extLst>
+              <a:ext uri="{FF2B5EF4-FFF2-40B4-BE49-F238E27FC236}">
+                <a16:creationId xmlns:a16="http://schemas.microsoft.com/office/drawing/2014/main" id="{E53146C9-B725-8BD3-8413-F20AE6FB1A00}"/>
+              </a:ext>
+            </a:extLst>
+          </p:cNvPr>
+          <p:cNvSpPr txBox="1">
+            <a:spLocks/>
+          </p:cNvSpPr>
+          <p:nvPr/>
+        </p:nvSpPr>
+        <p:spPr>
+          <a:xfrm>
+            <a:off x="590464" y="395619"/>
+            <a:ext cx="10353762" cy="766439"/>
+          </a:xfrm>
+          <a:prstGeom prst="rect">
+            <a:avLst/>
+          </a:prstGeom>
+        </p:spPr>
+        <p:txBody>
+          <a:bodyPr vert="horz" lIns="91440" tIns="45720" rIns="91440" bIns="45720" rtlCol="0" anchor="ctr">
+            <a:normAutofit/>
+          </a:bodyPr>
+          <a:lstStyle>
+            <a:lvl1pPr algn="ctr" defTabSz="914400" rtl="0" eaLnBrk="1" latinLnBrk="1" hangingPunct="1">
+              <a:lnSpc>
+                <a:spcPct val="90000"/>
+              </a:lnSpc>
+              <a:spcBef>
+                <a:spcPct val="0"/>
+              </a:spcBef>
+              <a:buNone/>
+              <a:defRPr sz="3200" kern="1200" cap="all" baseline="0">
+                <a:solidFill>
+                  <a:schemeClr val="tx1"/>
+                </a:solidFill>
+                <a:effectLst/>
+                <a:latin typeface="Batang" panose="02030600000101010101" pitchFamily="18" charset="-127"/>
+                <a:ea typeface="Batang" panose="02030600000101010101" pitchFamily="18" charset="-127"/>
+                <a:cs typeface="+mj-cs"/>
+              </a:defRPr>
+            </a:lvl1pPr>
+          </a:lstStyle>
+          <a:p>
+            <a:pPr algn="l"/>
+            <a:r>
+              <a:rPr lang="en-US" altLang="ko-KR" sz="2800" cap="none">
+                <a:latin typeface="ADLaM Display" panose="02010000000000000000" pitchFamily="2" charset="0"/>
+                <a:cs typeface="ADLaM Display" panose="02010000000000000000" pitchFamily="2" charset="0"/>
+              </a:rPr>
+              <a:t>Summary</a:t>
+            </a:r>
+            <a:endParaRPr lang="ko-KR" altLang="en-US" sz="2800" cap="none" dirty="0">
+              <a:latin typeface="ADLaM Display" panose="02010000000000000000" pitchFamily="2" charset="0"/>
+              <a:cs typeface="ADLaM Display" panose="02010000000000000000" pitchFamily="2" charset="0"/>
+            </a:endParaRPr>
+          </a:p>
+        </p:txBody>
+      </p:sp>
+      <p:sp>
+        <p:nvSpPr>
+          <p:cNvPr id="2" name="TextBox 1">
+            <a:extLst>
+              <a:ext uri="{FF2B5EF4-FFF2-40B4-BE49-F238E27FC236}">
+                <a16:creationId xmlns:a16="http://schemas.microsoft.com/office/drawing/2014/main" id="{EAD7A436-B2E9-31A4-2E23-960D855B21A1}"/>
+              </a:ext>
+            </a:extLst>
+          </p:cNvPr>
+          <p:cNvSpPr txBox="1"/>
+          <p:nvPr/>
+        </p:nvSpPr>
+        <p:spPr>
+          <a:xfrm>
+            <a:off x="812800" y="1818640"/>
+            <a:ext cx="10952479" cy="3432030"/>
+          </a:xfrm>
+          <a:prstGeom prst="rect">
+            <a:avLst/>
+          </a:prstGeom>
+          <a:noFill/>
+        </p:spPr>
+        <p:txBody>
+          <a:bodyPr wrap="square" rtlCol="0">
+            <a:spAutoFit/>
+          </a:bodyPr>
+          <a:lstStyle/>
+          <a:p>
+            <a:pPr marL="285750" indent="-285750">
+              <a:lnSpc>
+                <a:spcPct val="250000"/>
+              </a:lnSpc>
+              <a:buFont typeface="Wingdings" panose="05000000000000000000" pitchFamily="2" charset="2"/>
+              <a:buChar char="v"/>
+            </a:pPr>
+            <a:r>
+              <a:rPr lang="ko-KR" altLang="en-US" dirty="0">
+                <a:latin typeface="맑은 고딕 Semilight" panose="020B0502040204020203" pitchFamily="50" charset="-127"/>
+                <a:ea typeface="맑은 고딕 Semilight" panose="020B0502040204020203" pitchFamily="50" charset="-127"/>
+                <a:cs typeface="맑은 고딕 Semilight" panose="020B0502040204020203" pitchFamily="50" charset="-127"/>
+              </a:rPr>
+              <a:t>선형대수는 데이터를 담는 그릇과 연산 도구</a:t>
+            </a:r>
+            <a:endParaRPr lang="en-US" altLang="ko-KR" dirty="0">
+              <a:latin typeface="맑은 고딕 Semilight" panose="020B0502040204020203" pitchFamily="50" charset="-127"/>
+              <a:ea typeface="맑은 고딕 Semilight" panose="020B0502040204020203" pitchFamily="50" charset="-127"/>
+              <a:cs typeface="맑은 고딕 Semilight" panose="020B0502040204020203" pitchFamily="50" charset="-127"/>
+            </a:endParaRPr>
+          </a:p>
+          <a:p>
+            <a:pPr marL="285750" indent="-285750">
+              <a:lnSpc>
+                <a:spcPct val="250000"/>
+              </a:lnSpc>
+              <a:buFont typeface="Wingdings" panose="05000000000000000000" pitchFamily="2" charset="2"/>
+              <a:buChar char="v"/>
+            </a:pPr>
+            <a:r>
+              <a:rPr lang="ko-KR" altLang="en-US" dirty="0">
+                <a:latin typeface="맑은 고딕 Semilight" panose="020B0502040204020203" pitchFamily="50" charset="-127"/>
+                <a:ea typeface="맑은 고딕 Semilight" panose="020B0502040204020203" pitchFamily="50" charset="-127"/>
+                <a:cs typeface="맑은 고딕 Semilight" panose="020B0502040204020203" pitchFamily="50" charset="-127"/>
+              </a:rPr>
+              <a:t>통계와 분포는 그 데이터의 의미를 해석하고 예측의 확신을 더하는 논리</a:t>
+            </a:r>
+            <a:endParaRPr lang="en-US" altLang="ko-KR" dirty="0">
+              <a:latin typeface="맑은 고딕 Semilight" panose="020B0502040204020203" pitchFamily="50" charset="-127"/>
+              <a:ea typeface="맑은 고딕 Semilight" panose="020B0502040204020203" pitchFamily="50" charset="-127"/>
+              <a:cs typeface="맑은 고딕 Semilight" panose="020B0502040204020203" pitchFamily="50" charset="-127"/>
+            </a:endParaRPr>
+          </a:p>
+          <a:p>
+            <a:pPr marL="285750" indent="-285750">
+              <a:lnSpc>
+                <a:spcPct val="250000"/>
+              </a:lnSpc>
+              <a:buFont typeface="Wingdings" panose="05000000000000000000" pitchFamily="2" charset="2"/>
+              <a:buChar char="v"/>
+            </a:pPr>
+            <a:r>
+              <a:rPr lang="ko-KR" altLang="en-US" dirty="0">
+                <a:latin typeface="맑은 고딕 Semilight" panose="020B0502040204020203" pitchFamily="50" charset="-127"/>
+                <a:ea typeface="맑은 고딕 Semilight" panose="020B0502040204020203" pitchFamily="50" charset="-127"/>
+                <a:cs typeface="맑은 고딕 Semilight" panose="020B0502040204020203" pitchFamily="50" charset="-127"/>
+              </a:rPr>
+              <a:t>선형대수가 </a:t>
+            </a:r>
+            <a:r>
+              <a:rPr lang="ko-KR" altLang="en-US" dirty="0" err="1">
+                <a:latin typeface="맑은 고딕 Semilight" panose="020B0502040204020203" pitchFamily="50" charset="-127"/>
+                <a:ea typeface="맑은 고딕 Semilight" panose="020B0502040204020203" pitchFamily="50" charset="-127"/>
+                <a:cs typeface="맑은 고딕 Semilight" panose="020B0502040204020203" pitchFamily="50" charset="-127"/>
+              </a:rPr>
+              <a:t>머신러닝과</a:t>
+            </a:r>
+            <a:r>
+              <a:rPr lang="ko-KR" altLang="en-US" dirty="0">
+                <a:latin typeface="맑은 고딕 Semilight" panose="020B0502040204020203" pitchFamily="50" charset="-127"/>
+                <a:ea typeface="맑은 고딕 Semilight" panose="020B0502040204020203" pitchFamily="50" charset="-127"/>
+                <a:cs typeface="맑은 고딕 Semilight" panose="020B0502040204020203" pitchFamily="50" charset="-127"/>
+              </a:rPr>
+              <a:t> 딥러닝 모델의 </a:t>
+            </a:r>
+            <a:r>
+              <a:rPr lang="en-US" altLang="ko-KR" dirty="0">
+                <a:latin typeface="맑은 고딕 Semilight" panose="020B0502040204020203" pitchFamily="50" charset="-127"/>
+                <a:ea typeface="맑은 고딕 Semilight" panose="020B0502040204020203" pitchFamily="50" charset="-127"/>
+                <a:cs typeface="맑은 고딕 Semilight" panose="020B0502040204020203" pitchFamily="50" charset="-127"/>
+              </a:rPr>
+              <a:t>“</a:t>
+            </a:r>
+            <a:r>
+              <a:rPr lang="ko-KR" altLang="en-US" dirty="0">
+                <a:latin typeface="맑은 고딕 Semilight" panose="020B0502040204020203" pitchFamily="50" charset="-127"/>
+                <a:ea typeface="맑은 고딕 Semilight" panose="020B0502040204020203" pitchFamily="50" charset="-127"/>
+                <a:cs typeface="맑은 고딕 Semilight" panose="020B0502040204020203" pitchFamily="50" charset="-127"/>
+              </a:rPr>
+              <a:t>근육</a:t>
+            </a:r>
+            <a:r>
+              <a:rPr lang="en-US" altLang="ko-KR" dirty="0">
+                <a:latin typeface="맑은 고딕 Semilight" panose="020B0502040204020203" pitchFamily="50" charset="-127"/>
+                <a:ea typeface="맑은 고딕 Semilight" panose="020B0502040204020203" pitchFamily="50" charset="-127"/>
+                <a:cs typeface="맑은 고딕 Semilight" panose="020B0502040204020203" pitchFamily="50" charset="-127"/>
+              </a:rPr>
+              <a:t>(</a:t>
+            </a:r>
+            <a:r>
+              <a:rPr lang="ko-KR" altLang="en-US" dirty="0">
+                <a:latin typeface="맑은 고딕 Semilight" panose="020B0502040204020203" pitchFamily="50" charset="-127"/>
+                <a:ea typeface="맑은 고딕 Semilight" panose="020B0502040204020203" pitchFamily="50" charset="-127"/>
+                <a:cs typeface="맑은 고딕 Semilight" panose="020B0502040204020203" pitchFamily="50" charset="-127"/>
+              </a:rPr>
+              <a:t>연산</a:t>
+            </a:r>
+            <a:r>
+              <a:rPr lang="en-US" altLang="ko-KR" dirty="0">
+                <a:latin typeface="맑은 고딕 Semilight" panose="020B0502040204020203" pitchFamily="50" charset="-127"/>
+                <a:ea typeface="맑은 고딕 Semilight" panose="020B0502040204020203" pitchFamily="50" charset="-127"/>
+                <a:cs typeface="맑은 고딕 Semilight" panose="020B0502040204020203" pitchFamily="50" charset="-127"/>
+              </a:rPr>
+              <a:t>)”</a:t>
+            </a:r>
+            <a:r>
+              <a:rPr lang="ko-KR" altLang="en-US" dirty="0">
+                <a:latin typeface="맑은 고딕 Semilight" panose="020B0502040204020203" pitchFamily="50" charset="-127"/>
+                <a:ea typeface="맑은 고딕 Semilight" panose="020B0502040204020203" pitchFamily="50" charset="-127"/>
+                <a:cs typeface="맑은 고딕 Semilight" panose="020B0502040204020203" pitchFamily="50" charset="-127"/>
+              </a:rPr>
+              <a:t>이라면</a:t>
+            </a:r>
+            <a:r>
+              <a:rPr lang="en-US" altLang="ko-KR" dirty="0">
+                <a:latin typeface="맑은 고딕 Semilight" panose="020B0502040204020203" pitchFamily="50" charset="-127"/>
+                <a:ea typeface="맑은 고딕 Semilight" panose="020B0502040204020203" pitchFamily="50" charset="-127"/>
+                <a:cs typeface="맑은 고딕 Semilight" panose="020B0502040204020203" pitchFamily="50" charset="-127"/>
+              </a:rPr>
+              <a:t>, </a:t>
+            </a:r>
+            <a:r>
+              <a:rPr lang="ko-KR" altLang="en-US" dirty="0">
+                <a:latin typeface="맑은 고딕 Semilight" panose="020B0502040204020203" pitchFamily="50" charset="-127"/>
+                <a:ea typeface="맑은 고딕 Semilight" panose="020B0502040204020203" pitchFamily="50" charset="-127"/>
+                <a:cs typeface="맑은 고딕 Semilight" panose="020B0502040204020203" pitchFamily="50" charset="-127"/>
+              </a:rPr>
+              <a:t>통계와 확률은 모델의 </a:t>
+            </a:r>
+            <a:r>
+              <a:rPr lang="en-US" altLang="ko-KR" dirty="0">
+                <a:latin typeface="맑은 고딕 Semilight" panose="020B0502040204020203" pitchFamily="50" charset="-127"/>
+                <a:ea typeface="맑은 고딕 Semilight" panose="020B0502040204020203" pitchFamily="50" charset="-127"/>
+                <a:cs typeface="맑은 고딕 Semilight" panose="020B0502040204020203" pitchFamily="50" charset="-127"/>
+              </a:rPr>
+              <a:t>“</a:t>
+            </a:r>
+            <a:r>
+              <a:rPr lang="ko-KR" altLang="en-US" dirty="0">
+                <a:latin typeface="맑은 고딕 Semilight" panose="020B0502040204020203" pitchFamily="50" charset="-127"/>
+                <a:ea typeface="맑은 고딕 Semilight" panose="020B0502040204020203" pitchFamily="50" charset="-127"/>
+                <a:cs typeface="맑은 고딕 Semilight" panose="020B0502040204020203" pitchFamily="50" charset="-127"/>
+              </a:rPr>
+              <a:t>지능</a:t>
+            </a:r>
+            <a:r>
+              <a:rPr lang="en-US" altLang="ko-KR" dirty="0">
+                <a:latin typeface="맑은 고딕 Semilight" panose="020B0502040204020203" pitchFamily="50" charset="-127"/>
+                <a:ea typeface="맑은 고딕 Semilight" panose="020B0502040204020203" pitchFamily="50" charset="-127"/>
+                <a:cs typeface="맑은 고딕 Semilight" panose="020B0502040204020203" pitchFamily="50" charset="-127"/>
+              </a:rPr>
+              <a:t>(</a:t>
+            </a:r>
+            <a:r>
+              <a:rPr lang="ko-KR" altLang="en-US" dirty="0">
+                <a:latin typeface="맑은 고딕 Semilight" panose="020B0502040204020203" pitchFamily="50" charset="-127"/>
+                <a:ea typeface="맑은 고딕 Semilight" panose="020B0502040204020203" pitchFamily="50" charset="-127"/>
+                <a:cs typeface="맑은 고딕 Semilight" panose="020B0502040204020203" pitchFamily="50" charset="-127"/>
+              </a:rPr>
+              <a:t>판단</a:t>
+            </a:r>
+            <a:r>
+              <a:rPr lang="en-US" altLang="ko-KR" dirty="0">
+                <a:latin typeface="맑은 고딕 Semilight" panose="020B0502040204020203" pitchFamily="50" charset="-127"/>
+                <a:ea typeface="맑은 고딕 Semilight" panose="020B0502040204020203" pitchFamily="50" charset="-127"/>
+                <a:cs typeface="맑은 고딕 Semilight" panose="020B0502040204020203" pitchFamily="50" charset="-127"/>
+              </a:rPr>
+              <a:t>)”</a:t>
+            </a:r>
+          </a:p>
+          <a:p>
+            <a:pPr marL="285750" indent="-285750">
+              <a:lnSpc>
+                <a:spcPct val="250000"/>
+              </a:lnSpc>
+              <a:buFont typeface="Wingdings" panose="05000000000000000000" pitchFamily="2" charset="2"/>
+              <a:buChar char="v"/>
+            </a:pPr>
+            <a:r>
+              <a:rPr lang="ko-KR" altLang="en-US" dirty="0">
+                <a:latin typeface="맑은 고딕 Semilight" panose="020B0502040204020203" pitchFamily="50" charset="-127"/>
+                <a:ea typeface="맑은 고딕 Semilight" panose="020B0502040204020203" pitchFamily="50" charset="-127"/>
+                <a:cs typeface="맑은 고딕 Semilight" panose="020B0502040204020203" pitchFamily="50" charset="-127"/>
+              </a:rPr>
+              <a:t>확률적 사고는 인공지능은 단순한 암기기가 아닌</a:t>
+            </a:r>
+            <a:r>
+              <a:rPr lang="en-US" altLang="ko-KR" dirty="0">
+                <a:latin typeface="맑은 고딕 Semilight" panose="020B0502040204020203" pitchFamily="50" charset="-127"/>
+                <a:ea typeface="맑은 고딕 Semilight" panose="020B0502040204020203" pitchFamily="50" charset="-127"/>
+                <a:cs typeface="맑은 고딕 Semilight" panose="020B0502040204020203" pitchFamily="50" charset="-127"/>
+              </a:rPr>
+              <a:t>, </a:t>
+            </a:r>
+            <a:r>
+              <a:rPr lang="ko-KR" altLang="en-US" dirty="0">
+                <a:latin typeface="맑은 고딕 Semilight" panose="020B0502040204020203" pitchFamily="50" charset="-127"/>
+                <a:ea typeface="맑은 고딕 Semilight" panose="020B0502040204020203" pitchFamily="50" charset="-127"/>
+                <a:cs typeface="맑은 고딕 Semilight" panose="020B0502040204020203" pitchFamily="50" charset="-127"/>
+              </a:rPr>
+              <a:t>복잡한 세상의 패턴을 추론하는 도구로 이해</a:t>
+            </a:r>
+            <a:endParaRPr lang="en-US" altLang="ko-KR" dirty="0">
+              <a:latin typeface="맑은 고딕 Semilight" panose="020B0502040204020203" pitchFamily="50" charset="-127"/>
+              <a:ea typeface="맑은 고딕 Semilight" panose="020B0502040204020203" pitchFamily="50" charset="-127"/>
+              <a:cs typeface="맑은 고딕 Semilight" panose="020B0502040204020203" pitchFamily="50" charset="-127"/>
+            </a:endParaRPr>
+          </a:p>
+          <a:p>
+            <a:pPr marL="285750" indent="-285750">
+              <a:lnSpc>
+                <a:spcPct val="250000"/>
+              </a:lnSpc>
+              <a:buFont typeface="Wingdings" panose="05000000000000000000" pitchFamily="2" charset="2"/>
+              <a:buChar char="v"/>
+            </a:pPr>
+            <a:r>
+              <a:rPr lang="ko-KR" altLang="en-US" dirty="0">
+                <a:latin typeface="맑은 고딕 Semilight" panose="020B0502040204020203" pitchFamily="50" charset="-127"/>
+                <a:ea typeface="맑은 고딕 Semilight" panose="020B0502040204020203" pitchFamily="50" charset="-127"/>
+                <a:cs typeface="맑은 고딕 Semilight" panose="020B0502040204020203" pitchFamily="50" charset="-127"/>
+              </a:rPr>
+              <a:t>이 기반이 탄탄할수록 최신 논문이나 알고리즘을 자신의 것으로 만들 수 있음</a:t>
+            </a:r>
+            <a:endParaRPr lang="en-US" altLang="ko-KR" dirty="0">
+              <a:latin typeface="맑은 고딕 Semilight" panose="020B0502040204020203" pitchFamily="50" charset="-127"/>
+              <a:ea typeface="맑은 고딕 Semilight" panose="020B0502040204020203" pitchFamily="50" charset="-127"/>
+              <a:cs typeface="맑은 고딕 Semilight" panose="020B0502040204020203" pitchFamily="50" charset="-127"/>
+            </a:endParaRPr>
+          </a:p>
+        </p:txBody>
+      </p:sp>
+    </p:spTree>
+    <p:extLst>
+      <p:ext uri="{BB962C8B-B14F-4D97-AF65-F5344CB8AC3E}">
+        <p14:creationId xmlns:p14="http://schemas.microsoft.com/office/powerpoint/2010/main" val="3985175364"/>
+      </p:ext>
+    </p:extLst>
+  </p:cSld>
+  <p:clrMapOvr>
+    <a:masterClrMapping/>
+  </p:clrMapOvr>
+</p:sld>
+</file>
+
+<file path=ppt/slides/slide32.xml><?xml version="1.0" encoding="utf-8"?>
 <p:sld xmlns:a="http://schemas.openxmlformats.org/drawingml/2006/main" xmlns:r="http://schemas.openxmlformats.org/officeDocument/2006/relationships" xmlns:p="http://schemas.openxmlformats.org/presentationml/2006/main">
   <p:cSld>
     <p:spTree>
@@ -15526,7 +17994,7 @@
             <a:fld id="{D57F1E4F-1CFF-5643-939E-217C01CDF565}" type="slidenum">
               <a:rPr lang="en-US" smtClean="0"/>
               <a:pPr/>
-              <a:t>29</a:t>
+              <a:t>32</a:t>
             </a:fld>
             <a:endParaRPr lang="en-US" dirty="0"/>
           </a:p>
@@ -17210,509 +19678,7 @@
 </p:sld>
 </file>
 
-<file path=ppt/slides/slide3.xml><?xml version="1.0" encoding="utf-8"?>
-<p:sld xmlns:a="http://schemas.openxmlformats.org/drawingml/2006/main" xmlns:r="http://schemas.openxmlformats.org/officeDocument/2006/relationships" xmlns:p="http://schemas.openxmlformats.org/presentationml/2006/main">
-  <p:cSld>
-    <p:spTree>
-      <p:nvGrpSpPr>
-        <p:cNvPr id="1" name="">
-          <a:extLst>
-            <a:ext uri="{FF2B5EF4-FFF2-40B4-BE49-F238E27FC236}">
-              <a16:creationId xmlns:a16="http://schemas.microsoft.com/office/drawing/2014/main" id="{88FFB53F-5797-0BB2-9323-F166DE5B6771}"/>
-            </a:ext>
-          </a:extLst>
-        </p:cNvPr>
-        <p:cNvGrpSpPr/>
-        <p:nvPr/>
-      </p:nvGrpSpPr>
-      <p:grpSpPr>
-        <a:xfrm>
-          <a:off x="0" y="0"/>
-          <a:ext cx="0" cy="0"/>
-          <a:chOff x="0" y="0"/>
-          <a:chExt cx="0" cy="0"/>
-        </a:xfrm>
-      </p:grpSpPr>
-      <p:sp>
-        <p:nvSpPr>
-          <p:cNvPr id="4" name="슬라이드 번호 개체 틀 3">
-            <a:extLst>
-              <a:ext uri="{FF2B5EF4-FFF2-40B4-BE49-F238E27FC236}">
-                <a16:creationId xmlns:a16="http://schemas.microsoft.com/office/drawing/2014/main" id="{DBFB5B3E-2733-6F10-C433-7C314850C9FE}"/>
-              </a:ext>
-            </a:extLst>
-          </p:cNvPr>
-          <p:cNvSpPr>
-            <a:spLocks noGrp="1"/>
-          </p:cNvSpPr>
-          <p:nvPr>
-            <p:ph type="sldNum" sz="quarter" idx="12"/>
-          </p:nvPr>
-        </p:nvSpPr>
-        <p:spPr>
-          <a:xfrm>
-            <a:off x="10514011" y="6036261"/>
-            <a:ext cx="753545" cy="365125"/>
-          </a:xfrm>
-        </p:spPr>
-        <p:txBody>
-          <a:bodyPr/>
-          <a:lstStyle/>
-          <a:p>
-            <a:fld id="{D57F1E4F-1CFF-5643-939E-217C01CDF565}" type="slidenum">
-              <a:rPr lang="en-US" smtClean="0"/>
-              <a:pPr/>
-              <a:t>3</a:t>
-            </a:fld>
-            <a:endParaRPr lang="en-US" dirty="0"/>
-          </a:p>
-        </p:txBody>
-      </p:sp>
-      <p:sp>
-        <p:nvSpPr>
-          <p:cNvPr id="3" name="제목 1">
-            <a:extLst>
-              <a:ext uri="{FF2B5EF4-FFF2-40B4-BE49-F238E27FC236}">
-                <a16:creationId xmlns:a16="http://schemas.microsoft.com/office/drawing/2014/main" id="{C56A9490-8D65-6528-22C1-98B7D5080918}"/>
-              </a:ext>
-            </a:extLst>
-          </p:cNvPr>
-          <p:cNvSpPr txBox="1">
-            <a:spLocks/>
-          </p:cNvSpPr>
-          <p:nvPr/>
-        </p:nvSpPr>
-        <p:spPr>
-          <a:xfrm>
-            <a:off x="475645" y="481983"/>
-            <a:ext cx="10353762" cy="766439"/>
-          </a:xfrm>
-          <a:prstGeom prst="rect">
-            <a:avLst/>
-          </a:prstGeom>
-        </p:spPr>
-        <p:txBody>
-          <a:bodyPr vert="horz" lIns="91440" tIns="45720" rIns="91440" bIns="45720" rtlCol="0" anchor="ctr">
-            <a:normAutofit/>
-          </a:bodyPr>
-          <a:lstStyle>
-            <a:lvl1pPr algn="ctr" defTabSz="914400" rtl="0" eaLnBrk="1" latinLnBrk="1" hangingPunct="1">
-              <a:lnSpc>
-                <a:spcPct val="90000"/>
-              </a:lnSpc>
-              <a:spcBef>
-                <a:spcPct val="0"/>
-              </a:spcBef>
-              <a:buNone/>
-              <a:defRPr sz="3200" kern="1200" cap="all" baseline="0">
-                <a:solidFill>
-                  <a:schemeClr val="tx1"/>
-                </a:solidFill>
-                <a:effectLst/>
-                <a:latin typeface="Batang" panose="02030600000101010101" pitchFamily="18" charset="-127"/>
-                <a:ea typeface="Batang" panose="02030600000101010101" pitchFamily="18" charset="-127"/>
-                <a:cs typeface="+mj-cs"/>
-              </a:defRPr>
-            </a:lvl1pPr>
-          </a:lstStyle>
-          <a:p>
-            <a:pPr algn="l"/>
-            <a:r>
-              <a:rPr lang="en-US" altLang="ko-KR" sz="2800" cap="none" dirty="0" err="1">
-                <a:solidFill>
-                  <a:schemeClr val="bg2">
-                    <a:lumMod val="25000"/>
-                  </a:schemeClr>
-                </a:solidFill>
-                <a:latin typeface="맑은 고딕" panose="020B0503020000020004" pitchFamily="50" charset="-127"/>
-                <a:ea typeface="맑은 고딕" panose="020B0503020000020004" pitchFamily="50" charset="-127"/>
-                <a:cs typeface="Segoe UI Light" panose="020B0502040204020203" pitchFamily="34" charset="0"/>
-              </a:rPr>
-              <a:t>PyTorch</a:t>
-            </a:r>
-            <a:endParaRPr lang="ko-KR" altLang="en-US" sz="2800" cap="none" dirty="0">
-              <a:solidFill>
-                <a:schemeClr val="bg2">
-                  <a:lumMod val="25000"/>
-                </a:schemeClr>
-              </a:solidFill>
-              <a:latin typeface="맑은 고딕" panose="020B0503020000020004" pitchFamily="50" charset="-127"/>
-              <a:ea typeface="맑은 고딕" panose="020B0503020000020004" pitchFamily="50" charset="-127"/>
-              <a:cs typeface="Segoe UI Light" panose="020B0502040204020203" pitchFamily="34" charset="0"/>
-            </a:endParaRPr>
-          </a:p>
-        </p:txBody>
-      </p:sp>
-      <p:pic>
-        <p:nvPicPr>
-          <p:cNvPr id="2" name="그림 1">
-            <a:extLst>
-              <a:ext uri="{FF2B5EF4-FFF2-40B4-BE49-F238E27FC236}">
-                <a16:creationId xmlns:a16="http://schemas.microsoft.com/office/drawing/2014/main" id="{E24E00A9-B7BD-84B1-C8C9-4379A44B71E8}"/>
-              </a:ext>
-            </a:extLst>
-          </p:cNvPr>
-          <p:cNvPicPr>
-            <a:picLocks noChangeAspect="1"/>
-          </p:cNvPicPr>
-          <p:nvPr/>
-        </p:nvPicPr>
-        <p:blipFill>
-          <a:blip r:embed="rId2"/>
-          <a:stretch>
-            <a:fillRect/>
-          </a:stretch>
-        </p:blipFill>
-        <p:spPr>
-          <a:xfrm>
-            <a:off x="794196" y="2796363"/>
-            <a:ext cx="4492179" cy="2374720"/>
-          </a:xfrm>
-          <a:prstGeom prst="rect">
-            <a:avLst/>
-          </a:prstGeom>
-        </p:spPr>
-      </p:pic>
-      <p:pic>
-        <p:nvPicPr>
-          <p:cNvPr id="5" name="그림 4">
-            <a:extLst>
-              <a:ext uri="{FF2B5EF4-FFF2-40B4-BE49-F238E27FC236}">
-                <a16:creationId xmlns:a16="http://schemas.microsoft.com/office/drawing/2014/main" id="{E2B39FB3-BDC3-5CE1-2660-D71F27A4AC06}"/>
-              </a:ext>
-            </a:extLst>
-          </p:cNvPr>
-          <p:cNvPicPr>
-            <a:picLocks noChangeAspect="1"/>
-          </p:cNvPicPr>
-          <p:nvPr/>
-        </p:nvPicPr>
-        <p:blipFill>
-          <a:blip r:embed="rId3"/>
-          <a:stretch>
-            <a:fillRect/>
-          </a:stretch>
-        </p:blipFill>
-        <p:spPr>
-          <a:xfrm>
-            <a:off x="5937695" y="2796363"/>
-            <a:ext cx="4737003" cy="3063556"/>
-          </a:xfrm>
-          <a:prstGeom prst="rect">
-            <a:avLst/>
-          </a:prstGeom>
-        </p:spPr>
-      </p:pic>
-      <p:sp>
-        <p:nvSpPr>
-          <p:cNvPr id="6" name="TextBox 5">
-            <a:extLst>
-              <a:ext uri="{FF2B5EF4-FFF2-40B4-BE49-F238E27FC236}">
-                <a16:creationId xmlns:a16="http://schemas.microsoft.com/office/drawing/2014/main" id="{C000331E-189C-7790-90B5-D620BD0EBE3F}"/>
-              </a:ext>
-            </a:extLst>
-          </p:cNvPr>
-          <p:cNvSpPr txBox="1"/>
-          <p:nvPr/>
-        </p:nvSpPr>
-        <p:spPr>
-          <a:xfrm>
-            <a:off x="2177634" y="5497523"/>
-            <a:ext cx="3166251" cy="369332"/>
-          </a:xfrm>
-          <a:prstGeom prst="rect">
-            <a:avLst/>
-          </a:prstGeom>
-          <a:noFill/>
-        </p:spPr>
-        <p:txBody>
-          <a:bodyPr wrap="none" rtlCol="0">
-            <a:spAutoFit/>
-          </a:bodyPr>
-          <a:lstStyle/>
-          <a:p>
-            <a:r>
-              <a:rPr lang="en-US" altLang="ko-KR" dirty="0">
-                <a:latin typeface="맑은 고딕 Semilight" panose="020B0502040204020203" pitchFamily="50" charset="-127"/>
-                <a:ea typeface="맑은 고딕 Semilight" panose="020B0502040204020203" pitchFamily="50" charset="-127"/>
-                <a:cs typeface="맑은 고딕 Semilight" panose="020B0502040204020203" pitchFamily="50" charset="-127"/>
-              </a:rPr>
-              <a:t>Forward, </a:t>
-            </a:r>
-            <a:r>
-              <a:rPr lang="en-US" altLang="ko-KR" dirty="0" err="1">
-                <a:latin typeface="맑은 고딕 Semilight" panose="020B0502040204020203" pitchFamily="50" charset="-127"/>
-                <a:ea typeface="맑은 고딕 Semilight" panose="020B0502040204020203" pitchFamily="50" charset="-127"/>
-                <a:cs typeface="맑은 고딕 Semilight" panose="020B0502040204020203" pitchFamily="50" charset="-127"/>
-              </a:rPr>
-              <a:t>Autograd</a:t>
-            </a:r>
-            <a:r>
-              <a:rPr lang="en-US" altLang="ko-KR" dirty="0">
-                <a:latin typeface="맑은 고딕 Semilight" panose="020B0502040204020203" pitchFamily="50" charset="-127"/>
-                <a:ea typeface="맑은 고딕 Semilight" panose="020B0502040204020203" pitchFamily="50" charset="-127"/>
-                <a:cs typeface="맑은 고딕 Semilight" panose="020B0502040204020203" pitchFamily="50" charset="-127"/>
-              </a:rPr>
-              <a:t>, Backward</a:t>
-            </a:r>
-            <a:endParaRPr lang="ko-KR" altLang="en-US" dirty="0">
-              <a:latin typeface="맑은 고딕 Semilight" panose="020B0502040204020203" pitchFamily="50" charset="-127"/>
-              <a:ea typeface="맑은 고딕 Semilight" panose="020B0502040204020203" pitchFamily="50" charset="-127"/>
-              <a:cs typeface="맑은 고딕 Semilight" panose="020B0502040204020203" pitchFamily="50" charset="-127"/>
-            </a:endParaRPr>
-          </a:p>
-        </p:txBody>
-      </p:sp>
-      <p:sp>
-        <p:nvSpPr>
-          <p:cNvPr id="8" name="TextBox 7">
-            <a:extLst>
-              <a:ext uri="{FF2B5EF4-FFF2-40B4-BE49-F238E27FC236}">
-                <a16:creationId xmlns:a16="http://schemas.microsoft.com/office/drawing/2014/main" id="{AB747EDD-F717-2F86-B83C-CA5F3D943427}"/>
-              </a:ext>
-            </a:extLst>
-          </p:cNvPr>
-          <p:cNvSpPr txBox="1"/>
-          <p:nvPr/>
-        </p:nvSpPr>
-        <p:spPr>
-          <a:xfrm>
-            <a:off x="561974" y="1265090"/>
-            <a:ext cx="10835829" cy="1152688"/>
-          </a:xfrm>
-          <a:prstGeom prst="rect">
-            <a:avLst/>
-          </a:prstGeom>
-          <a:noFill/>
-        </p:spPr>
-        <p:txBody>
-          <a:bodyPr wrap="square">
-            <a:spAutoFit/>
-          </a:bodyPr>
-          <a:lstStyle/>
-          <a:p>
-            <a:pPr>
-              <a:lnSpc>
-                <a:spcPct val="150000"/>
-              </a:lnSpc>
-            </a:pPr>
-            <a:r>
-              <a:rPr lang="en-US" altLang="ko-KR" sz="1600" b="1" dirty="0">
-                <a:latin typeface="맑은 고딕 Semilight" panose="020B0502040204020203" pitchFamily="50" charset="-127"/>
-                <a:ea typeface="맑은 고딕 Semilight" panose="020B0502040204020203" pitchFamily="50" charset="-127"/>
-                <a:cs typeface="맑은 고딕 Semilight" panose="020B0502040204020203" pitchFamily="50" charset="-127"/>
-              </a:rPr>
-              <a:t>Forward:</a:t>
-            </a:r>
-            <a:r>
-              <a:rPr lang="ko-KR" altLang="en-US" sz="1600" dirty="0">
-                <a:latin typeface="맑은 고딕 Semilight" panose="020B0502040204020203" pitchFamily="50" charset="-127"/>
-                <a:ea typeface="맑은 고딕 Semilight" panose="020B0502040204020203" pitchFamily="50" charset="-127"/>
-                <a:cs typeface="맑은 고딕 Semilight" panose="020B0502040204020203" pitchFamily="50" charset="-127"/>
-              </a:rPr>
-              <a:t> 시험 문제를 풀고</a:t>
-            </a:r>
-            <a:r>
-              <a:rPr lang="en-US" altLang="ko-KR" sz="1600" dirty="0">
-                <a:latin typeface="맑은 고딕 Semilight" panose="020B0502040204020203" pitchFamily="50" charset="-127"/>
-                <a:ea typeface="맑은 고딕 Semilight" panose="020B0502040204020203" pitchFamily="50" charset="-127"/>
-                <a:cs typeface="맑은 고딕 Semilight" panose="020B0502040204020203" pitchFamily="50" charset="-127"/>
-              </a:rPr>
-              <a:t>(</a:t>
-            </a:r>
-            <a:r>
-              <a:rPr lang="ko-KR" altLang="en-US" sz="1600" dirty="0" err="1">
-                <a:latin typeface="맑은 고딕 Semilight" panose="020B0502040204020203" pitchFamily="50" charset="-127"/>
-                <a:ea typeface="맑은 고딕 Semilight" panose="020B0502040204020203" pitchFamily="50" charset="-127"/>
-                <a:cs typeface="맑은 고딕 Semilight" panose="020B0502040204020203" pitchFamily="50" charset="-127"/>
-              </a:rPr>
-              <a:t>네크워크</a:t>
-            </a:r>
-            <a:r>
-              <a:rPr lang="ko-KR" altLang="en-US" sz="1600" dirty="0">
-                <a:latin typeface="맑은 고딕 Semilight" panose="020B0502040204020203" pitchFamily="50" charset="-127"/>
-                <a:ea typeface="맑은 고딕 Semilight" panose="020B0502040204020203" pitchFamily="50" charset="-127"/>
-                <a:cs typeface="맑은 고딕 Semilight" panose="020B0502040204020203" pitchFamily="50" charset="-127"/>
-              </a:rPr>
-              <a:t> 구조 설정</a:t>
-            </a:r>
-            <a:r>
-              <a:rPr lang="en-US" altLang="ko-KR" sz="1600" dirty="0">
-                <a:latin typeface="맑은 고딕 Semilight" panose="020B0502040204020203" pitchFamily="50" charset="-127"/>
-                <a:ea typeface="맑은 고딕 Semilight" panose="020B0502040204020203" pitchFamily="50" charset="-127"/>
-                <a:cs typeface="맑은 고딕 Semilight" panose="020B0502040204020203" pitchFamily="50" charset="-127"/>
-              </a:rPr>
-              <a:t>)</a:t>
-            </a:r>
-            <a:r>
-              <a:rPr lang="ko-KR" altLang="en-US" sz="1600" dirty="0">
-                <a:latin typeface="맑은 고딕 Semilight" panose="020B0502040204020203" pitchFamily="50" charset="-127"/>
-                <a:ea typeface="맑은 고딕 Semilight" panose="020B0502040204020203" pitchFamily="50" charset="-127"/>
-                <a:cs typeface="맑은 고딕 Semilight" panose="020B0502040204020203" pitchFamily="50" charset="-127"/>
-              </a:rPr>
-              <a:t> </a:t>
-            </a:r>
-            <a:r>
-              <a:rPr lang="en-US" altLang="ko-KR" sz="1600" b="1" dirty="0">
-                <a:latin typeface="맑은 고딕 Semilight" panose="020B0502040204020203" pitchFamily="50" charset="-127"/>
-                <a:ea typeface="맑은 고딕 Semilight" panose="020B0502040204020203" pitchFamily="50" charset="-127"/>
-                <a:cs typeface="맑은 고딕 Semilight" panose="020B0502040204020203" pitchFamily="50" charset="-127"/>
-              </a:rPr>
-              <a:t>Loss </a:t>
-            </a:r>
-            <a:r>
-              <a:rPr lang="ko-KR" altLang="en-US" sz="1600" b="1" dirty="0">
-                <a:latin typeface="맑은 고딕 Semilight" panose="020B0502040204020203" pitchFamily="50" charset="-127"/>
-                <a:ea typeface="맑은 고딕 Semilight" panose="020B0502040204020203" pitchFamily="50" charset="-127"/>
-                <a:cs typeface="맑은 고딕 Semilight" panose="020B0502040204020203" pitchFamily="50" charset="-127"/>
-              </a:rPr>
-              <a:t>계산</a:t>
-            </a:r>
-            <a:r>
-              <a:rPr lang="en-US" altLang="ko-KR" sz="1600" b="1" dirty="0">
-                <a:latin typeface="맑은 고딕 Semilight" panose="020B0502040204020203" pitchFamily="50" charset="-127"/>
-                <a:ea typeface="맑은 고딕 Semilight" panose="020B0502040204020203" pitchFamily="50" charset="-127"/>
-                <a:cs typeface="맑은 고딕 Semilight" panose="020B0502040204020203" pitchFamily="50" charset="-127"/>
-              </a:rPr>
-              <a:t>:</a:t>
-            </a:r>
-            <a:r>
-              <a:rPr lang="ko-KR" altLang="en-US" sz="1600" dirty="0">
-                <a:latin typeface="맑은 고딕 Semilight" panose="020B0502040204020203" pitchFamily="50" charset="-127"/>
-                <a:ea typeface="맑은 고딕 Semilight" panose="020B0502040204020203" pitchFamily="50" charset="-127"/>
-                <a:cs typeface="맑은 고딕 Semilight" panose="020B0502040204020203" pitchFamily="50" charset="-127"/>
-              </a:rPr>
-              <a:t> 채점을 해서 몇 점 틀렸는지 확인한 후 </a:t>
-            </a:r>
-            <a:r>
-              <a:rPr lang="en-US" altLang="ko-KR" sz="1600" b="1" dirty="0">
-                <a:latin typeface="맑은 고딕 Semilight" panose="020B0502040204020203" pitchFamily="50" charset="-127"/>
-                <a:ea typeface="맑은 고딕 Semilight" panose="020B0502040204020203" pitchFamily="50" charset="-127"/>
-                <a:cs typeface="맑은 고딕 Semilight" panose="020B0502040204020203" pitchFamily="50" charset="-127"/>
-              </a:rPr>
-              <a:t>Backward:</a:t>
-            </a:r>
-            <a:r>
-              <a:rPr lang="ko-KR" altLang="en-US" sz="1600" dirty="0">
-                <a:latin typeface="맑은 고딕 Semilight" panose="020B0502040204020203" pitchFamily="50" charset="-127"/>
-                <a:ea typeface="맑은 고딕 Semilight" panose="020B0502040204020203" pitchFamily="50" charset="-127"/>
-                <a:cs typeface="맑은 고딕 Semilight" panose="020B0502040204020203" pitchFamily="50" charset="-127"/>
-              </a:rPr>
-              <a:t> 틀린 문제의 해설지를 보며 </a:t>
-            </a:r>
-            <a:r>
-              <a:rPr lang="en-US" altLang="ko-KR" sz="1600" dirty="0">
-                <a:latin typeface="맑은 고딕 Semilight" panose="020B0502040204020203" pitchFamily="50" charset="-127"/>
-                <a:ea typeface="맑은 고딕 Semilight" panose="020B0502040204020203" pitchFamily="50" charset="-127"/>
-                <a:cs typeface="맑은 고딕 Semilight" panose="020B0502040204020203" pitchFamily="50" charset="-127"/>
-              </a:rPr>
-              <a:t>"</a:t>
-            </a:r>
-            <a:r>
-              <a:rPr lang="ko-KR" altLang="en-US" sz="1600" dirty="0">
-                <a:latin typeface="맑은 고딕 Semilight" panose="020B0502040204020203" pitchFamily="50" charset="-127"/>
-                <a:ea typeface="맑은 고딕 Semilight" panose="020B0502040204020203" pitchFamily="50" charset="-127"/>
-                <a:cs typeface="맑은 고딕 Semilight" panose="020B0502040204020203" pitchFamily="50" charset="-127"/>
-              </a:rPr>
-              <a:t>어떤 개념이 부족했는지</a:t>
-            </a:r>
-            <a:r>
-              <a:rPr lang="en-US" altLang="ko-KR" sz="1600" dirty="0">
-                <a:latin typeface="맑은 고딕 Semilight" panose="020B0502040204020203" pitchFamily="50" charset="-127"/>
-                <a:ea typeface="맑은 고딕 Semilight" panose="020B0502040204020203" pitchFamily="50" charset="-127"/>
-                <a:cs typeface="맑은 고딕 Semilight" panose="020B0502040204020203" pitchFamily="50" charset="-127"/>
-              </a:rPr>
-              <a:t>" </a:t>
-            </a:r>
-            <a:r>
-              <a:rPr lang="ko-KR" altLang="en-US" sz="1600" dirty="0">
-                <a:latin typeface="맑은 고딕 Semilight" panose="020B0502040204020203" pitchFamily="50" charset="-127"/>
-                <a:ea typeface="맑은 고딕 Semilight" panose="020B0502040204020203" pitchFamily="50" charset="-127"/>
-                <a:cs typeface="맑은 고딕 Semilight" panose="020B0502040204020203" pitchFamily="50" charset="-127"/>
-              </a:rPr>
-              <a:t>파악하여 </a:t>
-            </a:r>
-            <a:r>
-              <a:rPr lang="en-US" altLang="ko-KR" sz="1600" b="1" dirty="0">
-                <a:latin typeface="맑은 고딕 Semilight" panose="020B0502040204020203" pitchFamily="50" charset="-127"/>
-                <a:ea typeface="맑은 고딕 Semilight" panose="020B0502040204020203" pitchFamily="50" charset="-127"/>
-                <a:cs typeface="맑은 고딕 Semilight" panose="020B0502040204020203" pitchFamily="50" charset="-127"/>
-              </a:rPr>
-              <a:t>Optimization:</a:t>
-            </a:r>
-            <a:r>
-              <a:rPr lang="ko-KR" altLang="en-US" sz="1600" dirty="0">
-                <a:latin typeface="맑은 고딕 Semilight" panose="020B0502040204020203" pitchFamily="50" charset="-127"/>
-                <a:ea typeface="맑은 고딕 Semilight" panose="020B0502040204020203" pitchFamily="50" charset="-127"/>
-                <a:cs typeface="맑은 고딕 Semilight" panose="020B0502040204020203" pitchFamily="50" charset="-127"/>
-              </a:rPr>
-              <a:t> 부족했던 개념을 새로 공부해서 머릿속 지식</a:t>
-            </a:r>
-            <a:r>
-              <a:rPr lang="en-US" altLang="ko-KR" sz="1600" dirty="0">
-                <a:latin typeface="맑은 고딕 Semilight" panose="020B0502040204020203" pitchFamily="50" charset="-127"/>
-                <a:ea typeface="맑은 고딕 Semilight" panose="020B0502040204020203" pitchFamily="50" charset="-127"/>
-                <a:cs typeface="맑은 고딕 Semilight" panose="020B0502040204020203" pitchFamily="50" charset="-127"/>
-              </a:rPr>
-              <a:t>(</a:t>
-            </a:r>
-            <a:r>
-              <a:rPr lang="ko-KR" altLang="en-US" sz="1600" dirty="0">
-                <a:latin typeface="맑은 고딕 Semilight" panose="020B0502040204020203" pitchFamily="50" charset="-127"/>
-                <a:ea typeface="맑은 고딕 Semilight" panose="020B0502040204020203" pitchFamily="50" charset="-127"/>
-                <a:cs typeface="맑은 고딕 Semilight" panose="020B0502040204020203" pitchFamily="50" charset="-127"/>
-              </a:rPr>
-              <a:t>가중치</a:t>
-            </a:r>
-            <a:r>
-              <a:rPr lang="en-US" altLang="ko-KR" sz="1600" dirty="0">
-                <a:latin typeface="맑은 고딕 Semilight" panose="020B0502040204020203" pitchFamily="50" charset="-127"/>
-                <a:ea typeface="맑은 고딕 Semilight" panose="020B0502040204020203" pitchFamily="50" charset="-127"/>
-                <a:cs typeface="맑은 고딕 Semilight" panose="020B0502040204020203" pitchFamily="50" charset="-127"/>
-              </a:rPr>
-              <a:t>)</a:t>
-            </a:r>
-            <a:r>
-              <a:rPr lang="ko-KR" altLang="en-US" sz="1600" dirty="0">
-                <a:latin typeface="맑은 고딕 Semilight" panose="020B0502040204020203" pitchFamily="50" charset="-127"/>
-                <a:ea typeface="맑은 고딕 Semilight" panose="020B0502040204020203" pitchFamily="50" charset="-127"/>
-                <a:cs typeface="맑은 고딕 Semilight" panose="020B0502040204020203" pitchFamily="50" charset="-127"/>
-              </a:rPr>
-              <a:t>을 고쳐가는 과정을 수천 번 반복</a:t>
-            </a:r>
-            <a:r>
-              <a:rPr lang="en-US" altLang="ko-KR" sz="1600" dirty="0">
-                <a:latin typeface="맑은 고딕 Semilight" panose="020B0502040204020203" pitchFamily="50" charset="-127"/>
-                <a:ea typeface="맑은 고딕 Semilight" panose="020B0502040204020203" pitchFamily="50" charset="-127"/>
-                <a:cs typeface="맑은 고딕 Semilight" panose="020B0502040204020203" pitchFamily="50" charset="-127"/>
-              </a:rPr>
-              <a:t>(Epoch)</a:t>
-            </a:r>
-            <a:r>
-              <a:rPr lang="ko-KR" altLang="en-US" sz="1600" dirty="0">
-                <a:latin typeface="맑은 고딕 Semilight" panose="020B0502040204020203" pitchFamily="50" charset="-127"/>
-                <a:ea typeface="맑은 고딕 Semilight" panose="020B0502040204020203" pitchFamily="50" charset="-127"/>
-                <a:cs typeface="맑은 고딕 Semilight" panose="020B0502040204020203" pitchFamily="50" charset="-127"/>
-              </a:rPr>
-              <a:t>하면 모델은 점점 정답에 가까워지게 학습</a:t>
-            </a:r>
-          </a:p>
-        </p:txBody>
-      </p:sp>
-    </p:spTree>
-    <p:extLst>
-      <p:ext uri="{BB962C8B-B14F-4D97-AF65-F5344CB8AC3E}">
-        <p14:creationId xmlns:p14="http://schemas.microsoft.com/office/powerpoint/2010/main" val="2153360048"/>
-      </p:ext>
-    </p:extLst>
-  </p:cSld>
-  <p:clrMapOvr>
-    <a:masterClrMapping/>
-  </p:clrMapOvr>
-</p:sld>
-</file>
-
-<file path=ppt/slides/slide30.xml><?xml version="1.0" encoding="utf-8"?>
+<file path=ppt/slides/slide33.xml><?xml version="1.0" encoding="utf-8"?>
 <p:sld xmlns:a="http://schemas.openxmlformats.org/drawingml/2006/main" xmlns:r="http://schemas.openxmlformats.org/officeDocument/2006/relationships" xmlns:p="http://schemas.openxmlformats.org/presentationml/2006/main">
   <p:cSld>
     <p:spTree>
@@ -17764,7 +19730,7 @@
             <a:fld id="{D57F1E4F-1CFF-5643-939E-217C01CDF565}" type="slidenum">
               <a:rPr lang="en-US" smtClean="0"/>
               <a:pPr/>
-              <a:t>30</a:t>
+              <a:t>33</a:t>
             </a:fld>
             <a:endParaRPr lang="en-US" dirty="0"/>
           </a:p>
@@ -17943,7 +19909,7 @@
 </p:sld>
 </file>
 
-<file path=ppt/slides/slide31.xml><?xml version="1.0" encoding="utf-8"?>
+<file path=ppt/slides/slide34.xml><?xml version="1.0" encoding="utf-8"?>
 <p:sld xmlns:a="http://schemas.openxmlformats.org/drawingml/2006/main" xmlns:r="http://schemas.openxmlformats.org/officeDocument/2006/relationships" xmlns:p="http://schemas.openxmlformats.org/presentationml/2006/main">
   <p:cSld>
     <p:spTree>
@@ -17995,7 +19961,7 @@
             <a:fld id="{D57F1E4F-1CFF-5643-939E-217C01CDF565}" type="slidenum">
               <a:rPr lang="en-US" smtClean="0"/>
               <a:pPr/>
-              <a:t>31</a:t>
+              <a:t>34</a:t>
             </a:fld>
             <a:endParaRPr lang="en-US" dirty="0"/>
           </a:p>

--- a/Linear_Algebra/w6_Deep Learning.pptx
+++ b/Linear_Algebra/w6_Deep Learning.pptx
@@ -12161,7 +12161,7 @@
         </p:nvSpPr>
         <p:spPr>
           <a:xfrm>
-            <a:off x="507550" y="1480521"/>
+            <a:off x="670110" y="1700213"/>
             <a:ext cx="3592964" cy="3734398"/>
           </a:xfrm>
         </p:spPr>
@@ -12384,8 +12384,8 @@
         </p:blipFill>
         <p:spPr>
           <a:xfrm>
-            <a:off x="4100514" y="1448109"/>
-            <a:ext cx="7505700" cy="4431874"/>
+            <a:off x="4659314" y="1700213"/>
+            <a:ext cx="6413497" cy="3786963"/>
           </a:xfrm>
           <a:prstGeom prst="rect">
             <a:avLst/>
@@ -17646,7 +17646,7 @@
           <a:p>
             <a:pPr algn="l"/>
             <a:r>
-              <a:rPr lang="en-US" altLang="ko-KR" sz="2800" cap="none">
+              <a:rPr lang="en-US" altLang="ko-KR" sz="2800" cap="none" dirty="0">
                 <a:latin typeface="ADLaM Display" panose="02010000000000000000" pitchFamily="2" charset="0"/>
                 <a:cs typeface="ADLaM Display" panose="02010000000000000000" pitchFamily="2" charset="0"/>
               </a:rPr>

--- a/Linear_Algebra/w6_Deep Learning.pptx
+++ b/Linear_Algebra/w6_Deep Learning.pptx
@@ -9164,68 +9164,6 @@
           </a:p>
         </p:txBody>
       </p:sp>
-      <p:pic>
-        <p:nvPicPr>
-          <p:cNvPr id="8" name="그림 7">
-            <a:extLst>
-              <a:ext uri="{FF2B5EF4-FFF2-40B4-BE49-F238E27FC236}">
-                <a16:creationId xmlns:a16="http://schemas.microsoft.com/office/drawing/2014/main" id="{71E7BB11-E633-A94D-2501-F36DA50C0749}"/>
-              </a:ext>
-            </a:extLst>
-          </p:cNvPr>
-          <p:cNvPicPr>
-            <a:picLocks noChangeAspect="1"/>
-          </p:cNvPicPr>
-          <p:nvPr/>
-        </p:nvPicPr>
-        <p:blipFill>
-          <a:blip r:embed="rId2"/>
-          <a:stretch>
-            <a:fillRect/>
-          </a:stretch>
-        </p:blipFill>
-        <p:spPr>
-          <a:xfrm>
-            <a:off x="5079820" y="2029703"/>
-            <a:ext cx="5713174" cy="4371683"/>
-          </a:xfrm>
-          <a:prstGeom prst="rect">
-            <a:avLst/>
-          </a:prstGeom>
-        </p:spPr>
-      </p:pic>
-      <p:pic>
-        <p:nvPicPr>
-          <p:cNvPr id="3" name="그림 2">
-            <a:extLst>
-              <a:ext uri="{FF2B5EF4-FFF2-40B4-BE49-F238E27FC236}">
-                <a16:creationId xmlns:a16="http://schemas.microsoft.com/office/drawing/2014/main" id="{EAD74360-CCF4-B8C7-480C-D7341F47A02F}"/>
-              </a:ext>
-            </a:extLst>
-          </p:cNvPr>
-          <p:cNvPicPr>
-            <a:picLocks noChangeAspect="1"/>
-          </p:cNvPicPr>
-          <p:nvPr/>
-        </p:nvPicPr>
-        <p:blipFill>
-          <a:blip r:embed="rId3">
-            <a:grayscl/>
-          </a:blip>
-          <a:stretch>
-            <a:fillRect/>
-          </a:stretch>
-        </p:blipFill>
-        <p:spPr>
-          <a:xfrm>
-            <a:off x="656620" y="2691805"/>
-            <a:ext cx="3240913" cy="844788"/>
-          </a:xfrm>
-          <a:prstGeom prst="rect">
-            <a:avLst/>
-          </a:prstGeom>
-        </p:spPr>
-      </p:pic>
       <p:sp>
         <p:nvSpPr>
           <p:cNvPr id="7" name="TextBox 6">
@@ -9355,6 +9293,305 @@
           </a:p>
         </p:txBody>
       </p:sp>
+      <p:pic>
+        <p:nvPicPr>
+          <p:cNvPr id="10" name="그림 9">
+            <a:extLst>
+              <a:ext uri="{FF2B5EF4-FFF2-40B4-BE49-F238E27FC236}">
+                <a16:creationId xmlns:a16="http://schemas.microsoft.com/office/drawing/2014/main" id="{5C2E440B-91D4-F6FD-2093-8724B055434A}"/>
+              </a:ext>
+            </a:extLst>
+          </p:cNvPr>
+          <p:cNvPicPr>
+            <a:picLocks noChangeAspect="1"/>
+          </p:cNvPicPr>
+          <p:nvPr/>
+        </p:nvPicPr>
+        <p:blipFill>
+          <a:blip r:embed="rId2"/>
+          <a:stretch>
+            <a:fillRect/>
+          </a:stretch>
+        </p:blipFill>
+        <p:spPr>
+          <a:xfrm>
+            <a:off x="631177" y="2346220"/>
+            <a:ext cx="9554908" cy="3515216"/>
+          </a:xfrm>
+          <a:prstGeom prst="rect">
+            <a:avLst/>
+          </a:prstGeom>
+        </p:spPr>
+      </p:pic>
+      <p:pic>
+        <p:nvPicPr>
+          <p:cNvPr id="3" name="그림 2">
+            <a:extLst>
+              <a:ext uri="{FF2B5EF4-FFF2-40B4-BE49-F238E27FC236}">
+                <a16:creationId xmlns:a16="http://schemas.microsoft.com/office/drawing/2014/main" id="{EAD74360-CCF4-B8C7-480C-D7341F47A02F}"/>
+              </a:ext>
+            </a:extLst>
+          </p:cNvPr>
+          <p:cNvPicPr>
+            <a:picLocks noChangeAspect="1"/>
+          </p:cNvPicPr>
+          <p:nvPr/>
+        </p:nvPicPr>
+        <p:blipFill>
+          <a:blip r:embed="rId3">
+            <a:duotone>
+              <a:prstClr val="black"/>
+              <a:schemeClr val="accent5">
+                <a:tint val="45000"/>
+                <a:satMod val="400000"/>
+              </a:schemeClr>
+            </a:duotone>
+          </a:blip>
+          <a:stretch>
+            <a:fillRect/>
+          </a:stretch>
+        </p:blipFill>
+        <p:spPr>
+          <a:xfrm>
+            <a:off x="6936981" y="5568043"/>
+            <a:ext cx="3010598" cy="784753"/>
+          </a:xfrm>
+          <a:prstGeom prst="rect">
+            <a:avLst/>
+          </a:prstGeom>
+          <a:ln w="28575">
+            <a:solidFill>
+              <a:srgbClr val="FF0000"/>
+            </a:solidFill>
+          </a:ln>
+        </p:spPr>
+      </p:pic>
+      <p:pic>
+        <p:nvPicPr>
+          <p:cNvPr id="6" name="그림 5" descr="분류기] Softmax 함수 : 네이버 블로그">
+            <a:extLst>
+              <a:ext uri="{FF2B5EF4-FFF2-40B4-BE49-F238E27FC236}">
+                <a16:creationId xmlns:a16="http://schemas.microsoft.com/office/drawing/2014/main" id="{6DF8396C-609B-7141-FE25-7CA1E9B3D1E2}"/>
+              </a:ext>
+            </a:extLst>
+          </p:cNvPr>
+          <p:cNvPicPr>
+            <a:picLocks noChangeAspect="1"/>
+          </p:cNvPicPr>
+          <p:nvPr/>
+        </p:nvPicPr>
+        <p:blipFill>
+          <a:blip r:embed="rId4">
+            <a:duotone>
+              <a:schemeClr val="accent1">
+                <a:shade val="45000"/>
+                <a:satMod val="135000"/>
+              </a:schemeClr>
+              <a:prstClr val="white"/>
+            </a:duotone>
+          </a:blip>
+          <a:stretch>
+            <a:fillRect/>
+          </a:stretch>
+        </p:blipFill>
+        <p:spPr>
+          <a:xfrm>
+            <a:off x="4458857" y="5549571"/>
+            <a:ext cx="2440708" cy="1049505"/>
+          </a:xfrm>
+          <a:prstGeom prst="rect">
+            <a:avLst/>
+          </a:prstGeom>
+        </p:spPr>
+      </p:pic>
+      <p:pic>
+        <p:nvPicPr>
+          <p:cNvPr id="14" name="그림 13">
+            <a:extLst>
+              <a:ext uri="{FF2B5EF4-FFF2-40B4-BE49-F238E27FC236}">
+                <a16:creationId xmlns:a16="http://schemas.microsoft.com/office/drawing/2014/main" id="{BF77518F-7C5A-DC79-50B4-CD4B71A4A0C6}"/>
+              </a:ext>
+            </a:extLst>
+          </p:cNvPr>
+          <p:cNvPicPr>
+            <a:picLocks noChangeAspect="1"/>
+          </p:cNvPicPr>
+          <p:nvPr/>
+        </p:nvPicPr>
+        <p:blipFill>
+          <a:blip r:embed="rId5"/>
+          <a:stretch>
+            <a:fillRect/>
+          </a:stretch>
+        </p:blipFill>
+        <p:spPr>
+          <a:xfrm>
+            <a:off x="774536" y="5866641"/>
+            <a:ext cx="3684320" cy="377418"/>
+          </a:xfrm>
+          <a:prstGeom prst="rect">
+            <a:avLst/>
+          </a:prstGeom>
+          <a:ln w="19050">
+            <a:solidFill>
+              <a:srgbClr val="0070C0"/>
+            </a:solidFill>
+          </a:ln>
+        </p:spPr>
+      </p:pic>
+      <p:sp>
+        <p:nvSpPr>
+          <p:cNvPr id="15" name="직사각형 14">
+            <a:extLst>
+              <a:ext uri="{FF2B5EF4-FFF2-40B4-BE49-F238E27FC236}">
+                <a16:creationId xmlns:a16="http://schemas.microsoft.com/office/drawing/2014/main" id="{9F32B282-897A-E569-9C0B-CECA36EC63CF}"/>
+              </a:ext>
+            </a:extLst>
+          </p:cNvPr>
+          <p:cNvSpPr/>
+          <p:nvPr/>
+        </p:nvSpPr>
+        <p:spPr>
+          <a:xfrm>
+            <a:off x="4514273" y="5237017"/>
+            <a:ext cx="861292" cy="340262"/>
+          </a:xfrm>
+          <a:prstGeom prst="rect">
+            <a:avLst/>
+          </a:prstGeom>
+          <a:noFill/>
+          <a:ln w="28575">
+            <a:solidFill>
+              <a:srgbClr val="0070C0"/>
+            </a:solidFill>
+          </a:ln>
+        </p:spPr>
+        <p:style>
+          <a:lnRef idx="2">
+            <a:schemeClr val="accent1">
+              <a:shade val="15000"/>
+            </a:schemeClr>
+          </a:lnRef>
+          <a:fillRef idx="1">
+            <a:schemeClr val="accent1"/>
+          </a:fillRef>
+          <a:effectRef idx="0">
+            <a:schemeClr val="accent1"/>
+          </a:effectRef>
+          <a:fontRef idx="minor">
+            <a:schemeClr val="lt1"/>
+          </a:fontRef>
+        </p:style>
+        <p:txBody>
+          <a:bodyPr rtlCol="0" anchor="ctr"/>
+          <a:lstStyle/>
+          <a:p>
+            <a:pPr algn="ctr"/>
+            <a:endParaRPr lang="ko-KR" altLang="en-US" dirty="0">
+              <a:ln w="28575">
+                <a:solidFill>
+                  <a:srgbClr val="0070C0"/>
+                </a:solidFill>
+              </a:ln>
+              <a:noFill/>
+            </a:endParaRPr>
+          </a:p>
+        </p:txBody>
+      </p:sp>
+      <p:pic>
+        <p:nvPicPr>
+          <p:cNvPr id="17" name="그림 16">
+            <a:extLst>
+              <a:ext uri="{FF2B5EF4-FFF2-40B4-BE49-F238E27FC236}">
+                <a16:creationId xmlns:a16="http://schemas.microsoft.com/office/drawing/2014/main" id="{8E4B74DC-4F26-6050-E574-472C5673CB1F}"/>
+              </a:ext>
+            </a:extLst>
+          </p:cNvPr>
+          <p:cNvPicPr>
+            <a:picLocks noChangeAspect="1"/>
+          </p:cNvPicPr>
+          <p:nvPr/>
+        </p:nvPicPr>
+        <p:blipFill>
+          <a:blip r:embed="rId6"/>
+          <a:stretch>
+            <a:fillRect/>
+          </a:stretch>
+        </p:blipFill>
+        <p:spPr>
+          <a:xfrm>
+            <a:off x="9171575" y="4171654"/>
+            <a:ext cx="2791215" cy="428685"/>
+          </a:xfrm>
+          <a:prstGeom prst="rect">
+            <a:avLst/>
+          </a:prstGeom>
+          <a:ln w="28575">
+            <a:solidFill>
+              <a:srgbClr val="FF0000"/>
+            </a:solidFill>
+          </a:ln>
+        </p:spPr>
+      </p:pic>
+      <p:sp>
+        <p:nvSpPr>
+          <p:cNvPr id="18" name="직사각형 17">
+            <a:extLst>
+              <a:ext uri="{FF2B5EF4-FFF2-40B4-BE49-F238E27FC236}">
+                <a16:creationId xmlns:a16="http://schemas.microsoft.com/office/drawing/2014/main" id="{CC8CCDDA-C063-685C-0C3A-25640911DAE4}"/>
+              </a:ext>
+            </a:extLst>
+          </p:cNvPr>
+          <p:cNvSpPr/>
+          <p:nvPr/>
+        </p:nvSpPr>
+        <p:spPr>
+          <a:xfrm>
+            <a:off x="9377224" y="4983020"/>
+            <a:ext cx="861292" cy="340262"/>
+          </a:xfrm>
+          <a:prstGeom prst="rect">
+            <a:avLst/>
+          </a:prstGeom>
+          <a:noFill/>
+          <a:ln w="28575">
+            <a:solidFill>
+              <a:srgbClr val="DD462F"/>
+            </a:solidFill>
+          </a:ln>
+        </p:spPr>
+        <p:style>
+          <a:lnRef idx="2">
+            <a:schemeClr val="accent1">
+              <a:shade val="15000"/>
+            </a:schemeClr>
+          </a:lnRef>
+          <a:fillRef idx="1">
+            <a:schemeClr val="accent1"/>
+          </a:fillRef>
+          <a:effectRef idx="0">
+            <a:schemeClr val="accent1"/>
+          </a:effectRef>
+          <a:fontRef idx="minor">
+            <a:schemeClr val="lt1"/>
+          </a:fontRef>
+        </p:style>
+        <p:txBody>
+          <a:bodyPr rtlCol="0" anchor="ctr"/>
+          <a:lstStyle/>
+          <a:p>
+            <a:pPr algn="ctr"/>
+            <a:endParaRPr lang="ko-KR" altLang="en-US" dirty="0">
+              <a:ln w="28575">
+                <a:solidFill>
+                  <a:srgbClr val="0070C0"/>
+                </a:solidFill>
+              </a:ln>
+              <a:noFill/>
+            </a:endParaRPr>
+          </a:p>
+        </p:txBody>
+      </p:sp>
     </p:spTree>
     <p:extLst>
       <p:ext uri="{BB962C8B-B14F-4D97-AF65-F5344CB8AC3E}">
@@ -9365,6 +9602,256 @@
   <p:clrMapOvr>
     <a:masterClrMapping/>
   </p:clrMapOvr>
+  <p:timing>
+    <p:tnLst>
+      <p:par>
+        <p:cTn id="1" dur="indefinite" restart="never" nodeType="tmRoot">
+          <p:childTnLst>
+            <p:seq concurrent="1" nextAc="seek">
+              <p:cTn id="2" dur="indefinite" nodeType="mainSeq">
+                <p:childTnLst>
+                  <p:par>
+                    <p:cTn id="3" fill="hold">
+                      <p:stCondLst>
+                        <p:cond delay="indefinite"/>
+                      </p:stCondLst>
+                      <p:childTnLst>
+                        <p:par>
+                          <p:cTn id="4" fill="hold">
+                            <p:stCondLst>
+                              <p:cond delay="0"/>
+                            </p:stCondLst>
+                            <p:childTnLst>
+                              <p:par>
+                                <p:cTn id="5" presetID="1" presetClass="entr" presetSubtype="0" fill="hold" nodeType="clickEffect">
+                                  <p:stCondLst>
+                                    <p:cond delay="0"/>
+                                  </p:stCondLst>
+                                  <p:childTnLst>
+                                    <p:set>
+                                      <p:cBhvr>
+                                        <p:cTn id="6" dur="1" fill="hold">
+                                          <p:stCondLst>
+                                            <p:cond delay="0"/>
+                                          </p:stCondLst>
+                                        </p:cTn>
+                                        <p:tgtEl>
+                                          <p:spTgt spid="14"/>
+                                        </p:tgtEl>
+                                        <p:attrNameLst>
+                                          <p:attrName>style.visibility</p:attrName>
+                                        </p:attrNameLst>
+                                      </p:cBhvr>
+                                      <p:to>
+                                        <p:strVal val="visible"/>
+                                      </p:to>
+                                    </p:set>
+                                  </p:childTnLst>
+                                </p:cTn>
+                              </p:par>
+                              <p:par>
+                                <p:cTn id="7" presetID="1" presetClass="entr" presetSubtype="0" fill="hold" grpId="0" nodeType="withEffect">
+                                  <p:stCondLst>
+                                    <p:cond delay="0"/>
+                                  </p:stCondLst>
+                                  <p:childTnLst>
+                                    <p:set>
+                                      <p:cBhvr>
+                                        <p:cTn id="8" dur="1" fill="hold">
+                                          <p:stCondLst>
+                                            <p:cond delay="0"/>
+                                          </p:stCondLst>
+                                        </p:cTn>
+                                        <p:tgtEl>
+                                          <p:spTgt spid="15"/>
+                                        </p:tgtEl>
+                                        <p:attrNameLst>
+                                          <p:attrName>style.visibility</p:attrName>
+                                        </p:attrNameLst>
+                                      </p:cBhvr>
+                                      <p:to>
+                                        <p:strVal val="visible"/>
+                                      </p:to>
+                                    </p:set>
+                                  </p:childTnLst>
+                                </p:cTn>
+                              </p:par>
+                              <p:par>
+                                <p:cTn id="9" presetID="1" presetClass="entr" presetSubtype="0" fill="hold" nodeType="withEffect">
+                                  <p:stCondLst>
+                                    <p:cond delay="0"/>
+                                  </p:stCondLst>
+                                  <p:childTnLst>
+                                    <p:set>
+                                      <p:cBhvr>
+                                        <p:cTn id="10" dur="1" fill="hold">
+                                          <p:stCondLst>
+                                            <p:cond delay="0"/>
+                                          </p:stCondLst>
+                                        </p:cTn>
+                                        <p:tgtEl>
+                                          <p:spTgt spid="6"/>
+                                        </p:tgtEl>
+                                        <p:attrNameLst>
+                                          <p:attrName>style.visibility</p:attrName>
+                                        </p:attrNameLst>
+                                      </p:cBhvr>
+                                      <p:to>
+                                        <p:strVal val="visible"/>
+                                      </p:to>
+                                    </p:set>
+                                  </p:childTnLst>
+                                </p:cTn>
+                              </p:par>
+                            </p:childTnLst>
+                          </p:cTn>
+                        </p:par>
+                      </p:childTnLst>
+                    </p:cTn>
+                  </p:par>
+                  <p:par>
+                    <p:cTn id="11" fill="hold">
+                      <p:stCondLst>
+                        <p:cond delay="indefinite"/>
+                      </p:stCondLst>
+                      <p:childTnLst>
+                        <p:par>
+                          <p:cTn id="12" fill="hold">
+                            <p:stCondLst>
+                              <p:cond delay="0"/>
+                            </p:stCondLst>
+                            <p:childTnLst>
+                              <p:par>
+                                <p:cTn id="13" presetID="1" presetClass="entr" presetSubtype="0" fill="hold" grpId="0" nodeType="clickEffect">
+                                  <p:stCondLst>
+                                    <p:cond delay="0"/>
+                                  </p:stCondLst>
+                                  <p:childTnLst>
+                                    <p:set>
+                                      <p:cBhvr>
+                                        <p:cTn id="14" dur="1" fill="hold">
+                                          <p:stCondLst>
+                                            <p:cond delay="0"/>
+                                          </p:stCondLst>
+                                        </p:cTn>
+                                        <p:tgtEl>
+                                          <p:spTgt spid="18"/>
+                                        </p:tgtEl>
+                                        <p:attrNameLst>
+                                          <p:attrName>style.visibility</p:attrName>
+                                        </p:attrNameLst>
+                                      </p:cBhvr>
+                                      <p:to>
+                                        <p:strVal val="visible"/>
+                                      </p:to>
+                                    </p:set>
+                                  </p:childTnLst>
+                                </p:cTn>
+                              </p:par>
+                              <p:par>
+                                <p:cTn id="15" presetID="1" presetClass="entr" presetSubtype="0" fill="hold" nodeType="withEffect">
+                                  <p:stCondLst>
+                                    <p:cond delay="0"/>
+                                  </p:stCondLst>
+                                  <p:childTnLst>
+                                    <p:set>
+                                      <p:cBhvr>
+                                        <p:cTn id="16" dur="1" fill="hold">
+                                          <p:stCondLst>
+                                            <p:cond delay="0"/>
+                                          </p:stCondLst>
+                                        </p:cTn>
+                                        <p:tgtEl>
+                                          <p:spTgt spid="17"/>
+                                        </p:tgtEl>
+                                        <p:attrNameLst>
+                                          <p:attrName>style.visibility</p:attrName>
+                                        </p:attrNameLst>
+                                      </p:cBhvr>
+                                      <p:to>
+                                        <p:strVal val="visible"/>
+                                      </p:to>
+                                    </p:set>
+                                  </p:childTnLst>
+                                </p:cTn>
+                              </p:par>
+                            </p:childTnLst>
+                          </p:cTn>
+                        </p:par>
+                      </p:childTnLst>
+                    </p:cTn>
+                  </p:par>
+                  <p:par>
+                    <p:cTn id="17" fill="hold">
+                      <p:stCondLst>
+                        <p:cond delay="indefinite"/>
+                      </p:stCondLst>
+                      <p:childTnLst>
+                        <p:par>
+                          <p:cTn id="18" fill="hold">
+                            <p:stCondLst>
+                              <p:cond delay="0"/>
+                            </p:stCondLst>
+                            <p:childTnLst>
+                              <p:par>
+                                <p:cTn id="19" presetID="1" presetClass="entr" presetSubtype="0" fill="hold" nodeType="clickEffect">
+                                  <p:stCondLst>
+                                    <p:cond delay="0"/>
+                                  </p:stCondLst>
+                                  <p:childTnLst>
+                                    <p:set>
+                                      <p:cBhvr>
+                                        <p:cTn id="20" dur="1" fill="hold">
+                                          <p:stCondLst>
+                                            <p:cond delay="0"/>
+                                          </p:stCondLst>
+                                        </p:cTn>
+                                        <p:tgtEl>
+                                          <p:spTgt spid="3"/>
+                                        </p:tgtEl>
+                                        <p:attrNameLst>
+                                          <p:attrName>style.visibility</p:attrName>
+                                        </p:attrNameLst>
+                                      </p:cBhvr>
+                                      <p:to>
+                                        <p:strVal val="visible"/>
+                                      </p:to>
+                                    </p:set>
+                                  </p:childTnLst>
+                                </p:cTn>
+                              </p:par>
+                            </p:childTnLst>
+                          </p:cTn>
+                        </p:par>
+                      </p:childTnLst>
+                    </p:cTn>
+                  </p:par>
+                </p:childTnLst>
+              </p:cTn>
+              <p:prevCondLst>
+                <p:cond evt="onPrev" delay="0">
+                  <p:tgtEl>
+                    <p:sldTgt/>
+                  </p:tgtEl>
+                </p:cond>
+              </p:prevCondLst>
+              <p:nextCondLst>
+                <p:cond evt="onNext" delay="0">
+                  <p:tgtEl>
+                    <p:sldTgt/>
+                  </p:tgtEl>
+                </p:cond>
+              </p:nextCondLst>
+            </p:seq>
+          </p:childTnLst>
+        </p:cTn>
+      </p:par>
+    </p:tnLst>
+    <p:bldLst>
+      <p:bldP spid="15" grpId="0" animBg="1"/>
+      <p:bldP spid="18" grpId="0" animBg="1"/>
+    </p:bldLst>
+  </p:timing>
 </p:sld>
 </file>
 

--- a/Linear_Algebra/w6_Deep Learning.pptx
+++ b/Linear_Algebra/w6_Deep Learning.pptx
@@ -8855,10 +8855,10 @@
       </p:sp>
       <p:pic>
         <p:nvPicPr>
-          <p:cNvPr id="11" name="그림 10">
+          <p:cNvPr id="13" name="그림 12">
             <a:extLst>
               <a:ext uri="{FF2B5EF4-FFF2-40B4-BE49-F238E27FC236}">
-                <a16:creationId xmlns:a16="http://schemas.microsoft.com/office/drawing/2014/main" id="{65514FD8-2DC4-4FAB-2375-F50B8E9281E9}"/>
+                <a16:creationId xmlns:a16="http://schemas.microsoft.com/office/drawing/2014/main" id="{C8A7B801-0A51-4A98-B12E-63322EDDADBF}"/>
               </a:ext>
             </a:extLst>
           </p:cNvPr>
@@ -8875,37 +8875,7 @@
         </p:blipFill>
         <p:spPr>
           <a:xfrm>
-            <a:off x="710701" y="2174702"/>
-            <a:ext cx="6005080" cy="3939881"/>
-          </a:xfrm>
-          <a:prstGeom prst="rect">
-            <a:avLst/>
-          </a:prstGeom>
-        </p:spPr>
-      </p:pic>
-      <p:pic>
-        <p:nvPicPr>
-          <p:cNvPr id="13" name="그림 12">
-            <a:extLst>
-              <a:ext uri="{FF2B5EF4-FFF2-40B4-BE49-F238E27FC236}">
-                <a16:creationId xmlns:a16="http://schemas.microsoft.com/office/drawing/2014/main" id="{C8A7B801-0A51-4A98-B12E-63322EDDADBF}"/>
-              </a:ext>
-            </a:extLst>
-          </p:cNvPr>
-          <p:cNvPicPr>
-            <a:picLocks noChangeAspect="1"/>
-          </p:cNvPicPr>
-          <p:nvPr/>
-        </p:nvPicPr>
-        <p:blipFill>
-          <a:blip r:embed="rId4"/>
-          <a:stretch>
-            <a:fillRect/>
-          </a:stretch>
-        </p:blipFill>
-        <p:spPr>
-          <a:xfrm>
-            <a:off x="6893866" y="2624079"/>
+            <a:off x="6985080" y="1798410"/>
             <a:ext cx="4587433" cy="478434"/>
           </a:xfrm>
           <a:prstGeom prst="rect">
@@ -8979,23 +8949,7 @@
                 <a:ea typeface="맑은 고딕 Semilight" panose="020B0502040204020203" pitchFamily="50" charset="-127"/>
                 <a:cs typeface="맑은 고딕 Semilight" panose="020B0502040204020203" pitchFamily="50" charset="-127"/>
               </a:rPr>
-              <a:t>정답인 위치의 </a:t>
-            </a:r>
-            <a:r>
-              <a:rPr lang="ko-KR" altLang="en-US" sz="1800" dirty="0" err="1">
-                <a:latin typeface="맑은 고딕 Semilight" panose="020B0502040204020203" pitchFamily="50" charset="-127"/>
-                <a:ea typeface="맑은 고딕 Semilight" panose="020B0502040204020203" pitchFamily="50" charset="-127"/>
-                <a:cs typeface="맑은 고딕 Semilight" panose="020B0502040204020203" pitchFamily="50" charset="-127"/>
-              </a:rPr>
-              <a:t>확률값만</a:t>
-            </a:r>
-            <a:r>
-              <a:rPr lang="ko-KR" altLang="en-US" sz="1800" dirty="0">
-                <a:latin typeface="맑은 고딕 Semilight" panose="020B0502040204020203" pitchFamily="50" charset="-127"/>
-                <a:ea typeface="맑은 고딕 Semilight" panose="020B0502040204020203" pitchFamily="50" charset="-127"/>
-                <a:cs typeface="맑은 고딕 Semilight" panose="020B0502040204020203" pitchFamily="50" charset="-127"/>
-              </a:rPr>
-              <a:t> 남는다</a:t>
+              <a:t>정답인 위치의 확률 값만 남는다</a:t>
             </a:r>
             <a:r>
               <a:rPr lang="en-US" altLang="ko-KR" sz="1800" dirty="0">
@@ -9013,6 +8967,36 @@
           </a:p>
         </p:txBody>
       </p:sp>
+      <p:pic>
+        <p:nvPicPr>
+          <p:cNvPr id="6" name="그림 5">
+            <a:extLst>
+              <a:ext uri="{FF2B5EF4-FFF2-40B4-BE49-F238E27FC236}">
+                <a16:creationId xmlns:a16="http://schemas.microsoft.com/office/drawing/2014/main" id="{A6CBFD89-AE31-F70B-1B8A-A07BB6330D79}"/>
+              </a:ext>
+            </a:extLst>
+          </p:cNvPr>
+          <p:cNvPicPr>
+            <a:picLocks noChangeAspect="1"/>
+          </p:cNvPicPr>
+          <p:nvPr/>
+        </p:nvPicPr>
+        <p:blipFill>
+          <a:blip r:embed="rId4"/>
+          <a:stretch>
+            <a:fillRect/>
+          </a:stretch>
+        </p:blipFill>
+        <p:spPr>
+          <a:xfrm>
+            <a:off x="619487" y="2276844"/>
+            <a:ext cx="10908656" cy="3633509"/>
+          </a:xfrm>
+          <a:prstGeom prst="rect">
+            <a:avLst/>
+          </a:prstGeom>
+        </p:spPr>
+      </p:pic>
     </p:spTree>
     <p:extLst>
       <p:ext uri="{BB962C8B-B14F-4D97-AF65-F5344CB8AC3E}">
@@ -9049,6 +9033,36 @@
           <a:chExt cx="0" cy="0"/>
         </a:xfrm>
       </p:grpSpPr>
+      <p:pic>
+        <p:nvPicPr>
+          <p:cNvPr id="5" name="그림 4">
+            <a:extLst>
+              <a:ext uri="{FF2B5EF4-FFF2-40B4-BE49-F238E27FC236}">
+                <a16:creationId xmlns:a16="http://schemas.microsoft.com/office/drawing/2014/main" id="{D53F641F-7A68-D1E1-74DF-263C3332A21D}"/>
+              </a:ext>
+            </a:extLst>
+          </p:cNvPr>
+          <p:cNvPicPr>
+            <a:picLocks noChangeAspect="1"/>
+          </p:cNvPicPr>
+          <p:nvPr/>
+        </p:nvPicPr>
+        <p:blipFill>
+          <a:blip r:embed="rId2"/>
+          <a:stretch>
+            <a:fillRect/>
+          </a:stretch>
+        </p:blipFill>
+        <p:spPr>
+          <a:xfrm>
+            <a:off x="543286" y="2708078"/>
+            <a:ext cx="11086021" cy="3049553"/>
+          </a:xfrm>
+          <a:prstGeom prst="rect">
+            <a:avLst/>
+          </a:prstGeom>
+        </p:spPr>
+      </p:pic>
       <p:sp>
         <p:nvSpPr>
           <p:cNvPr id="4" name="슬라이드 번호 개체 틀 3">
@@ -9295,36 +9309,6 @@
       </p:sp>
       <p:pic>
         <p:nvPicPr>
-          <p:cNvPr id="10" name="그림 9">
-            <a:extLst>
-              <a:ext uri="{FF2B5EF4-FFF2-40B4-BE49-F238E27FC236}">
-                <a16:creationId xmlns:a16="http://schemas.microsoft.com/office/drawing/2014/main" id="{5C2E440B-91D4-F6FD-2093-8724B055434A}"/>
-              </a:ext>
-            </a:extLst>
-          </p:cNvPr>
-          <p:cNvPicPr>
-            <a:picLocks noChangeAspect="1"/>
-          </p:cNvPicPr>
-          <p:nvPr/>
-        </p:nvPicPr>
-        <p:blipFill>
-          <a:blip r:embed="rId2"/>
-          <a:stretch>
-            <a:fillRect/>
-          </a:stretch>
-        </p:blipFill>
-        <p:spPr>
-          <a:xfrm>
-            <a:off x="631177" y="2346220"/>
-            <a:ext cx="9554908" cy="3515216"/>
-          </a:xfrm>
-          <a:prstGeom prst="rect">
-            <a:avLst/>
-          </a:prstGeom>
-        </p:spPr>
-      </p:pic>
-      <p:pic>
-        <p:nvPicPr>
           <p:cNvPr id="3" name="그림 2">
             <a:extLst>
               <a:ext uri="{FF2B5EF4-FFF2-40B4-BE49-F238E27FC236}">
@@ -9353,7 +9337,7 @@
         </p:blipFill>
         <p:spPr>
           <a:xfrm>
-            <a:off x="6936981" y="5568043"/>
+            <a:off x="8524781" y="1825124"/>
             <a:ext cx="3010598" cy="784753"/>
           </a:xfrm>
           <a:prstGeom prst="rect">
@@ -9396,47 +9380,12 @@
         </p:blipFill>
         <p:spPr>
           <a:xfrm>
-            <a:off x="4458857" y="5549571"/>
+            <a:off x="6483362" y="5642397"/>
             <a:ext cx="2440708" cy="1049505"/>
           </a:xfrm>
           <a:prstGeom prst="rect">
             <a:avLst/>
           </a:prstGeom>
-        </p:spPr>
-      </p:pic>
-      <p:pic>
-        <p:nvPicPr>
-          <p:cNvPr id="14" name="그림 13">
-            <a:extLst>
-              <a:ext uri="{FF2B5EF4-FFF2-40B4-BE49-F238E27FC236}">
-                <a16:creationId xmlns:a16="http://schemas.microsoft.com/office/drawing/2014/main" id="{BF77518F-7C5A-DC79-50B4-CD4B71A4A0C6}"/>
-              </a:ext>
-            </a:extLst>
-          </p:cNvPr>
-          <p:cNvPicPr>
-            <a:picLocks noChangeAspect="1"/>
-          </p:cNvPicPr>
-          <p:nvPr/>
-        </p:nvPicPr>
-        <p:blipFill>
-          <a:blip r:embed="rId5"/>
-          <a:stretch>
-            <a:fillRect/>
-          </a:stretch>
-        </p:blipFill>
-        <p:spPr>
-          <a:xfrm>
-            <a:off x="774536" y="5866641"/>
-            <a:ext cx="3684320" cy="377418"/>
-          </a:xfrm>
-          <a:prstGeom prst="rect">
-            <a:avLst/>
-          </a:prstGeom>
-          <a:ln w="19050">
-            <a:solidFill>
-              <a:srgbClr val="0070C0"/>
-            </a:solidFill>
-          </a:ln>
         </p:spPr>
       </p:pic>
       <p:sp>
@@ -9453,7 +9402,7 @@
         </p:nvSpPr>
         <p:spPr>
           <a:xfrm>
-            <a:off x="4514273" y="5237017"/>
+            <a:off x="8590646" y="5274687"/>
             <a:ext cx="861292" cy="340262"/>
           </a:xfrm>
           <a:prstGeom prst="rect">
@@ -9498,41 +9447,6 @@
           </a:p>
         </p:txBody>
       </p:sp>
-      <p:pic>
-        <p:nvPicPr>
-          <p:cNvPr id="17" name="그림 16">
-            <a:extLst>
-              <a:ext uri="{FF2B5EF4-FFF2-40B4-BE49-F238E27FC236}">
-                <a16:creationId xmlns:a16="http://schemas.microsoft.com/office/drawing/2014/main" id="{8E4B74DC-4F26-6050-E574-472C5673CB1F}"/>
-              </a:ext>
-            </a:extLst>
-          </p:cNvPr>
-          <p:cNvPicPr>
-            <a:picLocks noChangeAspect="1"/>
-          </p:cNvPicPr>
-          <p:nvPr/>
-        </p:nvPicPr>
-        <p:blipFill>
-          <a:blip r:embed="rId6"/>
-          <a:stretch>
-            <a:fillRect/>
-          </a:stretch>
-        </p:blipFill>
-        <p:spPr>
-          <a:xfrm>
-            <a:off x="9171575" y="4171654"/>
-            <a:ext cx="2791215" cy="428685"/>
-          </a:xfrm>
-          <a:prstGeom prst="rect">
-            <a:avLst/>
-          </a:prstGeom>
-          <a:ln w="28575">
-            <a:solidFill>
-              <a:srgbClr val="FF0000"/>
-            </a:solidFill>
-          </a:ln>
-        </p:spPr>
-      </p:pic>
       <p:sp>
         <p:nvSpPr>
           <p:cNvPr id="18" name="직사각형 17">
@@ -9547,7 +9461,7 @@
         </p:nvSpPr>
         <p:spPr>
           <a:xfrm>
-            <a:off x="9377224" y="4983020"/>
+            <a:off x="10836910" y="5472266"/>
             <a:ext cx="861292" cy="340262"/>
           </a:xfrm>
           <a:prstGeom prst="rect">
@@ -9614,6 +9528,9 @@
                     <p:cTn id="3" fill="hold">
                       <p:stCondLst>
                         <p:cond delay="indefinite"/>
+                        <p:cond evt="onBegin" delay="0">
+                          <p:tn val="2"/>
+                        </p:cond>
                       </p:stCondLst>
                       <p:childTnLst>
                         <p:par>
@@ -9623,7 +9540,7 @@
                             </p:stCondLst>
                             <p:childTnLst>
                               <p:par>
-                                <p:cTn id="5" presetID="1" presetClass="entr" presetSubtype="0" fill="hold" nodeType="clickEffect">
+                                <p:cTn id="5" presetID="1" presetClass="entr" presetSubtype="0" fill="hold" grpId="0" nodeType="withEffect">
                                   <p:stCondLst>
                                     <p:cond delay="0"/>
                                   </p:stCondLst>
@@ -9631,33 +9548,6 @@
                                     <p:set>
                                       <p:cBhvr>
                                         <p:cTn id="6" dur="1" fill="hold">
-                                          <p:stCondLst>
-                                            <p:cond delay="0"/>
-                                          </p:stCondLst>
-                                        </p:cTn>
-                                        <p:tgtEl>
-                                          <p:spTgt spid="14"/>
-                                        </p:tgtEl>
-                                        <p:attrNameLst>
-                                          <p:attrName>style.visibility</p:attrName>
-                                        </p:attrNameLst>
-                                      </p:cBhvr>
-                                      <p:to>
-                                        <p:strVal val="visible"/>
-                                      </p:to>
-                                    </p:set>
-                                  </p:childTnLst>
-                                </p:cTn>
-                              </p:par>
-                              <p:par>
-                                <p:cTn id="7" presetID="1" presetClass="entr" presetSubtype="0" fill="hold" grpId="0" nodeType="withEffect">
-                                  <p:stCondLst>
-                                    <p:cond delay="0"/>
-                                  </p:stCondLst>
-                                  <p:childTnLst>
-                                    <p:set>
-                                      <p:cBhvr>
-                                        <p:cTn id="8" dur="1" fill="hold">
                                           <p:stCondLst>
                                             <p:cond delay="0"/>
                                           </p:stCondLst>
@@ -9677,14 +9567,14 @@
                                 </p:cTn>
                               </p:par>
                               <p:par>
-                                <p:cTn id="9" presetID="1" presetClass="entr" presetSubtype="0" fill="hold" nodeType="withEffect">
+                                <p:cTn id="7" presetID="1" presetClass="entr" presetSubtype="0" fill="hold" nodeType="withEffect">
                                   <p:stCondLst>
                                     <p:cond delay="0"/>
                                   </p:stCondLst>
                                   <p:childTnLst>
                                     <p:set>
                                       <p:cBhvr>
-                                        <p:cTn id="10" dur="1" fill="hold">
+                                        <p:cTn id="8" dur="1" fill="hold">
                                           <p:stCondLst>
                                             <p:cond delay="0"/>
                                           </p:stCondLst>
@@ -9710,59 +9600,32 @@
                     </p:cTn>
                   </p:par>
                   <p:par>
-                    <p:cTn id="11" fill="hold">
+                    <p:cTn id="9" fill="hold">
                       <p:stCondLst>
                         <p:cond delay="indefinite"/>
                       </p:stCondLst>
                       <p:childTnLst>
                         <p:par>
-                          <p:cTn id="12" fill="hold">
+                          <p:cTn id="10" fill="hold">
                             <p:stCondLst>
                               <p:cond delay="0"/>
                             </p:stCondLst>
                             <p:childTnLst>
                               <p:par>
-                                <p:cTn id="13" presetID="1" presetClass="entr" presetSubtype="0" fill="hold" grpId="0" nodeType="clickEffect">
+                                <p:cTn id="11" presetID="1" presetClass="entr" presetSubtype="0" fill="hold" grpId="0" nodeType="clickEffect">
                                   <p:stCondLst>
                                     <p:cond delay="0"/>
                                   </p:stCondLst>
                                   <p:childTnLst>
                                     <p:set>
                                       <p:cBhvr>
-                                        <p:cTn id="14" dur="1" fill="hold">
+                                        <p:cTn id="12" dur="1" fill="hold">
                                           <p:stCondLst>
                                             <p:cond delay="0"/>
                                           </p:stCondLst>
                                         </p:cTn>
                                         <p:tgtEl>
                                           <p:spTgt spid="18"/>
-                                        </p:tgtEl>
-                                        <p:attrNameLst>
-                                          <p:attrName>style.visibility</p:attrName>
-                                        </p:attrNameLst>
-                                      </p:cBhvr>
-                                      <p:to>
-                                        <p:strVal val="visible"/>
-                                      </p:to>
-                                    </p:set>
-                                  </p:childTnLst>
-                                </p:cTn>
-                              </p:par>
-                              <p:par>
-                                <p:cTn id="15" presetID="1" presetClass="entr" presetSubtype="0" fill="hold" nodeType="withEffect">
-                                  <p:stCondLst>
-                                    <p:cond delay="0"/>
-                                  </p:stCondLst>
-                                  <p:childTnLst>
-                                    <p:set>
-                                      <p:cBhvr>
-                                        <p:cTn id="16" dur="1" fill="hold">
-                                          <p:stCondLst>
-                                            <p:cond delay="0"/>
-                                          </p:stCondLst>
-                                        </p:cTn>
-                                        <p:tgtEl>
-                                          <p:spTgt spid="17"/>
                                         </p:tgtEl>
                                         <p:attrNameLst>
                                           <p:attrName>style.visibility</p:attrName>
@@ -9782,26 +9645,26 @@
                     </p:cTn>
                   </p:par>
                   <p:par>
-                    <p:cTn id="17" fill="hold">
+                    <p:cTn id="13" fill="hold">
                       <p:stCondLst>
                         <p:cond delay="indefinite"/>
                       </p:stCondLst>
                       <p:childTnLst>
                         <p:par>
-                          <p:cTn id="18" fill="hold">
+                          <p:cTn id="14" fill="hold">
                             <p:stCondLst>
                               <p:cond delay="0"/>
                             </p:stCondLst>
                             <p:childTnLst>
                               <p:par>
-                                <p:cTn id="19" presetID="1" presetClass="entr" presetSubtype="0" fill="hold" nodeType="clickEffect">
+                                <p:cTn id="15" presetID="1" presetClass="entr" presetSubtype="0" fill="hold" nodeType="clickEffect">
                                   <p:stCondLst>
                                     <p:cond delay="0"/>
                                   </p:stCondLst>
                                   <p:childTnLst>
                                     <p:set>
                                       <p:cBhvr>
-                                        <p:cTn id="20" dur="1" fill="hold">
+                                        <p:cTn id="16" dur="1" fill="hold">
                                           <p:stCondLst>
                                             <p:cond delay="0"/>
                                           </p:stCondLst>
